--- a/deliverables/Robo-T-Rader_OpenAI_Build_Week_2026.pptx
+++ b/deliverables/Robo-T-Rader_OpenAI_Build_Week_2026.pptx
@@ -2,22 +2,22 @@
 <file path=ppt/presentation.xml><?xml version="1.0" encoding="utf-8"?>
 <p:presentation xmlns:p="http://schemas.openxmlformats.org/presentationml/2006/main">
   <p:sldMasterIdLst>
-    <p:sldMasterId xmlns:r="http://schemas.openxmlformats.org/officeDocument/2006/relationships" id="2147483648" r:id="Rc74bbde5d1fc4f9c"/>
+    <p:sldMasterId xmlns:r="http://schemas.openxmlformats.org/officeDocument/2006/relationships" id="2147483648" r:id="Rc58b740cd73649bc"/>
   </p:sldMasterIdLst>
   <p:notesMasterIdLst>
-    <p:notesMasterId xmlns:r="http://schemas.openxmlformats.org/officeDocument/2006/relationships" r:id="R06387351ce3e4283"/>
+    <p:notesMasterId xmlns:r="http://schemas.openxmlformats.org/officeDocument/2006/relationships" r:id="R1202769f2312400b"/>
   </p:notesMasterIdLst>
   <p:sldIdLst>
-    <p:sldId xmlns:r="http://schemas.openxmlformats.org/officeDocument/2006/relationships" id="256" r:id="Rd77180e57fc5418a"/>
-    <p:sldId xmlns:r="http://schemas.openxmlformats.org/officeDocument/2006/relationships" id="257" r:id="R3aae73d2e77f4825"/>
-    <p:sldId xmlns:r="http://schemas.openxmlformats.org/officeDocument/2006/relationships" id="258" r:id="Rb3a2dbad60184b02"/>
-    <p:sldId xmlns:r="http://schemas.openxmlformats.org/officeDocument/2006/relationships" id="259" r:id="R3b87532a6c694f16"/>
-    <p:sldId xmlns:r="http://schemas.openxmlformats.org/officeDocument/2006/relationships" id="260" r:id="R74aea1237fa745b0"/>
-    <p:sldId xmlns:r="http://schemas.openxmlformats.org/officeDocument/2006/relationships" id="261" r:id="Re910d43d5e4e4c34"/>
-    <p:sldId xmlns:r="http://schemas.openxmlformats.org/officeDocument/2006/relationships" id="262" r:id="Rba9ad5a0f8ed417d"/>
-    <p:sldId xmlns:r="http://schemas.openxmlformats.org/officeDocument/2006/relationships" id="263" r:id="R77f0d63dab844209"/>
-    <p:sldId xmlns:r="http://schemas.openxmlformats.org/officeDocument/2006/relationships" id="264" r:id="R4f2016e74d354ba0"/>
-    <p:sldId xmlns:r="http://schemas.openxmlformats.org/officeDocument/2006/relationships" id="265" r:id="Rda7cac80333945d6"/>
+    <p:sldId xmlns:r="http://schemas.openxmlformats.org/officeDocument/2006/relationships" id="256" r:id="Rf695aa83d1734a8d"/>
+    <p:sldId xmlns:r="http://schemas.openxmlformats.org/officeDocument/2006/relationships" id="257" r:id="Refa66d3726c54257"/>
+    <p:sldId xmlns:r="http://schemas.openxmlformats.org/officeDocument/2006/relationships" id="258" r:id="Rc1a701c4d6544738"/>
+    <p:sldId xmlns:r="http://schemas.openxmlformats.org/officeDocument/2006/relationships" id="259" r:id="R1c3e187fa01d4381"/>
+    <p:sldId xmlns:r="http://schemas.openxmlformats.org/officeDocument/2006/relationships" id="260" r:id="Re7d113e59e284240"/>
+    <p:sldId xmlns:r="http://schemas.openxmlformats.org/officeDocument/2006/relationships" id="261" r:id="Rca64f05c918549b6"/>
+    <p:sldId xmlns:r="http://schemas.openxmlformats.org/officeDocument/2006/relationships" id="262" r:id="R535747d4987a4ae9"/>
+    <p:sldId xmlns:r="http://schemas.openxmlformats.org/officeDocument/2006/relationships" id="263" r:id="R7e0e182465c6465d"/>
+    <p:sldId xmlns:r="http://schemas.openxmlformats.org/officeDocument/2006/relationships" id="264" r:id="R5cb6238a4d9f465c"/>
+    <p:sldId xmlns:r="http://schemas.openxmlformats.org/officeDocument/2006/relationships" id="265" r:id="Rbfa45cb58cba41d4"/>
   </p:sldIdLst>
   <p:sldSz cx="12192000" cy="6858000"/>
   <p:notesSz cx="6858000" cy="9144000"/>
@@ -1158,7 +1158,7 @@
   </p:cSld>
   <p:clrMap bg1="lt1" tx1="dk1" bg2="lt2" tx2="dk2" accent1="accent1" accent2="accent2" accent3="accent3" accent4="accent4" accent5="accent5" accent6="accent6" hlink="hlink" folHlink="folHlink"/>
   <p:sldLayoutIdLst>
-    <p:sldLayoutId xmlns:r="http://schemas.openxmlformats.org/officeDocument/2006/relationships" id="2147483649" r:id="R0fe5a44a0a924040"/>
+    <p:sldLayoutId xmlns:r="http://schemas.openxmlformats.org/officeDocument/2006/relationships" id="2147483649" r:id="Rdbc38080a8e546d1"/>
   </p:sldLayoutIdLst>
   <p:txStyles>
     <p:titleStyle>
@@ -1563,6 +1563,7 @@
           <a:lstStyle xmlns:a="http://schemas.openxmlformats.org/drawingml/2006/main"/>
           <a:p xmlns:a="http://schemas.openxmlformats.org/drawingml/2006/main">
             <a:pPr algn="l">
+              <a:buNone/>
               <a:defRPr sz="900" b="1">
                 <a:solidFill>
                   <a:srgbClr val="8DE0C7"/>
@@ -1627,6 +1628,7 @@
           <a:lstStyle xmlns:a="http://schemas.openxmlformats.org/drawingml/2006/main"/>
           <a:p xmlns:a="http://schemas.openxmlformats.org/drawingml/2006/main">
             <a:pPr algn="l">
+              <a:buNone/>
               <a:defRPr sz="2325" b="1">
                 <a:solidFill>
                   <a:srgbClr val="FFFFFF"/>
@@ -1691,6 +1693,7 @@
           <a:lstStyle xmlns:a="http://schemas.openxmlformats.org/drawingml/2006/main"/>
           <a:p xmlns:a="http://schemas.openxmlformats.org/drawingml/2006/main">
             <a:pPr algn="l">
+              <a:buNone/>
               <a:defRPr sz="1575" b="0">
                 <a:solidFill>
                   <a:srgbClr val="D7E2DD"/>
@@ -1823,6 +1826,7 @@
           <a:lstStyle xmlns:a="http://schemas.openxmlformats.org/drawingml/2006/main"/>
           <a:p xmlns:a="http://schemas.openxmlformats.org/drawingml/2006/main">
             <a:pPr algn="l">
+              <a:buNone/>
               <a:defRPr sz="2100" b="1">
                 <a:solidFill>
                   <a:srgbClr val="17202A"/>
@@ -1887,6 +1891,7 @@
           <a:lstStyle xmlns:a="http://schemas.openxmlformats.org/drawingml/2006/main"/>
           <a:p xmlns:a="http://schemas.openxmlformats.org/drawingml/2006/main">
             <a:pPr algn="l">
+              <a:buNone/>
               <a:defRPr sz="900" b="0">
                 <a:solidFill>
                   <a:srgbClr val="5F6B64"/>
@@ -2019,6 +2024,7 @@
           <a:lstStyle xmlns:a="http://schemas.openxmlformats.org/drawingml/2006/main"/>
           <a:p xmlns:a="http://schemas.openxmlformats.org/drawingml/2006/main">
             <a:pPr algn="l">
+              <a:buNone/>
               <a:defRPr sz="2100" b="1">
                 <a:solidFill>
                   <a:srgbClr val="17202A"/>
@@ -2083,6 +2089,7 @@
           <a:lstStyle xmlns:a="http://schemas.openxmlformats.org/drawingml/2006/main"/>
           <a:p xmlns:a="http://schemas.openxmlformats.org/drawingml/2006/main">
             <a:pPr algn="l">
+              <a:buNone/>
               <a:defRPr sz="900" b="0">
                 <a:solidFill>
                   <a:srgbClr val="5F6B64"/>
@@ -2215,6 +2222,7 @@
           <a:lstStyle xmlns:a="http://schemas.openxmlformats.org/drawingml/2006/main"/>
           <a:p xmlns:a="http://schemas.openxmlformats.org/drawingml/2006/main">
             <a:pPr algn="l">
+              <a:buNone/>
               <a:defRPr sz="2100" b="1">
                 <a:solidFill>
                   <a:srgbClr val="17202A"/>
@@ -2279,6 +2287,7 @@
           <a:lstStyle xmlns:a="http://schemas.openxmlformats.org/drawingml/2006/main"/>
           <a:p xmlns:a="http://schemas.openxmlformats.org/drawingml/2006/main">
             <a:pPr algn="l">
+              <a:buNone/>
               <a:defRPr sz="900" b="0">
                 <a:solidFill>
                   <a:srgbClr val="5F6B64"/>
@@ -2411,6 +2420,7 @@
           <a:lstStyle xmlns:a="http://schemas.openxmlformats.org/drawingml/2006/main"/>
           <a:p xmlns:a="http://schemas.openxmlformats.org/drawingml/2006/main">
             <a:pPr algn="l">
+              <a:buNone/>
               <a:defRPr sz="2100" b="1">
                 <a:solidFill>
                   <a:srgbClr val="17202A"/>
@@ -2475,6 +2485,7 @@
           <a:lstStyle xmlns:a="http://schemas.openxmlformats.org/drawingml/2006/main"/>
           <a:p xmlns:a="http://schemas.openxmlformats.org/drawingml/2006/main">
             <a:pPr algn="l">
+              <a:buNone/>
               <a:defRPr sz="900" b="0">
                 <a:solidFill>
                   <a:srgbClr val="5F6B64"/>
@@ -2539,6 +2550,7 @@
           <a:lstStyle xmlns:a="http://schemas.openxmlformats.org/drawingml/2006/main"/>
           <a:p xmlns:a="http://schemas.openxmlformats.org/drawingml/2006/main">
             <a:pPr algn="l">
+              <a:buNone/>
               <a:defRPr sz="900" b="1">
                 <a:solidFill>
                   <a:srgbClr val="8DE0C7"/>
@@ -2636,6 +2648,7 @@
           <a:lstStyle xmlns:a="http://schemas.openxmlformats.org/drawingml/2006/main"/>
           <a:p xmlns:a="http://schemas.openxmlformats.org/drawingml/2006/main">
             <a:pPr algn="l">
+              <a:buNone/>
               <a:defRPr sz="1200" b="1">
                 <a:solidFill>
                   <a:srgbClr val="0F8A6A"/>
@@ -2700,6 +2713,7 @@
           <a:lstStyle xmlns:a="http://schemas.openxmlformats.org/drawingml/2006/main"/>
           <a:p xmlns:a="http://schemas.openxmlformats.org/drawingml/2006/main">
             <a:pPr algn="l">
+              <a:buNone/>
               <a:defRPr sz="863" b="0">
                 <a:solidFill>
                   <a:srgbClr val="17202A"/>
@@ -2797,6 +2811,7 @@
           <a:lstStyle xmlns:a="http://schemas.openxmlformats.org/drawingml/2006/main"/>
           <a:p xmlns:a="http://schemas.openxmlformats.org/drawingml/2006/main">
             <a:pPr algn="l">
+              <a:buNone/>
               <a:defRPr sz="1200" b="1">
                 <a:solidFill>
                   <a:srgbClr val="2E5EA7"/>
@@ -2861,6 +2876,7 @@
           <a:lstStyle xmlns:a="http://schemas.openxmlformats.org/drawingml/2006/main"/>
           <a:p xmlns:a="http://schemas.openxmlformats.org/drawingml/2006/main">
             <a:pPr algn="l">
+              <a:buNone/>
               <a:defRPr sz="863" b="0">
                 <a:solidFill>
                   <a:srgbClr val="17202A"/>
@@ -2958,6 +2974,7 @@
           <a:lstStyle xmlns:a="http://schemas.openxmlformats.org/drawingml/2006/main"/>
           <a:p xmlns:a="http://schemas.openxmlformats.org/drawingml/2006/main">
             <a:pPr algn="l">
+              <a:buNone/>
               <a:defRPr sz="1200" b="1">
                 <a:solidFill>
                   <a:srgbClr val="C98A21"/>
@@ -3022,6 +3039,7 @@
           <a:lstStyle xmlns:a="http://schemas.openxmlformats.org/drawingml/2006/main"/>
           <a:p xmlns:a="http://schemas.openxmlformats.org/drawingml/2006/main">
             <a:pPr algn="l">
+              <a:buNone/>
               <a:defRPr sz="863" b="0">
                 <a:solidFill>
                   <a:srgbClr val="17202A"/>
@@ -3119,6 +3137,7 @@
           <a:lstStyle xmlns:a="http://schemas.openxmlformats.org/drawingml/2006/main"/>
           <a:p xmlns:a="http://schemas.openxmlformats.org/drawingml/2006/main">
             <a:pPr algn="l">
+              <a:buNone/>
               <a:defRPr sz="1200" b="1">
                 <a:solidFill>
                   <a:srgbClr val="6559B7"/>
@@ -3183,6 +3202,7 @@
           <a:lstStyle xmlns:a="http://schemas.openxmlformats.org/drawingml/2006/main"/>
           <a:p xmlns:a="http://schemas.openxmlformats.org/drawingml/2006/main">
             <a:pPr algn="l">
+              <a:buNone/>
               <a:defRPr sz="863" b="0">
                 <a:solidFill>
                   <a:srgbClr val="17202A"/>
@@ -3280,6 +3300,7 @@
           <a:lstStyle xmlns:a="http://schemas.openxmlformats.org/drawingml/2006/main"/>
           <a:p xmlns:a="http://schemas.openxmlformats.org/drawingml/2006/main">
             <a:pPr algn="l">
+              <a:buNone/>
               <a:defRPr sz="1200" b="1">
                 <a:solidFill>
                   <a:srgbClr val="C85847"/>
@@ -3344,6 +3365,7 @@
           <a:lstStyle xmlns:a="http://schemas.openxmlformats.org/drawingml/2006/main"/>
           <a:p xmlns:a="http://schemas.openxmlformats.org/drawingml/2006/main">
             <a:pPr algn="l">
+              <a:buNone/>
               <a:defRPr sz="863" b="0">
                 <a:solidFill>
                   <a:srgbClr val="17202A"/>
@@ -3408,6 +3430,7 @@
           <a:lstStyle xmlns:a="http://schemas.openxmlformats.org/drawingml/2006/main"/>
           <a:p xmlns:a="http://schemas.openxmlformats.org/drawingml/2006/main">
             <a:pPr algn="l">
+              <a:buNone/>
               <a:defRPr sz="1350" b="0">
                 <a:solidFill>
                   <a:srgbClr val="D7E2DD"/>
@@ -3472,6 +3495,7 @@
           <a:lstStyle xmlns:a="http://schemas.openxmlformats.org/drawingml/2006/main"/>
           <a:p xmlns:a="http://schemas.openxmlformats.org/drawingml/2006/main">
             <a:pPr algn="r">
+              <a:buNone/>
               <a:defRPr sz="750" b="0">
                 <a:solidFill>
                   <a:srgbClr val="5F6B64"/>
@@ -3495,6 +3519,28 @@
           </a:p>
         </p:txBody>
       </p:sp>
+      <p:pic>
+        <p:nvPicPr>
+          <p:cNvPr id="40" name=""/>
+          <p:cNvPicPr>
+            <a:picLocks xmlns:a="http://schemas.openxmlformats.org/drawingml/2006/main" noChangeAspect="1"/>
+          </p:cNvPicPr>
+          <p:nvPr/>
+        </p:nvPicPr>
+        <p:blipFill>
+          <a:blip xmlns:r="http://schemas.openxmlformats.org/officeDocument/2006/relationships" xmlns:a="http://schemas.openxmlformats.org/drawingml/2006/main" r:embed="R53d4f7b6782b4c68"/>
+          <a:stretch xmlns:a="http://schemas.openxmlformats.org/drawingml/2006/main"/>
+        </p:blipFill>
+        <p:spPr>
+          <a:xfrm xmlns:a="http://schemas.openxmlformats.org/drawingml/2006/main">
+            <a:off x="9399495" y="266700"/>
+            <a:ext cx="1679760" cy="1047750"/>
+          </a:xfrm>
+          <a:prstGeom xmlns:a="http://schemas.openxmlformats.org/drawingml/2006/main" prst="rect">
+            <a:avLst/>
+          </a:prstGeom>
+        </p:spPr>
+      </p:pic>
     </p:spTree>
     <p:extLst>
       <p:ext uri="{BB962C8B-B14F-4D97-AF65-F5344CB8AC3E}">
@@ -3628,6 +3674,7 @@
           <a:lstStyle xmlns:a="http://schemas.openxmlformats.org/drawingml/2006/main"/>
           <a:p xmlns:a="http://schemas.openxmlformats.org/drawingml/2006/main">
             <a:pPr algn="l">
+              <a:buNone/>
               <a:defRPr sz="900" b="1">
                 <a:solidFill>
                   <a:srgbClr val="8DE0C7"/>
@@ -3692,6 +3739,7 @@
           <a:lstStyle xmlns:a="http://schemas.openxmlformats.org/drawingml/2006/main"/>
           <a:p xmlns:a="http://schemas.openxmlformats.org/drawingml/2006/main">
             <a:pPr algn="l">
+              <a:buNone/>
               <a:defRPr sz="2325" b="1">
                 <a:solidFill>
                   <a:srgbClr val="FFFFFF"/>
@@ -3789,6 +3837,7 @@
           <a:lstStyle xmlns:a="http://schemas.openxmlformats.org/drawingml/2006/main"/>
           <a:p xmlns:a="http://schemas.openxmlformats.org/drawingml/2006/main">
             <a:pPr algn="l">
+              <a:buNone/>
               <a:defRPr sz="1200" b="1">
                 <a:solidFill>
                   <a:srgbClr val="0F8A6A"/>
@@ -3853,6 +3902,7 @@
           <a:lstStyle xmlns:a="http://schemas.openxmlformats.org/drawingml/2006/main"/>
           <a:p xmlns:a="http://schemas.openxmlformats.org/drawingml/2006/main">
             <a:pPr algn="l">
+              <a:buNone/>
               <a:defRPr sz="863" b="0">
                 <a:solidFill>
                   <a:srgbClr val="17202A"/>
@@ -3950,6 +4000,7 @@
           <a:lstStyle xmlns:a="http://schemas.openxmlformats.org/drawingml/2006/main"/>
           <a:p xmlns:a="http://schemas.openxmlformats.org/drawingml/2006/main">
             <a:pPr algn="l">
+              <a:buNone/>
               <a:defRPr sz="1200" b="1">
                 <a:solidFill>
                   <a:srgbClr val="2E5EA7"/>
@@ -4014,6 +4065,7 @@
           <a:lstStyle xmlns:a="http://schemas.openxmlformats.org/drawingml/2006/main"/>
           <a:p xmlns:a="http://schemas.openxmlformats.org/drawingml/2006/main">
             <a:pPr algn="l">
+              <a:buNone/>
               <a:defRPr sz="863" b="0">
                 <a:solidFill>
                   <a:srgbClr val="17202A"/>
@@ -4111,6 +4163,7 @@
           <a:lstStyle xmlns:a="http://schemas.openxmlformats.org/drawingml/2006/main"/>
           <a:p xmlns:a="http://schemas.openxmlformats.org/drawingml/2006/main">
             <a:pPr algn="l">
+              <a:buNone/>
               <a:defRPr sz="1200" b="1">
                 <a:solidFill>
                   <a:srgbClr val="C98A21"/>
@@ -4175,6 +4228,7 @@
           <a:lstStyle xmlns:a="http://schemas.openxmlformats.org/drawingml/2006/main"/>
           <a:p xmlns:a="http://schemas.openxmlformats.org/drawingml/2006/main">
             <a:pPr algn="l">
+              <a:buNone/>
               <a:defRPr sz="863" b="0">
                 <a:solidFill>
                   <a:srgbClr val="17202A"/>
@@ -4272,6 +4326,7 @@
           <a:lstStyle xmlns:a="http://schemas.openxmlformats.org/drawingml/2006/main"/>
           <a:p xmlns:a="http://schemas.openxmlformats.org/drawingml/2006/main">
             <a:pPr algn="l">
+              <a:buNone/>
               <a:defRPr sz="1200" b="1">
                 <a:solidFill>
                   <a:srgbClr val="6559B7"/>
@@ -4336,6 +4391,7 @@
           <a:lstStyle xmlns:a="http://schemas.openxmlformats.org/drawingml/2006/main"/>
           <a:p xmlns:a="http://schemas.openxmlformats.org/drawingml/2006/main">
             <a:pPr algn="l">
+              <a:buNone/>
               <a:defRPr sz="863" b="0">
                 <a:solidFill>
                   <a:srgbClr val="17202A"/>
@@ -4433,6 +4489,7 @@
           <a:lstStyle xmlns:a="http://schemas.openxmlformats.org/drawingml/2006/main"/>
           <a:p xmlns:a="http://schemas.openxmlformats.org/drawingml/2006/main">
             <a:pPr algn="l">
+              <a:buNone/>
               <a:defRPr sz="1200" b="1">
                 <a:solidFill>
                   <a:srgbClr val="C85847"/>
@@ -4497,6 +4554,7 @@
           <a:lstStyle xmlns:a="http://schemas.openxmlformats.org/drawingml/2006/main"/>
           <a:p xmlns:a="http://schemas.openxmlformats.org/drawingml/2006/main">
             <a:pPr algn="l">
+              <a:buNone/>
               <a:defRPr sz="863" b="0">
                 <a:solidFill>
                   <a:srgbClr val="17202A"/>
@@ -4825,6 +4883,7 @@
           <a:lstStyle xmlns:a="http://schemas.openxmlformats.org/drawingml/2006/main"/>
           <a:p xmlns:a="http://schemas.openxmlformats.org/drawingml/2006/main">
             <a:pPr algn="l">
+              <a:buNone/>
               <a:defRPr sz="2250" b="1">
                 <a:solidFill>
                   <a:srgbClr val="FFFFFF"/>
@@ -4889,6 +4948,7 @@
           <a:lstStyle xmlns:a="http://schemas.openxmlformats.org/drawingml/2006/main"/>
           <a:p xmlns:a="http://schemas.openxmlformats.org/drawingml/2006/main">
             <a:pPr algn="l">
+              <a:buNone/>
               <a:defRPr sz="1500" b="0">
                 <a:solidFill>
                   <a:srgbClr val="D7E2DD"/>
@@ -4953,6 +5013,7 @@
           <a:lstStyle xmlns:a="http://schemas.openxmlformats.org/drawingml/2006/main"/>
           <a:p xmlns:a="http://schemas.openxmlformats.org/drawingml/2006/main">
             <a:pPr algn="l">
+              <a:buNone/>
               <a:defRPr sz="900" b="0">
                 <a:solidFill>
                   <a:srgbClr val="8DE0C7"/>
@@ -5017,6 +5078,7 @@
           <a:lstStyle xmlns:a="http://schemas.openxmlformats.org/drawingml/2006/main"/>
           <a:p xmlns:a="http://schemas.openxmlformats.org/drawingml/2006/main">
             <a:pPr algn="r">
+              <a:buNone/>
               <a:defRPr sz="750" b="0">
                 <a:solidFill>
                   <a:srgbClr val="5F6B64"/>
@@ -5040,6 +5102,28 @@
           </a:p>
         </p:txBody>
       </p:sp>
+      <p:pic>
+        <p:nvPicPr>
+          <p:cNvPr id="32" name=""/>
+          <p:cNvPicPr>
+            <a:picLocks xmlns:a="http://schemas.openxmlformats.org/drawingml/2006/main" noChangeAspect="1"/>
+          </p:cNvPicPr>
+          <p:nvPr/>
+        </p:nvPicPr>
+        <p:blipFill>
+          <a:blip xmlns:r="http://schemas.openxmlformats.org/officeDocument/2006/relationships" xmlns:a="http://schemas.openxmlformats.org/drawingml/2006/main" r:embed="Rb154235000424b0a"/>
+          <a:stretch xmlns:a="http://schemas.openxmlformats.org/drawingml/2006/main"/>
+        </p:blipFill>
+        <p:spPr>
+          <a:xfrm xmlns:a="http://schemas.openxmlformats.org/drawingml/2006/main">
+            <a:off x="8766913" y="4476750"/>
+            <a:ext cx="1801924" cy="1123950"/>
+          </a:xfrm>
+          <a:prstGeom xmlns:a="http://schemas.openxmlformats.org/drawingml/2006/main" prst="rect">
+            <a:avLst/>
+          </a:prstGeom>
+        </p:spPr>
+      </p:pic>
     </p:spTree>
     <p:extLst>
       <p:ext uri="{BB962C8B-B14F-4D97-AF65-F5344CB8AC3E}">
@@ -5173,6 +5257,7 @@
           <a:lstStyle xmlns:a="http://schemas.openxmlformats.org/drawingml/2006/main"/>
           <a:p xmlns:a="http://schemas.openxmlformats.org/drawingml/2006/main">
             <a:pPr algn="l">
+              <a:buNone/>
               <a:defRPr sz="900" b="1">
                 <a:solidFill>
                   <a:srgbClr val="0F8A6A"/>
@@ -5237,6 +5322,7 @@
           <a:lstStyle xmlns:a="http://schemas.openxmlformats.org/drawingml/2006/main"/>
           <a:p xmlns:a="http://schemas.openxmlformats.org/drawingml/2006/main">
             <a:pPr algn="l">
+              <a:buNone/>
               <a:defRPr sz="2325" b="1">
                 <a:solidFill>
                   <a:srgbClr val="17202A"/>
@@ -5369,6 +5455,7 @@
           <a:lstStyle xmlns:a="http://schemas.openxmlformats.org/drawingml/2006/main"/>
           <a:p xmlns:a="http://schemas.openxmlformats.org/drawingml/2006/main">
             <a:pPr algn="l">
+              <a:buNone/>
               <a:defRPr sz="1275" b="1">
                 <a:solidFill>
                   <a:srgbClr val="17202A"/>
@@ -5433,6 +5520,7 @@
           <a:lstStyle xmlns:a="http://schemas.openxmlformats.org/drawingml/2006/main"/>
           <a:p xmlns:a="http://schemas.openxmlformats.org/drawingml/2006/main">
             <a:pPr algn="l">
+              <a:buNone/>
               <a:defRPr sz="938" b="0">
                 <a:solidFill>
                   <a:srgbClr val="5F6B64"/>
@@ -5565,6 +5653,7 @@
           <a:lstStyle xmlns:a="http://schemas.openxmlformats.org/drawingml/2006/main"/>
           <a:p xmlns:a="http://schemas.openxmlformats.org/drawingml/2006/main">
             <a:pPr algn="l">
+              <a:buNone/>
               <a:defRPr sz="1275" b="1">
                 <a:solidFill>
                   <a:srgbClr val="17202A"/>
@@ -5629,6 +5718,7 @@
           <a:lstStyle xmlns:a="http://schemas.openxmlformats.org/drawingml/2006/main"/>
           <a:p xmlns:a="http://schemas.openxmlformats.org/drawingml/2006/main">
             <a:pPr algn="l">
+              <a:buNone/>
               <a:defRPr sz="938" b="0">
                 <a:solidFill>
                   <a:srgbClr val="5F6B64"/>
@@ -5761,6 +5851,7 @@
           <a:lstStyle xmlns:a="http://schemas.openxmlformats.org/drawingml/2006/main"/>
           <a:p xmlns:a="http://schemas.openxmlformats.org/drawingml/2006/main">
             <a:pPr algn="l">
+              <a:buNone/>
               <a:defRPr sz="1275" b="1">
                 <a:solidFill>
                   <a:srgbClr val="17202A"/>
@@ -5825,6 +5916,7 @@
           <a:lstStyle xmlns:a="http://schemas.openxmlformats.org/drawingml/2006/main"/>
           <a:p xmlns:a="http://schemas.openxmlformats.org/drawingml/2006/main">
             <a:pPr algn="l">
+              <a:buNone/>
               <a:defRPr sz="938" b="0">
                 <a:solidFill>
                   <a:srgbClr val="5F6B64"/>
@@ -5922,6 +6014,7 @@
           <a:lstStyle xmlns:a="http://schemas.openxmlformats.org/drawingml/2006/main"/>
           <a:p xmlns:a="http://schemas.openxmlformats.org/drawingml/2006/main">
             <a:pPr algn="ctr">
+              <a:buNone/>
               <a:defRPr sz="1350" b="0">
                 <a:solidFill>
                   <a:srgbClr val="5F6B64"/>
@@ -5986,6 +6079,7 @@
           <a:lstStyle xmlns:a="http://schemas.openxmlformats.org/drawingml/2006/main"/>
           <a:p xmlns:a="http://schemas.openxmlformats.org/drawingml/2006/main">
             <a:pPr algn="ctr">
+              <a:buNone/>
               <a:defRPr sz="1725" b="1">
                 <a:solidFill>
                   <a:srgbClr val="17202A"/>
@@ -6050,6 +6144,7 @@
           <a:lstStyle xmlns:a="http://schemas.openxmlformats.org/drawingml/2006/main"/>
           <a:p xmlns:a="http://schemas.openxmlformats.org/drawingml/2006/main">
             <a:pPr algn="r">
+              <a:buNone/>
               <a:defRPr sz="750" b="0">
                 <a:solidFill>
                   <a:srgbClr val="5F6B64"/>
@@ -6206,6 +6301,7 @@
           <a:lstStyle xmlns:a="http://schemas.openxmlformats.org/drawingml/2006/main"/>
           <a:p xmlns:a="http://schemas.openxmlformats.org/drawingml/2006/main">
             <a:pPr algn="l">
+              <a:buNone/>
               <a:defRPr sz="900" b="1">
                 <a:solidFill>
                   <a:srgbClr val="0F8A6A"/>
@@ -6270,6 +6366,7 @@
           <a:lstStyle xmlns:a="http://schemas.openxmlformats.org/drawingml/2006/main"/>
           <a:p xmlns:a="http://schemas.openxmlformats.org/drawingml/2006/main">
             <a:pPr algn="l">
+              <a:buNone/>
               <a:defRPr sz="2325" b="1">
                 <a:solidFill>
                   <a:srgbClr val="17202A"/>
@@ -6367,6 +6464,7 @@
           <a:lstStyle xmlns:a="http://schemas.openxmlformats.org/drawingml/2006/main"/>
           <a:p xmlns:a="http://schemas.openxmlformats.org/drawingml/2006/main">
             <a:pPr algn="ctr">
+              <a:buNone/>
               <a:defRPr sz="788" b="1">
                 <a:solidFill>
                   <a:srgbClr val="0F8A6A"/>
@@ -6464,6 +6562,7 @@
           <a:lstStyle xmlns:a="http://schemas.openxmlformats.org/drawingml/2006/main"/>
           <a:p xmlns:a="http://schemas.openxmlformats.org/drawingml/2006/main">
             <a:pPr algn="l">
+              <a:buNone/>
               <a:defRPr sz="1200" b="1">
                 <a:solidFill>
                   <a:srgbClr val="0F8A6A"/>
@@ -6528,6 +6627,7 @@
           <a:lstStyle xmlns:a="http://schemas.openxmlformats.org/drawingml/2006/main"/>
           <a:p xmlns:a="http://schemas.openxmlformats.org/drawingml/2006/main">
             <a:pPr algn="l">
+              <a:buNone/>
               <a:defRPr sz="863" b="0">
                 <a:solidFill>
                   <a:srgbClr val="17202A"/>
@@ -6625,6 +6725,7 @@
           <a:lstStyle xmlns:a="http://schemas.openxmlformats.org/drawingml/2006/main"/>
           <a:p xmlns:a="http://schemas.openxmlformats.org/drawingml/2006/main">
             <a:pPr algn="ctr">
+              <a:buNone/>
               <a:defRPr sz="788" b="1">
                 <a:solidFill>
                   <a:srgbClr val="2E5EA7"/>
@@ -6722,6 +6823,7 @@
           <a:lstStyle xmlns:a="http://schemas.openxmlformats.org/drawingml/2006/main"/>
           <a:p xmlns:a="http://schemas.openxmlformats.org/drawingml/2006/main">
             <a:pPr algn="l">
+              <a:buNone/>
               <a:defRPr sz="1200" b="1">
                 <a:solidFill>
                   <a:srgbClr val="2E5EA7"/>
@@ -6786,6 +6888,7 @@
           <a:lstStyle xmlns:a="http://schemas.openxmlformats.org/drawingml/2006/main"/>
           <a:p xmlns:a="http://schemas.openxmlformats.org/drawingml/2006/main">
             <a:pPr algn="l">
+              <a:buNone/>
               <a:defRPr sz="863" b="0">
                 <a:solidFill>
                   <a:srgbClr val="17202A"/>
@@ -6883,6 +6986,7 @@
           <a:lstStyle xmlns:a="http://schemas.openxmlformats.org/drawingml/2006/main"/>
           <a:p xmlns:a="http://schemas.openxmlformats.org/drawingml/2006/main">
             <a:pPr algn="ctr">
+              <a:buNone/>
               <a:defRPr sz="788" b="1">
                 <a:solidFill>
                   <a:srgbClr val="C98A21"/>
@@ -6980,6 +7084,7 @@
           <a:lstStyle xmlns:a="http://schemas.openxmlformats.org/drawingml/2006/main"/>
           <a:p xmlns:a="http://schemas.openxmlformats.org/drawingml/2006/main">
             <a:pPr algn="l">
+              <a:buNone/>
               <a:defRPr sz="1200" b="1">
                 <a:solidFill>
                   <a:srgbClr val="C98A21"/>
@@ -7044,6 +7149,7 @@
           <a:lstStyle xmlns:a="http://schemas.openxmlformats.org/drawingml/2006/main"/>
           <a:p xmlns:a="http://schemas.openxmlformats.org/drawingml/2006/main">
             <a:pPr algn="l">
+              <a:buNone/>
               <a:defRPr sz="863" b="0">
                 <a:solidFill>
                   <a:srgbClr val="17202A"/>
@@ -7141,6 +7247,7 @@
           <a:lstStyle xmlns:a="http://schemas.openxmlformats.org/drawingml/2006/main"/>
           <a:p xmlns:a="http://schemas.openxmlformats.org/drawingml/2006/main">
             <a:pPr algn="ctr">
+              <a:buNone/>
               <a:defRPr sz="788" b="1">
                 <a:solidFill>
                   <a:srgbClr val="6559B7"/>
@@ -7238,6 +7345,7 @@
           <a:lstStyle xmlns:a="http://schemas.openxmlformats.org/drawingml/2006/main"/>
           <a:p xmlns:a="http://schemas.openxmlformats.org/drawingml/2006/main">
             <a:pPr algn="l">
+              <a:buNone/>
               <a:defRPr sz="1200" b="1">
                 <a:solidFill>
                   <a:srgbClr val="6559B7"/>
@@ -7302,6 +7410,7 @@
           <a:lstStyle xmlns:a="http://schemas.openxmlformats.org/drawingml/2006/main"/>
           <a:p xmlns:a="http://schemas.openxmlformats.org/drawingml/2006/main">
             <a:pPr algn="l">
+              <a:buNone/>
               <a:defRPr sz="863" b="0">
                 <a:solidFill>
                   <a:srgbClr val="17202A"/>
@@ -7399,6 +7508,7 @@
           <a:lstStyle xmlns:a="http://schemas.openxmlformats.org/drawingml/2006/main"/>
           <a:p xmlns:a="http://schemas.openxmlformats.org/drawingml/2006/main">
             <a:pPr algn="l">
+              <a:buNone/>
               <a:defRPr sz="1200" b="1">
                 <a:solidFill>
                   <a:srgbClr val="C85847"/>
@@ -7463,6 +7573,7 @@
           <a:lstStyle xmlns:a="http://schemas.openxmlformats.org/drawingml/2006/main"/>
           <a:p xmlns:a="http://schemas.openxmlformats.org/drawingml/2006/main">
             <a:pPr algn="l">
+              <a:buNone/>
               <a:defRPr sz="863" b="0">
                 <a:solidFill>
                   <a:srgbClr val="17202A"/>
@@ -7593,6 +7704,7 @@
           <a:lstStyle xmlns:a="http://schemas.openxmlformats.org/drawingml/2006/main"/>
           <a:p xmlns:a="http://schemas.openxmlformats.org/drawingml/2006/main">
             <a:pPr algn="r">
+              <a:buNone/>
               <a:defRPr sz="750" b="0">
                 <a:solidFill>
                   <a:srgbClr val="5F6B64"/>
@@ -7749,6 +7861,7 @@
           <a:lstStyle xmlns:a="http://schemas.openxmlformats.org/drawingml/2006/main"/>
           <a:p xmlns:a="http://schemas.openxmlformats.org/drawingml/2006/main">
             <a:pPr algn="l">
+              <a:buNone/>
               <a:defRPr sz="900" b="1">
                 <a:solidFill>
                   <a:srgbClr val="0F8A6A"/>
@@ -7813,6 +7926,7 @@
           <a:lstStyle xmlns:a="http://schemas.openxmlformats.org/drawingml/2006/main"/>
           <a:p xmlns:a="http://schemas.openxmlformats.org/drawingml/2006/main">
             <a:pPr algn="l">
+              <a:buNone/>
               <a:defRPr sz="2325" b="1">
                 <a:solidFill>
                   <a:srgbClr val="17202A"/>
@@ -7910,6 +8024,7 @@
           <a:lstStyle xmlns:a="http://schemas.openxmlformats.org/drawingml/2006/main"/>
           <a:p xmlns:a="http://schemas.openxmlformats.org/drawingml/2006/main">
             <a:pPr algn="ctr">
+              <a:buNone/>
               <a:defRPr sz="788" b="1">
                 <a:solidFill>
                   <a:srgbClr val="0F8A6A"/>
@@ -8007,6 +8122,7 @@
           <a:lstStyle xmlns:a="http://schemas.openxmlformats.org/drawingml/2006/main"/>
           <a:p xmlns:a="http://schemas.openxmlformats.org/drawingml/2006/main">
             <a:pPr algn="l">
+              <a:buNone/>
               <a:defRPr sz="900" b="1">
                 <a:solidFill>
                   <a:srgbClr val="FFFFFF"/>
@@ -8104,6 +8220,7 @@
           <a:lstStyle xmlns:a="http://schemas.openxmlformats.org/drawingml/2006/main"/>
           <a:p xmlns:a="http://schemas.openxmlformats.org/drawingml/2006/main">
             <a:pPr algn="l">
+              <a:buNone/>
               <a:defRPr sz="900" b="1">
                 <a:solidFill>
                   <a:srgbClr val="FFFFFF"/>
@@ -8201,6 +8318,7 @@
           <a:lstStyle xmlns:a="http://schemas.openxmlformats.org/drawingml/2006/main"/>
           <a:p xmlns:a="http://schemas.openxmlformats.org/drawingml/2006/main">
             <a:pPr algn="l">
+              <a:buNone/>
               <a:defRPr sz="900" b="1">
                 <a:solidFill>
                   <a:srgbClr val="FFFFFF"/>
@@ -8298,6 +8416,7 @@
           <a:lstStyle xmlns:a="http://schemas.openxmlformats.org/drawingml/2006/main"/>
           <a:p xmlns:a="http://schemas.openxmlformats.org/drawingml/2006/main">
             <a:pPr algn="l">
+              <a:buNone/>
               <a:defRPr sz="900" b="1">
                 <a:solidFill>
                   <a:srgbClr val="FFFFFF"/>
@@ -8395,6 +8514,7 @@
           <a:lstStyle xmlns:a="http://schemas.openxmlformats.org/drawingml/2006/main"/>
           <a:p xmlns:a="http://schemas.openxmlformats.org/drawingml/2006/main">
             <a:pPr algn="l">
+              <a:buNone/>
               <a:defRPr sz="825" b="0">
                 <a:solidFill>
                   <a:srgbClr val="17202A"/>
@@ -8492,6 +8612,7 @@
           <a:lstStyle xmlns:a="http://schemas.openxmlformats.org/drawingml/2006/main"/>
           <a:p xmlns:a="http://schemas.openxmlformats.org/drawingml/2006/main">
             <a:pPr algn="l">
+              <a:buNone/>
               <a:defRPr sz="863" b="1">
                 <a:solidFill>
                   <a:srgbClr val="0F8A6A"/>
@@ -8589,6 +8710,7 @@
           <a:lstStyle xmlns:a="http://schemas.openxmlformats.org/drawingml/2006/main"/>
           <a:p xmlns:a="http://schemas.openxmlformats.org/drawingml/2006/main">
             <a:pPr algn="l">
+              <a:buNone/>
               <a:defRPr sz="863" b="0">
                 <a:solidFill>
                   <a:srgbClr val="17202A"/>
@@ -8686,6 +8808,7 @@
           <a:lstStyle xmlns:a="http://schemas.openxmlformats.org/drawingml/2006/main"/>
           <a:p xmlns:a="http://schemas.openxmlformats.org/drawingml/2006/main">
             <a:pPr algn="l">
+              <a:buNone/>
               <a:defRPr sz="863" b="0">
                 <a:solidFill>
                   <a:srgbClr val="17202A"/>
@@ -8783,6 +8906,7 @@
           <a:lstStyle xmlns:a="http://schemas.openxmlformats.org/drawingml/2006/main"/>
           <a:p xmlns:a="http://schemas.openxmlformats.org/drawingml/2006/main">
             <a:pPr algn="l">
+              <a:buNone/>
               <a:defRPr sz="825" b="0">
                 <a:solidFill>
                   <a:srgbClr val="17202A"/>
@@ -8880,6 +9004,7 @@
           <a:lstStyle xmlns:a="http://schemas.openxmlformats.org/drawingml/2006/main"/>
           <a:p xmlns:a="http://schemas.openxmlformats.org/drawingml/2006/main">
             <a:pPr algn="l">
+              <a:buNone/>
               <a:defRPr sz="863" b="1">
                 <a:solidFill>
                   <a:srgbClr val="0F8A6A"/>
@@ -8977,6 +9102,7 @@
           <a:lstStyle xmlns:a="http://schemas.openxmlformats.org/drawingml/2006/main"/>
           <a:p xmlns:a="http://schemas.openxmlformats.org/drawingml/2006/main">
             <a:pPr algn="l">
+              <a:buNone/>
               <a:defRPr sz="863" b="0">
                 <a:solidFill>
                   <a:srgbClr val="17202A"/>
@@ -9074,6 +9200,7 @@
           <a:lstStyle xmlns:a="http://schemas.openxmlformats.org/drawingml/2006/main"/>
           <a:p xmlns:a="http://schemas.openxmlformats.org/drawingml/2006/main">
             <a:pPr algn="l">
+              <a:buNone/>
               <a:defRPr sz="863" b="0">
                 <a:solidFill>
                   <a:srgbClr val="17202A"/>
@@ -9171,6 +9298,7 @@
           <a:lstStyle xmlns:a="http://schemas.openxmlformats.org/drawingml/2006/main"/>
           <a:p xmlns:a="http://schemas.openxmlformats.org/drawingml/2006/main">
             <a:pPr algn="l">
+              <a:buNone/>
               <a:defRPr sz="825" b="0">
                 <a:solidFill>
                   <a:srgbClr val="17202A"/>
@@ -9268,6 +9396,7 @@
           <a:lstStyle xmlns:a="http://schemas.openxmlformats.org/drawingml/2006/main"/>
           <a:p xmlns:a="http://schemas.openxmlformats.org/drawingml/2006/main">
             <a:pPr algn="l">
+              <a:buNone/>
               <a:defRPr sz="863" b="1">
                 <a:solidFill>
                   <a:srgbClr val="0F8A6A"/>
@@ -9365,6 +9494,7 @@
           <a:lstStyle xmlns:a="http://schemas.openxmlformats.org/drawingml/2006/main"/>
           <a:p xmlns:a="http://schemas.openxmlformats.org/drawingml/2006/main">
             <a:pPr algn="l">
+              <a:buNone/>
               <a:defRPr sz="863" b="0">
                 <a:solidFill>
                   <a:srgbClr val="17202A"/>
@@ -9462,6 +9592,7 @@
           <a:lstStyle xmlns:a="http://schemas.openxmlformats.org/drawingml/2006/main"/>
           <a:p xmlns:a="http://schemas.openxmlformats.org/drawingml/2006/main">
             <a:pPr algn="l">
+              <a:buNone/>
               <a:defRPr sz="863" b="0">
                 <a:solidFill>
                   <a:srgbClr val="17202A"/>
@@ -9559,6 +9690,7 @@
           <a:lstStyle xmlns:a="http://schemas.openxmlformats.org/drawingml/2006/main"/>
           <a:p xmlns:a="http://schemas.openxmlformats.org/drawingml/2006/main">
             <a:pPr algn="l">
+              <a:buNone/>
               <a:defRPr sz="825" b="0">
                 <a:solidFill>
                   <a:srgbClr val="17202A"/>
@@ -9656,6 +9788,7 @@
           <a:lstStyle xmlns:a="http://schemas.openxmlformats.org/drawingml/2006/main"/>
           <a:p xmlns:a="http://schemas.openxmlformats.org/drawingml/2006/main">
             <a:pPr algn="l">
+              <a:buNone/>
               <a:defRPr sz="863" b="1">
                 <a:solidFill>
                   <a:srgbClr val="0F8A6A"/>
@@ -9753,6 +9886,7 @@
           <a:lstStyle xmlns:a="http://schemas.openxmlformats.org/drawingml/2006/main"/>
           <a:p xmlns:a="http://schemas.openxmlformats.org/drawingml/2006/main">
             <a:pPr algn="l">
+              <a:buNone/>
               <a:defRPr sz="863" b="0">
                 <a:solidFill>
                   <a:srgbClr val="17202A"/>
@@ -9850,6 +9984,7 @@
           <a:lstStyle xmlns:a="http://schemas.openxmlformats.org/drawingml/2006/main"/>
           <a:p xmlns:a="http://schemas.openxmlformats.org/drawingml/2006/main">
             <a:pPr algn="l">
+              <a:buNone/>
               <a:defRPr sz="863" b="0">
                 <a:solidFill>
                   <a:srgbClr val="17202A"/>
@@ -9947,6 +10082,7 @@
           <a:lstStyle xmlns:a="http://schemas.openxmlformats.org/drawingml/2006/main"/>
           <a:p xmlns:a="http://schemas.openxmlformats.org/drawingml/2006/main">
             <a:pPr algn="l">
+              <a:buNone/>
               <a:defRPr sz="825" b="0">
                 <a:solidFill>
                   <a:srgbClr val="17202A"/>
@@ -10044,6 +10180,7 @@
           <a:lstStyle xmlns:a="http://schemas.openxmlformats.org/drawingml/2006/main"/>
           <a:p xmlns:a="http://schemas.openxmlformats.org/drawingml/2006/main">
             <a:pPr algn="l">
+              <a:buNone/>
               <a:defRPr sz="863" b="1">
                 <a:solidFill>
                   <a:srgbClr val="0F8A6A"/>
@@ -10141,6 +10278,7 @@
           <a:lstStyle xmlns:a="http://schemas.openxmlformats.org/drawingml/2006/main"/>
           <a:p xmlns:a="http://schemas.openxmlformats.org/drawingml/2006/main">
             <a:pPr algn="l">
+              <a:buNone/>
               <a:defRPr sz="863" b="0">
                 <a:solidFill>
                   <a:srgbClr val="17202A"/>
@@ -10238,6 +10376,7 @@
           <a:lstStyle xmlns:a="http://schemas.openxmlformats.org/drawingml/2006/main"/>
           <a:p xmlns:a="http://schemas.openxmlformats.org/drawingml/2006/main">
             <a:pPr algn="l">
+              <a:buNone/>
               <a:defRPr sz="863" b="0">
                 <a:solidFill>
                   <a:srgbClr val="17202A"/>
@@ -10335,6 +10474,7 @@
           <a:lstStyle xmlns:a="http://schemas.openxmlformats.org/drawingml/2006/main"/>
           <a:p xmlns:a="http://schemas.openxmlformats.org/drawingml/2006/main">
             <a:pPr algn="l">
+              <a:buNone/>
               <a:defRPr sz="825" b="0">
                 <a:solidFill>
                   <a:srgbClr val="17202A"/>
@@ -10432,6 +10572,7 @@
           <a:lstStyle xmlns:a="http://schemas.openxmlformats.org/drawingml/2006/main"/>
           <a:p xmlns:a="http://schemas.openxmlformats.org/drawingml/2006/main">
             <a:pPr algn="l">
+              <a:buNone/>
               <a:defRPr sz="863" b="1">
                 <a:solidFill>
                   <a:srgbClr val="0F8A6A"/>
@@ -10529,6 +10670,7 @@
           <a:lstStyle xmlns:a="http://schemas.openxmlformats.org/drawingml/2006/main"/>
           <a:p xmlns:a="http://schemas.openxmlformats.org/drawingml/2006/main">
             <a:pPr algn="l">
+              <a:buNone/>
               <a:defRPr sz="863" b="0">
                 <a:solidFill>
                   <a:srgbClr val="17202A"/>
@@ -10626,6 +10768,7 @@
           <a:lstStyle xmlns:a="http://schemas.openxmlformats.org/drawingml/2006/main"/>
           <a:p xmlns:a="http://schemas.openxmlformats.org/drawingml/2006/main">
             <a:pPr algn="l">
+              <a:buNone/>
               <a:defRPr sz="863" b="0">
                 <a:solidFill>
                   <a:srgbClr val="17202A"/>
@@ -10690,6 +10833,7 @@
           <a:lstStyle xmlns:a="http://schemas.openxmlformats.org/drawingml/2006/main"/>
           <a:p xmlns:a="http://schemas.openxmlformats.org/drawingml/2006/main">
             <a:pPr algn="ctr">
+              <a:buNone/>
               <a:defRPr sz="1050" b="0">
                 <a:solidFill>
                   <a:srgbClr val="5F6B64"/>
@@ -10754,6 +10898,7 @@
           <a:lstStyle xmlns:a="http://schemas.openxmlformats.org/drawingml/2006/main"/>
           <a:p xmlns:a="http://schemas.openxmlformats.org/drawingml/2006/main">
             <a:pPr algn="r">
+              <a:buNone/>
               <a:defRPr sz="750" b="0">
                 <a:solidFill>
                   <a:srgbClr val="5F6B64"/>
@@ -10910,6 +11055,7 @@
           <a:lstStyle xmlns:a="http://schemas.openxmlformats.org/drawingml/2006/main"/>
           <a:p xmlns:a="http://schemas.openxmlformats.org/drawingml/2006/main">
             <a:pPr algn="l">
+              <a:buNone/>
               <a:defRPr sz="900" b="1">
                 <a:solidFill>
                   <a:srgbClr val="0F8A6A"/>
@@ -10974,6 +11120,7 @@
           <a:lstStyle xmlns:a="http://schemas.openxmlformats.org/drawingml/2006/main"/>
           <a:p xmlns:a="http://schemas.openxmlformats.org/drawingml/2006/main">
             <a:pPr algn="l">
+              <a:buNone/>
               <a:defRPr sz="2325" b="1">
                 <a:solidFill>
                   <a:srgbClr val="17202A"/>
@@ -11071,6 +11218,7 @@
           <a:lstStyle xmlns:a="http://schemas.openxmlformats.org/drawingml/2006/main"/>
           <a:p xmlns:a="http://schemas.openxmlformats.org/drawingml/2006/main">
             <a:pPr algn="l">
+              <a:buNone/>
               <a:defRPr sz="1200" b="1">
                 <a:solidFill>
                   <a:srgbClr val="0F8A6A"/>
@@ -11135,6 +11283,7 @@
           <a:lstStyle xmlns:a="http://schemas.openxmlformats.org/drawingml/2006/main"/>
           <a:p xmlns:a="http://schemas.openxmlformats.org/drawingml/2006/main">
             <a:pPr algn="l">
+              <a:buNone/>
               <a:defRPr sz="863" b="0">
                 <a:solidFill>
                   <a:srgbClr val="17202A"/>
@@ -11232,6 +11381,7 @@
           <a:lstStyle xmlns:a="http://schemas.openxmlformats.org/drawingml/2006/main"/>
           <a:p xmlns:a="http://schemas.openxmlformats.org/drawingml/2006/main">
             <a:pPr algn="l">
+              <a:buNone/>
               <a:defRPr sz="1200" b="1">
                 <a:solidFill>
                   <a:srgbClr val="2E5EA7"/>
@@ -11296,6 +11446,7 @@
           <a:lstStyle xmlns:a="http://schemas.openxmlformats.org/drawingml/2006/main"/>
           <a:p xmlns:a="http://schemas.openxmlformats.org/drawingml/2006/main">
             <a:pPr algn="l">
+              <a:buNone/>
               <a:defRPr sz="863" b="0">
                 <a:solidFill>
                   <a:srgbClr val="17202A"/>
@@ -11393,6 +11544,7 @@
           <a:lstStyle xmlns:a="http://schemas.openxmlformats.org/drawingml/2006/main"/>
           <a:p xmlns:a="http://schemas.openxmlformats.org/drawingml/2006/main">
             <a:pPr algn="l">
+              <a:buNone/>
               <a:defRPr sz="1200" b="1">
                 <a:solidFill>
                   <a:srgbClr val="6559B7"/>
@@ -11457,6 +11609,7 @@
           <a:lstStyle xmlns:a="http://schemas.openxmlformats.org/drawingml/2006/main"/>
           <a:p xmlns:a="http://schemas.openxmlformats.org/drawingml/2006/main">
             <a:pPr algn="l">
+              <a:buNone/>
               <a:defRPr sz="863" b="0">
                 <a:solidFill>
                   <a:srgbClr val="17202A"/>
@@ -11554,6 +11707,7 @@
           <a:lstStyle xmlns:a="http://schemas.openxmlformats.org/drawingml/2006/main"/>
           <a:p xmlns:a="http://schemas.openxmlformats.org/drawingml/2006/main">
             <a:pPr algn="l">
+              <a:buNone/>
               <a:defRPr sz="1200" b="1">
                 <a:solidFill>
                   <a:srgbClr val="C98A21"/>
@@ -11618,6 +11772,7 @@
           <a:lstStyle xmlns:a="http://schemas.openxmlformats.org/drawingml/2006/main"/>
           <a:p xmlns:a="http://schemas.openxmlformats.org/drawingml/2006/main">
             <a:pPr algn="l">
+              <a:buNone/>
               <a:defRPr sz="863" b="0">
                 <a:solidFill>
                   <a:srgbClr val="17202A"/>
@@ -11715,6 +11870,7 @@
           <a:lstStyle xmlns:a="http://schemas.openxmlformats.org/drawingml/2006/main"/>
           <a:p xmlns:a="http://schemas.openxmlformats.org/drawingml/2006/main">
             <a:pPr algn="l">
+              <a:buNone/>
               <a:defRPr sz="1200" b="1">
                 <a:solidFill>
                   <a:srgbClr val="C85847"/>
@@ -11779,6 +11935,7 @@
           <a:lstStyle xmlns:a="http://schemas.openxmlformats.org/drawingml/2006/main"/>
           <a:p xmlns:a="http://schemas.openxmlformats.org/drawingml/2006/main">
             <a:pPr algn="l">
+              <a:buNone/>
               <a:defRPr sz="863" b="0">
                 <a:solidFill>
                   <a:srgbClr val="17202A"/>
@@ -11876,6 +12033,7 @@
           <a:lstStyle xmlns:a="http://schemas.openxmlformats.org/drawingml/2006/main"/>
           <a:p xmlns:a="http://schemas.openxmlformats.org/drawingml/2006/main">
             <a:pPr algn="l">
+              <a:buNone/>
               <a:defRPr sz="1200" b="1">
                 <a:solidFill>
                   <a:srgbClr val="0F8A6A"/>
@@ -11940,6 +12098,7 @@
           <a:lstStyle xmlns:a="http://schemas.openxmlformats.org/drawingml/2006/main"/>
           <a:p xmlns:a="http://schemas.openxmlformats.org/drawingml/2006/main">
             <a:pPr algn="l">
+              <a:buNone/>
               <a:defRPr sz="863" b="0">
                 <a:solidFill>
                   <a:srgbClr val="17202A"/>
@@ -12402,6 +12561,7 @@
           <a:lstStyle xmlns:a="http://schemas.openxmlformats.org/drawingml/2006/main"/>
           <a:p xmlns:a="http://schemas.openxmlformats.org/drawingml/2006/main">
             <a:pPr algn="l">
+              <a:buNone/>
               <a:defRPr sz="2100" b="1">
                 <a:solidFill>
                   <a:srgbClr val="17202A"/>
@@ -12466,6 +12626,7 @@
           <a:lstStyle xmlns:a="http://schemas.openxmlformats.org/drawingml/2006/main"/>
           <a:p xmlns:a="http://schemas.openxmlformats.org/drawingml/2006/main">
             <a:pPr algn="l">
+              <a:buNone/>
               <a:defRPr sz="900" b="0">
                 <a:solidFill>
                   <a:srgbClr val="5F6B64"/>
@@ -12598,6 +12759,7 @@
           <a:lstStyle xmlns:a="http://schemas.openxmlformats.org/drawingml/2006/main"/>
           <a:p xmlns:a="http://schemas.openxmlformats.org/drawingml/2006/main">
             <a:pPr algn="l">
+              <a:buNone/>
               <a:defRPr sz="2100" b="1">
                 <a:solidFill>
                   <a:srgbClr val="17202A"/>
@@ -12662,6 +12824,7 @@
           <a:lstStyle xmlns:a="http://schemas.openxmlformats.org/drawingml/2006/main"/>
           <a:p xmlns:a="http://schemas.openxmlformats.org/drawingml/2006/main">
             <a:pPr algn="l">
+              <a:buNone/>
               <a:defRPr sz="900" b="0">
                 <a:solidFill>
                   <a:srgbClr val="5F6B64"/>
@@ -12794,6 +12957,7 @@
           <a:lstStyle xmlns:a="http://schemas.openxmlformats.org/drawingml/2006/main"/>
           <a:p xmlns:a="http://schemas.openxmlformats.org/drawingml/2006/main">
             <a:pPr algn="l">
+              <a:buNone/>
               <a:defRPr sz="2100" b="1">
                 <a:solidFill>
                   <a:srgbClr val="17202A"/>
@@ -12858,6 +13022,7 @@
           <a:lstStyle xmlns:a="http://schemas.openxmlformats.org/drawingml/2006/main"/>
           <a:p xmlns:a="http://schemas.openxmlformats.org/drawingml/2006/main">
             <a:pPr algn="l">
+              <a:buNone/>
               <a:defRPr sz="900" b="0">
                 <a:solidFill>
                   <a:srgbClr val="5F6B64"/>
@@ -12990,6 +13155,7 @@
           <a:lstStyle xmlns:a="http://schemas.openxmlformats.org/drawingml/2006/main"/>
           <a:p xmlns:a="http://schemas.openxmlformats.org/drawingml/2006/main">
             <a:pPr algn="l">
+              <a:buNone/>
               <a:defRPr sz="2100" b="1">
                 <a:solidFill>
                   <a:srgbClr val="17202A"/>
@@ -13054,6 +13220,7 @@
           <a:lstStyle xmlns:a="http://schemas.openxmlformats.org/drawingml/2006/main"/>
           <a:p xmlns:a="http://schemas.openxmlformats.org/drawingml/2006/main">
             <a:pPr algn="l">
+              <a:buNone/>
               <a:defRPr sz="900" b="0">
                 <a:solidFill>
                   <a:srgbClr val="5F6B64"/>
@@ -13118,6 +13285,7 @@
           <a:lstStyle xmlns:a="http://schemas.openxmlformats.org/drawingml/2006/main"/>
           <a:p xmlns:a="http://schemas.openxmlformats.org/drawingml/2006/main">
             <a:pPr algn="l">
+              <a:buNone/>
               <a:defRPr sz="1050" b="0">
                 <a:solidFill>
                   <a:srgbClr val="17202A"/>
@@ -13182,6 +13350,7 @@
           <a:lstStyle xmlns:a="http://schemas.openxmlformats.org/drawingml/2006/main"/>
           <a:p xmlns:a="http://schemas.openxmlformats.org/drawingml/2006/main">
             <a:pPr algn="r">
+              <a:buNone/>
               <a:defRPr sz="750" b="0">
                 <a:solidFill>
                   <a:srgbClr val="5F6B64"/>
@@ -13338,6 +13507,7 @@
           <a:lstStyle xmlns:a="http://schemas.openxmlformats.org/drawingml/2006/main"/>
           <a:p xmlns:a="http://schemas.openxmlformats.org/drawingml/2006/main">
             <a:pPr algn="l">
+              <a:buNone/>
               <a:defRPr sz="900" b="1">
                 <a:solidFill>
                   <a:srgbClr val="0F8A6A"/>
@@ -13402,6 +13572,7 @@
           <a:lstStyle xmlns:a="http://schemas.openxmlformats.org/drawingml/2006/main"/>
           <a:p xmlns:a="http://schemas.openxmlformats.org/drawingml/2006/main">
             <a:pPr algn="l">
+              <a:buNone/>
               <a:defRPr sz="2325" b="1">
                 <a:solidFill>
                   <a:srgbClr val="17202A"/>
@@ -13499,6 +13670,7 @@
           <a:lstStyle xmlns:a="http://schemas.openxmlformats.org/drawingml/2006/main"/>
           <a:p xmlns:a="http://schemas.openxmlformats.org/drawingml/2006/main">
             <a:pPr algn="l">
+              <a:buNone/>
               <a:defRPr sz="1200" b="1">
                 <a:solidFill>
                   <a:srgbClr val="0F8A6A"/>
@@ -13563,6 +13735,7 @@
           <a:lstStyle xmlns:a="http://schemas.openxmlformats.org/drawingml/2006/main"/>
           <a:p xmlns:a="http://schemas.openxmlformats.org/drawingml/2006/main">
             <a:pPr algn="l">
+              <a:buNone/>
               <a:defRPr sz="863" b="0">
                 <a:solidFill>
                   <a:srgbClr val="17202A"/>
@@ -13660,6 +13833,7 @@
           <a:lstStyle xmlns:a="http://schemas.openxmlformats.org/drawingml/2006/main"/>
           <a:p xmlns:a="http://schemas.openxmlformats.org/drawingml/2006/main">
             <a:pPr algn="l">
+              <a:buNone/>
               <a:defRPr sz="1200" b="1">
                 <a:solidFill>
                   <a:srgbClr val="2E5EA7"/>
@@ -13724,6 +13898,7 @@
           <a:lstStyle xmlns:a="http://schemas.openxmlformats.org/drawingml/2006/main"/>
           <a:p xmlns:a="http://schemas.openxmlformats.org/drawingml/2006/main">
             <a:pPr algn="l">
+              <a:buNone/>
               <a:defRPr sz="863" b="0">
                 <a:solidFill>
                   <a:srgbClr val="17202A"/>
@@ -13821,6 +13996,7 @@
           <a:lstStyle xmlns:a="http://schemas.openxmlformats.org/drawingml/2006/main"/>
           <a:p xmlns:a="http://schemas.openxmlformats.org/drawingml/2006/main">
             <a:pPr algn="l">
+              <a:buNone/>
               <a:defRPr sz="1200" b="1">
                 <a:solidFill>
                   <a:srgbClr val="C98A21"/>
@@ -13885,6 +14061,7 @@
           <a:lstStyle xmlns:a="http://schemas.openxmlformats.org/drawingml/2006/main"/>
           <a:p xmlns:a="http://schemas.openxmlformats.org/drawingml/2006/main">
             <a:pPr algn="l">
+              <a:buNone/>
               <a:defRPr sz="863" b="0">
                 <a:solidFill>
                   <a:srgbClr val="17202A"/>
@@ -13982,6 +14159,7 @@
           <a:lstStyle xmlns:a="http://schemas.openxmlformats.org/drawingml/2006/main"/>
           <a:p xmlns:a="http://schemas.openxmlformats.org/drawingml/2006/main">
             <a:pPr algn="l">
+              <a:buNone/>
               <a:defRPr sz="1200" b="1">
                 <a:solidFill>
                   <a:srgbClr val="6559B7"/>
@@ -14046,6 +14224,7 @@
           <a:lstStyle xmlns:a="http://schemas.openxmlformats.org/drawingml/2006/main"/>
           <a:p xmlns:a="http://schemas.openxmlformats.org/drawingml/2006/main">
             <a:pPr algn="l">
+              <a:buNone/>
               <a:defRPr sz="863" b="0">
                 <a:solidFill>
                   <a:srgbClr val="17202A"/>
@@ -14143,6 +14322,7 @@
           <a:lstStyle xmlns:a="http://schemas.openxmlformats.org/drawingml/2006/main"/>
           <a:p xmlns:a="http://schemas.openxmlformats.org/drawingml/2006/main">
             <a:pPr algn="l">
+              <a:buNone/>
               <a:defRPr sz="1200" b="1">
                 <a:solidFill>
                   <a:srgbClr val="C85847"/>
@@ -14207,6 +14387,7 @@
           <a:lstStyle xmlns:a="http://schemas.openxmlformats.org/drawingml/2006/main"/>
           <a:p xmlns:a="http://schemas.openxmlformats.org/drawingml/2006/main">
             <a:pPr algn="l">
+              <a:buNone/>
               <a:defRPr sz="863" b="0">
                 <a:solidFill>
                   <a:srgbClr val="17202A"/>
@@ -14568,6 +14749,7 @@
           <a:lstStyle xmlns:a="http://schemas.openxmlformats.org/drawingml/2006/main"/>
           <a:p xmlns:a="http://schemas.openxmlformats.org/drawingml/2006/main">
             <a:pPr algn="ctr">
+              <a:buNone/>
               <a:defRPr sz="1200" b="0">
                 <a:solidFill>
                   <a:srgbClr val="5F6B64"/>
@@ -14632,6 +14814,7 @@
           <a:lstStyle xmlns:a="http://schemas.openxmlformats.org/drawingml/2006/main"/>
           <a:p xmlns:a="http://schemas.openxmlformats.org/drawingml/2006/main">
             <a:pPr algn="ctr">
+              <a:buNone/>
               <a:defRPr sz="1650" b="1">
                 <a:solidFill>
                   <a:srgbClr val="17202A"/>
@@ -14696,6 +14879,7 @@
           <a:lstStyle xmlns:a="http://schemas.openxmlformats.org/drawingml/2006/main"/>
           <a:p xmlns:a="http://schemas.openxmlformats.org/drawingml/2006/main">
             <a:pPr algn="r">
+              <a:buNone/>
               <a:defRPr sz="750" b="0">
                 <a:solidFill>
                   <a:srgbClr val="5F6B64"/>
@@ -14852,6 +15036,7 @@
           <a:lstStyle xmlns:a="http://schemas.openxmlformats.org/drawingml/2006/main"/>
           <a:p xmlns:a="http://schemas.openxmlformats.org/drawingml/2006/main">
             <a:pPr algn="l">
+              <a:buNone/>
               <a:defRPr sz="900" b="1">
                 <a:solidFill>
                   <a:srgbClr val="0F8A6A"/>
@@ -14916,6 +15101,7 @@
           <a:lstStyle xmlns:a="http://schemas.openxmlformats.org/drawingml/2006/main"/>
           <a:p xmlns:a="http://schemas.openxmlformats.org/drawingml/2006/main">
             <a:pPr algn="l">
+              <a:buNone/>
               <a:defRPr sz="2325" b="1">
                 <a:solidFill>
                   <a:srgbClr val="17202A"/>
@@ -15048,6 +15234,7 @@
           <a:lstStyle xmlns:a="http://schemas.openxmlformats.org/drawingml/2006/main"/>
           <a:p xmlns:a="http://schemas.openxmlformats.org/drawingml/2006/main">
             <a:pPr algn="l">
+              <a:buNone/>
               <a:defRPr sz="1275" b="1">
                 <a:solidFill>
                   <a:srgbClr val="17202A"/>
@@ -15112,6 +15299,7 @@
           <a:lstStyle xmlns:a="http://schemas.openxmlformats.org/drawingml/2006/main"/>
           <a:p xmlns:a="http://schemas.openxmlformats.org/drawingml/2006/main">
             <a:pPr algn="l">
+              <a:buNone/>
               <a:defRPr sz="938" b="0">
                 <a:solidFill>
                   <a:srgbClr val="5F6B64"/>
@@ -15244,6 +15432,7 @@
           <a:lstStyle xmlns:a="http://schemas.openxmlformats.org/drawingml/2006/main"/>
           <a:p xmlns:a="http://schemas.openxmlformats.org/drawingml/2006/main">
             <a:pPr algn="l">
+              <a:buNone/>
               <a:defRPr sz="1275" b="1">
                 <a:solidFill>
                   <a:srgbClr val="17202A"/>
@@ -15308,6 +15497,7 @@
           <a:lstStyle xmlns:a="http://schemas.openxmlformats.org/drawingml/2006/main"/>
           <a:p xmlns:a="http://schemas.openxmlformats.org/drawingml/2006/main">
             <a:pPr algn="l">
+              <a:buNone/>
               <a:defRPr sz="938" b="0">
                 <a:solidFill>
                   <a:srgbClr val="5F6B64"/>
@@ -15440,6 +15630,7 @@
           <a:lstStyle xmlns:a="http://schemas.openxmlformats.org/drawingml/2006/main"/>
           <a:p xmlns:a="http://schemas.openxmlformats.org/drawingml/2006/main">
             <a:pPr algn="l">
+              <a:buNone/>
               <a:defRPr sz="1275" b="1">
                 <a:solidFill>
                   <a:srgbClr val="17202A"/>
@@ -15504,6 +15695,7 @@
           <a:lstStyle xmlns:a="http://schemas.openxmlformats.org/drawingml/2006/main"/>
           <a:p xmlns:a="http://schemas.openxmlformats.org/drawingml/2006/main">
             <a:pPr algn="l">
+              <a:buNone/>
               <a:defRPr sz="938" b="0">
                 <a:solidFill>
                   <a:srgbClr val="5F6B64"/>
@@ -15636,6 +15828,7 @@
           <a:lstStyle xmlns:a="http://schemas.openxmlformats.org/drawingml/2006/main"/>
           <a:p xmlns:a="http://schemas.openxmlformats.org/drawingml/2006/main">
             <a:pPr algn="l">
+              <a:buNone/>
               <a:defRPr sz="1275" b="1">
                 <a:solidFill>
                   <a:srgbClr val="17202A"/>
@@ -15700,6 +15893,7 @@
           <a:lstStyle xmlns:a="http://schemas.openxmlformats.org/drawingml/2006/main"/>
           <a:p xmlns:a="http://schemas.openxmlformats.org/drawingml/2006/main">
             <a:pPr algn="l">
+              <a:buNone/>
               <a:defRPr sz="938" b="0">
                 <a:solidFill>
                   <a:srgbClr val="5F6B64"/>
@@ -15832,6 +16026,7 @@
           <a:lstStyle xmlns:a="http://schemas.openxmlformats.org/drawingml/2006/main"/>
           <a:p xmlns:a="http://schemas.openxmlformats.org/drawingml/2006/main">
             <a:pPr algn="l">
+              <a:buNone/>
               <a:defRPr sz="1275" b="1">
                 <a:solidFill>
                   <a:srgbClr val="17202A"/>
@@ -15896,6 +16091,7 @@
           <a:lstStyle xmlns:a="http://schemas.openxmlformats.org/drawingml/2006/main"/>
           <a:p xmlns:a="http://schemas.openxmlformats.org/drawingml/2006/main">
             <a:pPr algn="l">
+              <a:buNone/>
               <a:defRPr sz="938" b="0">
                 <a:solidFill>
                   <a:srgbClr val="5F6B64"/>
@@ -16224,6 +16420,7 @@
           <a:lstStyle xmlns:a="http://schemas.openxmlformats.org/drawingml/2006/main"/>
           <a:p xmlns:a="http://schemas.openxmlformats.org/drawingml/2006/main">
             <a:pPr algn="ctr">
+              <a:buNone/>
               <a:defRPr sz="1350" b="1">
                 <a:solidFill>
                   <a:srgbClr val="17202A"/>
@@ -16288,6 +16485,7 @@
           <a:lstStyle xmlns:a="http://schemas.openxmlformats.org/drawingml/2006/main"/>
           <a:p xmlns:a="http://schemas.openxmlformats.org/drawingml/2006/main">
             <a:pPr algn="ctr">
+              <a:buNone/>
               <a:defRPr sz="1088" b="0">
                 <a:solidFill>
                   <a:srgbClr val="5F6B64"/>
@@ -16352,6 +16550,7 @@
           <a:lstStyle xmlns:a="http://schemas.openxmlformats.org/drawingml/2006/main"/>
           <a:p xmlns:a="http://schemas.openxmlformats.org/drawingml/2006/main">
             <a:pPr algn="r">
+              <a:buNone/>
               <a:defRPr sz="750" b="0">
                 <a:solidFill>
                   <a:srgbClr val="5F6B64"/>
@@ -16508,6 +16707,7 @@
           <a:lstStyle xmlns:a="http://schemas.openxmlformats.org/drawingml/2006/main"/>
           <a:p xmlns:a="http://schemas.openxmlformats.org/drawingml/2006/main">
             <a:pPr algn="l">
+              <a:buNone/>
               <a:defRPr sz="900" b="1">
                 <a:solidFill>
                   <a:srgbClr val="0F8A6A"/>
@@ -16572,6 +16772,7 @@
           <a:lstStyle xmlns:a="http://schemas.openxmlformats.org/drawingml/2006/main"/>
           <a:p xmlns:a="http://schemas.openxmlformats.org/drawingml/2006/main">
             <a:pPr algn="l">
+              <a:buNone/>
               <a:defRPr sz="2325" b="1">
                 <a:solidFill>
                   <a:srgbClr val="17202A"/>
@@ -16669,6 +16870,7 @@
           <a:lstStyle xmlns:a="http://schemas.openxmlformats.org/drawingml/2006/main"/>
           <a:p xmlns:a="http://schemas.openxmlformats.org/drawingml/2006/main">
             <a:pPr algn="ctr">
+              <a:buNone/>
               <a:defRPr sz="788" b="1">
                 <a:solidFill>
                   <a:srgbClr val="C85847"/>
@@ -16801,6 +17003,7 @@
           <a:lstStyle xmlns:a="http://schemas.openxmlformats.org/drawingml/2006/main"/>
           <a:p xmlns:a="http://schemas.openxmlformats.org/drawingml/2006/main">
             <a:pPr algn="l">
+              <a:buNone/>
               <a:defRPr sz="1275" b="1">
                 <a:solidFill>
                   <a:srgbClr val="17202A"/>
@@ -16865,6 +17068,7 @@
           <a:lstStyle xmlns:a="http://schemas.openxmlformats.org/drawingml/2006/main"/>
           <a:p xmlns:a="http://schemas.openxmlformats.org/drawingml/2006/main">
             <a:pPr algn="l">
+              <a:buNone/>
               <a:defRPr sz="938" b="0">
                 <a:solidFill>
                   <a:srgbClr val="5F6B64"/>
@@ -16997,6 +17201,7 @@
           <a:lstStyle xmlns:a="http://schemas.openxmlformats.org/drawingml/2006/main"/>
           <a:p xmlns:a="http://schemas.openxmlformats.org/drawingml/2006/main">
             <a:pPr algn="l">
+              <a:buNone/>
               <a:defRPr sz="1275" b="1">
                 <a:solidFill>
                   <a:srgbClr val="17202A"/>
@@ -17061,6 +17266,7 @@
           <a:lstStyle xmlns:a="http://schemas.openxmlformats.org/drawingml/2006/main"/>
           <a:p xmlns:a="http://schemas.openxmlformats.org/drawingml/2006/main">
             <a:pPr algn="l">
+              <a:buNone/>
               <a:defRPr sz="938" b="0">
                 <a:solidFill>
                   <a:srgbClr val="5F6B64"/>
@@ -17193,6 +17399,7 @@
           <a:lstStyle xmlns:a="http://schemas.openxmlformats.org/drawingml/2006/main"/>
           <a:p xmlns:a="http://schemas.openxmlformats.org/drawingml/2006/main">
             <a:pPr algn="l">
+              <a:buNone/>
               <a:defRPr sz="1275" b="1">
                 <a:solidFill>
                   <a:srgbClr val="17202A"/>
@@ -17257,6 +17464,7 @@
           <a:lstStyle xmlns:a="http://schemas.openxmlformats.org/drawingml/2006/main"/>
           <a:p xmlns:a="http://schemas.openxmlformats.org/drawingml/2006/main">
             <a:pPr algn="l">
+              <a:buNone/>
               <a:defRPr sz="938" b="0">
                 <a:solidFill>
                   <a:srgbClr val="5F6B64"/>
@@ -17389,6 +17597,7 @@
           <a:lstStyle xmlns:a="http://schemas.openxmlformats.org/drawingml/2006/main"/>
           <a:p xmlns:a="http://schemas.openxmlformats.org/drawingml/2006/main">
             <a:pPr algn="l">
+              <a:buNone/>
               <a:defRPr sz="1275" b="1">
                 <a:solidFill>
                   <a:srgbClr val="17202A"/>
@@ -17453,6 +17662,7 @@
           <a:lstStyle xmlns:a="http://schemas.openxmlformats.org/drawingml/2006/main"/>
           <a:p xmlns:a="http://schemas.openxmlformats.org/drawingml/2006/main">
             <a:pPr algn="l">
+              <a:buNone/>
               <a:defRPr sz="938" b="0">
                 <a:solidFill>
                   <a:srgbClr val="5F6B64"/>
@@ -17550,6 +17760,7 @@
           <a:lstStyle xmlns:a="http://schemas.openxmlformats.org/drawingml/2006/main"/>
           <a:p xmlns:a="http://schemas.openxmlformats.org/drawingml/2006/main">
             <a:pPr algn="ctr">
+              <a:buNone/>
               <a:defRPr sz="1350" b="0">
                 <a:solidFill>
                   <a:srgbClr val="5F6B64"/>
@@ -17614,6 +17825,7 @@
           <a:lstStyle xmlns:a="http://schemas.openxmlformats.org/drawingml/2006/main"/>
           <a:p xmlns:a="http://schemas.openxmlformats.org/drawingml/2006/main">
             <a:pPr algn="ctr">
+              <a:buNone/>
               <a:defRPr sz="1725" b="1">
                 <a:solidFill>
                   <a:srgbClr val="17202A"/>
@@ -17678,6 +17890,7 @@
           <a:lstStyle xmlns:a="http://schemas.openxmlformats.org/drawingml/2006/main"/>
           <a:p xmlns:a="http://schemas.openxmlformats.org/drawingml/2006/main">
             <a:pPr algn="r">
+              <a:buNone/>
               <a:defRPr sz="750" b="0">
                 <a:solidFill>
                   <a:srgbClr val="5F6B64"/>
@@ -17834,6 +18047,7 @@
           <a:lstStyle xmlns:a="http://schemas.openxmlformats.org/drawingml/2006/main"/>
           <a:p xmlns:a="http://schemas.openxmlformats.org/drawingml/2006/main">
             <a:pPr algn="l">
+              <a:buNone/>
               <a:defRPr sz="900" b="1">
                 <a:solidFill>
                   <a:srgbClr val="0F8A6A"/>
@@ -17898,6 +18112,7 @@
           <a:lstStyle xmlns:a="http://schemas.openxmlformats.org/drawingml/2006/main"/>
           <a:p xmlns:a="http://schemas.openxmlformats.org/drawingml/2006/main">
             <a:pPr algn="l">
+              <a:buNone/>
               <a:defRPr sz="2325" b="1">
                 <a:solidFill>
                   <a:srgbClr val="17202A"/>
@@ -18030,6 +18245,7 @@
           <a:lstStyle xmlns:a="http://schemas.openxmlformats.org/drawingml/2006/main"/>
           <a:p xmlns:a="http://schemas.openxmlformats.org/drawingml/2006/main">
             <a:pPr algn="l">
+              <a:buNone/>
               <a:defRPr sz="1275" b="1">
                 <a:solidFill>
                   <a:srgbClr val="17202A"/>
@@ -18094,6 +18310,7 @@
           <a:lstStyle xmlns:a="http://schemas.openxmlformats.org/drawingml/2006/main"/>
           <a:p xmlns:a="http://schemas.openxmlformats.org/drawingml/2006/main">
             <a:pPr algn="l">
+              <a:buNone/>
               <a:defRPr sz="938" b="0">
                 <a:solidFill>
                   <a:srgbClr val="5F6B64"/>
@@ -18117,6 +18334,7 @@
           </a:p>
           <a:p xmlns:a="http://schemas.openxmlformats.org/drawingml/2006/main">
             <a:pPr algn="l">
+              <a:buNone/>
               <a:defRPr sz="938" b="0">
                 <a:solidFill>
                   <a:srgbClr val="5F6B64"/>
@@ -18140,6 +18358,7 @@
           </a:p>
           <a:p xmlns:a="http://schemas.openxmlformats.org/drawingml/2006/main">
             <a:pPr algn="l">
+              <a:buNone/>
               <a:defRPr sz="938" b="0">
                 <a:solidFill>
                   <a:srgbClr val="5F6B64"/>
@@ -18163,6 +18382,7 @@
           </a:p>
           <a:p xmlns:a="http://schemas.openxmlformats.org/drawingml/2006/main">
             <a:pPr algn="l">
+              <a:buNone/>
               <a:defRPr sz="938" b="0">
                 <a:solidFill>
                   <a:srgbClr val="5F6B64"/>
@@ -18186,6 +18406,7 @@
           </a:p>
           <a:p xmlns:a="http://schemas.openxmlformats.org/drawingml/2006/main">
             <a:pPr algn="l">
+              <a:buNone/>
               <a:defRPr sz="938" b="0">
                 <a:solidFill>
                   <a:srgbClr val="5F6B64"/>
@@ -18318,6 +18539,7 @@
           <a:lstStyle xmlns:a="http://schemas.openxmlformats.org/drawingml/2006/main"/>
           <a:p xmlns:a="http://schemas.openxmlformats.org/drawingml/2006/main">
             <a:pPr algn="l">
+              <a:buNone/>
               <a:defRPr sz="1275" b="1">
                 <a:solidFill>
                   <a:srgbClr val="17202A"/>
@@ -18382,6 +18604,7 @@
           <a:lstStyle xmlns:a="http://schemas.openxmlformats.org/drawingml/2006/main"/>
           <a:p xmlns:a="http://schemas.openxmlformats.org/drawingml/2006/main">
             <a:pPr algn="l">
+              <a:buNone/>
               <a:defRPr sz="938" b="0">
                 <a:solidFill>
                   <a:srgbClr val="5F6B64"/>
@@ -18405,6 +18628,7 @@
           </a:p>
           <a:p xmlns:a="http://schemas.openxmlformats.org/drawingml/2006/main">
             <a:pPr algn="l">
+              <a:buNone/>
               <a:defRPr sz="938" b="0">
                 <a:solidFill>
                   <a:srgbClr val="5F6B64"/>
@@ -18428,6 +18652,7 @@
           </a:p>
           <a:p xmlns:a="http://schemas.openxmlformats.org/drawingml/2006/main">
             <a:pPr algn="l">
+              <a:buNone/>
               <a:defRPr sz="938" b="0">
                 <a:solidFill>
                   <a:srgbClr val="5F6B64"/>
@@ -18451,6 +18676,7 @@
           </a:p>
           <a:p xmlns:a="http://schemas.openxmlformats.org/drawingml/2006/main">
             <a:pPr algn="l">
+              <a:buNone/>
               <a:defRPr sz="938" b="0">
                 <a:solidFill>
                   <a:srgbClr val="5F6B64"/>
@@ -18474,6 +18700,7 @@
           </a:p>
           <a:p xmlns:a="http://schemas.openxmlformats.org/drawingml/2006/main">
             <a:pPr algn="l">
+              <a:buNone/>
               <a:defRPr sz="938" b="0">
                 <a:solidFill>
                   <a:srgbClr val="5F6B64"/>
@@ -18571,6 +18798,7 @@
           <a:lstStyle xmlns:a="http://schemas.openxmlformats.org/drawingml/2006/main"/>
           <a:p xmlns:a="http://schemas.openxmlformats.org/drawingml/2006/main">
             <a:pPr algn="ctr">
+              <a:buNone/>
               <a:defRPr sz="1350" b="1">
                 <a:solidFill>
                   <a:srgbClr val="17202A"/>
@@ -18635,6 +18863,7 @@
           <a:lstStyle xmlns:a="http://schemas.openxmlformats.org/drawingml/2006/main"/>
           <a:p xmlns:a="http://schemas.openxmlformats.org/drawingml/2006/main">
             <a:pPr algn="r">
+              <a:buNone/>
               <a:defRPr sz="750" b="0">
                 <a:solidFill>
                   <a:srgbClr val="5F6B64"/>

--- a/deliverables/Robo-T-Rader_OpenAI_Build_Week_2026.pptx
+++ b/deliverables/Robo-T-Rader_OpenAI_Build_Week_2026.pptx
@@ -2,22 +2,22 @@
 <file path=ppt/presentation.xml><?xml version="1.0" encoding="utf-8"?>
 <p:presentation xmlns:p="http://schemas.openxmlformats.org/presentationml/2006/main">
   <p:sldMasterIdLst>
-    <p:sldMasterId xmlns:r="http://schemas.openxmlformats.org/officeDocument/2006/relationships" id="2147483648" r:id="Rc58b740cd73649bc"/>
+    <p:sldMasterId xmlns:r="http://schemas.openxmlformats.org/officeDocument/2006/relationships" id="2147483648" r:id="Rfb599ace06504e35"/>
   </p:sldMasterIdLst>
   <p:notesMasterIdLst>
-    <p:notesMasterId xmlns:r="http://schemas.openxmlformats.org/officeDocument/2006/relationships" r:id="R1202769f2312400b"/>
+    <p:notesMasterId xmlns:r="http://schemas.openxmlformats.org/officeDocument/2006/relationships" r:id="R83958e6f92364cbc"/>
   </p:notesMasterIdLst>
   <p:sldIdLst>
-    <p:sldId xmlns:r="http://schemas.openxmlformats.org/officeDocument/2006/relationships" id="256" r:id="Rf695aa83d1734a8d"/>
-    <p:sldId xmlns:r="http://schemas.openxmlformats.org/officeDocument/2006/relationships" id="257" r:id="Refa66d3726c54257"/>
-    <p:sldId xmlns:r="http://schemas.openxmlformats.org/officeDocument/2006/relationships" id="258" r:id="Rc1a701c4d6544738"/>
-    <p:sldId xmlns:r="http://schemas.openxmlformats.org/officeDocument/2006/relationships" id="259" r:id="R1c3e187fa01d4381"/>
-    <p:sldId xmlns:r="http://schemas.openxmlformats.org/officeDocument/2006/relationships" id="260" r:id="Re7d113e59e284240"/>
-    <p:sldId xmlns:r="http://schemas.openxmlformats.org/officeDocument/2006/relationships" id="261" r:id="Rca64f05c918549b6"/>
-    <p:sldId xmlns:r="http://schemas.openxmlformats.org/officeDocument/2006/relationships" id="262" r:id="R535747d4987a4ae9"/>
-    <p:sldId xmlns:r="http://schemas.openxmlformats.org/officeDocument/2006/relationships" id="263" r:id="R7e0e182465c6465d"/>
-    <p:sldId xmlns:r="http://schemas.openxmlformats.org/officeDocument/2006/relationships" id="264" r:id="R5cb6238a4d9f465c"/>
-    <p:sldId xmlns:r="http://schemas.openxmlformats.org/officeDocument/2006/relationships" id="265" r:id="Rbfa45cb58cba41d4"/>
+    <p:sldId xmlns:r="http://schemas.openxmlformats.org/officeDocument/2006/relationships" id="256" r:id="Re85942ac1fea4c81"/>
+    <p:sldId xmlns:r="http://schemas.openxmlformats.org/officeDocument/2006/relationships" id="257" r:id="R7ad698423490418c"/>
+    <p:sldId xmlns:r="http://schemas.openxmlformats.org/officeDocument/2006/relationships" id="258" r:id="R1a12b091d74e4959"/>
+    <p:sldId xmlns:r="http://schemas.openxmlformats.org/officeDocument/2006/relationships" id="259" r:id="R9a09d846c31e4e32"/>
+    <p:sldId xmlns:r="http://schemas.openxmlformats.org/officeDocument/2006/relationships" id="260" r:id="R72b929a8d7af4533"/>
+    <p:sldId xmlns:r="http://schemas.openxmlformats.org/officeDocument/2006/relationships" id="261" r:id="R3c11ed85880a4a22"/>
+    <p:sldId xmlns:r="http://schemas.openxmlformats.org/officeDocument/2006/relationships" id="262" r:id="Rfa8f8dd58cdf4f6e"/>
+    <p:sldId xmlns:r="http://schemas.openxmlformats.org/officeDocument/2006/relationships" id="263" r:id="Rfcc4663ff53b4111"/>
+    <p:sldId xmlns:r="http://schemas.openxmlformats.org/officeDocument/2006/relationships" id="264" r:id="R157e87ee3ff34a67"/>
+    <p:sldId xmlns:r="http://schemas.openxmlformats.org/officeDocument/2006/relationships" id="265" r:id="R7886375bb4c44362"/>
   </p:sldIdLst>
   <p:sldSz cx="12192000" cy="6858000"/>
   <p:notesSz cx="6858000" cy="9144000"/>
@@ -1158,7 +1158,7 @@
   </p:cSld>
   <p:clrMap bg1="lt1" tx1="dk1" bg2="lt2" tx2="dk2" accent1="accent1" accent2="accent2" accent3="accent3" accent4="accent4" accent5="accent5" accent6="accent6" hlink="hlink" folHlink="folHlink"/>
   <p:sldLayoutIdLst>
-    <p:sldLayoutId xmlns:r="http://schemas.openxmlformats.org/officeDocument/2006/relationships" id="2147483649" r:id="Rdbc38080a8e546d1"/>
+    <p:sldLayoutId xmlns:r="http://schemas.openxmlformats.org/officeDocument/2006/relationships" id="2147483649" r:id="R5c1c2e1202ed4723"/>
   </p:sldLayoutIdLst>
   <p:txStyles>
     <p:titleStyle>
@@ -3528,7 +3528,7 @@
           <p:nvPr/>
         </p:nvPicPr>
         <p:blipFill>
-          <a:blip xmlns:r="http://schemas.openxmlformats.org/officeDocument/2006/relationships" xmlns:a="http://schemas.openxmlformats.org/drawingml/2006/main" r:embed="R53d4f7b6782b4c68"/>
+          <a:blip xmlns:r="http://schemas.openxmlformats.org/officeDocument/2006/relationships" xmlns:a="http://schemas.openxmlformats.org/drawingml/2006/main" r:embed="R53d6e359e9b14312"/>
           <a:stretch xmlns:a="http://schemas.openxmlformats.org/drawingml/2006/main"/>
         </p:blipFill>
         <p:spPr>
@@ -5111,13 +5111,68 @@
           <p:nvPr/>
         </p:nvPicPr>
         <p:blipFill>
-          <a:blip xmlns:r="http://schemas.openxmlformats.org/officeDocument/2006/relationships" xmlns:a="http://schemas.openxmlformats.org/drawingml/2006/main" r:embed="Rb154235000424b0a"/>
+          <a:blip xmlns:r="http://schemas.openxmlformats.org/officeDocument/2006/relationships" xmlns:a="http://schemas.openxmlformats.org/drawingml/2006/main" r:embed="Raef0bbeeb8e6424d"/>
           <a:stretch xmlns:a="http://schemas.openxmlformats.org/drawingml/2006/main"/>
         </p:blipFill>
         <p:spPr>
           <a:xfrm xmlns:a="http://schemas.openxmlformats.org/drawingml/2006/main">
             <a:off x="8766913" y="4476750"/>
             <a:ext cx="1801924" cy="1123950"/>
+          </a:xfrm>
+          <a:prstGeom xmlns:a="http://schemas.openxmlformats.org/drawingml/2006/main" prst="rect">
+            <a:avLst/>
+          </a:prstGeom>
+        </p:spPr>
+      </p:pic>
+      <p:sp>
+        <p:nvSpPr>
+          <p:cNvPr id="33" name="logo-cleanup-mask">
+            <a:extLst xmlns:a="http://schemas.openxmlformats.org/drawingml/2006/main">
+              <a:ext uri="{FF2B5EF4-FFF2-40B4-BE49-F238E27FC236}">
+                <a16:creationId xmlns:a16="http://schemas.microsoft.com/office/drawing/2014/main" id="{3D1748BE-201F-420E-857A-32773D81969B}"/>
+              </a:ext>
+            </a:extLst>
+          </p:cNvPr>
+          <p:cNvSpPr>
+            <a:spLocks xmlns:a="http://schemas.openxmlformats.org/drawingml/2006/main" noGrp="1"/>
+          </p:cNvSpPr>
+          <p:nvPr/>
+        </p:nvSpPr>
+        <p:spPr>
+          <a:xfrm xmlns:a="http://schemas.openxmlformats.org/drawingml/2006/main">
+            <a:off x="8858250" y="4333875"/>
+            <a:ext cx="2476500" cy="1524000"/>
+          </a:xfrm>
+          <a:prstGeom xmlns:a="http://schemas.openxmlformats.org/drawingml/2006/main" prst="rect">
+            <a:avLst/>
+          </a:prstGeom>
+          <a:solidFill xmlns:a="http://schemas.openxmlformats.org/drawingml/2006/main">
+            <a:srgbClr val="11181F"/>
+          </a:solidFill>
+          <a:ln xmlns:a="http://schemas.openxmlformats.org/drawingml/2006/main" w="0">
+            <a:solidFill>
+              <a:srgbClr val="11181F"/>
+            </a:solidFill>
+            <a:prstDash val="solid"/>
+          </a:ln>
+        </p:spPr>
+      </p:sp>
+      <p:pic>
+        <p:nvPicPr>
+          <p:cNvPr id="34" name=""/>
+          <p:cNvPicPr>
+            <a:picLocks xmlns:a="http://schemas.openxmlformats.org/drawingml/2006/main" noChangeAspect="1"/>
+          </p:cNvPicPr>
+          <p:nvPr/>
+        </p:nvPicPr>
+        <p:blipFill>
+          <a:blip xmlns:r="http://schemas.openxmlformats.org/officeDocument/2006/relationships" xmlns:a="http://schemas.openxmlformats.org/drawingml/2006/main" r:embed="Rae3414bc2b274eea"/>
+          <a:stretch xmlns:a="http://schemas.openxmlformats.org/drawingml/2006/main"/>
+        </p:blipFill>
+        <p:spPr>
+          <a:xfrm xmlns:a="http://schemas.openxmlformats.org/drawingml/2006/main">
+            <a:off x="9409326" y="5000625"/>
+            <a:ext cx="1374349" cy="857250"/>
           </a:xfrm>
           <a:prstGeom xmlns:a="http://schemas.openxmlformats.org/drawingml/2006/main" prst="rect">
             <a:avLst/>

--- a/deliverables/Robo-T-Rader_OpenAI_Build_Week_2026.pptx
+++ b/deliverables/Robo-T-Rader_OpenAI_Build_Week_2026.pptx
@@ -2,22 +2,22 @@
 <file path=ppt/presentation.xml><?xml version="1.0" encoding="utf-8"?>
 <p:presentation xmlns:p="http://schemas.openxmlformats.org/presentationml/2006/main">
   <p:sldMasterIdLst>
-    <p:sldMasterId xmlns:r="http://schemas.openxmlformats.org/officeDocument/2006/relationships" id="2147483648" r:id="Rfb599ace06504e35"/>
+    <p:sldMasterId xmlns:r="http://schemas.openxmlformats.org/officeDocument/2006/relationships" id="2147483648" r:id="R7161ec00ecf745e6"/>
   </p:sldMasterIdLst>
   <p:notesMasterIdLst>
-    <p:notesMasterId xmlns:r="http://schemas.openxmlformats.org/officeDocument/2006/relationships" r:id="R83958e6f92364cbc"/>
+    <p:notesMasterId xmlns:r="http://schemas.openxmlformats.org/officeDocument/2006/relationships" r:id="R0884bc54827c46a4"/>
   </p:notesMasterIdLst>
   <p:sldIdLst>
-    <p:sldId xmlns:r="http://schemas.openxmlformats.org/officeDocument/2006/relationships" id="256" r:id="Re85942ac1fea4c81"/>
-    <p:sldId xmlns:r="http://schemas.openxmlformats.org/officeDocument/2006/relationships" id="257" r:id="R7ad698423490418c"/>
-    <p:sldId xmlns:r="http://schemas.openxmlformats.org/officeDocument/2006/relationships" id="258" r:id="R1a12b091d74e4959"/>
-    <p:sldId xmlns:r="http://schemas.openxmlformats.org/officeDocument/2006/relationships" id="259" r:id="R9a09d846c31e4e32"/>
-    <p:sldId xmlns:r="http://schemas.openxmlformats.org/officeDocument/2006/relationships" id="260" r:id="R72b929a8d7af4533"/>
-    <p:sldId xmlns:r="http://schemas.openxmlformats.org/officeDocument/2006/relationships" id="261" r:id="R3c11ed85880a4a22"/>
-    <p:sldId xmlns:r="http://schemas.openxmlformats.org/officeDocument/2006/relationships" id="262" r:id="Rfa8f8dd58cdf4f6e"/>
-    <p:sldId xmlns:r="http://schemas.openxmlformats.org/officeDocument/2006/relationships" id="263" r:id="Rfcc4663ff53b4111"/>
-    <p:sldId xmlns:r="http://schemas.openxmlformats.org/officeDocument/2006/relationships" id="264" r:id="R157e87ee3ff34a67"/>
-    <p:sldId xmlns:r="http://schemas.openxmlformats.org/officeDocument/2006/relationships" id="265" r:id="R7886375bb4c44362"/>
+    <p:sldId xmlns:r="http://schemas.openxmlformats.org/officeDocument/2006/relationships" id="256" r:id="Rd82c2d39c8324b56"/>
+    <p:sldId xmlns:r="http://schemas.openxmlformats.org/officeDocument/2006/relationships" id="257" r:id="Rbc0404821a5742e8"/>
+    <p:sldId xmlns:r="http://schemas.openxmlformats.org/officeDocument/2006/relationships" id="258" r:id="Re1b6cc59dd2d4d2c"/>
+    <p:sldId xmlns:r="http://schemas.openxmlformats.org/officeDocument/2006/relationships" id="259" r:id="R3fcaa9d64789439e"/>
+    <p:sldId xmlns:r="http://schemas.openxmlformats.org/officeDocument/2006/relationships" id="260" r:id="R33802646e51246a7"/>
+    <p:sldId xmlns:r="http://schemas.openxmlformats.org/officeDocument/2006/relationships" id="261" r:id="R7339a26905144c93"/>
+    <p:sldId xmlns:r="http://schemas.openxmlformats.org/officeDocument/2006/relationships" id="262" r:id="R8aba76aa18834888"/>
+    <p:sldId xmlns:r="http://schemas.openxmlformats.org/officeDocument/2006/relationships" id="263" r:id="R1d33308b34884b30"/>
+    <p:sldId xmlns:r="http://schemas.openxmlformats.org/officeDocument/2006/relationships" id="264" r:id="Rf679e84a718e43d9"/>
+    <p:sldId xmlns:r="http://schemas.openxmlformats.org/officeDocument/2006/relationships" id="265" r:id="R57139668448743a9"/>
   </p:sldIdLst>
   <p:sldSz cx="12192000" cy="6858000"/>
   <p:notesSz cx="6858000" cy="9144000"/>
@@ -1158,7 +1158,7 @@
   </p:cSld>
   <p:clrMap bg1="lt1" tx1="dk1" bg2="lt2" tx2="dk2" accent1="accent1" accent2="accent2" accent3="accent3" accent4="accent4" accent5="accent5" accent6="accent6" hlink="hlink" folHlink="folHlink"/>
   <p:sldLayoutIdLst>
-    <p:sldLayoutId xmlns:r="http://schemas.openxmlformats.org/officeDocument/2006/relationships" id="2147483649" r:id="R5c1c2e1202ed4723"/>
+    <p:sldLayoutId xmlns:r="http://schemas.openxmlformats.org/officeDocument/2006/relationships" id="2147483649" r:id="Rf26701d92dd94fd7"/>
   </p:sldLayoutIdLst>
   <p:txStyles>
     <p:titleStyle>
@@ -1457,7 +1457,7 @@
           <p:cNvPr id="1" name="">
             <a:extLst xmlns:a="http://schemas.openxmlformats.org/drawingml/2006/main">
               <a:ext uri="{FF2B5EF4-FFF2-40B4-BE49-F238E27FC236}">
-                <a16:creationId xmlns:a16="http://schemas.microsoft.com/office/drawing/2014/main" id="{672DE6F8-8443-49B1-A8AE-72622760E901}"/>
+                <a16:creationId xmlns:a16="http://schemas.microsoft.com/office/drawing/2014/main" id="{01CFBABD-394C-469F-977F-8B468DD3AE2F}"/>
               </a:ext>
             </a:extLst>
           </p:cNvPr>
@@ -1492,7 +1492,7 @@
           <p:cNvPr id="2" name="">
             <a:extLst xmlns:a="http://schemas.openxmlformats.org/drawingml/2006/main">
               <a:ext uri="{FF2B5EF4-FFF2-40B4-BE49-F238E27FC236}">
-                <a16:creationId xmlns:a16="http://schemas.microsoft.com/office/drawing/2014/main" id="{DEB7B80D-4E87-40BA-B500-494560BA1716}"/>
+                <a16:creationId xmlns:a16="http://schemas.microsoft.com/office/drawing/2014/main" id="{E8F58981-4919-47CE-9027-F2568636DD65}"/>
               </a:ext>
             </a:extLst>
           </p:cNvPr>
@@ -1527,7 +1527,7 @@
           <p:cNvPr id="3" name="">
             <a:extLst xmlns:a="http://schemas.openxmlformats.org/drawingml/2006/main">
               <a:ext uri="{FF2B5EF4-FFF2-40B4-BE49-F238E27FC236}">
-                <a16:creationId xmlns:a16="http://schemas.microsoft.com/office/drawing/2014/main" id="{2BBF46FE-966B-427B-81BB-D3FE2FC68B95}"/>
+                <a16:creationId xmlns:a16="http://schemas.microsoft.com/office/drawing/2014/main" id="{33E6513D-F505-44C5-AAE2-3776043342C0}"/>
               </a:ext>
             </a:extLst>
           </p:cNvPr>
@@ -1563,7 +1563,6 @@
           <a:lstStyle xmlns:a="http://schemas.openxmlformats.org/drawingml/2006/main"/>
           <a:p xmlns:a="http://schemas.openxmlformats.org/drawingml/2006/main">
             <a:pPr algn="l">
-              <a:buNone/>
               <a:defRPr sz="900" b="1">
                 <a:solidFill>
                   <a:srgbClr val="8DE0C7"/>
@@ -1592,7 +1591,7 @@
           <p:cNvPr id="4" name="">
             <a:extLst xmlns:a="http://schemas.openxmlformats.org/drawingml/2006/main">
               <a:ext uri="{FF2B5EF4-FFF2-40B4-BE49-F238E27FC236}">
-                <a16:creationId xmlns:a16="http://schemas.microsoft.com/office/drawing/2014/main" id="{41EEFE66-FCDD-40AC-8A0C-A59BD90EFAA2}"/>
+                <a16:creationId xmlns:a16="http://schemas.microsoft.com/office/drawing/2014/main" id="{D80B9F25-5901-4EF9-8E58-01E55BCFA1D2}"/>
               </a:ext>
             </a:extLst>
           </p:cNvPr>
@@ -1628,7 +1627,6 @@
           <a:lstStyle xmlns:a="http://schemas.openxmlformats.org/drawingml/2006/main"/>
           <a:p xmlns:a="http://schemas.openxmlformats.org/drawingml/2006/main">
             <a:pPr algn="l">
-              <a:buNone/>
               <a:defRPr sz="2325" b="1">
                 <a:solidFill>
                   <a:srgbClr val="FFFFFF"/>
@@ -1647,7 +1645,7 @@
                 <a:ea typeface="Aptos Display"/>
                 <a:cs typeface="Aptos Display"/>
               </a:rPr>
-              <a:t>Robo-T-Rader convierte trading autonomo en una plataforma operable.</a:t>
+              <a:t>Robo-T-Rader turns autonomous trading into an operable platform.</a:t>
             </a:r>
           </a:p>
         </p:txBody>
@@ -1657,7 +1655,7 @@
           <p:cNvPr id="5" name="">
             <a:extLst xmlns:a="http://schemas.openxmlformats.org/drawingml/2006/main">
               <a:ext uri="{FF2B5EF4-FFF2-40B4-BE49-F238E27FC236}">
-                <a16:creationId xmlns:a16="http://schemas.microsoft.com/office/drawing/2014/main" id="{717DEF34-D067-48C5-9B64-5120358E43D0}"/>
+                <a16:creationId xmlns:a16="http://schemas.microsoft.com/office/drawing/2014/main" id="{248C70DD-FFDB-4007-B664-99EC2D4FA5F9}"/>
               </a:ext>
             </a:extLst>
           </p:cNvPr>
@@ -1693,7 +1691,6 @@
           <a:lstStyle xmlns:a="http://schemas.openxmlformats.org/drawingml/2006/main"/>
           <a:p xmlns:a="http://schemas.openxmlformats.org/drawingml/2006/main">
             <a:pPr algn="l">
-              <a:buNone/>
               <a:defRPr sz="1575" b="0">
                 <a:solidFill>
                   <a:srgbClr val="D7E2DD"/>
@@ -1712,7 +1709,7 @@
                 <a:ea typeface="Aptos"/>
                 <a:cs typeface="Aptos"/>
               </a:rPr>
-              <a:t>No es un bot aislado. Es un ecosistema para descubrir, incubar, gobernar y operar sistemas autonomos con disciplina.</a:t>
+              <a:t>It is not a single bot. It is an ecosystem for discovering, incubating, governing, and operating autonomous systems with discipline.</a:t>
             </a:r>
           </a:p>
         </p:txBody>
@@ -1722,7 +1719,7 @@
           <p:cNvPr id="6" name="">
             <a:extLst xmlns:a="http://schemas.openxmlformats.org/drawingml/2006/main">
               <a:ext uri="{FF2B5EF4-FFF2-40B4-BE49-F238E27FC236}">
-                <a16:creationId xmlns:a16="http://schemas.microsoft.com/office/drawing/2014/main" id="{1A38EA10-CBBB-4BAD-B146-948B409EE7E2}"/>
+                <a16:creationId xmlns:a16="http://schemas.microsoft.com/office/drawing/2014/main" id="{EC90E490-3B94-4644-A773-2578F4E902C0}"/>
               </a:ext>
             </a:extLst>
           </p:cNvPr>
@@ -1755,7 +1752,7 @@
           <p:cNvPr id="7" name="">
             <a:extLst xmlns:a="http://schemas.openxmlformats.org/drawingml/2006/main">
               <a:ext uri="{FF2B5EF4-FFF2-40B4-BE49-F238E27FC236}">
-                <a16:creationId xmlns:a16="http://schemas.microsoft.com/office/drawing/2014/main" id="{EBA36B90-E2BE-4DB2-9DC1-01A6523A8DC7}"/>
+                <a16:creationId xmlns:a16="http://schemas.microsoft.com/office/drawing/2014/main" id="{98AA2B5A-DFFD-46AE-BAB4-2A29B5A9B851}"/>
               </a:ext>
             </a:extLst>
           </p:cNvPr>
@@ -1790,7 +1787,7 @@
           <p:cNvPr id="8" name="">
             <a:extLst xmlns:a="http://schemas.openxmlformats.org/drawingml/2006/main">
               <a:ext uri="{FF2B5EF4-FFF2-40B4-BE49-F238E27FC236}">
-                <a16:creationId xmlns:a16="http://schemas.microsoft.com/office/drawing/2014/main" id="{15695753-415E-4F7A-AFA5-8F609AE36A3D}"/>
+                <a16:creationId xmlns:a16="http://schemas.microsoft.com/office/drawing/2014/main" id="{36A9845E-859C-46E7-9ED7-61DFD0ACD14E}"/>
               </a:ext>
             </a:extLst>
           </p:cNvPr>
@@ -1826,7 +1823,6 @@
           <a:lstStyle xmlns:a="http://schemas.openxmlformats.org/drawingml/2006/main"/>
           <a:p xmlns:a="http://schemas.openxmlformats.org/drawingml/2006/main">
             <a:pPr algn="l">
-              <a:buNone/>
               <a:defRPr sz="2100" b="1">
                 <a:solidFill>
                   <a:srgbClr val="17202A"/>
@@ -1855,7 +1851,7 @@
           <p:cNvPr id="9" name="">
             <a:extLst xmlns:a="http://schemas.openxmlformats.org/drawingml/2006/main">
               <a:ext uri="{FF2B5EF4-FFF2-40B4-BE49-F238E27FC236}">
-                <a16:creationId xmlns:a16="http://schemas.microsoft.com/office/drawing/2014/main" id="{614C5169-0669-47E3-8834-6B9850083959}"/>
+                <a16:creationId xmlns:a16="http://schemas.microsoft.com/office/drawing/2014/main" id="{68C29E45-0BF1-4332-8F99-C4825FCE29FD}"/>
               </a:ext>
             </a:extLst>
           </p:cNvPr>
@@ -1891,7 +1887,6 @@
           <a:lstStyle xmlns:a="http://schemas.openxmlformats.org/drawingml/2006/main"/>
           <a:p xmlns:a="http://schemas.openxmlformats.org/drawingml/2006/main">
             <a:pPr algn="l">
-              <a:buNone/>
               <a:defRPr sz="900" b="0">
                 <a:solidFill>
                   <a:srgbClr val="5F6B64"/>
@@ -1910,7 +1905,7 @@
                 <a:ea typeface="Aptos"/>
                 <a:cs typeface="Aptos"/>
               </a:rPr>
-              <a:t>entornos live/lab</a:t>
+              <a:t>live/lab environments</a:t>
             </a:r>
           </a:p>
         </p:txBody>
@@ -1920,7 +1915,7 @@
           <p:cNvPr id="10" name="">
             <a:extLst xmlns:a="http://schemas.openxmlformats.org/drawingml/2006/main">
               <a:ext uri="{FF2B5EF4-FFF2-40B4-BE49-F238E27FC236}">
-                <a16:creationId xmlns:a16="http://schemas.microsoft.com/office/drawing/2014/main" id="{BCF9FE60-EEDF-406F-B447-C90ACCE1302C}"/>
+                <a16:creationId xmlns:a16="http://schemas.microsoft.com/office/drawing/2014/main" id="{59710B63-D918-40D1-AB4B-F40468A87D4E}"/>
               </a:ext>
             </a:extLst>
           </p:cNvPr>
@@ -1953,7 +1948,7 @@
           <p:cNvPr id="11" name="">
             <a:extLst xmlns:a="http://schemas.openxmlformats.org/drawingml/2006/main">
               <a:ext uri="{FF2B5EF4-FFF2-40B4-BE49-F238E27FC236}">
-                <a16:creationId xmlns:a16="http://schemas.microsoft.com/office/drawing/2014/main" id="{91187FDE-9D23-4432-A4EF-5F97FA81472F}"/>
+                <a16:creationId xmlns:a16="http://schemas.microsoft.com/office/drawing/2014/main" id="{F9E004BE-1B96-4F2D-96E7-7EE372986DB2}"/>
               </a:ext>
             </a:extLst>
           </p:cNvPr>
@@ -1988,7 +1983,7 @@
           <p:cNvPr id="12" name="">
             <a:extLst xmlns:a="http://schemas.openxmlformats.org/drawingml/2006/main">
               <a:ext uri="{FF2B5EF4-FFF2-40B4-BE49-F238E27FC236}">
-                <a16:creationId xmlns:a16="http://schemas.microsoft.com/office/drawing/2014/main" id="{6E187280-C445-4898-8AFF-17E632AA5DED}"/>
+                <a16:creationId xmlns:a16="http://schemas.microsoft.com/office/drawing/2014/main" id="{4C61CB98-72D4-4D8F-AFFA-7BCDEDB996E0}"/>
               </a:ext>
             </a:extLst>
           </p:cNvPr>
@@ -2024,7 +2019,6 @@
           <a:lstStyle xmlns:a="http://schemas.openxmlformats.org/drawingml/2006/main"/>
           <a:p xmlns:a="http://schemas.openxmlformats.org/drawingml/2006/main">
             <a:pPr algn="l">
-              <a:buNone/>
               <a:defRPr sz="2100" b="1">
                 <a:solidFill>
                   <a:srgbClr val="17202A"/>
@@ -2053,7 +2047,7 @@
           <p:cNvPr id="13" name="">
             <a:extLst xmlns:a="http://schemas.openxmlformats.org/drawingml/2006/main">
               <a:ext uri="{FF2B5EF4-FFF2-40B4-BE49-F238E27FC236}">
-                <a16:creationId xmlns:a16="http://schemas.microsoft.com/office/drawing/2014/main" id="{8B865D24-0185-4019-940C-EA2BABF67CF0}"/>
+                <a16:creationId xmlns:a16="http://schemas.microsoft.com/office/drawing/2014/main" id="{8A4A6535-182C-43E1-87A0-222723A010EA}"/>
               </a:ext>
             </a:extLst>
           </p:cNvPr>
@@ -2089,7 +2083,6 @@
           <a:lstStyle xmlns:a="http://schemas.openxmlformats.org/drawingml/2006/main"/>
           <a:p xmlns:a="http://schemas.openxmlformats.org/drawingml/2006/main">
             <a:pPr algn="l">
-              <a:buNone/>
               <a:defRPr sz="900" b="0">
                 <a:solidFill>
                   <a:srgbClr val="5F6B64"/>
@@ -2108,7 +2101,7 @@
                 <a:ea typeface="Aptos"/>
                 <a:cs typeface="Aptos"/>
               </a:rPr>
-              <a:t>modulos nombrados</a:t>
+              <a:t>named modules</a:t>
             </a:r>
           </a:p>
         </p:txBody>
@@ -2118,7 +2111,7 @@
           <p:cNvPr id="14" name="">
             <a:extLst xmlns:a="http://schemas.openxmlformats.org/drawingml/2006/main">
               <a:ext uri="{FF2B5EF4-FFF2-40B4-BE49-F238E27FC236}">
-                <a16:creationId xmlns:a16="http://schemas.microsoft.com/office/drawing/2014/main" id="{7CE2E6BA-F420-4157-9BAF-13F591A9CC9C}"/>
+                <a16:creationId xmlns:a16="http://schemas.microsoft.com/office/drawing/2014/main" id="{96F11C2A-401D-400F-9D64-2BE6E7CFF9ED}"/>
               </a:ext>
             </a:extLst>
           </p:cNvPr>
@@ -2151,7 +2144,7 @@
           <p:cNvPr id="15" name="">
             <a:extLst xmlns:a="http://schemas.openxmlformats.org/drawingml/2006/main">
               <a:ext uri="{FF2B5EF4-FFF2-40B4-BE49-F238E27FC236}">
-                <a16:creationId xmlns:a16="http://schemas.microsoft.com/office/drawing/2014/main" id="{9A21215F-9BD0-448F-B4BE-4C69E9E1DFAA}"/>
+                <a16:creationId xmlns:a16="http://schemas.microsoft.com/office/drawing/2014/main" id="{C13F83EA-1CF4-4891-ACC1-25BA1D6A3736}"/>
               </a:ext>
             </a:extLst>
           </p:cNvPr>
@@ -2186,7 +2179,7 @@
           <p:cNvPr id="16" name="">
             <a:extLst xmlns:a="http://schemas.openxmlformats.org/drawingml/2006/main">
               <a:ext uri="{FF2B5EF4-FFF2-40B4-BE49-F238E27FC236}">
-                <a16:creationId xmlns:a16="http://schemas.microsoft.com/office/drawing/2014/main" id="{15B521C8-3570-4A56-8228-8F3A2DC69FDE}"/>
+                <a16:creationId xmlns:a16="http://schemas.microsoft.com/office/drawing/2014/main" id="{A4625BFF-8AE1-4146-9D64-E64E4F4FA6B9}"/>
               </a:ext>
             </a:extLst>
           </p:cNvPr>
@@ -2222,7 +2215,6 @@
           <a:lstStyle xmlns:a="http://schemas.openxmlformats.org/drawingml/2006/main"/>
           <a:p xmlns:a="http://schemas.openxmlformats.org/drawingml/2006/main">
             <a:pPr algn="l">
-              <a:buNone/>
               <a:defRPr sz="2100" b="1">
                 <a:solidFill>
                   <a:srgbClr val="17202A"/>
@@ -2251,7 +2243,7 @@
           <p:cNvPr id="17" name="">
             <a:extLst xmlns:a="http://schemas.openxmlformats.org/drawingml/2006/main">
               <a:ext uri="{FF2B5EF4-FFF2-40B4-BE49-F238E27FC236}">
-                <a16:creationId xmlns:a16="http://schemas.microsoft.com/office/drawing/2014/main" id="{F01EAC34-7774-4BDD-876B-543520417DF8}"/>
+                <a16:creationId xmlns:a16="http://schemas.microsoft.com/office/drawing/2014/main" id="{BC42EF46-E125-4850-AFCF-5F158238D950}"/>
               </a:ext>
             </a:extLst>
           </p:cNvPr>
@@ -2287,7 +2279,6 @@
           <a:lstStyle xmlns:a="http://schemas.openxmlformats.org/drawingml/2006/main"/>
           <a:p xmlns:a="http://schemas.openxmlformats.org/drawingml/2006/main">
             <a:pPr algn="l">
-              <a:buNone/>
               <a:defRPr sz="900" b="0">
                 <a:solidFill>
                   <a:srgbClr val="5F6B64"/>
@@ -2306,7 +2297,7 @@
                 <a:ea typeface="Aptos"/>
                 <a:cs typeface="Aptos"/>
               </a:rPr>
-              <a:t>modulos de discovery</a:t>
+              <a:t>discovery modules</a:t>
             </a:r>
           </a:p>
         </p:txBody>
@@ -2316,7 +2307,7 @@
           <p:cNvPr id="18" name="">
             <a:extLst xmlns:a="http://schemas.openxmlformats.org/drawingml/2006/main">
               <a:ext uri="{FF2B5EF4-FFF2-40B4-BE49-F238E27FC236}">
-                <a16:creationId xmlns:a16="http://schemas.microsoft.com/office/drawing/2014/main" id="{5A8E2E06-14A1-43B0-A9DB-A31890E1C546}"/>
+                <a16:creationId xmlns:a16="http://schemas.microsoft.com/office/drawing/2014/main" id="{944B86CC-54B8-4D60-A697-0D8BEE5DE95F}"/>
               </a:ext>
             </a:extLst>
           </p:cNvPr>
@@ -2349,7 +2340,7 @@
           <p:cNvPr id="19" name="">
             <a:extLst xmlns:a="http://schemas.openxmlformats.org/drawingml/2006/main">
               <a:ext uri="{FF2B5EF4-FFF2-40B4-BE49-F238E27FC236}">
-                <a16:creationId xmlns:a16="http://schemas.microsoft.com/office/drawing/2014/main" id="{67A630F3-5AC5-4367-A204-15E86A572115}"/>
+                <a16:creationId xmlns:a16="http://schemas.microsoft.com/office/drawing/2014/main" id="{0909D655-F496-4C20-A1F7-DE4D37AE96DA}"/>
               </a:ext>
             </a:extLst>
           </p:cNvPr>
@@ -2384,7 +2375,7 @@
           <p:cNvPr id="20" name="">
             <a:extLst xmlns:a="http://schemas.openxmlformats.org/drawingml/2006/main">
               <a:ext uri="{FF2B5EF4-FFF2-40B4-BE49-F238E27FC236}">
-                <a16:creationId xmlns:a16="http://schemas.microsoft.com/office/drawing/2014/main" id="{5E758AE1-F096-4CFB-9F8F-E533ACE1BB84}"/>
+                <a16:creationId xmlns:a16="http://schemas.microsoft.com/office/drawing/2014/main" id="{FB8D68CD-EF11-447D-BE01-82E454106AFE}"/>
               </a:ext>
             </a:extLst>
           </p:cNvPr>
@@ -2420,7 +2411,6 @@
           <a:lstStyle xmlns:a="http://schemas.openxmlformats.org/drawingml/2006/main"/>
           <a:p xmlns:a="http://schemas.openxmlformats.org/drawingml/2006/main">
             <a:pPr algn="l">
-              <a:buNone/>
               <a:defRPr sz="2100" b="1">
                 <a:solidFill>
                   <a:srgbClr val="17202A"/>
@@ -2449,7 +2439,7 @@
           <p:cNvPr id="21" name="">
             <a:extLst xmlns:a="http://schemas.openxmlformats.org/drawingml/2006/main">
               <a:ext uri="{FF2B5EF4-FFF2-40B4-BE49-F238E27FC236}">
-                <a16:creationId xmlns:a16="http://schemas.microsoft.com/office/drawing/2014/main" id="{FDC0FA11-F451-4316-AFFA-B8F950B59AA4}"/>
+                <a16:creationId xmlns:a16="http://schemas.microsoft.com/office/drawing/2014/main" id="{5E9AA660-C9BF-41CD-BCF8-855885424ACC}"/>
               </a:ext>
             </a:extLst>
           </p:cNvPr>
@@ -2485,7 +2475,6 @@
           <a:lstStyle xmlns:a="http://schemas.openxmlformats.org/drawingml/2006/main"/>
           <a:p xmlns:a="http://schemas.openxmlformats.org/drawingml/2006/main">
             <a:pPr algn="l">
-              <a:buNone/>
               <a:defRPr sz="900" b="0">
                 <a:solidFill>
                   <a:srgbClr val="5F6B64"/>
@@ -2504,7 +2493,7 @@
                 <a:ea typeface="Aptos"/>
                 <a:cs typeface="Aptos"/>
               </a:rPr>
-              <a:t>plano de datos comun</a:t>
+              <a:t>shared data plane</a:t>
             </a:r>
           </a:p>
         </p:txBody>
@@ -2514,7 +2503,7 @@
           <p:cNvPr id="22" name="">
             <a:extLst xmlns:a="http://schemas.openxmlformats.org/drawingml/2006/main">
               <a:ext uri="{FF2B5EF4-FFF2-40B4-BE49-F238E27FC236}">
-                <a16:creationId xmlns:a16="http://schemas.microsoft.com/office/drawing/2014/main" id="{8BD21117-F6F5-49B0-8CF1-407CFE4A4730}"/>
+                <a16:creationId xmlns:a16="http://schemas.microsoft.com/office/drawing/2014/main" id="{F425FED4-3CDD-47E6-BE1A-4149DB002109}"/>
               </a:ext>
             </a:extLst>
           </p:cNvPr>
@@ -2550,7 +2539,6 @@
           <a:lstStyle xmlns:a="http://schemas.openxmlformats.org/drawingml/2006/main"/>
           <a:p xmlns:a="http://schemas.openxmlformats.org/drawingml/2006/main">
             <a:pPr algn="l">
-              <a:buNone/>
               <a:defRPr sz="900" b="1">
                 <a:solidFill>
                   <a:srgbClr val="8DE0C7"/>
@@ -2569,7 +2557,7 @@
                 <a:ea typeface="Aptos"/>
                 <a:cs typeface="Aptos"/>
               </a:rPr>
-              <a:t>MAPA DEL ECOSISTEMA</a:t>
+              <a:t>ECOSYSTEM MAP</a:t>
             </a:r>
           </a:p>
         </p:txBody>
@@ -2579,7 +2567,7 @@
           <p:cNvPr id="23" name="">
             <a:extLst xmlns:a="http://schemas.openxmlformats.org/drawingml/2006/main">
               <a:ext uri="{FF2B5EF4-FFF2-40B4-BE49-F238E27FC236}">
-                <a16:creationId xmlns:a16="http://schemas.microsoft.com/office/drawing/2014/main" id="{95DE4403-4721-49F3-8AC6-53F15099F3D5}"/>
+                <a16:creationId xmlns:a16="http://schemas.microsoft.com/office/drawing/2014/main" id="{1D67F394-95CE-4520-B25B-D1E7FBC3AA60}"/>
               </a:ext>
             </a:extLst>
           </p:cNvPr>
@@ -2612,7 +2600,7 @@
           <p:cNvPr id="24" name="">
             <a:extLst xmlns:a="http://schemas.openxmlformats.org/drawingml/2006/main">
               <a:ext uri="{FF2B5EF4-FFF2-40B4-BE49-F238E27FC236}">
-                <a16:creationId xmlns:a16="http://schemas.microsoft.com/office/drawing/2014/main" id="{D3923455-1E5C-4FF7-9E99-85A4D2315A9A}"/>
+                <a16:creationId xmlns:a16="http://schemas.microsoft.com/office/drawing/2014/main" id="{CF6A0097-9E18-4186-A4B3-48F24F92D6FF}"/>
               </a:ext>
             </a:extLst>
           </p:cNvPr>
@@ -2648,7 +2636,6 @@
           <a:lstStyle xmlns:a="http://schemas.openxmlformats.org/drawingml/2006/main"/>
           <a:p xmlns:a="http://schemas.openxmlformats.org/drawingml/2006/main">
             <a:pPr algn="l">
-              <a:buNone/>
               <a:defRPr sz="1200" b="1">
                 <a:solidFill>
                   <a:srgbClr val="0F8A6A"/>
@@ -2677,7 +2664,7 @@
           <p:cNvPr id="25" name="">
             <a:extLst xmlns:a="http://schemas.openxmlformats.org/drawingml/2006/main">
               <a:ext uri="{FF2B5EF4-FFF2-40B4-BE49-F238E27FC236}">
-                <a16:creationId xmlns:a16="http://schemas.microsoft.com/office/drawing/2014/main" id="{5FE88F9A-27CB-4F72-89C6-388C39060A83}"/>
+                <a16:creationId xmlns:a16="http://schemas.microsoft.com/office/drawing/2014/main" id="{AE5DC72C-AF8E-4E05-AC3F-3B46E7C3EFEE}"/>
               </a:ext>
             </a:extLst>
           </p:cNvPr>
@@ -2713,7 +2700,6 @@
           <a:lstStyle xmlns:a="http://schemas.openxmlformats.org/drawingml/2006/main"/>
           <a:p xmlns:a="http://schemas.openxmlformats.org/drawingml/2006/main">
             <a:pPr algn="l">
-              <a:buNone/>
               <a:defRPr sz="863" b="0">
                 <a:solidFill>
                   <a:srgbClr val="17202A"/>
@@ -2742,7 +2728,7 @@
           <p:cNvPr id="26" name="">
             <a:extLst xmlns:a="http://schemas.openxmlformats.org/drawingml/2006/main">
               <a:ext uri="{FF2B5EF4-FFF2-40B4-BE49-F238E27FC236}">
-                <a16:creationId xmlns:a16="http://schemas.microsoft.com/office/drawing/2014/main" id="{C8DBFD9F-1BD6-4189-9C45-F32CF9FDEF7F}"/>
+                <a16:creationId xmlns:a16="http://schemas.microsoft.com/office/drawing/2014/main" id="{9C9BC920-80DB-41F9-8BBC-3C26DA396400}"/>
               </a:ext>
             </a:extLst>
           </p:cNvPr>
@@ -2775,7 +2761,7 @@
           <p:cNvPr id="27" name="">
             <a:extLst xmlns:a="http://schemas.openxmlformats.org/drawingml/2006/main">
               <a:ext uri="{FF2B5EF4-FFF2-40B4-BE49-F238E27FC236}">
-                <a16:creationId xmlns:a16="http://schemas.microsoft.com/office/drawing/2014/main" id="{64D364B9-3B6E-494B-98CA-311A70517B04}"/>
+                <a16:creationId xmlns:a16="http://schemas.microsoft.com/office/drawing/2014/main" id="{49A42ACB-DE5F-4123-B679-BECA5CE77FFE}"/>
               </a:ext>
             </a:extLst>
           </p:cNvPr>
@@ -2811,7 +2797,6 @@
           <a:lstStyle xmlns:a="http://schemas.openxmlformats.org/drawingml/2006/main"/>
           <a:p xmlns:a="http://schemas.openxmlformats.org/drawingml/2006/main">
             <a:pPr algn="l">
-              <a:buNone/>
               <a:defRPr sz="1200" b="1">
                 <a:solidFill>
                   <a:srgbClr val="2E5EA7"/>
@@ -2840,7 +2825,7 @@
           <p:cNvPr id="28" name="">
             <a:extLst xmlns:a="http://schemas.openxmlformats.org/drawingml/2006/main">
               <a:ext uri="{FF2B5EF4-FFF2-40B4-BE49-F238E27FC236}">
-                <a16:creationId xmlns:a16="http://schemas.microsoft.com/office/drawing/2014/main" id="{923E4265-E767-4F8C-A2CB-00542D9D4949}"/>
+                <a16:creationId xmlns:a16="http://schemas.microsoft.com/office/drawing/2014/main" id="{2DE69DD2-3D60-420A-9844-7B187BDFD8D4}"/>
               </a:ext>
             </a:extLst>
           </p:cNvPr>
@@ -2876,7 +2861,6 @@
           <a:lstStyle xmlns:a="http://schemas.openxmlformats.org/drawingml/2006/main"/>
           <a:p xmlns:a="http://schemas.openxmlformats.org/drawingml/2006/main">
             <a:pPr algn="l">
-              <a:buNone/>
               <a:defRPr sz="863" b="0">
                 <a:solidFill>
                   <a:srgbClr val="17202A"/>
@@ -2905,7 +2889,7 @@
           <p:cNvPr id="29" name="">
             <a:extLst xmlns:a="http://schemas.openxmlformats.org/drawingml/2006/main">
               <a:ext uri="{FF2B5EF4-FFF2-40B4-BE49-F238E27FC236}">
-                <a16:creationId xmlns:a16="http://schemas.microsoft.com/office/drawing/2014/main" id="{7564DE4D-33E5-4218-B4BF-18DC4F677326}"/>
+                <a16:creationId xmlns:a16="http://schemas.microsoft.com/office/drawing/2014/main" id="{89B9C111-56F5-483F-9B6A-6EECDA0ABA51}"/>
               </a:ext>
             </a:extLst>
           </p:cNvPr>
@@ -2938,7 +2922,7 @@
           <p:cNvPr id="30" name="">
             <a:extLst xmlns:a="http://schemas.openxmlformats.org/drawingml/2006/main">
               <a:ext uri="{FF2B5EF4-FFF2-40B4-BE49-F238E27FC236}">
-                <a16:creationId xmlns:a16="http://schemas.microsoft.com/office/drawing/2014/main" id="{F6CAB4B0-6D43-46CB-848E-082D438FE046}"/>
+                <a16:creationId xmlns:a16="http://schemas.microsoft.com/office/drawing/2014/main" id="{87C9E796-D905-4AC6-B103-D7BF12BA8F52}"/>
               </a:ext>
             </a:extLst>
           </p:cNvPr>
@@ -2974,7 +2958,6 @@
           <a:lstStyle xmlns:a="http://schemas.openxmlformats.org/drawingml/2006/main"/>
           <a:p xmlns:a="http://schemas.openxmlformats.org/drawingml/2006/main">
             <a:pPr algn="l">
-              <a:buNone/>
               <a:defRPr sz="1200" b="1">
                 <a:solidFill>
                   <a:srgbClr val="C98A21"/>
@@ -3003,7 +2986,7 @@
           <p:cNvPr id="31" name="">
             <a:extLst xmlns:a="http://schemas.openxmlformats.org/drawingml/2006/main">
               <a:ext uri="{FF2B5EF4-FFF2-40B4-BE49-F238E27FC236}">
-                <a16:creationId xmlns:a16="http://schemas.microsoft.com/office/drawing/2014/main" id="{6EE0A184-3F45-407C-92A7-606F11547C20}"/>
+                <a16:creationId xmlns:a16="http://schemas.microsoft.com/office/drawing/2014/main" id="{95EB716D-57E1-4A34-B35D-ED96655787B1}"/>
               </a:ext>
             </a:extLst>
           </p:cNvPr>
@@ -3039,7 +3022,6 @@
           <a:lstStyle xmlns:a="http://schemas.openxmlformats.org/drawingml/2006/main"/>
           <a:p xmlns:a="http://schemas.openxmlformats.org/drawingml/2006/main">
             <a:pPr algn="l">
-              <a:buNone/>
               <a:defRPr sz="863" b="0">
                 <a:solidFill>
                   <a:srgbClr val="17202A"/>
@@ -3068,7 +3050,7 @@
           <p:cNvPr id="32" name="">
             <a:extLst xmlns:a="http://schemas.openxmlformats.org/drawingml/2006/main">
               <a:ext uri="{FF2B5EF4-FFF2-40B4-BE49-F238E27FC236}">
-                <a16:creationId xmlns:a16="http://schemas.microsoft.com/office/drawing/2014/main" id="{16BE89C0-DF3A-4BF9-BA9D-4356879ED0A7}"/>
+                <a16:creationId xmlns:a16="http://schemas.microsoft.com/office/drawing/2014/main" id="{4F0857FB-A56D-459A-A838-263D3C5FF983}"/>
               </a:ext>
             </a:extLst>
           </p:cNvPr>
@@ -3101,7 +3083,7 @@
           <p:cNvPr id="33" name="">
             <a:extLst xmlns:a="http://schemas.openxmlformats.org/drawingml/2006/main">
               <a:ext uri="{FF2B5EF4-FFF2-40B4-BE49-F238E27FC236}">
-                <a16:creationId xmlns:a16="http://schemas.microsoft.com/office/drawing/2014/main" id="{A32BC42C-B263-4DFC-AEB6-E3E6AF462296}"/>
+                <a16:creationId xmlns:a16="http://schemas.microsoft.com/office/drawing/2014/main" id="{7663160C-A171-4B9C-8021-F61F4303C8D1}"/>
               </a:ext>
             </a:extLst>
           </p:cNvPr>
@@ -3137,7 +3119,6 @@
           <a:lstStyle xmlns:a="http://schemas.openxmlformats.org/drawingml/2006/main"/>
           <a:p xmlns:a="http://schemas.openxmlformats.org/drawingml/2006/main">
             <a:pPr algn="l">
-              <a:buNone/>
               <a:defRPr sz="1200" b="1">
                 <a:solidFill>
                   <a:srgbClr val="6559B7"/>
@@ -3166,7 +3147,7 @@
           <p:cNvPr id="34" name="">
             <a:extLst xmlns:a="http://schemas.openxmlformats.org/drawingml/2006/main">
               <a:ext uri="{FF2B5EF4-FFF2-40B4-BE49-F238E27FC236}">
-                <a16:creationId xmlns:a16="http://schemas.microsoft.com/office/drawing/2014/main" id="{E20D89D8-F9F4-4857-AF1A-3EC2B2792094}"/>
+                <a16:creationId xmlns:a16="http://schemas.microsoft.com/office/drawing/2014/main" id="{3A0B7237-13EE-40FC-8EEF-B3262FEC680B}"/>
               </a:ext>
             </a:extLst>
           </p:cNvPr>
@@ -3202,7 +3183,6 @@
           <a:lstStyle xmlns:a="http://schemas.openxmlformats.org/drawingml/2006/main"/>
           <a:p xmlns:a="http://schemas.openxmlformats.org/drawingml/2006/main">
             <a:pPr algn="l">
-              <a:buNone/>
               <a:defRPr sz="863" b="0">
                 <a:solidFill>
                   <a:srgbClr val="17202A"/>
@@ -3231,7 +3211,7 @@
           <p:cNvPr id="35" name="">
             <a:extLst xmlns:a="http://schemas.openxmlformats.org/drawingml/2006/main">
               <a:ext uri="{FF2B5EF4-FFF2-40B4-BE49-F238E27FC236}">
-                <a16:creationId xmlns:a16="http://schemas.microsoft.com/office/drawing/2014/main" id="{3CEFAC4C-318E-4BFD-AB03-FFF361AB1CC8}"/>
+                <a16:creationId xmlns:a16="http://schemas.microsoft.com/office/drawing/2014/main" id="{7243EAA1-C674-4F22-BE6C-A41949B40BA8}"/>
               </a:ext>
             </a:extLst>
           </p:cNvPr>
@@ -3264,7 +3244,7 @@
           <p:cNvPr id="36" name="">
             <a:extLst xmlns:a="http://schemas.openxmlformats.org/drawingml/2006/main">
               <a:ext uri="{FF2B5EF4-FFF2-40B4-BE49-F238E27FC236}">
-                <a16:creationId xmlns:a16="http://schemas.microsoft.com/office/drawing/2014/main" id="{69A9A30D-9C8C-4AF9-A570-C0B98CED1238}"/>
+                <a16:creationId xmlns:a16="http://schemas.microsoft.com/office/drawing/2014/main" id="{73068422-F040-4FD5-9565-5EE33B6404CD}"/>
               </a:ext>
             </a:extLst>
           </p:cNvPr>
@@ -3300,7 +3280,6 @@
           <a:lstStyle xmlns:a="http://schemas.openxmlformats.org/drawingml/2006/main"/>
           <a:p xmlns:a="http://schemas.openxmlformats.org/drawingml/2006/main">
             <a:pPr algn="l">
-              <a:buNone/>
               <a:defRPr sz="1200" b="1">
                 <a:solidFill>
                   <a:srgbClr val="C85847"/>
@@ -3329,7 +3308,7 @@
           <p:cNvPr id="37" name="">
             <a:extLst xmlns:a="http://schemas.openxmlformats.org/drawingml/2006/main">
               <a:ext uri="{FF2B5EF4-FFF2-40B4-BE49-F238E27FC236}">
-                <a16:creationId xmlns:a16="http://schemas.microsoft.com/office/drawing/2014/main" id="{0B9B4215-EE80-4CE5-B59C-F3381B4F6FAB}"/>
+                <a16:creationId xmlns:a16="http://schemas.microsoft.com/office/drawing/2014/main" id="{94E92479-0EC4-47A3-AE60-57EC10BC434F}"/>
               </a:ext>
             </a:extLst>
           </p:cNvPr>
@@ -3365,7 +3344,6 @@
           <a:lstStyle xmlns:a="http://schemas.openxmlformats.org/drawingml/2006/main"/>
           <a:p xmlns:a="http://schemas.openxmlformats.org/drawingml/2006/main">
             <a:pPr algn="l">
-              <a:buNone/>
               <a:defRPr sz="863" b="0">
                 <a:solidFill>
                   <a:srgbClr val="17202A"/>
@@ -3394,7 +3372,7 @@
           <p:cNvPr id="38" name="">
             <a:extLst xmlns:a="http://schemas.openxmlformats.org/drawingml/2006/main">
               <a:ext uri="{FF2B5EF4-FFF2-40B4-BE49-F238E27FC236}">
-                <a16:creationId xmlns:a16="http://schemas.microsoft.com/office/drawing/2014/main" id="{6C53A7E9-846C-469C-9263-E486B8A6FFD1}"/>
+                <a16:creationId xmlns:a16="http://schemas.microsoft.com/office/drawing/2014/main" id="{E639D646-22D3-4FA3-94E0-57769A9081A3}"/>
               </a:ext>
             </a:extLst>
           </p:cNvPr>
@@ -3430,7 +3408,6 @@
           <a:lstStyle xmlns:a="http://schemas.openxmlformats.org/drawingml/2006/main"/>
           <a:p xmlns:a="http://schemas.openxmlformats.org/drawingml/2006/main">
             <a:pPr algn="l">
-              <a:buNone/>
               <a:defRPr sz="1350" b="0">
                 <a:solidFill>
                   <a:srgbClr val="D7E2DD"/>
@@ -3449,17 +3426,39 @@
                 <a:ea typeface="Aptos"/>
                 <a:cs typeface="Aptos"/>
               </a:rPr>
-              <a:t>La contribucion para el concurso vive en la capa de plataforma: contratos de datos, discovery gobernado, incubacion de edge y una forma mas clara de operar sistemas autonomos.</a:t>
+              <a:t>The Build Week contribution lives in the platform layer: data contracts, governed discovery, edge incubation, and a clearer way to operate autonomous systems.</a:t>
             </a:r>
           </a:p>
         </p:txBody>
       </p:sp>
-      <p:sp>
-        <p:nvSpPr>
-          <p:cNvPr id="39" name="">
-            <a:extLst xmlns:a="http://schemas.openxmlformats.org/drawingml/2006/main">
-              <a:ext uri="{FF2B5EF4-FFF2-40B4-BE49-F238E27FC236}">
-                <a16:creationId xmlns:a16="http://schemas.microsoft.com/office/drawing/2014/main" id="{A4BF03B5-9E3A-4478-B0B3-9D35E73165C8}"/>
+      <p:pic>
+        <p:nvPicPr>
+          <p:cNvPr id="39" name=""/>
+          <p:cNvPicPr>
+            <a:picLocks xmlns:a="http://schemas.openxmlformats.org/drawingml/2006/main" noChangeAspect="1"/>
+          </p:cNvPicPr>
+          <p:nvPr/>
+        </p:nvPicPr>
+        <p:blipFill>
+          <a:blip xmlns:r="http://schemas.openxmlformats.org/officeDocument/2006/relationships" xmlns:a="http://schemas.openxmlformats.org/drawingml/2006/main" r:embed="R726feb1592c34f1d"/>
+          <a:stretch xmlns:a="http://schemas.openxmlformats.org/drawingml/2006/main"/>
+        </p:blipFill>
+        <p:spPr>
+          <a:xfrm xmlns:a="http://schemas.openxmlformats.org/drawingml/2006/main">
+            <a:off x="9399495" y="266700"/>
+            <a:ext cx="1679760" cy="1047750"/>
+          </a:xfrm>
+          <a:prstGeom xmlns:a="http://schemas.openxmlformats.org/drawingml/2006/main" prst="rect">
+            <a:avLst/>
+          </a:prstGeom>
+        </p:spPr>
+      </p:pic>
+      <p:sp>
+        <p:nvSpPr>
+          <p:cNvPr id="40" name="">
+            <a:extLst xmlns:a="http://schemas.openxmlformats.org/drawingml/2006/main">
+              <a:ext uri="{FF2B5EF4-FFF2-40B4-BE49-F238E27FC236}">
+                <a16:creationId xmlns:a16="http://schemas.microsoft.com/office/drawing/2014/main" id="{57EC1CDC-C320-410C-BFC8-968D185CBFAA}"/>
               </a:ext>
             </a:extLst>
           </p:cNvPr>
@@ -3495,7 +3494,6 @@
           <a:lstStyle xmlns:a="http://schemas.openxmlformats.org/drawingml/2006/main"/>
           <a:p xmlns:a="http://schemas.openxmlformats.org/drawingml/2006/main">
             <a:pPr algn="r">
-              <a:buNone/>
               <a:defRPr sz="750" b="0">
                 <a:solidFill>
                   <a:srgbClr val="5F6B64"/>
@@ -3519,32 +3517,10 @@
           </a:p>
         </p:txBody>
       </p:sp>
-      <p:pic>
-        <p:nvPicPr>
-          <p:cNvPr id="40" name=""/>
-          <p:cNvPicPr>
-            <a:picLocks xmlns:a="http://schemas.openxmlformats.org/drawingml/2006/main" noChangeAspect="1"/>
-          </p:cNvPicPr>
-          <p:nvPr/>
-        </p:nvPicPr>
-        <p:blipFill>
-          <a:blip xmlns:r="http://schemas.openxmlformats.org/officeDocument/2006/relationships" xmlns:a="http://schemas.openxmlformats.org/drawingml/2006/main" r:embed="R53d6e359e9b14312"/>
-          <a:stretch xmlns:a="http://schemas.openxmlformats.org/drawingml/2006/main"/>
-        </p:blipFill>
-        <p:spPr>
-          <a:xfrm xmlns:a="http://schemas.openxmlformats.org/drawingml/2006/main">
-            <a:off x="9399495" y="266700"/>
-            <a:ext cx="1679760" cy="1047750"/>
-          </a:xfrm>
-          <a:prstGeom xmlns:a="http://schemas.openxmlformats.org/drawingml/2006/main" prst="rect">
-            <a:avLst/>
-          </a:prstGeom>
-        </p:spPr>
-      </p:pic>
     </p:spTree>
     <p:extLst>
       <p:ext uri="{BB962C8B-B14F-4D97-AF65-F5344CB8AC3E}">
-        <p14:creationId xmlns:p14="http://schemas.microsoft.com/office/powerpoint/2010/main" val="1854129056"/>
+        <p14:creationId xmlns:p14="http://schemas.microsoft.com/office/powerpoint/2010/main" val="1903231010"/>
       </p:ext>
     </p:extLst>
   </p:cSld>
@@ -3568,7 +3544,7 @@
           <p:cNvPr id="1" name="">
             <a:extLst xmlns:a="http://schemas.openxmlformats.org/drawingml/2006/main">
               <a:ext uri="{FF2B5EF4-FFF2-40B4-BE49-F238E27FC236}">
-                <a16:creationId xmlns:a16="http://schemas.microsoft.com/office/drawing/2014/main" id="{F2BFA77E-83A7-4930-A9FC-F4C18DCF167F}"/>
+                <a16:creationId xmlns:a16="http://schemas.microsoft.com/office/drawing/2014/main" id="{4759A5F9-A54A-4063-8F5A-BA648BDD954C}"/>
               </a:ext>
             </a:extLst>
           </p:cNvPr>
@@ -3603,7 +3579,7 @@
           <p:cNvPr id="2" name="">
             <a:extLst xmlns:a="http://schemas.openxmlformats.org/drawingml/2006/main">
               <a:ext uri="{FF2B5EF4-FFF2-40B4-BE49-F238E27FC236}">
-                <a16:creationId xmlns:a16="http://schemas.microsoft.com/office/drawing/2014/main" id="{0697D1F8-D108-4D29-8449-420AF0276CA0}"/>
+                <a16:creationId xmlns:a16="http://schemas.microsoft.com/office/drawing/2014/main" id="{41D53BF2-A295-4FC8-BB4C-3559A70A0084}"/>
               </a:ext>
             </a:extLst>
           </p:cNvPr>
@@ -3638,7 +3614,7 @@
           <p:cNvPr id="3" name="">
             <a:extLst xmlns:a="http://schemas.openxmlformats.org/drawingml/2006/main">
               <a:ext uri="{FF2B5EF4-FFF2-40B4-BE49-F238E27FC236}">
-                <a16:creationId xmlns:a16="http://schemas.microsoft.com/office/drawing/2014/main" id="{E8411EF3-F880-4485-A89E-CA7C3DBDB723}"/>
+                <a16:creationId xmlns:a16="http://schemas.microsoft.com/office/drawing/2014/main" id="{123C3B50-108B-43DC-9910-FF53439BDAB3}"/>
               </a:ext>
             </a:extLst>
           </p:cNvPr>
@@ -3674,7 +3650,6 @@
           <a:lstStyle xmlns:a="http://schemas.openxmlformats.org/drawingml/2006/main"/>
           <a:p xmlns:a="http://schemas.openxmlformats.org/drawingml/2006/main">
             <a:pPr algn="l">
-              <a:buNone/>
               <a:defRPr sz="900" b="1">
                 <a:solidFill>
                   <a:srgbClr val="8DE0C7"/>
@@ -3703,7 +3678,7 @@
           <p:cNvPr id="4" name="">
             <a:extLst xmlns:a="http://schemas.openxmlformats.org/drawingml/2006/main">
               <a:ext uri="{FF2B5EF4-FFF2-40B4-BE49-F238E27FC236}">
-                <a16:creationId xmlns:a16="http://schemas.microsoft.com/office/drawing/2014/main" id="{EF824FF5-676B-4514-9DA2-5D62278D48F5}"/>
+                <a16:creationId xmlns:a16="http://schemas.microsoft.com/office/drawing/2014/main" id="{9082C6E8-60EE-40C7-9A7B-139EDA9B0E87}"/>
               </a:ext>
             </a:extLst>
           </p:cNvPr>
@@ -3739,7 +3714,6 @@
           <a:lstStyle xmlns:a="http://schemas.openxmlformats.org/drawingml/2006/main"/>
           <a:p xmlns:a="http://schemas.openxmlformats.org/drawingml/2006/main">
             <a:pPr algn="l">
-              <a:buNone/>
               <a:defRPr sz="2325" b="1">
                 <a:solidFill>
                   <a:srgbClr val="FFFFFF"/>
@@ -3758,7 +3732,7 @@
                 <a:ea typeface="Aptos Display"/>
                 <a:cs typeface="Aptos Display"/>
               </a:rPr>
-              <a:t>La forma mas clara de entender Robo-T-Rader es seguir un camino concreto por Prod-Hetzner y sus modulos satelite.</a:t>
+              <a:t>The clearest way to understand Robo-T-Rader is to follow one concrete path through Prod-Hetzner and its satellite modules.</a:t>
             </a:r>
           </a:p>
         </p:txBody>
@@ -3768,7 +3742,7 @@
           <p:cNvPr id="5" name="">
             <a:extLst xmlns:a="http://schemas.openxmlformats.org/drawingml/2006/main">
               <a:ext uri="{FF2B5EF4-FFF2-40B4-BE49-F238E27FC236}">
-                <a16:creationId xmlns:a16="http://schemas.microsoft.com/office/drawing/2014/main" id="{F8360309-DB9B-4338-A622-B3197B246437}"/>
+                <a16:creationId xmlns:a16="http://schemas.microsoft.com/office/drawing/2014/main" id="{397EAE12-34A4-43D2-91A1-1C62ADD0EFF5}"/>
               </a:ext>
             </a:extLst>
           </p:cNvPr>
@@ -3801,7 +3775,7 @@
           <p:cNvPr id="6" name="">
             <a:extLst xmlns:a="http://schemas.openxmlformats.org/drawingml/2006/main">
               <a:ext uri="{FF2B5EF4-FFF2-40B4-BE49-F238E27FC236}">
-                <a16:creationId xmlns:a16="http://schemas.microsoft.com/office/drawing/2014/main" id="{499CA78C-0DC2-4420-A607-C4932BD2E2A8}"/>
+                <a16:creationId xmlns:a16="http://schemas.microsoft.com/office/drawing/2014/main" id="{82A7DC7B-C811-4ECB-AA0A-34DEBBD78814}"/>
               </a:ext>
             </a:extLst>
           </p:cNvPr>
@@ -3837,7 +3811,6 @@
           <a:lstStyle xmlns:a="http://schemas.openxmlformats.org/drawingml/2006/main"/>
           <a:p xmlns:a="http://schemas.openxmlformats.org/drawingml/2006/main">
             <a:pPr algn="l">
-              <a:buNone/>
               <a:defRPr sz="1200" b="1">
                 <a:solidFill>
                   <a:srgbClr val="0F8A6A"/>
@@ -3866,7 +3839,7 @@
           <p:cNvPr id="7" name="">
             <a:extLst xmlns:a="http://schemas.openxmlformats.org/drawingml/2006/main">
               <a:ext uri="{FF2B5EF4-FFF2-40B4-BE49-F238E27FC236}">
-                <a16:creationId xmlns:a16="http://schemas.microsoft.com/office/drawing/2014/main" id="{153BC023-5A54-4D1E-807E-C5760D58FFB0}"/>
+                <a16:creationId xmlns:a16="http://schemas.microsoft.com/office/drawing/2014/main" id="{D0828BE2-7D26-4646-A1CC-F232F6E85F73}"/>
               </a:ext>
             </a:extLst>
           </p:cNvPr>
@@ -3902,7 +3875,6 @@
           <a:lstStyle xmlns:a="http://schemas.openxmlformats.org/drawingml/2006/main"/>
           <a:p xmlns:a="http://schemas.openxmlformats.org/drawingml/2006/main">
             <a:pPr algn="l">
-              <a:buNone/>
               <a:defRPr sz="863" b="0">
                 <a:solidFill>
                   <a:srgbClr val="17202A"/>
@@ -3921,7 +3893,7 @@
                 <a:ea typeface="Aptos"/>
                 <a:cs typeface="Aptos"/>
               </a:rPr>
-              <a:t>runtime multi-engine que hoy representa la cara operativa del sistema</a:t>
+              <a:t>the multi-engine runtime that now represents the operational face of the platform</a:t>
             </a:r>
           </a:p>
         </p:txBody>
@@ -3931,7 +3903,7 @@
           <p:cNvPr id="8" name="">
             <a:extLst xmlns:a="http://schemas.openxmlformats.org/drawingml/2006/main">
               <a:ext uri="{FF2B5EF4-FFF2-40B4-BE49-F238E27FC236}">
-                <a16:creationId xmlns:a16="http://schemas.microsoft.com/office/drawing/2014/main" id="{48175760-7643-4358-98EF-B51E96F8DCB1}"/>
+                <a16:creationId xmlns:a16="http://schemas.microsoft.com/office/drawing/2014/main" id="{E2151766-4126-42A8-805C-174E0261D770}"/>
               </a:ext>
             </a:extLst>
           </p:cNvPr>
@@ -3964,7 +3936,7 @@
           <p:cNvPr id="9" name="">
             <a:extLst xmlns:a="http://schemas.openxmlformats.org/drawingml/2006/main">
               <a:ext uri="{FF2B5EF4-FFF2-40B4-BE49-F238E27FC236}">
-                <a16:creationId xmlns:a16="http://schemas.microsoft.com/office/drawing/2014/main" id="{F3A5BD00-7FC9-440F-B62A-F2BFF189EAAA}"/>
+                <a16:creationId xmlns:a16="http://schemas.microsoft.com/office/drawing/2014/main" id="{A33C0BBD-584C-40EB-A460-D0DE19E0942E}"/>
               </a:ext>
             </a:extLst>
           </p:cNvPr>
@@ -4000,7 +3972,6 @@
           <a:lstStyle xmlns:a="http://schemas.openxmlformats.org/drawingml/2006/main"/>
           <a:p xmlns:a="http://schemas.openxmlformats.org/drawingml/2006/main">
             <a:pPr algn="l">
-              <a:buNone/>
               <a:defRPr sz="1200" b="1">
                 <a:solidFill>
                   <a:srgbClr val="2E5EA7"/>
@@ -4029,7 +4000,7 @@
           <p:cNvPr id="10" name="">
             <a:extLst xmlns:a="http://schemas.openxmlformats.org/drawingml/2006/main">
               <a:ext uri="{FF2B5EF4-FFF2-40B4-BE49-F238E27FC236}">
-                <a16:creationId xmlns:a16="http://schemas.microsoft.com/office/drawing/2014/main" id="{F929040E-7AD1-4EBE-B8A4-841A1EA39D9F}"/>
+                <a16:creationId xmlns:a16="http://schemas.microsoft.com/office/drawing/2014/main" id="{A4D08F16-8643-4271-8A78-74121143E5FF}"/>
               </a:ext>
             </a:extLst>
           </p:cNvPr>
@@ -4065,7 +4036,6 @@
           <a:lstStyle xmlns:a="http://schemas.openxmlformats.org/drawingml/2006/main"/>
           <a:p xmlns:a="http://schemas.openxmlformats.org/drawingml/2006/main">
             <a:pPr algn="l">
-              <a:buNone/>
               <a:defRPr sz="863" b="0">
                 <a:solidFill>
                   <a:srgbClr val="17202A"/>
@@ -4084,7 +4054,7 @@
                 <a:ea typeface="Aptos"/>
                 <a:cs typeface="Aptos"/>
               </a:rPr>
-              <a:t>plano de datos compartido para quotes, candles, readiness y mappings</a:t>
+              <a:t>the shared data plane for quotes, candles, readiness, and mappings</a:t>
             </a:r>
           </a:p>
         </p:txBody>
@@ -4094,7 +4064,7 @@
           <p:cNvPr id="11" name="">
             <a:extLst xmlns:a="http://schemas.openxmlformats.org/drawingml/2006/main">
               <a:ext uri="{FF2B5EF4-FFF2-40B4-BE49-F238E27FC236}">
-                <a16:creationId xmlns:a16="http://schemas.microsoft.com/office/drawing/2014/main" id="{05737079-3A82-4969-B978-780AAB83C071}"/>
+                <a16:creationId xmlns:a16="http://schemas.microsoft.com/office/drawing/2014/main" id="{28A94ED6-95D6-480E-A5A9-C887DD85754A}"/>
               </a:ext>
             </a:extLst>
           </p:cNvPr>
@@ -4127,7 +4097,7 @@
           <p:cNvPr id="12" name="">
             <a:extLst xmlns:a="http://schemas.openxmlformats.org/drawingml/2006/main">
               <a:ext uri="{FF2B5EF4-FFF2-40B4-BE49-F238E27FC236}">
-                <a16:creationId xmlns:a16="http://schemas.microsoft.com/office/drawing/2014/main" id="{0C08D21C-664D-412E-9C54-49D09AFF4D74}"/>
+                <a16:creationId xmlns:a16="http://schemas.microsoft.com/office/drawing/2014/main" id="{D1F3B0BF-D20E-4C13-9073-83469ABC837C}"/>
               </a:ext>
             </a:extLst>
           </p:cNvPr>
@@ -4163,7 +4133,6 @@
           <a:lstStyle xmlns:a="http://schemas.openxmlformats.org/drawingml/2006/main"/>
           <a:p xmlns:a="http://schemas.openxmlformats.org/drawingml/2006/main">
             <a:pPr algn="l">
-              <a:buNone/>
               <a:defRPr sz="1200" b="1">
                 <a:solidFill>
                   <a:srgbClr val="C98A21"/>
@@ -4192,7 +4161,7 @@
           <p:cNvPr id="13" name="">
             <a:extLst xmlns:a="http://schemas.openxmlformats.org/drawingml/2006/main">
               <a:ext uri="{FF2B5EF4-FFF2-40B4-BE49-F238E27FC236}">
-                <a16:creationId xmlns:a16="http://schemas.microsoft.com/office/drawing/2014/main" id="{C0856419-3E56-4D4B-8ABC-628267EB5E32}"/>
+                <a16:creationId xmlns:a16="http://schemas.microsoft.com/office/drawing/2014/main" id="{20A3473C-C01F-4258-A622-B9D125F2D1C1}"/>
               </a:ext>
             </a:extLst>
           </p:cNvPr>
@@ -4228,7 +4197,6 @@
           <a:lstStyle xmlns:a="http://schemas.openxmlformats.org/drawingml/2006/main"/>
           <a:p xmlns:a="http://schemas.openxmlformats.org/drawingml/2006/main">
             <a:pPr algn="l">
-              <a:buNone/>
               <a:defRPr sz="863" b="0">
                 <a:solidFill>
                   <a:srgbClr val="17202A"/>
@@ -4247,7 +4215,7 @@
                 <a:ea typeface="Aptos"/>
                 <a:cs typeface="Aptos"/>
               </a:rPr>
-              <a:t>replay y visualizacion cuando algo sale mal o merece revision</a:t>
+              <a:t>replay and visual review whenever behavior deserves investigation</a:t>
             </a:r>
           </a:p>
         </p:txBody>
@@ -4257,7 +4225,7 @@
           <p:cNvPr id="14" name="">
             <a:extLst xmlns:a="http://schemas.openxmlformats.org/drawingml/2006/main">
               <a:ext uri="{FF2B5EF4-FFF2-40B4-BE49-F238E27FC236}">
-                <a16:creationId xmlns:a16="http://schemas.microsoft.com/office/drawing/2014/main" id="{C600885E-4BEB-45EF-AF30-13A994612311}"/>
+                <a16:creationId xmlns:a16="http://schemas.microsoft.com/office/drawing/2014/main" id="{F8887CB4-D18B-4F8A-AB6D-350ADBB6EA79}"/>
               </a:ext>
             </a:extLst>
           </p:cNvPr>
@@ -4290,7 +4258,7 @@
           <p:cNvPr id="15" name="">
             <a:extLst xmlns:a="http://schemas.openxmlformats.org/drawingml/2006/main">
               <a:ext uri="{FF2B5EF4-FFF2-40B4-BE49-F238E27FC236}">
-                <a16:creationId xmlns:a16="http://schemas.microsoft.com/office/drawing/2014/main" id="{284428D3-97AE-47EC-9C8F-0BA4C8B62983}"/>
+                <a16:creationId xmlns:a16="http://schemas.microsoft.com/office/drawing/2014/main" id="{D296EE86-929E-415A-8785-2082FA4CF746}"/>
               </a:ext>
             </a:extLst>
           </p:cNvPr>
@@ -4326,7 +4294,6 @@
           <a:lstStyle xmlns:a="http://schemas.openxmlformats.org/drawingml/2006/main"/>
           <a:p xmlns:a="http://schemas.openxmlformats.org/drawingml/2006/main">
             <a:pPr algn="l">
-              <a:buNone/>
               <a:defRPr sz="1200" b="1">
                 <a:solidFill>
                   <a:srgbClr val="6559B7"/>
@@ -4355,7 +4322,7 @@
           <p:cNvPr id="16" name="">
             <a:extLst xmlns:a="http://schemas.openxmlformats.org/drawingml/2006/main">
               <a:ext uri="{FF2B5EF4-FFF2-40B4-BE49-F238E27FC236}">
-                <a16:creationId xmlns:a16="http://schemas.microsoft.com/office/drawing/2014/main" id="{05CB2BB8-C40B-47C1-9D5C-D50CD1AD967F}"/>
+                <a16:creationId xmlns:a16="http://schemas.microsoft.com/office/drawing/2014/main" id="{43FBFA54-F953-4A04-911F-88CF93FA1C64}"/>
               </a:ext>
             </a:extLst>
           </p:cNvPr>
@@ -4391,7 +4358,6 @@
           <a:lstStyle xmlns:a="http://schemas.openxmlformats.org/drawingml/2006/main"/>
           <a:p xmlns:a="http://schemas.openxmlformats.org/drawingml/2006/main">
             <a:pPr algn="l">
-              <a:buNone/>
               <a:defRPr sz="863" b="0">
                 <a:solidFill>
                   <a:srgbClr val="17202A"/>
@@ -4410,7 +4376,7 @@
                 <a:ea typeface="Aptos"/>
                 <a:cs typeface="Aptos"/>
               </a:rPr>
-              <a:t>surface de decision que resume edges, blockers y prioridades</a:t>
+              <a:t>the decision surface that summarizes edges, blockers, and priorities</a:t>
             </a:r>
           </a:p>
         </p:txBody>
@@ -4420,7 +4386,7 @@
           <p:cNvPr id="17" name="">
             <a:extLst xmlns:a="http://schemas.openxmlformats.org/drawingml/2006/main">
               <a:ext uri="{FF2B5EF4-FFF2-40B4-BE49-F238E27FC236}">
-                <a16:creationId xmlns:a16="http://schemas.microsoft.com/office/drawing/2014/main" id="{B51F9D11-98DB-46EA-B1D9-45AFA1027B39}"/>
+                <a16:creationId xmlns:a16="http://schemas.microsoft.com/office/drawing/2014/main" id="{5967E26C-977C-422A-A362-52FB2298DDE6}"/>
               </a:ext>
             </a:extLst>
           </p:cNvPr>
@@ -4453,7 +4419,7 @@
           <p:cNvPr id="18" name="">
             <a:extLst xmlns:a="http://schemas.openxmlformats.org/drawingml/2006/main">
               <a:ext uri="{FF2B5EF4-FFF2-40B4-BE49-F238E27FC236}">
-                <a16:creationId xmlns:a16="http://schemas.microsoft.com/office/drawing/2014/main" id="{14111678-1498-42EF-A7DA-17BB14A6781C}"/>
+                <a16:creationId xmlns:a16="http://schemas.microsoft.com/office/drawing/2014/main" id="{B89457D1-D2D3-45D3-A818-8F7F1BD4082F}"/>
               </a:ext>
             </a:extLst>
           </p:cNvPr>
@@ -4489,7 +4455,6 @@
           <a:lstStyle xmlns:a="http://schemas.openxmlformats.org/drawingml/2006/main"/>
           <a:p xmlns:a="http://schemas.openxmlformats.org/drawingml/2006/main">
             <a:pPr algn="l">
-              <a:buNone/>
               <a:defRPr sz="1200" b="1">
                 <a:solidFill>
                   <a:srgbClr val="C85847"/>
@@ -4518,7 +4483,7 @@
           <p:cNvPr id="19" name="">
             <a:extLst xmlns:a="http://schemas.openxmlformats.org/drawingml/2006/main">
               <a:ext uri="{FF2B5EF4-FFF2-40B4-BE49-F238E27FC236}">
-                <a16:creationId xmlns:a16="http://schemas.microsoft.com/office/drawing/2014/main" id="{DAEF4625-7A67-482F-A3F7-BF2A599872E7}"/>
+                <a16:creationId xmlns:a16="http://schemas.microsoft.com/office/drawing/2014/main" id="{D57A61A6-95C6-42AA-8C1C-BCAD889E4F50}"/>
               </a:ext>
             </a:extLst>
           </p:cNvPr>
@@ -4554,7 +4519,6 @@
           <a:lstStyle xmlns:a="http://schemas.openxmlformats.org/drawingml/2006/main"/>
           <a:p xmlns:a="http://schemas.openxmlformats.org/drawingml/2006/main">
             <a:pPr algn="l">
-              <a:buNone/>
               <a:defRPr sz="863" b="0">
                 <a:solidFill>
                   <a:srgbClr val="17202A"/>
@@ -4573,7 +4537,7 @@
                 <a:ea typeface="Aptos"/>
                 <a:cs typeface="Aptos"/>
               </a:rPr>
-              <a:t>rastro de lo que viene despues</a:t>
+              <a:t>the pipeline for what comes next</a:t>
             </a:r>
           </a:p>
         </p:txBody>
@@ -4583,7 +4547,7 @@
           <p:cNvPr id="20" name="">
             <a:extLst xmlns:a="http://schemas.openxmlformats.org/drawingml/2006/main">
               <a:ext uri="{FF2B5EF4-FFF2-40B4-BE49-F238E27FC236}">
-                <a16:creationId xmlns:a16="http://schemas.microsoft.com/office/drawing/2014/main" id="{3C34FC9E-53FE-4DDF-BCE1-AA10E6A6FB19}"/>
+                <a16:creationId xmlns:a16="http://schemas.microsoft.com/office/drawing/2014/main" id="{3F79D5C0-CB59-43F4-A510-283FBDE887C4}"/>
               </a:ext>
             </a:extLst>
           </p:cNvPr>
@@ -4616,7 +4580,7 @@
           <p:cNvPr id="21" name="">
             <a:extLst xmlns:a="http://schemas.openxmlformats.org/drawingml/2006/main">
               <a:ext uri="{FF2B5EF4-FFF2-40B4-BE49-F238E27FC236}">
-                <a16:creationId xmlns:a16="http://schemas.microsoft.com/office/drawing/2014/main" id="{2368C5E1-E6C5-4750-8608-BC2057E43510}"/>
+                <a16:creationId xmlns:a16="http://schemas.microsoft.com/office/drawing/2014/main" id="{E1FC7F9F-C063-4126-9A43-40140B58A723}"/>
               </a:ext>
             </a:extLst>
           </p:cNvPr>
@@ -4649,7 +4613,7 @@
           <p:cNvPr id="22" name="">
             <a:extLst xmlns:a="http://schemas.openxmlformats.org/drawingml/2006/main">
               <a:ext uri="{FF2B5EF4-FFF2-40B4-BE49-F238E27FC236}">
-                <a16:creationId xmlns:a16="http://schemas.microsoft.com/office/drawing/2014/main" id="{1FC98E8F-7821-47B9-9C6E-0FBDC6D8887C}"/>
+                <a16:creationId xmlns:a16="http://schemas.microsoft.com/office/drawing/2014/main" id="{2872225C-277E-4CFD-824E-C5500E65F4F9}"/>
               </a:ext>
             </a:extLst>
           </p:cNvPr>
@@ -4682,7 +4646,7 @@
           <p:cNvPr id="23" name="">
             <a:extLst xmlns:a="http://schemas.openxmlformats.org/drawingml/2006/main">
               <a:ext uri="{FF2B5EF4-FFF2-40B4-BE49-F238E27FC236}">
-                <a16:creationId xmlns:a16="http://schemas.microsoft.com/office/drawing/2014/main" id="{2E73EB96-2917-49F2-B6CB-263013D58B5C}"/>
+                <a16:creationId xmlns:a16="http://schemas.microsoft.com/office/drawing/2014/main" id="{BFA567B4-6E81-45A4-B310-E5A0903B30F2}"/>
               </a:ext>
             </a:extLst>
           </p:cNvPr>
@@ -4715,7 +4679,7 @@
           <p:cNvPr id="24" name="">
             <a:extLst xmlns:a="http://schemas.openxmlformats.org/drawingml/2006/main">
               <a:ext uri="{FF2B5EF4-FFF2-40B4-BE49-F238E27FC236}">
-                <a16:creationId xmlns:a16="http://schemas.microsoft.com/office/drawing/2014/main" id="{837DD80E-C52A-4B8C-B92A-8D5AD82CA462}"/>
+                <a16:creationId xmlns:a16="http://schemas.microsoft.com/office/drawing/2014/main" id="{60FD44CB-13E9-4E03-8B75-6FC55FA269A8}"/>
               </a:ext>
             </a:extLst>
           </p:cNvPr>
@@ -4748,7 +4712,7 @@
           <p:cNvPr id="25" name="">
             <a:extLst xmlns:a="http://schemas.openxmlformats.org/drawingml/2006/main">
               <a:ext uri="{FF2B5EF4-FFF2-40B4-BE49-F238E27FC236}">
-                <a16:creationId xmlns:a16="http://schemas.microsoft.com/office/drawing/2014/main" id="{7B64C350-4B75-4DDC-A54B-D949A4A046BE}"/>
+                <a16:creationId xmlns:a16="http://schemas.microsoft.com/office/drawing/2014/main" id="{62472AB2-1117-4713-989F-403B363C73B0}"/>
               </a:ext>
             </a:extLst>
           </p:cNvPr>
@@ -4781,7 +4745,7 @@
           <p:cNvPr id="26" name="">
             <a:extLst xmlns:a="http://schemas.openxmlformats.org/drawingml/2006/main">
               <a:ext uri="{FF2B5EF4-FFF2-40B4-BE49-F238E27FC236}">
-                <a16:creationId xmlns:a16="http://schemas.microsoft.com/office/drawing/2014/main" id="{50B22BBA-7C58-4691-AEA1-EA5C365A0537}"/>
+                <a16:creationId xmlns:a16="http://schemas.microsoft.com/office/drawing/2014/main" id="{42BBD894-1E31-45E5-9C77-124C424460ED}"/>
               </a:ext>
             </a:extLst>
           </p:cNvPr>
@@ -4814,7 +4778,7 @@
           <p:cNvPr id="27" name="">
             <a:extLst xmlns:a="http://schemas.openxmlformats.org/drawingml/2006/main">
               <a:ext uri="{FF2B5EF4-FFF2-40B4-BE49-F238E27FC236}">
-                <a16:creationId xmlns:a16="http://schemas.microsoft.com/office/drawing/2014/main" id="{44A4856E-8DC5-4A49-BC8B-5BC49DC583EB}"/>
+                <a16:creationId xmlns:a16="http://schemas.microsoft.com/office/drawing/2014/main" id="{E2740654-93A9-4461-83C4-BDA3F6C3A185}"/>
               </a:ext>
             </a:extLst>
           </p:cNvPr>
@@ -4847,7 +4811,7 @@
           <p:cNvPr id="28" name="">
             <a:extLst xmlns:a="http://schemas.openxmlformats.org/drawingml/2006/main">
               <a:ext uri="{FF2B5EF4-FFF2-40B4-BE49-F238E27FC236}">
-                <a16:creationId xmlns:a16="http://schemas.microsoft.com/office/drawing/2014/main" id="{DEE0FB01-6099-4830-BDB4-3C4818E4E6A8}"/>
+                <a16:creationId xmlns:a16="http://schemas.microsoft.com/office/drawing/2014/main" id="{B798FF2B-9C97-46FF-98F9-87C11A37B5E6}"/>
               </a:ext>
             </a:extLst>
           </p:cNvPr>
@@ -4883,7 +4847,6 @@
           <a:lstStyle xmlns:a="http://schemas.openxmlformats.org/drawingml/2006/main"/>
           <a:p xmlns:a="http://schemas.openxmlformats.org/drawingml/2006/main">
             <a:pPr algn="l">
-              <a:buNone/>
               <a:defRPr sz="2250" b="1">
                 <a:solidFill>
                   <a:srgbClr val="FFFFFF"/>
@@ -4902,7 +4865,7 @@
                 <a:ea typeface="Aptos Display"/>
                 <a:cs typeface="Aptos Display"/>
               </a:rPr>
-              <a:t>Categoria sugerida: Work &amp; Productivity.</a:t>
+              <a:t>Recommended category: Work &amp; Productivity.</a:t>
             </a:r>
           </a:p>
         </p:txBody>
@@ -4912,7 +4875,7 @@
           <p:cNvPr id="29" name="">
             <a:extLst xmlns:a="http://schemas.openxmlformats.org/drawingml/2006/main">
               <a:ext uri="{FF2B5EF4-FFF2-40B4-BE49-F238E27FC236}">
-                <a16:creationId xmlns:a16="http://schemas.microsoft.com/office/drawing/2014/main" id="{F380C200-8EE2-4ACA-8CE4-8AFD804A9703}"/>
+                <a16:creationId xmlns:a16="http://schemas.microsoft.com/office/drawing/2014/main" id="{78A65AD3-84BE-4F14-A56E-08693F5437FC}"/>
               </a:ext>
             </a:extLst>
           </p:cNvPr>
@@ -4924,7 +4887,7 @@
         <p:spPr>
           <a:xfrm xmlns:a="http://schemas.openxmlformats.org/drawingml/2006/main">
             <a:off x="819150" y="4457700"/>
-            <a:ext cx="10001250" cy="838200"/>
+            <a:ext cx="8001000" cy="838200"/>
           </a:xfrm>
           <a:prstGeom xmlns:a="http://schemas.openxmlformats.org/drawingml/2006/main" prst="rect">
             <a:avLst/>
@@ -4948,7 +4911,6 @@
           <a:lstStyle xmlns:a="http://schemas.openxmlformats.org/drawingml/2006/main"/>
           <a:p xmlns:a="http://schemas.openxmlformats.org/drawingml/2006/main">
             <a:pPr algn="l">
-              <a:buNone/>
               <a:defRPr sz="1500" b="0">
                 <a:solidFill>
                   <a:srgbClr val="D7E2DD"/>
@@ -4967,7 +4929,7 @@
                 <a:ea typeface="Aptos"/>
                 <a:cs typeface="Aptos"/>
               </a:rPr>
-              <a:t>Lo mas valioso no es una operacion aislada. Es haber convertido investigacion, datos, incubacion y gobierno en un flujo de trabajo que un equipo puede usar para mejorar sistemas autonomos reales.</a:t>
+              <a:t>The strongest value is not a single trade. It is turning research, data, incubation, and governance into a workflow that a team can use to improve real autonomous systems.</a:t>
             </a:r>
           </a:p>
         </p:txBody>
@@ -4977,7 +4939,7 @@
           <p:cNvPr id="30" name="">
             <a:extLst xmlns:a="http://schemas.openxmlformats.org/drawingml/2006/main">
               <a:ext uri="{FF2B5EF4-FFF2-40B4-BE49-F238E27FC236}">
-                <a16:creationId xmlns:a16="http://schemas.microsoft.com/office/drawing/2014/main" id="{0CE05B45-49B7-45CD-9842-4AA29F7CBFB9}"/>
+                <a16:creationId xmlns:a16="http://schemas.microsoft.com/office/drawing/2014/main" id="{E9B372F2-CA17-4CD7-AC07-909446441CDB}"/>
               </a:ext>
             </a:extLst>
           </p:cNvPr>
@@ -5013,7 +4975,6 @@
           <a:lstStyle xmlns:a="http://schemas.openxmlformats.org/drawingml/2006/main"/>
           <a:p xmlns:a="http://schemas.openxmlformats.org/drawingml/2006/main">
             <a:pPr algn="l">
-              <a:buNone/>
               <a:defRPr sz="900" b="0">
                 <a:solidFill>
                   <a:srgbClr val="8DE0C7"/>
@@ -5037,12 +4998,34 @@
           </a:p>
         </p:txBody>
       </p:sp>
-      <p:sp>
-        <p:nvSpPr>
-          <p:cNvPr id="31" name="">
-            <a:extLst xmlns:a="http://schemas.openxmlformats.org/drawingml/2006/main">
-              <a:ext uri="{FF2B5EF4-FFF2-40B4-BE49-F238E27FC236}">
-                <a16:creationId xmlns:a16="http://schemas.microsoft.com/office/drawing/2014/main" id="{26DAC8E6-07D2-4FE9-BD83-38B4CE9CB824}"/>
+      <p:pic>
+        <p:nvPicPr>
+          <p:cNvPr id="31" name=""/>
+          <p:cNvPicPr>
+            <a:picLocks xmlns:a="http://schemas.openxmlformats.org/drawingml/2006/main" noChangeAspect="1"/>
+          </p:cNvPicPr>
+          <p:nvPr/>
+        </p:nvPicPr>
+        <p:blipFill>
+          <a:blip xmlns:r="http://schemas.openxmlformats.org/officeDocument/2006/relationships" xmlns:a="http://schemas.openxmlformats.org/drawingml/2006/main" r:embed="R7bf8ded4f3594e8b"/>
+          <a:stretch xmlns:a="http://schemas.openxmlformats.org/drawingml/2006/main"/>
+        </p:blipFill>
+        <p:spPr>
+          <a:xfrm xmlns:a="http://schemas.openxmlformats.org/drawingml/2006/main">
+            <a:off x="9409326" y="5000625"/>
+            <a:ext cx="1374349" cy="857250"/>
+          </a:xfrm>
+          <a:prstGeom xmlns:a="http://schemas.openxmlformats.org/drawingml/2006/main" prst="rect">
+            <a:avLst/>
+          </a:prstGeom>
+        </p:spPr>
+      </p:pic>
+      <p:sp>
+        <p:nvSpPr>
+          <p:cNvPr id="32" name="">
+            <a:extLst xmlns:a="http://schemas.openxmlformats.org/drawingml/2006/main">
+              <a:ext uri="{FF2B5EF4-FFF2-40B4-BE49-F238E27FC236}">
+                <a16:creationId xmlns:a16="http://schemas.microsoft.com/office/drawing/2014/main" id="{CD398960-EE3B-478B-9D84-B145F34111E5}"/>
               </a:ext>
             </a:extLst>
           </p:cNvPr>
@@ -5078,7 +5061,6 @@
           <a:lstStyle xmlns:a="http://schemas.openxmlformats.org/drawingml/2006/main"/>
           <a:p xmlns:a="http://schemas.openxmlformats.org/drawingml/2006/main">
             <a:pPr algn="r">
-              <a:buNone/>
               <a:defRPr sz="750" b="0">
                 <a:solidFill>
                   <a:srgbClr val="5F6B64"/>
@@ -5102,87 +5084,10 @@
           </a:p>
         </p:txBody>
       </p:sp>
-      <p:pic>
-        <p:nvPicPr>
-          <p:cNvPr id="32" name=""/>
-          <p:cNvPicPr>
-            <a:picLocks xmlns:a="http://schemas.openxmlformats.org/drawingml/2006/main" noChangeAspect="1"/>
-          </p:cNvPicPr>
-          <p:nvPr/>
-        </p:nvPicPr>
-        <p:blipFill>
-          <a:blip xmlns:r="http://schemas.openxmlformats.org/officeDocument/2006/relationships" xmlns:a="http://schemas.openxmlformats.org/drawingml/2006/main" r:embed="Raef0bbeeb8e6424d"/>
-          <a:stretch xmlns:a="http://schemas.openxmlformats.org/drawingml/2006/main"/>
-        </p:blipFill>
-        <p:spPr>
-          <a:xfrm xmlns:a="http://schemas.openxmlformats.org/drawingml/2006/main">
-            <a:off x="8766913" y="4476750"/>
-            <a:ext cx="1801924" cy="1123950"/>
-          </a:xfrm>
-          <a:prstGeom xmlns:a="http://schemas.openxmlformats.org/drawingml/2006/main" prst="rect">
-            <a:avLst/>
-          </a:prstGeom>
-        </p:spPr>
-      </p:pic>
-      <p:sp>
-        <p:nvSpPr>
-          <p:cNvPr id="33" name="logo-cleanup-mask">
-            <a:extLst xmlns:a="http://schemas.openxmlformats.org/drawingml/2006/main">
-              <a:ext uri="{FF2B5EF4-FFF2-40B4-BE49-F238E27FC236}">
-                <a16:creationId xmlns:a16="http://schemas.microsoft.com/office/drawing/2014/main" id="{3D1748BE-201F-420E-857A-32773D81969B}"/>
-              </a:ext>
-            </a:extLst>
-          </p:cNvPr>
-          <p:cNvSpPr>
-            <a:spLocks xmlns:a="http://schemas.openxmlformats.org/drawingml/2006/main" noGrp="1"/>
-          </p:cNvSpPr>
-          <p:nvPr/>
-        </p:nvSpPr>
-        <p:spPr>
-          <a:xfrm xmlns:a="http://schemas.openxmlformats.org/drawingml/2006/main">
-            <a:off x="8858250" y="4333875"/>
-            <a:ext cx="2476500" cy="1524000"/>
-          </a:xfrm>
-          <a:prstGeom xmlns:a="http://schemas.openxmlformats.org/drawingml/2006/main" prst="rect">
-            <a:avLst/>
-          </a:prstGeom>
-          <a:solidFill xmlns:a="http://schemas.openxmlformats.org/drawingml/2006/main">
-            <a:srgbClr val="11181F"/>
-          </a:solidFill>
-          <a:ln xmlns:a="http://schemas.openxmlformats.org/drawingml/2006/main" w="0">
-            <a:solidFill>
-              <a:srgbClr val="11181F"/>
-            </a:solidFill>
-            <a:prstDash val="solid"/>
-          </a:ln>
-        </p:spPr>
-      </p:sp>
-      <p:pic>
-        <p:nvPicPr>
-          <p:cNvPr id="34" name=""/>
-          <p:cNvPicPr>
-            <a:picLocks xmlns:a="http://schemas.openxmlformats.org/drawingml/2006/main" noChangeAspect="1"/>
-          </p:cNvPicPr>
-          <p:nvPr/>
-        </p:nvPicPr>
-        <p:blipFill>
-          <a:blip xmlns:r="http://schemas.openxmlformats.org/officeDocument/2006/relationships" xmlns:a="http://schemas.openxmlformats.org/drawingml/2006/main" r:embed="Rae3414bc2b274eea"/>
-          <a:stretch xmlns:a="http://schemas.openxmlformats.org/drawingml/2006/main"/>
-        </p:blipFill>
-        <p:spPr>
-          <a:xfrm xmlns:a="http://schemas.openxmlformats.org/drawingml/2006/main">
-            <a:off x="9409326" y="5000625"/>
-            <a:ext cx="1374349" cy="857250"/>
-          </a:xfrm>
-          <a:prstGeom xmlns:a="http://schemas.openxmlformats.org/drawingml/2006/main" prst="rect">
-            <a:avLst/>
-          </a:prstGeom>
-        </p:spPr>
-      </p:pic>
     </p:spTree>
     <p:extLst>
       <p:ext uri="{BB962C8B-B14F-4D97-AF65-F5344CB8AC3E}">
-        <p14:creationId xmlns:p14="http://schemas.microsoft.com/office/powerpoint/2010/main" val="661225742"/>
+        <p14:creationId xmlns:p14="http://schemas.microsoft.com/office/powerpoint/2010/main" val="1483121974"/>
       </p:ext>
     </p:extLst>
   </p:cSld>
@@ -5206,7 +5111,7 @@
           <p:cNvPr id="1" name="">
             <a:extLst xmlns:a="http://schemas.openxmlformats.org/drawingml/2006/main">
               <a:ext uri="{FF2B5EF4-FFF2-40B4-BE49-F238E27FC236}">
-                <a16:creationId xmlns:a16="http://schemas.microsoft.com/office/drawing/2014/main" id="{098078BA-F9CC-45B6-8EDC-37917B4C9249}"/>
+                <a16:creationId xmlns:a16="http://schemas.microsoft.com/office/drawing/2014/main" id="{CCC30F6C-9819-410E-A109-360253E1A120}"/>
               </a:ext>
             </a:extLst>
           </p:cNvPr>
@@ -5241,7 +5146,7 @@
           <p:cNvPr id="2" name="">
             <a:extLst xmlns:a="http://schemas.openxmlformats.org/drawingml/2006/main">
               <a:ext uri="{FF2B5EF4-FFF2-40B4-BE49-F238E27FC236}">
-                <a16:creationId xmlns:a16="http://schemas.microsoft.com/office/drawing/2014/main" id="{C6E9B0E4-B6DE-4A0C-ACF5-7315B9E99EAA}"/>
+                <a16:creationId xmlns:a16="http://schemas.microsoft.com/office/drawing/2014/main" id="{83E21113-D8C6-4741-9F3C-5C4A1FE9B045}"/>
               </a:ext>
             </a:extLst>
           </p:cNvPr>
@@ -5276,7 +5181,7 @@
           <p:cNvPr id="3" name="">
             <a:extLst xmlns:a="http://schemas.openxmlformats.org/drawingml/2006/main">
               <a:ext uri="{FF2B5EF4-FFF2-40B4-BE49-F238E27FC236}">
-                <a16:creationId xmlns:a16="http://schemas.microsoft.com/office/drawing/2014/main" id="{A44CA9D0-A56C-4712-BC67-30C7E733768E}"/>
+                <a16:creationId xmlns:a16="http://schemas.microsoft.com/office/drawing/2014/main" id="{F1F1D199-C30F-4C92-AAB0-999EC7204143}"/>
               </a:ext>
             </a:extLst>
           </p:cNvPr>
@@ -5312,7 +5217,6 @@
           <a:lstStyle xmlns:a="http://schemas.openxmlformats.org/drawingml/2006/main"/>
           <a:p xmlns:a="http://schemas.openxmlformats.org/drawingml/2006/main">
             <a:pPr algn="l">
-              <a:buNone/>
               <a:defRPr sz="900" b="1">
                 <a:solidFill>
                   <a:srgbClr val="0F8A6A"/>
@@ -5341,7 +5245,7 @@
           <p:cNvPr id="4" name="">
             <a:extLst xmlns:a="http://schemas.openxmlformats.org/drawingml/2006/main">
               <a:ext uri="{FF2B5EF4-FFF2-40B4-BE49-F238E27FC236}">
-                <a16:creationId xmlns:a16="http://schemas.microsoft.com/office/drawing/2014/main" id="{89F792C9-9F8F-4946-97F4-ED397820137D}"/>
+                <a16:creationId xmlns:a16="http://schemas.microsoft.com/office/drawing/2014/main" id="{8C51178D-B51D-43A2-AF00-C1D893252578}"/>
               </a:ext>
             </a:extLst>
           </p:cNvPr>
@@ -5377,7 +5281,6 @@
           <a:lstStyle xmlns:a="http://schemas.openxmlformats.org/drawingml/2006/main"/>
           <a:p xmlns:a="http://schemas.openxmlformats.org/drawingml/2006/main">
             <a:pPr algn="l">
-              <a:buNone/>
               <a:defRPr sz="2325" b="1">
                 <a:solidFill>
                   <a:srgbClr val="17202A"/>
@@ -5396,7 +5299,7 @@
                 <a:ea typeface="Aptos Display"/>
                 <a:cs typeface="Aptos Display"/>
               </a:rPr>
-              <a:t>Los bots fallan cuando investigacion, operacion y gobierno viven en la misma pieza.</a:t>
+              <a:t>Trading bots fail when research, operation, and governance live in the same box.</a:t>
             </a:r>
           </a:p>
         </p:txBody>
@@ -5406,7 +5309,7 @@
           <p:cNvPr id="5" name="">
             <a:extLst xmlns:a="http://schemas.openxmlformats.org/drawingml/2006/main">
               <a:ext uri="{FF2B5EF4-FFF2-40B4-BE49-F238E27FC236}">
-                <a16:creationId xmlns:a16="http://schemas.microsoft.com/office/drawing/2014/main" id="{D54E1E34-A0AD-4231-ADF9-906CB5F60D8F}"/>
+                <a16:creationId xmlns:a16="http://schemas.microsoft.com/office/drawing/2014/main" id="{0018B23E-76D7-43B6-94E2-FEBB66BE76C1}"/>
               </a:ext>
             </a:extLst>
           </p:cNvPr>
@@ -5439,7 +5342,7 @@
           <p:cNvPr id="6" name="">
             <a:extLst xmlns:a="http://schemas.openxmlformats.org/drawingml/2006/main">
               <a:ext uri="{FF2B5EF4-FFF2-40B4-BE49-F238E27FC236}">
-                <a16:creationId xmlns:a16="http://schemas.microsoft.com/office/drawing/2014/main" id="{1685AF5B-0DE9-42FE-A838-94345359D51D}"/>
+                <a16:creationId xmlns:a16="http://schemas.microsoft.com/office/drawing/2014/main" id="{78321BA4-5CF1-4DF3-B07E-05A9D8A03A2A}"/>
               </a:ext>
             </a:extLst>
           </p:cNvPr>
@@ -5474,7 +5377,7 @@
           <p:cNvPr id="7" name="">
             <a:extLst xmlns:a="http://schemas.openxmlformats.org/drawingml/2006/main">
               <a:ext uri="{FF2B5EF4-FFF2-40B4-BE49-F238E27FC236}">
-                <a16:creationId xmlns:a16="http://schemas.microsoft.com/office/drawing/2014/main" id="{A5763073-4309-43CF-89BE-BDB770BEB6E7}"/>
+                <a16:creationId xmlns:a16="http://schemas.microsoft.com/office/drawing/2014/main" id="{82DD0D9F-2489-4955-BFE0-2DE200001712}"/>
               </a:ext>
             </a:extLst>
           </p:cNvPr>
@@ -5510,7 +5413,6 @@
           <a:lstStyle xmlns:a="http://schemas.openxmlformats.org/drawingml/2006/main"/>
           <a:p xmlns:a="http://schemas.openxmlformats.org/drawingml/2006/main">
             <a:pPr algn="l">
-              <a:buNone/>
               <a:defRPr sz="1275" b="1">
                 <a:solidFill>
                   <a:srgbClr val="17202A"/>
@@ -5529,7 +5431,7 @@
                 <a:ea typeface="Aptos Display"/>
                 <a:cs typeface="Aptos Display"/>
               </a:rPr>
-              <a:t>Caja negra</a:t>
+              <a:t>Black box behavior</a:t>
             </a:r>
           </a:p>
         </p:txBody>
@@ -5539,7 +5441,7 @@
           <p:cNvPr id="8" name="">
             <a:extLst xmlns:a="http://schemas.openxmlformats.org/drawingml/2006/main">
               <a:ext uri="{FF2B5EF4-FFF2-40B4-BE49-F238E27FC236}">
-                <a16:creationId xmlns:a16="http://schemas.microsoft.com/office/drawing/2014/main" id="{974E39D3-3C2A-44AC-96F8-E65D14BCADEC}"/>
+                <a16:creationId xmlns:a16="http://schemas.microsoft.com/office/drawing/2014/main" id="{092215B6-A5B6-41AA-819B-78E6B0DCC5CD}"/>
               </a:ext>
             </a:extLst>
           </p:cNvPr>
@@ -5575,7 +5477,6 @@
           <a:lstStyle xmlns:a="http://schemas.openxmlformats.org/drawingml/2006/main"/>
           <a:p xmlns:a="http://schemas.openxmlformats.org/drawingml/2006/main">
             <a:pPr algn="l">
-              <a:buNone/>
               <a:defRPr sz="938" b="0">
                 <a:solidFill>
                   <a:srgbClr val="5F6B64"/>
@@ -5594,7 +5495,7 @@
                 <a:ea typeface="Aptos"/>
                 <a:cs typeface="Aptos"/>
               </a:rPr>
-              <a:t>La misma logica toma decisiones, ejecuta, interpreta resultados y se vuelve casi imposible saber que funciono, que fallo y por que.</a:t>
+              <a:t>The same logic decides, executes, interprets results, and makes it nearly impossible to isolate what worked, what failed, and why.</a:t>
             </a:r>
           </a:p>
         </p:txBody>
@@ -5604,7 +5505,7 @@
           <p:cNvPr id="9" name="">
             <a:extLst xmlns:a="http://schemas.openxmlformats.org/drawingml/2006/main">
               <a:ext uri="{FF2B5EF4-FFF2-40B4-BE49-F238E27FC236}">
-                <a16:creationId xmlns:a16="http://schemas.microsoft.com/office/drawing/2014/main" id="{CEE0566E-3C95-47AB-B30D-84E88F49E2B4}"/>
+                <a16:creationId xmlns:a16="http://schemas.microsoft.com/office/drawing/2014/main" id="{47405A3E-FBC4-4025-9C1D-B91CEEAF0B72}"/>
               </a:ext>
             </a:extLst>
           </p:cNvPr>
@@ -5637,7 +5538,7 @@
           <p:cNvPr id="10" name="">
             <a:extLst xmlns:a="http://schemas.openxmlformats.org/drawingml/2006/main">
               <a:ext uri="{FF2B5EF4-FFF2-40B4-BE49-F238E27FC236}">
-                <a16:creationId xmlns:a16="http://schemas.microsoft.com/office/drawing/2014/main" id="{2EF8F8AF-996C-4AFD-9126-765CF02E83CA}"/>
+                <a16:creationId xmlns:a16="http://schemas.microsoft.com/office/drawing/2014/main" id="{D579BBE4-864B-49DE-8BB2-E5E85C0CD180}"/>
               </a:ext>
             </a:extLst>
           </p:cNvPr>
@@ -5672,7 +5573,7 @@
           <p:cNvPr id="11" name="">
             <a:extLst xmlns:a="http://schemas.openxmlformats.org/drawingml/2006/main">
               <a:ext uri="{FF2B5EF4-FFF2-40B4-BE49-F238E27FC236}">
-                <a16:creationId xmlns:a16="http://schemas.microsoft.com/office/drawing/2014/main" id="{C0C6204C-88E7-4F4C-861A-96D59990620D}"/>
+                <a16:creationId xmlns:a16="http://schemas.microsoft.com/office/drawing/2014/main" id="{BE3AB48A-1FAA-475B-9CA8-0D06DE5953DB}"/>
               </a:ext>
             </a:extLst>
           </p:cNvPr>
@@ -5708,7 +5609,6 @@
           <a:lstStyle xmlns:a="http://schemas.openxmlformats.org/drawingml/2006/main"/>
           <a:p xmlns:a="http://schemas.openxmlformats.org/drawingml/2006/main">
             <a:pPr algn="l">
-              <a:buNone/>
               <a:defRPr sz="1275" b="1">
                 <a:solidFill>
                   <a:srgbClr val="17202A"/>
@@ -5727,7 +5627,7 @@
                 <a:ea typeface="Aptos Display"/>
                 <a:cs typeface="Aptos Display"/>
               </a:rPr>
-              <a:t>Aprendizaje lento</a:t>
+              <a:t>Slow learning</a:t>
             </a:r>
           </a:p>
         </p:txBody>
@@ -5737,7 +5637,7 @@
           <p:cNvPr id="12" name="">
             <a:extLst xmlns:a="http://schemas.openxmlformats.org/drawingml/2006/main">
               <a:ext uri="{FF2B5EF4-FFF2-40B4-BE49-F238E27FC236}">
-                <a16:creationId xmlns:a16="http://schemas.microsoft.com/office/drawing/2014/main" id="{4FA31511-C61B-4549-9DDE-AFBF6BA40D81}"/>
+                <a16:creationId xmlns:a16="http://schemas.microsoft.com/office/drawing/2014/main" id="{0E4AC41F-92CD-4D30-A3ED-334AD6BD0A99}"/>
               </a:ext>
             </a:extLst>
           </p:cNvPr>
@@ -5773,7 +5673,6 @@
           <a:lstStyle xmlns:a="http://schemas.openxmlformats.org/drawingml/2006/main"/>
           <a:p xmlns:a="http://schemas.openxmlformats.org/drawingml/2006/main">
             <a:pPr algn="l">
-              <a:buNone/>
               <a:defRPr sz="938" b="0">
                 <a:solidFill>
                   <a:srgbClr val="5F6B64"/>
@@ -5792,7 +5691,7 @@
                 <a:ea typeface="Aptos"/>
                 <a:cs typeface="Aptos"/>
               </a:rPr>
-              <a:t>Sin replay, paridad y forensics, cada error cuesta una sesion completa. Los equipos terminan tocando reglas a ciegas.</a:t>
+              <a:t>Without replay, parity, and forensics, every error costs a full session. Teams end up tuning rules by intuition.</a:t>
             </a:r>
           </a:p>
         </p:txBody>
@@ -5802,7 +5701,7 @@
           <p:cNvPr id="13" name="">
             <a:extLst xmlns:a="http://schemas.openxmlformats.org/drawingml/2006/main">
               <a:ext uri="{FF2B5EF4-FFF2-40B4-BE49-F238E27FC236}">
-                <a16:creationId xmlns:a16="http://schemas.microsoft.com/office/drawing/2014/main" id="{5C6A94A1-6D25-411E-A971-380C675FBB55}"/>
+                <a16:creationId xmlns:a16="http://schemas.microsoft.com/office/drawing/2014/main" id="{4EF13011-3351-410B-AF5F-3C05D0A6D489}"/>
               </a:ext>
             </a:extLst>
           </p:cNvPr>
@@ -5835,7 +5734,7 @@
           <p:cNvPr id="14" name="">
             <a:extLst xmlns:a="http://schemas.openxmlformats.org/drawingml/2006/main">
               <a:ext uri="{FF2B5EF4-FFF2-40B4-BE49-F238E27FC236}">
-                <a16:creationId xmlns:a16="http://schemas.microsoft.com/office/drawing/2014/main" id="{B99B1A82-3753-46A7-9816-26C2E8142A74}"/>
+                <a16:creationId xmlns:a16="http://schemas.microsoft.com/office/drawing/2014/main" id="{10BA2A0B-11BC-4FA2-A167-8B8256CE9FA7}"/>
               </a:ext>
             </a:extLst>
           </p:cNvPr>
@@ -5870,7 +5769,7 @@
           <p:cNvPr id="15" name="">
             <a:extLst xmlns:a="http://schemas.openxmlformats.org/drawingml/2006/main">
               <a:ext uri="{FF2B5EF4-FFF2-40B4-BE49-F238E27FC236}">
-                <a16:creationId xmlns:a16="http://schemas.microsoft.com/office/drawing/2014/main" id="{30BB63A1-B244-4467-A750-DC810EE5E442}"/>
+                <a16:creationId xmlns:a16="http://schemas.microsoft.com/office/drawing/2014/main" id="{845B17E2-A2C8-4B06-9199-99D03C417630}"/>
               </a:ext>
             </a:extLst>
           </p:cNvPr>
@@ -5906,7 +5805,6 @@
           <a:lstStyle xmlns:a="http://schemas.openxmlformats.org/drawingml/2006/main"/>
           <a:p xmlns:a="http://schemas.openxmlformats.org/drawingml/2006/main">
             <a:pPr algn="l">
-              <a:buNone/>
               <a:defRPr sz="1275" b="1">
                 <a:solidFill>
                   <a:srgbClr val="17202A"/>
@@ -5925,7 +5823,7 @@
                 <a:ea typeface="Aptos Display"/>
                 <a:cs typeface="Aptos Display"/>
               </a:rPr>
-              <a:t>Gobierno debil</a:t>
+              <a:t>Weak governance</a:t>
             </a:r>
           </a:p>
         </p:txBody>
@@ -5935,7 +5833,7 @@
           <p:cNvPr id="16" name="">
             <a:extLst xmlns:a="http://schemas.openxmlformats.org/drawingml/2006/main">
               <a:ext uri="{FF2B5EF4-FFF2-40B4-BE49-F238E27FC236}">
-                <a16:creationId xmlns:a16="http://schemas.microsoft.com/office/drawing/2014/main" id="{C5BE4302-B568-4EA1-8F76-43B5FF5A1907}"/>
+                <a16:creationId xmlns:a16="http://schemas.microsoft.com/office/drawing/2014/main" id="{60EE17B9-4A67-4883-840D-9493956FEE59}"/>
               </a:ext>
             </a:extLst>
           </p:cNvPr>
@@ -5971,7 +5869,6 @@
           <a:lstStyle xmlns:a="http://schemas.openxmlformats.org/drawingml/2006/main"/>
           <a:p xmlns:a="http://schemas.openxmlformats.org/drawingml/2006/main">
             <a:pPr algn="l">
-              <a:buNone/>
               <a:defRPr sz="938" b="0">
                 <a:solidFill>
                   <a:srgbClr val="5F6B64"/>
@@ -5990,7 +5887,7 @@
                 <a:ea typeface="Aptos"/>
                 <a:cs typeface="Aptos"/>
               </a:rPr>
-              <a:t>Sin contratos, incubacion y surfaces de decision, toda mejora compite contra intuicion, urgencia y memoria incompleta.</a:t>
+              <a:t>Without contracts, incubation, and decision surfaces, every improvement competes against urgency, memory gaps, and guesswork.</a:t>
             </a:r>
           </a:p>
         </p:txBody>
@@ -6000,7 +5897,7 @@
           <p:cNvPr id="17" name="">
             <a:extLst xmlns:a="http://schemas.openxmlformats.org/drawingml/2006/main">
               <a:ext uri="{FF2B5EF4-FFF2-40B4-BE49-F238E27FC236}">
-                <a16:creationId xmlns:a16="http://schemas.microsoft.com/office/drawing/2014/main" id="{4C007748-109B-4E77-AD6C-DE0EE9CFE05D}"/>
+                <a16:creationId xmlns:a16="http://schemas.microsoft.com/office/drawing/2014/main" id="{A8B3E9C2-8CF3-46A2-8B04-A96B4E29CDEE}"/>
               </a:ext>
             </a:extLst>
           </p:cNvPr>
@@ -6033,7 +5930,7 @@
           <p:cNvPr id="18" name="">
             <a:extLst xmlns:a="http://schemas.openxmlformats.org/drawingml/2006/main">
               <a:ext uri="{FF2B5EF4-FFF2-40B4-BE49-F238E27FC236}">
-                <a16:creationId xmlns:a16="http://schemas.microsoft.com/office/drawing/2014/main" id="{47A0A683-98E8-4D35-9491-7364BB7B20B4}"/>
+                <a16:creationId xmlns:a16="http://schemas.microsoft.com/office/drawing/2014/main" id="{FD7D750D-A8DF-409D-8525-883FF4455075}"/>
               </a:ext>
             </a:extLst>
           </p:cNvPr>
@@ -6069,7 +5966,6 @@
           <a:lstStyle xmlns:a="http://schemas.openxmlformats.org/drawingml/2006/main"/>
           <a:p xmlns:a="http://schemas.openxmlformats.org/drawingml/2006/main">
             <a:pPr algn="ctr">
-              <a:buNone/>
               <a:defRPr sz="1350" b="0">
                 <a:solidFill>
                   <a:srgbClr val="5F6B64"/>
@@ -6088,7 +5984,7 @@
                 <a:ea typeface="Aptos"/>
                 <a:cs typeface="Aptos"/>
               </a:rPr>
-              <a:t>La tesis de Robo-T-Rader es simple:</a:t>
+              <a:t>Robo-T-Rader's core thesis is simple:</a:t>
             </a:r>
           </a:p>
         </p:txBody>
@@ -6098,7 +5994,7 @@
           <p:cNvPr id="19" name="">
             <a:extLst xmlns:a="http://schemas.openxmlformats.org/drawingml/2006/main">
               <a:ext uri="{FF2B5EF4-FFF2-40B4-BE49-F238E27FC236}">
-                <a16:creationId xmlns:a16="http://schemas.microsoft.com/office/drawing/2014/main" id="{F8308ABC-AA90-4980-B908-0B1030ED2EBA}"/>
+                <a16:creationId xmlns:a16="http://schemas.microsoft.com/office/drawing/2014/main" id="{2BAE5B27-4D42-445B-BC1E-B836E7DC8A50}"/>
               </a:ext>
             </a:extLst>
           </p:cNvPr>
@@ -6134,7 +6030,6 @@
           <a:lstStyle xmlns:a="http://schemas.openxmlformats.org/drawingml/2006/main"/>
           <a:p xmlns:a="http://schemas.openxmlformats.org/drawingml/2006/main">
             <a:pPr algn="ctr">
-              <a:buNone/>
               <a:defRPr sz="1725" b="1">
                 <a:solidFill>
                   <a:srgbClr val="17202A"/>
@@ -6153,7 +6048,7 @@
                 <a:ea typeface="Aptos Display"/>
                 <a:cs typeface="Aptos Display"/>
               </a:rPr>
-              <a:t>separar capas para que el equipo pueda mejorar robots autonomos sin adivinar.</a:t>
+              <a:t>separate layers so a team can improve autonomous robots without guessing.</a:t>
             </a:r>
           </a:p>
         </p:txBody>
@@ -6163,7 +6058,7 @@
           <p:cNvPr id="20" name="">
             <a:extLst xmlns:a="http://schemas.openxmlformats.org/drawingml/2006/main">
               <a:ext uri="{FF2B5EF4-FFF2-40B4-BE49-F238E27FC236}">
-                <a16:creationId xmlns:a16="http://schemas.microsoft.com/office/drawing/2014/main" id="{0DD1935A-0826-49A4-B441-71E48133B193}"/>
+                <a16:creationId xmlns:a16="http://schemas.microsoft.com/office/drawing/2014/main" id="{1E8277B5-25AF-45D0-894E-284662D0B750}"/>
               </a:ext>
             </a:extLst>
           </p:cNvPr>
@@ -6199,7 +6094,6 @@
           <a:lstStyle xmlns:a="http://schemas.openxmlformats.org/drawingml/2006/main"/>
           <a:p xmlns:a="http://schemas.openxmlformats.org/drawingml/2006/main">
             <a:pPr algn="r">
-              <a:buNone/>
               <a:defRPr sz="750" b="0">
                 <a:solidFill>
                   <a:srgbClr val="5F6B64"/>
@@ -6226,7 +6120,7 @@
     </p:spTree>
     <p:extLst>
       <p:ext uri="{BB962C8B-B14F-4D97-AF65-F5344CB8AC3E}">
-        <p14:creationId xmlns:p14="http://schemas.microsoft.com/office/powerpoint/2010/main" val="868072910"/>
+        <p14:creationId xmlns:p14="http://schemas.microsoft.com/office/powerpoint/2010/main" val="1011013449"/>
       </p:ext>
     </p:extLst>
   </p:cSld>
@@ -6250,7 +6144,7 @@
           <p:cNvPr id="1" name="">
             <a:extLst xmlns:a="http://schemas.openxmlformats.org/drawingml/2006/main">
               <a:ext uri="{FF2B5EF4-FFF2-40B4-BE49-F238E27FC236}">
-                <a16:creationId xmlns:a16="http://schemas.microsoft.com/office/drawing/2014/main" id="{E16E9F6E-F9CF-48C7-9E3A-AEF66E6C7456}"/>
+                <a16:creationId xmlns:a16="http://schemas.microsoft.com/office/drawing/2014/main" id="{779DFE4B-CD6B-4FF8-B4C2-694723192DAA}"/>
               </a:ext>
             </a:extLst>
           </p:cNvPr>
@@ -6285,7 +6179,7 @@
           <p:cNvPr id="2" name="">
             <a:extLst xmlns:a="http://schemas.openxmlformats.org/drawingml/2006/main">
               <a:ext uri="{FF2B5EF4-FFF2-40B4-BE49-F238E27FC236}">
-                <a16:creationId xmlns:a16="http://schemas.microsoft.com/office/drawing/2014/main" id="{31301C3F-B80E-4184-98BB-D80EB457924A}"/>
+                <a16:creationId xmlns:a16="http://schemas.microsoft.com/office/drawing/2014/main" id="{E2DDD63D-D617-4404-8170-6D452A8C893F}"/>
               </a:ext>
             </a:extLst>
           </p:cNvPr>
@@ -6320,7 +6214,7 @@
           <p:cNvPr id="3" name="">
             <a:extLst xmlns:a="http://schemas.openxmlformats.org/drawingml/2006/main">
               <a:ext uri="{FF2B5EF4-FFF2-40B4-BE49-F238E27FC236}">
-                <a16:creationId xmlns:a16="http://schemas.microsoft.com/office/drawing/2014/main" id="{902C190F-47DB-4B17-BF37-6C87C5338E73}"/>
+                <a16:creationId xmlns:a16="http://schemas.microsoft.com/office/drawing/2014/main" id="{390375B8-E4BE-4B7F-89CD-E42EF35A3597}"/>
               </a:ext>
             </a:extLst>
           </p:cNvPr>
@@ -6356,7 +6250,6 @@
           <a:lstStyle xmlns:a="http://schemas.openxmlformats.org/drawingml/2006/main"/>
           <a:p xmlns:a="http://schemas.openxmlformats.org/drawingml/2006/main">
             <a:pPr algn="l">
-              <a:buNone/>
               <a:defRPr sz="900" b="1">
                 <a:solidFill>
                   <a:srgbClr val="0F8A6A"/>
@@ -6385,7 +6278,7 @@
           <p:cNvPr id="4" name="">
             <a:extLst xmlns:a="http://schemas.openxmlformats.org/drawingml/2006/main">
               <a:ext uri="{FF2B5EF4-FFF2-40B4-BE49-F238E27FC236}">
-                <a16:creationId xmlns:a16="http://schemas.microsoft.com/office/drawing/2014/main" id="{4F18CB0D-9FAE-409B-8CF0-EFBDCD9DCD77}"/>
+                <a16:creationId xmlns:a16="http://schemas.microsoft.com/office/drawing/2014/main" id="{BCDE9E0B-118B-442E-8333-98FF31155C28}"/>
               </a:ext>
             </a:extLst>
           </p:cNvPr>
@@ -6421,7 +6314,6 @@
           <a:lstStyle xmlns:a="http://schemas.openxmlformats.org/drawingml/2006/main"/>
           <a:p xmlns:a="http://schemas.openxmlformats.org/drawingml/2006/main">
             <a:pPr algn="l">
-              <a:buNone/>
               <a:defRPr sz="2325" b="1">
                 <a:solidFill>
                   <a:srgbClr val="17202A"/>
@@ -6440,7 +6332,7 @@
                 <a:ea typeface="Aptos Display"/>
                 <a:cs typeface="Aptos Display"/>
               </a:rPr>
-              <a:t>Robo-T-Rader separa el stack en cinco capas que pueden evolucionar sin mezclarse.</a:t>
+              <a:t>Robo-T-Rader separates the stack into five layers that can evolve without collapsing into each other.</a:t>
             </a:r>
           </a:p>
         </p:txBody>
@@ -6450,7 +6342,7 @@
           <p:cNvPr id="5" name="">
             <a:extLst xmlns:a="http://schemas.openxmlformats.org/drawingml/2006/main">
               <a:ext uri="{FF2B5EF4-FFF2-40B4-BE49-F238E27FC236}">
-                <a16:creationId xmlns:a16="http://schemas.microsoft.com/office/drawing/2014/main" id="{0C0F9143-5F80-4F8F-B721-5F1929758AD9}"/>
+                <a16:creationId xmlns:a16="http://schemas.microsoft.com/office/drawing/2014/main" id="{03094E7A-CEE4-42B8-B763-19FCB282D3E1}"/>
               </a:ext>
             </a:extLst>
           </p:cNvPr>
@@ -6462,7 +6354,7 @@
         <p:spPr>
           <a:xfrm xmlns:a="http://schemas.openxmlformats.org/drawingml/2006/main">
             <a:off x="838200" y="1562100"/>
-            <a:ext cx="1257300" cy="228600"/>
+            <a:ext cx="1485900" cy="228600"/>
           </a:xfrm>
           <a:prstGeom xmlns:a="http://schemas.openxmlformats.org/drawingml/2006/main" prst="rect">
             <a:avLst/>
@@ -6483,7 +6375,7 @@
           <p:cNvPr id="6" name="">
             <a:extLst xmlns:a="http://schemas.openxmlformats.org/drawingml/2006/main">
               <a:ext uri="{FF2B5EF4-FFF2-40B4-BE49-F238E27FC236}">
-                <a16:creationId xmlns:a16="http://schemas.microsoft.com/office/drawing/2014/main" id="{EBBF6C16-B9DD-47BD-ADC6-678624397F5A}"/>
+                <a16:creationId xmlns:a16="http://schemas.microsoft.com/office/drawing/2014/main" id="{93AEA99B-E9B7-4DFD-B568-25BC46B1E23C}"/>
               </a:ext>
             </a:extLst>
           </p:cNvPr>
@@ -6495,7 +6387,7 @@
         <p:spPr>
           <a:xfrm xmlns:a="http://schemas.openxmlformats.org/drawingml/2006/main">
             <a:off x="838200" y="1600200"/>
-            <a:ext cx="1257300" cy="152400"/>
+            <a:ext cx="1485900" cy="152400"/>
           </a:xfrm>
           <a:prstGeom xmlns:a="http://schemas.openxmlformats.org/drawingml/2006/main" prst="rect">
             <a:avLst/>
@@ -6519,7 +6411,6 @@
           <a:lstStyle xmlns:a="http://schemas.openxmlformats.org/drawingml/2006/main"/>
           <a:p xmlns:a="http://schemas.openxmlformats.org/drawingml/2006/main">
             <a:pPr algn="ctr">
-              <a:buNone/>
               <a:defRPr sz="788" b="1">
                 <a:solidFill>
                   <a:srgbClr val="0F8A6A"/>
@@ -6548,7 +6439,7 @@
           <p:cNvPr id="7" name="">
             <a:extLst xmlns:a="http://schemas.openxmlformats.org/drawingml/2006/main">
               <a:ext uri="{FF2B5EF4-FFF2-40B4-BE49-F238E27FC236}">
-                <a16:creationId xmlns:a16="http://schemas.microsoft.com/office/drawing/2014/main" id="{7BAD5FE5-3CC7-469C-8446-274931B63CAC}"/>
+                <a16:creationId xmlns:a16="http://schemas.microsoft.com/office/drawing/2014/main" id="{A1150E55-6C00-4B0C-81CA-98B791686A18}"/>
               </a:ext>
             </a:extLst>
           </p:cNvPr>
@@ -6581,7 +6472,7 @@
           <p:cNvPr id="8" name="">
             <a:extLst xmlns:a="http://schemas.openxmlformats.org/drawingml/2006/main">
               <a:ext uri="{FF2B5EF4-FFF2-40B4-BE49-F238E27FC236}">
-                <a16:creationId xmlns:a16="http://schemas.microsoft.com/office/drawing/2014/main" id="{0FB42D0F-B950-4AB4-8193-6749F463F93A}"/>
+                <a16:creationId xmlns:a16="http://schemas.microsoft.com/office/drawing/2014/main" id="{EE1D7E04-7B3C-44D3-A970-D67825D7C80E}"/>
               </a:ext>
             </a:extLst>
           </p:cNvPr>
@@ -6617,7 +6508,6 @@
           <a:lstStyle xmlns:a="http://schemas.openxmlformats.org/drawingml/2006/main"/>
           <a:p xmlns:a="http://schemas.openxmlformats.org/drawingml/2006/main">
             <a:pPr algn="l">
-              <a:buNone/>
               <a:defRPr sz="1200" b="1">
                 <a:solidFill>
                   <a:srgbClr val="0F8A6A"/>
@@ -6646,7 +6536,7 @@
           <p:cNvPr id="9" name="">
             <a:extLst xmlns:a="http://schemas.openxmlformats.org/drawingml/2006/main">
               <a:ext uri="{FF2B5EF4-FFF2-40B4-BE49-F238E27FC236}">
-                <a16:creationId xmlns:a16="http://schemas.microsoft.com/office/drawing/2014/main" id="{CB5903F9-1A7F-4E69-8DCA-FDE4BD6CC884}"/>
+                <a16:creationId xmlns:a16="http://schemas.microsoft.com/office/drawing/2014/main" id="{CDBBB914-424B-41AF-A550-2D8C23D5443C}"/>
               </a:ext>
             </a:extLst>
           </p:cNvPr>
@@ -6682,7 +6572,6 @@
           <a:lstStyle xmlns:a="http://schemas.openxmlformats.org/drawingml/2006/main"/>
           <a:p xmlns:a="http://schemas.openxmlformats.org/drawingml/2006/main">
             <a:pPr algn="l">
-              <a:buNone/>
               <a:defRPr sz="863" b="0">
                 <a:solidFill>
                   <a:srgbClr val="17202A"/>
@@ -6701,7 +6590,7 @@
                 <a:ea typeface="Aptos"/>
                 <a:cs typeface="Aptos"/>
               </a:rPr>
-              <a:t>Dev, Dev-Hetzner, Prod-Hetzner, Naked, F2, Horizon, HorizonMD y CC operan distintos estilos y horizontes.</a:t>
+              <a:t>Dev, Dev-Hetzner, Prod-Hetzner, Naked, F2, Horizon, HorizonMD, and CC operate different styles and horizons.</a:t>
             </a:r>
           </a:p>
         </p:txBody>
@@ -6711,7 +6600,7 @@
           <p:cNvPr id="10" name="">
             <a:extLst xmlns:a="http://schemas.openxmlformats.org/drawingml/2006/main">
               <a:ext uri="{FF2B5EF4-FFF2-40B4-BE49-F238E27FC236}">
-                <a16:creationId xmlns:a16="http://schemas.microsoft.com/office/drawing/2014/main" id="{36D656B4-9276-40BB-9554-3AD1FD557D40}"/>
+                <a16:creationId xmlns:a16="http://schemas.microsoft.com/office/drawing/2014/main" id="{E19D3FA9-85FB-4A74-B2E4-646393F5AC68}"/>
               </a:ext>
             </a:extLst>
           </p:cNvPr>
@@ -6723,7 +6612,7 @@
         <p:spPr>
           <a:xfrm xmlns:a="http://schemas.openxmlformats.org/drawingml/2006/main">
             <a:off x="838200" y="2743200"/>
-            <a:ext cx="1257300" cy="228600"/>
+            <a:ext cx="1485900" cy="228600"/>
           </a:xfrm>
           <a:prstGeom xmlns:a="http://schemas.openxmlformats.org/drawingml/2006/main" prst="rect">
             <a:avLst/>
@@ -6744,7 +6633,7 @@
           <p:cNvPr id="11" name="">
             <a:extLst xmlns:a="http://schemas.openxmlformats.org/drawingml/2006/main">
               <a:ext uri="{FF2B5EF4-FFF2-40B4-BE49-F238E27FC236}">
-                <a16:creationId xmlns:a16="http://schemas.microsoft.com/office/drawing/2014/main" id="{5F216978-2DFB-47A8-8C32-5CA90EAC7CAD}"/>
+                <a16:creationId xmlns:a16="http://schemas.microsoft.com/office/drawing/2014/main" id="{2A1F451E-1790-4F52-850D-E6C0B8155F07}"/>
               </a:ext>
             </a:extLst>
           </p:cNvPr>
@@ -6756,7 +6645,7 @@
         <p:spPr>
           <a:xfrm xmlns:a="http://schemas.openxmlformats.org/drawingml/2006/main">
             <a:off x="838200" y="2781300"/>
-            <a:ext cx="1257300" cy="152400"/>
+            <a:ext cx="1485900" cy="152400"/>
           </a:xfrm>
           <a:prstGeom xmlns:a="http://schemas.openxmlformats.org/drawingml/2006/main" prst="rect">
             <a:avLst/>
@@ -6780,7 +6669,6 @@
           <a:lstStyle xmlns:a="http://schemas.openxmlformats.org/drawingml/2006/main"/>
           <a:p xmlns:a="http://schemas.openxmlformats.org/drawingml/2006/main">
             <a:pPr algn="ctr">
-              <a:buNone/>
               <a:defRPr sz="788" b="1">
                 <a:solidFill>
                   <a:srgbClr val="2E5EA7"/>
@@ -6809,7 +6697,7 @@
           <p:cNvPr id="12" name="">
             <a:extLst xmlns:a="http://schemas.openxmlformats.org/drawingml/2006/main">
               <a:ext uri="{FF2B5EF4-FFF2-40B4-BE49-F238E27FC236}">
-                <a16:creationId xmlns:a16="http://schemas.microsoft.com/office/drawing/2014/main" id="{44BDD164-A982-43AD-8D81-885006AF905E}"/>
+                <a16:creationId xmlns:a16="http://schemas.microsoft.com/office/drawing/2014/main" id="{E6F3FFB8-979D-4E7F-BC7F-1653089AB1A9}"/>
               </a:ext>
             </a:extLst>
           </p:cNvPr>
@@ -6842,7 +6730,7 @@
           <p:cNvPr id="13" name="">
             <a:extLst xmlns:a="http://schemas.openxmlformats.org/drawingml/2006/main">
               <a:ext uri="{FF2B5EF4-FFF2-40B4-BE49-F238E27FC236}">
-                <a16:creationId xmlns:a16="http://schemas.microsoft.com/office/drawing/2014/main" id="{449258C5-7FE4-43FC-BD48-28EE632BA1F1}"/>
+                <a16:creationId xmlns:a16="http://schemas.microsoft.com/office/drawing/2014/main" id="{888F9575-8309-4FAF-90ED-72A7528EC705}"/>
               </a:ext>
             </a:extLst>
           </p:cNvPr>
@@ -6878,7 +6766,6 @@
           <a:lstStyle xmlns:a="http://schemas.openxmlformats.org/drawingml/2006/main"/>
           <a:p xmlns:a="http://schemas.openxmlformats.org/drawingml/2006/main">
             <a:pPr algn="l">
-              <a:buNone/>
               <a:defRPr sz="1200" b="1">
                 <a:solidFill>
                   <a:srgbClr val="2E5EA7"/>
@@ -6907,7 +6794,7 @@
           <p:cNvPr id="14" name="">
             <a:extLst xmlns:a="http://schemas.openxmlformats.org/drawingml/2006/main">
               <a:ext uri="{FF2B5EF4-FFF2-40B4-BE49-F238E27FC236}">
-                <a16:creationId xmlns:a16="http://schemas.microsoft.com/office/drawing/2014/main" id="{0A5321F8-BD3C-4F0C-9E6C-E5759B8572C8}"/>
+                <a16:creationId xmlns:a16="http://schemas.microsoft.com/office/drawing/2014/main" id="{3BF104D0-9D72-442E-ABA9-93AD78EFBA84}"/>
               </a:ext>
             </a:extLst>
           </p:cNvPr>
@@ -6943,7 +6830,6 @@
           <a:lstStyle xmlns:a="http://schemas.openxmlformats.org/drawingml/2006/main"/>
           <a:p xmlns:a="http://schemas.openxmlformats.org/drawingml/2006/main">
             <a:pPr algn="l">
-              <a:buNone/>
               <a:defRPr sz="863" b="0">
                 <a:solidFill>
                   <a:srgbClr val="17202A"/>
@@ -6962,7 +6848,7 @@
                 <a:ea typeface="Aptos"/>
                 <a:cs typeface="Aptos"/>
               </a:rPr>
-              <a:t>Normaliza quotes, candles, readiness, mappings y productos de watchlist/universe para multiples consumidores.</a:t>
+              <a:t>Normalizes quotes, candles, readiness, mappings, and watchlist/universe products for multiple consumers.</a:t>
             </a:r>
           </a:p>
         </p:txBody>
@@ -6972,7 +6858,7 @@
           <p:cNvPr id="15" name="">
             <a:extLst xmlns:a="http://schemas.openxmlformats.org/drawingml/2006/main">
               <a:ext uri="{FF2B5EF4-FFF2-40B4-BE49-F238E27FC236}">
-                <a16:creationId xmlns:a16="http://schemas.microsoft.com/office/drawing/2014/main" id="{8897FD1D-3F62-4B5D-B4BE-0165FA0086C8}"/>
+                <a16:creationId xmlns:a16="http://schemas.microsoft.com/office/drawing/2014/main" id="{5D2CAA51-1F7A-4AC1-AD72-5186E40F58F2}"/>
               </a:ext>
             </a:extLst>
           </p:cNvPr>
@@ -6984,7 +6870,7 @@
         <p:spPr>
           <a:xfrm xmlns:a="http://schemas.openxmlformats.org/drawingml/2006/main">
             <a:off x="838200" y="3924300"/>
-            <a:ext cx="1257300" cy="228600"/>
+            <a:ext cx="1485900" cy="228600"/>
           </a:xfrm>
           <a:prstGeom xmlns:a="http://schemas.openxmlformats.org/drawingml/2006/main" prst="rect">
             <a:avLst/>
@@ -7005,7 +6891,7 @@
           <p:cNvPr id="16" name="">
             <a:extLst xmlns:a="http://schemas.openxmlformats.org/drawingml/2006/main">
               <a:ext uri="{FF2B5EF4-FFF2-40B4-BE49-F238E27FC236}">
-                <a16:creationId xmlns:a16="http://schemas.microsoft.com/office/drawing/2014/main" id="{EFB97A05-61E5-448C-B088-3A7BCADD7C1A}"/>
+                <a16:creationId xmlns:a16="http://schemas.microsoft.com/office/drawing/2014/main" id="{DCBD4A99-0546-454E-9AEE-6BE513E5BB3E}"/>
               </a:ext>
             </a:extLst>
           </p:cNvPr>
@@ -7017,7 +6903,7 @@
         <p:spPr>
           <a:xfrm xmlns:a="http://schemas.openxmlformats.org/drawingml/2006/main">
             <a:off x="838200" y="3962400"/>
-            <a:ext cx="1257300" cy="152400"/>
+            <a:ext cx="1485900" cy="152400"/>
           </a:xfrm>
           <a:prstGeom xmlns:a="http://schemas.openxmlformats.org/drawingml/2006/main" prst="rect">
             <a:avLst/>
@@ -7041,7 +6927,6 @@
           <a:lstStyle xmlns:a="http://schemas.openxmlformats.org/drawingml/2006/main"/>
           <a:p xmlns:a="http://schemas.openxmlformats.org/drawingml/2006/main">
             <a:pPr algn="ctr">
-              <a:buNone/>
               <a:defRPr sz="788" b="1">
                 <a:solidFill>
                   <a:srgbClr val="C98A21"/>
@@ -7070,7 +6955,7 @@
           <p:cNvPr id="17" name="">
             <a:extLst xmlns:a="http://schemas.openxmlformats.org/drawingml/2006/main">
               <a:ext uri="{FF2B5EF4-FFF2-40B4-BE49-F238E27FC236}">
-                <a16:creationId xmlns:a16="http://schemas.microsoft.com/office/drawing/2014/main" id="{3DE12512-DCF1-4419-80B0-0D0218BD271E}"/>
+                <a16:creationId xmlns:a16="http://schemas.microsoft.com/office/drawing/2014/main" id="{50D18D1D-3D7C-4CD8-A6BA-8CA18F86D111}"/>
               </a:ext>
             </a:extLst>
           </p:cNvPr>
@@ -7103,7 +6988,7 @@
           <p:cNvPr id="18" name="">
             <a:extLst xmlns:a="http://schemas.openxmlformats.org/drawingml/2006/main">
               <a:ext uri="{FF2B5EF4-FFF2-40B4-BE49-F238E27FC236}">
-                <a16:creationId xmlns:a16="http://schemas.microsoft.com/office/drawing/2014/main" id="{849DCF4D-20A9-4C5E-AA09-6C03D452C2EE}"/>
+                <a16:creationId xmlns:a16="http://schemas.microsoft.com/office/drawing/2014/main" id="{5BEA32AE-2386-43A7-9BAE-4D8649B96D7E}"/>
               </a:ext>
             </a:extLst>
           </p:cNvPr>
@@ -7139,7 +7024,6 @@
           <a:lstStyle xmlns:a="http://schemas.openxmlformats.org/drawingml/2006/main"/>
           <a:p xmlns:a="http://schemas.openxmlformats.org/drawingml/2006/main">
             <a:pPr algn="l">
-              <a:buNone/>
               <a:defRPr sz="1200" b="1">
                 <a:solidFill>
                   <a:srgbClr val="C98A21"/>
@@ -7168,7 +7052,7 @@
           <p:cNvPr id="19" name="">
             <a:extLst xmlns:a="http://schemas.openxmlformats.org/drawingml/2006/main">
               <a:ext uri="{FF2B5EF4-FFF2-40B4-BE49-F238E27FC236}">
-                <a16:creationId xmlns:a16="http://schemas.microsoft.com/office/drawing/2014/main" id="{FB5E2868-3243-4860-AE35-E655A8795FA6}"/>
+                <a16:creationId xmlns:a16="http://schemas.microsoft.com/office/drawing/2014/main" id="{E8DDF16E-FFD0-47E4-9513-A726576A8549}"/>
               </a:ext>
             </a:extLst>
           </p:cNvPr>
@@ -7204,7 +7088,6 @@
           <a:lstStyle xmlns:a="http://schemas.openxmlformats.org/drawingml/2006/main"/>
           <a:p xmlns:a="http://schemas.openxmlformats.org/drawingml/2006/main">
             <a:pPr algn="l">
-              <a:buNone/>
               <a:defRPr sz="863" b="0">
                 <a:solidFill>
                   <a:srgbClr val="17202A"/>
@@ -7223,7 +7106,7 @@
                 <a:ea typeface="Aptos"/>
                 <a:cs typeface="Aptos"/>
               </a:rPr>
-              <a:t>Sim, MarketSim, Forensics, VFL, Opportunity Coach y Gem Mining convierten sesiones reales en aprendizaje usable.</a:t>
+              <a:t>Sim, MarketSim, Forensics, VFL, Opportunity Coach, and Gem Mining turn live sessions into usable learning.</a:t>
             </a:r>
           </a:p>
         </p:txBody>
@@ -7233,7 +7116,7 @@
           <p:cNvPr id="20" name="">
             <a:extLst xmlns:a="http://schemas.openxmlformats.org/drawingml/2006/main">
               <a:ext uri="{FF2B5EF4-FFF2-40B4-BE49-F238E27FC236}">
-                <a16:creationId xmlns:a16="http://schemas.microsoft.com/office/drawing/2014/main" id="{282DA231-17BC-4D0A-975B-47B9DC26B418}"/>
+                <a16:creationId xmlns:a16="http://schemas.microsoft.com/office/drawing/2014/main" id="{DB521F1E-678C-49DE-AC67-ECC00B160A9D}"/>
               </a:ext>
             </a:extLst>
           </p:cNvPr>
@@ -7245,7 +7128,7 @@
         <p:spPr>
           <a:xfrm xmlns:a="http://schemas.openxmlformats.org/drawingml/2006/main">
             <a:off x="838200" y="5105400"/>
-            <a:ext cx="1257300" cy="228600"/>
+            <a:ext cx="1485900" cy="228600"/>
           </a:xfrm>
           <a:prstGeom xmlns:a="http://schemas.openxmlformats.org/drawingml/2006/main" prst="rect">
             <a:avLst/>
@@ -7266,7 +7149,7 @@
           <p:cNvPr id="21" name="">
             <a:extLst xmlns:a="http://schemas.openxmlformats.org/drawingml/2006/main">
               <a:ext uri="{FF2B5EF4-FFF2-40B4-BE49-F238E27FC236}">
-                <a16:creationId xmlns:a16="http://schemas.microsoft.com/office/drawing/2014/main" id="{1D2CF30B-9152-4A06-824B-0CD3EDBA6230}"/>
+                <a16:creationId xmlns:a16="http://schemas.microsoft.com/office/drawing/2014/main" id="{BB5C7FC9-DFC3-47D7-BACD-CCA1A6869432}"/>
               </a:ext>
             </a:extLst>
           </p:cNvPr>
@@ -7278,7 +7161,7 @@
         <p:spPr>
           <a:xfrm xmlns:a="http://schemas.openxmlformats.org/drawingml/2006/main">
             <a:off x="838200" y="5143500"/>
-            <a:ext cx="1257300" cy="152400"/>
+            <a:ext cx="1485900" cy="152400"/>
           </a:xfrm>
           <a:prstGeom xmlns:a="http://schemas.openxmlformats.org/drawingml/2006/main" prst="rect">
             <a:avLst/>
@@ -7302,7 +7185,6 @@
           <a:lstStyle xmlns:a="http://schemas.openxmlformats.org/drawingml/2006/main"/>
           <a:p xmlns:a="http://schemas.openxmlformats.org/drawingml/2006/main">
             <a:pPr algn="ctr">
-              <a:buNone/>
               <a:defRPr sz="788" b="1">
                 <a:solidFill>
                   <a:srgbClr val="6559B7"/>
@@ -7331,7 +7213,7 @@
           <p:cNvPr id="22" name="">
             <a:extLst xmlns:a="http://schemas.openxmlformats.org/drawingml/2006/main">
               <a:ext uri="{FF2B5EF4-FFF2-40B4-BE49-F238E27FC236}">
-                <a16:creationId xmlns:a16="http://schemas.microsoft.com/office/drawing/2014/main" id="{201B6DB0-1B2C-4AFB-9BA1-992C071ED0FD}"/>
+                <a16:creationId xmlns:a16="http://schemas.microsoft.com/office/drawing/2014/main" id="{E664E6B0-58AC-4A52-A860-CBF7A4F4F913}"/>
               </a:ext>
             </a:extLst>
           </p:cNvPr>
@@ -7364,7 +7246,7 @@
           <p:cNvPr id="23" name="">
             <a:extLst xmlns:a="http://schemas.openxmlformats.org/drawingml/2006/main">
               <a:ext uri="{FF2B5EF4-FFF2-40B4-BE49-F238E27FC236}">
-                <a16:creationId xmlns:a16="http://schemas.microsoft.com/office/drawing/2014/main" id="{BA47B24D-CFE2-486D-8067-32F26B5923B7}"/>
+                <a16:creationId xmlns:a16="http://schemas.microsoft.com/office/drawing/2014/main" id="{1A0ED8FC-686E-43B5-B4EC-C379D309872B}"/>
               </a:ext>
             </a:extLst>
           </p:cNvPr>
@@ -7400,7 +7282,6 @@
           <a:lstStyle xmlns:a="http://schemas.openxmlformats.org/drawingml/2006/main"/>
           <a:p xmlns:a="http://schemas.openxmlformats.org/drawingml/2006/main">
             <a:pPr algn="l">
-              <a:buNone/>
               <a:defRPr sz="1200" b="1">
                 <a:solidFill>
                   <a:srgbClr val="6559B7"/>
@@ -7429,7 +7310,7 @@
           <p:cNvPr id="24" name="">
             <a:extLst xmlns:a="http://schemas.openxmlformats.org/drawingml/2006/main">
               <a:ext uri="{FF2B5EF4-FFF2-40B4-BE49-F238E27FC236}">
-                <a16:creationId xmlns:a16="http://schemas.microsoft.com/office/drawing/2014/main" id="{E969F786-FECE-43C8-B1F7-CEEE80E0D891}"/>
+                <a16:creationId xmlns:a16="http://schemas.microsoft.com/office/drawing/2014/main" id="{7D9B9839-EA40-4AB1-846F-9482E136BD46}"/>
               </a:ext>
             </a:extLst>
           </p:cNvPr>
@@ -7465,7 +7346,6 @@
           <a:lstStyle xmlns:a="http://schemas.openxmlformats.org/drawingml/2006/main"/>
           <a:p xmlns:a="http://schemas.openxmlformats.org/drawingml/2006/main">
             <a:pPr algn="l">
-              <a:buNone/>
               <a:defRPr sz="863" b="0">
                 <a:solidFill>
                   <a:srgbClr val="17202A"/>
@@ -7484,7 +7364,7 @@
                 <a:ea typeface="Aptos"/>
                 <a:cs typeface="Aptos"/>
               </a:rPr>
-              <a:t>Edge Discovery Engine, Incubator y EPIC Atlas buscan edge futuro y lo frenan antes de promoverlo sin evidencia.</a:t>
+              <a:t>Edge Discovery Engine, Incubator, and EPIC Atlas search for future edge and stop it from reaching runtime too early.</a:t>
             </a:r>
           </a:p>
         </p:txBody>
@@ -7494,7 +7374,7 @@
           <p:cNvPr id="25" name="">
             <a:extLst xmlns:a="http://schemas.openxmlformats.org/drawingml/2006/main">
               <a:ext uri="{FF2B5EF4-FFF2-40B4-BE49-F238E27FC236}">
-                <a16:creationId xmlns:a16="http://schemas.microsoft.com/office/drawing/2014/main" id="{1E051A21-E199-4CF9-A2FC-F5B13FF3B131}"/>
+                <a16:creationId xmlns:a16="http://schemas.microsoft.com/office/drawing/2014/main" id="{CA6450FF-324F-4B2A-AF44-54274536312C}"/>
               </a:ext>
             </a:extLst>
           </p:cNvPr>
@@ -7527,7 +7407,7 @@
           <p:cNvPr id="26" name="">
             <a:extLst xmlns:a="http://schemas.openxmlformats.org/drawingml/2006/main">
               <a:ext uri="{FF2B5EF4-FFF2-40B4-BE49-F238E27FC236}">
-                <a16:creationId xmlns:a16="http://schemas.microsoft.com/office/drawing/2014/main" id="{89690C64-B90D-4838-9679-362B16EF801B}"/>
+                <a16:creationId xmlns:a16="http://schemas.microsoft.com/office/drawing/2014/main" id="{B99DF171-B49B-462D-9878-308B966B5D1D}"/>
               </a:ext>
             </a:extLst>
           </p:cNvPr>
@@ -7563,7 +7443,6 @@
           <a:lstStyle xmlns:a="http://schemas.openxmlformats.org/drawingml/2006/main"/>
           <a:p xmlns:a="http://schemas.openxmlformats.org/drawingml/2006/main">
             <a:pPr algn="l">
-              <a:buNone/>
               <a:defRPr sz="1200" b="1">
                 <a:solidFill>
                   <a:srgbClr val="C85847"/>
@@ -7592,7 +7471,7 @@
           <p:cNvPr id="27" name="">
             <a:extLst xmlns:a="http://schemas.openxmlformats.org/drawingml/2006/main">
               <a:ext uri="{FF2B5EF4-FFF2-40B4-BE49-F238E27FC236}">
-                <a16:creationId xmlns:a16="http://schemas.microsoft.com/office/drawing/2014/main" id="{A6420BAE-7F71-45DA-966C-9623250355A1}"/>
+                <a16:creationId xmlns:a16="http://schemas.microsoft.com/office/drawing/2014/main" id="{5CA4C420-4746-4FAF-9727-2B00EAF4E170}"/>
               </a:ext>
             </a:extLst>
           </p:cNvPr>
@@ -7628,7 +7507,6 @@
           <a:lstStyle xmlns:a="http://schemas.openxmlformats.org/drawingml/2006/main"/>
           <a:p xmlns:a="http://schemas.openxmlformats.org/drawingml/2006/main">
             <a:pPr algn="l">
-              <a:buNone/>
               <a:defRPr sz="863" b="0">
                 <a:solidFill>
                   <a:srgbClr val="17202A"/>
@@ -7647,7 +7525,7 @@
                 <a:ea typeface="Aptos"/>
                 <a:cs typeface="Aptos"/>
               </a:rPr>
-              <a:t>Graphify, Guardian, dashboards y postmortems hacen visible lo que vale la pena podar, mantener u observar.</a:t>
+              <a:t>Graphify, Guardian, dashboards, and postmortems make it visible what to prune, maintain, or observe.</a:t>
             </a:r>
           </a:p>
         </p:txBody>
@@ -7657,7 +7535,7 @@
           <p:cNvPr id="28" name="">
             <a:extLst xmlns:a="http://schemas.openxmlformats.org/drawingml/2006/main">
               <a:ext uri="{FF2B5EF4-FFF2-40B4-BE49-F238E27FC236}">
-                <a16:creationId xmlns:a16="http://schemas.microsoft.com/office/drawing/2014/main" id="{BFB781D3-80E7-46AF-A8EB-9CD1EC2EE59F}"/>
+                <a16:creationId xmlns:a16="http://schemas.microsoft.com/office/drawing/2014/main" id="{8295C3C3-4B95-48B1-9ABA-F5B85C52F952}"/>
               </a:ext>
             </a:extLst>
           </p:cNvPr>
@@ -7690,7 +7568,7 @@
           <p:cNvPr id="29" name="">
             <a:extLst xmlns:a="http://schemas.openxmlformats.org/drawingml/2006/main">
               <a:ext uri="{FF2B5EF4-FFF2-40B4-BE49-F238E27FC236}">
-                <a16:creationId xmlns:a16="http://schemas.microsoft.com/office/drawing/2014/main" id="{D0E3691E-D15B-42C2-8C1C-52BE88B252E0}"/>
+                <a16:creationId xmlns:a16="http://schemas.microsoft.com/office/drawing/2014/main" id="{8CF5ECA9-ECA6-4F66-B6CD-522FA2D2AB74}"/>
               </a:ext>
             </a:extLst>
           </p:cNvPr>
@@ -7723,7 +7601,7 @@
           <p:cNvPr id="30" name="">
             <a:extLst xmlns:a="http://schemas.openxmlformats.org/drawingml/2006/main">
               <a:ext uri="{FF2B5EF4-FFF2-40B4-BE49-F238E27FC236}">
-                <a16:creationId xmlns:a16="http://schemas.microsoft.com/office/drawing/2014/main" id="{DF0D6149-0A7F-489E-95D7-928A2124CFBD}"/>
+                <a16:creationId xmlns:a16="http://schemas.microsoft.com/office/drawing/2014/main" id="{0708DA55-A631-400B-A1FC-D2EC390ABC5E}"/>
               </a:ext>
             </a:extLst>
           </p:cNvPr>
@@ -7759,7 +7637,6 @@
           <a:lstStyle xmlns:a="http://schemas.openxmlformats.org/drawingml/2006/main"/>
           <a:p xmlns:a="http://schemas.openxmlformats.org/drawingml/2006/main">
             <a:pPr algn="r">
-              <a:buNone/>
               <a:defRPr sz="750" b="0">
                 <a:solidFill>
                   <a:srgbClr val="5F6B64"/>
@@ -7786,7 +7663,7 @@
     </p:spTree>
     <p:extLst>
       <p:ext uri="{BB962C8B-B14F-4D97-AF65-F5344CB8AC3E}">
-        <p14:creationId xmlns:p14="http://schemas.microsoft.com/office/powerpoint/2010/main" val="2129151814"/>
+        <p14:creationId xmlns:p14="http://schemas.microsoft.com/office/powerpoint/2010/main" val="1372929593"/>
       </p:ext>
     </p:extLst>
   </p:cSld>
@@ -7810,7 +7687,7 @@
           <p:cNvPr id="1" name="">
             <a:extLst xmlns:a="http://schemas.openxmlformats.org/drawingml/2006/main">
               <a:ext uri="{FF2B5EF4-FFF2-40B4-BE49-F238E27FC236}">
-                <a16:creationId xmlns:a16="http://schemas.microsoft.com/office/drawing/2014/main" id="{2ECD81F9-3FFB-4B8C-BB01-7985888E9DA6}"/>
+                <a16:creationId xmlns:a16="http://schemas.microsoft.com/office/drawing/2014/main" id="{69C58622-4193-4868-A8E2-24A0592DDF2A}"/>
               </a:ext>
             </a:extLst>
           </p:cNvPr>
@@ -7845,7 +7722,7 @@
           <p:cNvPr id="2" name="">
             <a:extLst xmlns:a="http://schemas.openxmlformats.org/drawingml/2006/main">
               <a:ext uri="{FF2B5EF4-FFF2-40B4-BE49-F238E27FC236}">
-                <a16:creationId xmlns:a16="http://schemas.microsoft.com/office/drawing/2014/main" id="{54218E17-5817-4ED8-AC5D-DB7F316DDEE5}"/>
+                <a16:creationId xmlns:a16="http://schemas.microsoft.com/office/drawing/2014/main" id="{61027950-049A-4CCD-B103-EC265833C271}"/>
               </a:ext>
             </a:extLst>
           </p:cNvPr>
@@ -7880,7 +7757,7 @@
           <p:cNvPr id="3" name="">
             <a:extLst xmlns:a="http://schemas.openxmlformats.org/drawingml/2006/main">
               <a:ext uri="{FF2B5EF4-FFF2-40B4-BE49-F238E27FC236}">
-                <a16:creationId xmlns:a16="http://schemas.microsoft.com/office/drawing/2014/main" id="{B9883BAC-800E-4FF3-88CC-15BED0588896}"/>
+                <a16:creationId xmlns:a16="http://schemas.microsoft.com/office/drawing/2014/main" id="{60B52C58-1DB2-4F9E-94BD-56431C370BEA}"/>
               </a:ext>
             </a:extLst>
           </p:cNvPr>
@@ -7916,7 +7793,6 @@
           <a:lstStyle xmlns:a="http://schemas.openxmlformats.org/drawingml/2006/main"/>
           <a:p xmlns:a="http://schemas.openxmlformats.org/drawingml/2006/main">
             <a:pPr algn="l">
-              <a:buNone/>
               <a:defRPr sz="900" b="1">
                 <a:solidFill>
                   <a:srgbClr val="0F8A6A"/>
@@ -7945,7 +7821,7 @@
           <p:cNvPr id="4" name="">
             <a:extLst xmlns:a="http://schemas.openxmlformats.org/drawingml/2006/main">
               <a:ext uri="{FF2B5EF4-FFF2-40B4-BE49-F238E27FC236}">
-                <a16:creationId xmlns:a16="http://schemas.microsoft.com/office/drawing/2014/main" id="{C7A2870C-41B7-4746-90CB-057AC7B595EC}"/>
+                <a16:creationId xmlns:a16="http://schemas.microsoft.com/office/drawing/2014/main" id="{1DE4F7E8-9A78-4945-8210-83EF4E3DE331}"/>
               </a:ext>
             </a:extLst>
           </p:cNvPr>
@@ -7981,7 +7857,6 @@
           <a:lstStyle xmlns:a="http://schemas.openxmlformats.org/drawingml/2006/main"/>
           <a:p xmlns:a="http://schemas.openxmlformats.org/drawingml/2006/main">
             <a:pPr algn="l">
-              <a:buNone/>
               <a:defRPr sz="2325" b="1">
                 <a:solidFill>
                   <a:srgbClr val="17202A"/>
@@ -8000,7 +7875,7 @@
                 <a:ea typeface="Aptos Display"/>
                 <a:cs typeface="Aptos Display"/>
               </a:rPr>
-              <a:t>El valor no esta en un modulo: esta en la coordinacion entre 22 piezas con roles claros.</a:t>
+              <a:t>The value is not in one module. It is in the coordination across 22 modules with clear roles.</a:t>
             </a:r>
           </a:p>
         </p:txBody>
@@ -8010,7 +7885,7 @@
           <p:cNvPr id="5" name="">
             <a:extLst xmlns:a="http://schemas.openxmlformats.org/drawingml/2006/main">
               <a:ext uri="{FF2B5EF4-FFF2-40B4-BE49-F238E27FC236}">
-                <a16:creationId xmlns:a16="http://schemas.microsoft.com/office/drawing/2014/main" id="{9A8BA41E-841D-4A2D-A49A-C71C4026E8E1}"/>
+                <a16:creationId xmlns:a16="http://schemas.microsoft.com/office/drawing/2014/main" id="{1AA08BFE-F668-40C8-A8D9-92F8251748D9}"/>
               </a:ext>
             </a:extLst>
           </p:cNvPr>
@@ -8022,7 +7897,7 @@
         <p:spPr>
           <a:xfrm xmlns:a="http://schemas.openxmlformats.org/drawingml/2006/main">
             <a:off x="857250" y="1447800"/>
-            <a:ext cx="1257300" cy="228600"/>
+            <a:ext cx="1485900" cy="228600"/>
           </a:xfrm>
           <a:prstGeom xmlns:a="http://schemas.openxmlformats.org/drawingml/2006/main" prst="rect">
             <a:avLst/>
@@ -8043,7 +7918,7 @@
           <p:cNvPr id="6" name="">
             <a:extLst xmlns:a="http://schemas.openxmlformats.org/drawingml/2006/main">
               <a:ext uri="{FF2B5EF4-FFF2-40B4-BE49-F238E27FC236}">
-                <a16:creationId xmlns:a16="http://schemas.microsoft.com/office/drawing/2014/main" id="{E6720CC0-2A04-4A43-8482-6AF2797B400C}"/>
+                <a16:creationId xmlns:a16="http://schemas.microsoft.com/office/drawing/2014/main" id="{D2478469-A758-4D67-AB9C-FAB0714829FA}"/>
               </a:ext>
             </a:extLst>
           </p:cNvPr>
@@ -8055,7 +7930,7 @@
         <p:spPr>
           <a:xfrm xmlns:a="http://schemas.openxmlformats.org/drawingml/2006/main">
             <a:off x="857250" y="1485900"/>
-            <a:ext cx="1257300" cy="152400"/>
+            <a:ext cx="1485900" cy="152400"/>
           </a:xfrm>
           <a:prstGeom xmlns:a="http://schemas.openxmlformats.org/drawingml/2006/main" prst="rect">
             <a:avLst/>
@@ -8079,7 +7954,6 @@
           <a:lstStyle xmlns:a="http://schemas.openxmlformats.org/drawingml/2006/main"/>
           <a:p xmlns:a="http://schemas.openxmlformats.org/drawingml/2006/main">
             <a:pPr algn="ctr">
-              <a:buNone/>
               <a:defRPr sz="788" b="1">
                 <a:solidFill>
                   <a:srgbClr val="0F8A6A"/>
@@ -8108,7 +7982,7 @@
           <p:cNvPr id="7" name="">
             <a:extLst xmlns:a="http://schemas.openxmlformats.org/drawingml/2006/main">
               <a:ext uri="{FF2B5EF4-FFF2-40B4-BE49-F238E27FC236}">
-                <a16:creationId xmlns:a16="http://schemas.microsoft.com/office/drawing/2014/main" id="{7E0CDF80-6D25-463E-AE72-28CE360AC9A9}"/>
+                <a16:creationId xmlns:a16="http://schemas.microsoft.com/office/drawing/2014/main" id="{C4F1171E-A4E1-4897-B3A9-84043AA7E19B}"/>
               </a:ext>
             </a:extLst>
           </p:cNvPr>
@@ -8141,7 +8015,7 @@
           <p:cNvPr id="8" name="">
             <a:extLst xmlns:a="http://schemas.openxmlformats.org/drawingml/2006/main">
               <a:ext uri="{FF2B5EF4-FFF2-40B4-BE49-F238E27FC236}">
-                <a16:creationId xmlns:a16="http://schemas.microsoft.com/office/drawing/2014/main" id="{129DC976-50A9-4907-B4CA-505A81DA5E83}"/>
+                <a16:creationId xmlns:a16="http://schemas.microsoft.com/office/drawing/2014/main" id="{9B6869C6-D488-467B-9E5C-D0DCE4B73D12}"/>
               </a:ext>
             </a:extLst>
           </p:cNvPr>
@@ -8177,7 +8051,6 @@
           <a:lstStyle xmlns:a="http://schemas.openxmlformats.org/drawingml/2006/main"/>
           <a:p xmlns:a="http://schemas.openxmlformats.org/drawingml/2006/main">
             <a:pPr algn="l">
-              <a:buNone/>
               <a:defRPr sz="900" b="1">
                 <a:solidFill>
                   <a:srgbClr val="FFFFFF"/>
@@ -8196,7 +8069,7 @@
                 <a:ea typeface="Aptos"/>
                 <a:cs typeface="Aptos"/>
               </a:rPr>
-              <a:t>Modulo</a:t>
+              <a:t>Module</a:t>
             </a:r>
           </a:p>
         </p:txBody>
@@ -8206,7 +8079,7 @@
           <p:cNvPr id="9" name="">
             <a:extLst xmlns:a="http://schemas.openxmlformats.org/drawingml/2006/main">
               <a:ext uri="{FF2B5EF4-FFF2-40B4-BE49-F238E27FC236}">
-                <a16:creationId xmlns:a16="http://schemas.microsoft.com/office/drawing/2014/main" id="{6934D3CA-8C38-45EC-9472-71974FC44FAF}"/>
+                <a16:creationId xmlns:a16="http://schemas.microsoft.com/office/drawing/2014/main" id="{C2243AF1-0AA0-457E-A5DA-6FE1150847DA}"/>
               </a:ext>
             </a:extLst>
           </p:cNvPr>
@@ -8239,7 +8112,7 @@
           <p:cNvPr id="10" name="">
             <a:extLst xmlns:a="http://schemas.openxmlformats.org/drawingml/2006/main">
               <a:ext uri="{FF2B5EF4-FFF2-40B4-BE49-F238E27FC236}">
-                <a16:creationId xmlns:a16="http://schemas.microsoft.com/office/drawing/2014/main" id="{9520B8A0-CBB3-49EE-9C96-EC1C7FE9D401}"/>
+                <a16:creationId xmlns:a16="http://schemas.microsoft.com/office/drawing/2014/main" id="{BF54B869-F4FB-4C2F-A24B-42AAA0AE38B8}"/>
               </a:ext>
             </a:extLst>
           </p:cNvPr>
@@ -8275,7 +8148,6 @@
           <a:lstStyle xmlns:a="http://schemas.openxmlformats.org/drawingml/2006/main"/>
           <a:p xmlns:a="http://schemas.openxmlformats.org/drawingml/2006/main">
             <a:pPr algn="l">
-              <a:buNone/>
               <a:defRPr sz="900" b="1">
                 <a:solidFill>
                   <a:srgbClr val="FFFFFF"/>
@@ -8294,7 +8166,7 @@
                 <a:ea typeface="Aptos"/>
                 <a:cs typeface="Aptos"/>
               </a:rPr>
-              <a:t>Tipo</a:t>
+              <a:t>Type</a:t>
             </a:r>
           </a:p>
         </p:txBody>
@@ -8304,7 +8176,7 @@
           <p:cNvPr id="11" name="">
             <a:extLst xmlns:a="http://schemas.openxmlformats.org/drawingml/2006/main">
               <a:ext uri="{FF2B5EF4-FFF2-40B4-BE49-F238E27FC236}">
-                <a16:creationId xmlns:a16="http://schemas.microsoft.com/office/drawing/2014/main" id="{3FBAFEDC-AB23-4CCB-8C4F-24A580CD3F9C}"/>
+                <a16:creationId xmlns:a16="http://schemas.microsoft.com/office/drawing/2014/main" id="{B5116ADE-5312-481A-A14F-C1A416B688DD}"/>
               </a:ext>
             </a:extLst>
           </p:cNvPr>
@@ -8337,7 +8209,7 @@
           <p:cNvPr id="12" name="">
             <a:extLst xmlns:a="http://schemas.openxmlformats.org/drawingml/2006/main">
               <a:ext uri="{FF2B5EF4-FFF2-40B4-BE49-F238E27FC236}">
-                <a16:creationId xmlns:a16="http://schemas.microsoft.com/office/drawing/2014/main" id="{748FB37A-4356-4CAA-814C-0E54F1F9BF6E}"/>
+                <a16:creationId xmlns:a16="http://schemas.microsoft.com/office/drawing/2014/main" id="{46869FFD-8F8B-4434-93EF-F20A46A450EF}"/>
               </a:ext>
             </a:extLst>
           </p:cNvPr>
@@ -8373,7 +8245,6 @@
           <a:lstStyle xmlns:a="http://schemas.openxmlformats.org/drawingml/2006/main"/>
           <a:p xmlns:a="http://schemas.openxmlformats.org/drawingml/2006/main">
             <a:pPr algn="l">
-              <a:buNone/>
               <a:defRPr sz="900" b="1">
                 <a:solidFill>
                   <a:srgbClr val="FFFFFF"/>
@@ -8392,7 +8263,7 @@
                 <a:ea typeface="Aptos"/>
                 <a:cs typeface="Aptos"/>
               </a:rPr>
-              <a:t>Rol</a:t>
+              <a:t>Role</a:t>
             </a:r>
           </a:p>
         </p:txBody>
@@ -8402,7 +8273,7 @@
           <p:cNvPr id="13" name="">
             <a:extLst xmlns:a="http://schemas.openxmlformats.org/drawingml/2006/main">
               <a:ext uri="{FF2B5EF4-FFF2-40B4-BE49-F238E27FC236}">
-                <a16:creationId xmlns:a16="http://schemas.microsoft.com/office/drawing/2014/main" id="{2D33EF0A-921E-443B-83B5-7B09F5FB0C31}"/>
+                <a16:creationId xmlns:a16="http://schemas.microsoft.com/office/drawing/2014/main" id="{F66B12EC-746D-4D04-A048-B8E1D815D193}"/>
               </a:ext>
             </a:extLst>
           </p:cNvPr>
@@ -8435,7 +8306,7 @@
           <p:cNvPr id="14" name="">
             <a:extLst xmlns:a="http://schemas.openxmlformats.org/drawingml/2006/main">
               <a:ext uri="{FF2B5EF4-FFF2-40B4-BE49-F238E27FC236}">
-                <a16:creationId xmlns:a16="http://schemas.microsoft.com/office/drawing/2014/main" id="{C51A4283-31E0-4C11-85D4-746E63A42667}"/>
+                <a16:creationId xmlns:a16="http://schemas.microsoft.com/office/drawing/2014/main" id="{F790FF7E-3CA7-41BA-90BB-2B9F7BCE0708}"/>
               </a:ext>
             </a:extLst>
           </p:cNvPr>
@@ -8471,7 +8342,6 @@
           <a:lstStyle xmlns:a="http://schemas.openxmlformats.org/drawingml/2006/main"/>
           <a:p xmlns:a="http://schemas.openxmlformats.org/drawingml/2006/main">
             <a:pPr algn="l">
-              <a:buNone/>
               <a:defRPr sz="900" b="1">
                 <a:solidFill>
                   <a:srgbClr val="FFFFFF"/>
@@ -8490,7 +8360,7 @@
                 <a:ea typeface="Aptos"/>
                 <a:cs typeface="Aptos"/>
               </a:rPr>
-              <a:t>Por que importa</a:t>
+              <a:t>Why it matters</a:t>
             </a:r>
           </a:p>
         </p:txBody>
@@ -8500,7 +8370,7 @@
           <p:cNvPr id="15" name="">
             <a:extLst xmlns:a="http://schemas.openxmlformats.org/drawingml/2006/main">
               <a:ext uri="{FF2B5EF4-FFF2-40B4-BE49-F238E27FC236}">
-                <a16:creationId xmlns:a16="http://schemas.microsoft.com/office/drawing/2014/main" id="{5F9D67F1-DCDE-47DA-85F7-80F498E32CA3}"/>
+                <a16:creationId xmlns:a16="http://schemas.microsoft.com/office/drawing/2014/main" id="{28DC13FC-6963-427C-880E-337C7C6F3E96}"/>
               </a:ext>
             </a:extLst>
           </p:cNvPr>
@@ -8533,7 +8403,7 @@
           <p:cNvPr id="16" name="">
             <a:extLst xmlns:a="http://schemas.openxmlformats.org/drawingml/2006/main">
               <a:ext uri="{FF2B5EF4-FFF2-40B4-BE49-F238E27FC236}">
-                <a16:creationId xmlns:a16="http://schemas.microsoft.com/office/drawing/2014/main" id="{DB6C1EDA-D1BA-4590-A699-1215848B3ABF}"/>
+                <a16:creationId xmlns:a16="http://schemas.microsoft.com/office/drawing/2014/main" id="{A1B29ECC-7816-4A76-8FBB-EDC4F0A553F1}"/>
               </a:ext>
             </a:extLst>
           </p:cNvPr>
@@ -8569,7 +8439,6 @@
           <a:lstStyle xmlns:a="http://schemas.openxmlformats.org/drawingml/2006/main"/>
           <a:p xmlns:a="http://schemas.openxmlformats.org/drawingml/2006/main">
             <a:pPr algn="l">
-              <a:buNone/>
               <a:defRPr sz="825" b="0">
                 <a:solidFill>
                   <a:srgbClr val="17202A"/>
@@ -8598,7 +8467,7 @@
           <p:cNvPr id="17" name="">
             <a:extLst xmlns:a="http://schemas.openxmlformats.org/drawingml/2006/main">
               <a:ext uri="{FF2B5EF4-FFF2-40B4-BE49-F238E27FC236}">
-                <a16:creationId xmlns:a16="http://schemas.microsoft.com/office/drawing/2014/main" id="{02B4A886-6F88-4CC9-87E5-F0CCD8B6ECC6}"/>
+                <a16:creationId xmlns:a16="http://schemas.microsoft.com/office/drawing/2014/main" id="{1EE68DE0-4D39-4CEA-96A3-625421792478}"/>
               </a:ext>
             </a:extLst>
           </p:cNvPr>
@@ -8631,7 +8500,7 @@
           <p:cNvPr id="18" name="">
             <a:extLst xmlns:a="http://schemas.openxmlformats.org/drawingml/2006/main">
               <a:ext uri="{FF2B5EF4-FFF2-40B4-BE49-F238E27FC236}">
-                <a16:creationId xmlns:a16="http://schemas.microsoft.com/office/drawing/2014/main" id="{144F566B-41F4-4462-950A-9DF9F1A5F194}"/>
+                <a16:creationId xmlns:a16="http://schemas.microsoft.com/office/drawing/2014/main" id="{98E00C1A-9AA6-4BFC-AEDC-0CC6253A397B}"/>
               </a:ext>
             </a:extLst>
           </p:cNvPr>
@@ -8667,7 +8536,6 @@
           <a:lstStyle xmlns:a="http://schemas.openxmlformats.org/drawingml/2006/main"/>
           <a:p xmlns:a="http://schemas.openxmlformats.org/drawingml/2006/main">
             <a:pPr algn="l">
-              <a:buNone/>
               <a:defRPr sz="863" b="1">
                 <a:solidFill>
                   <a:srgbClr val="0F8A6A"/>
@@ -8696,7 +8564,7 @@
           <p:cNvPr id="19" name="">
             <a:extLst xmlns:a="http://schemas.openxmlformats.org/drawingml/2006/main">
               <a:ext uri="{FF2B5EF4-FFF2-40B4-BE49-F238E27FC236}">
-                <a16:creationId xmlns:a16="http://schemas.microsoft.com/office/drawing/2014/main" id="{0E2EA3A4-98A0-4E49-99E8-A7E07AF05750}"/>
+                <a16:creationId xmlns:a16="http://schemas.microsoft.com/office/drawing/2014/main" id="{E52BB389-5A4B-4C96-B14B-5B4D2AA66B25}"/>
               </a:ext>
             </a:extLst>
           </p:cNvPr>
@@ -8729,7 +8597,7 @@
           <p:cNvPr id="20" name="">
             <a:extLst xmlns:a="http://schemas.openxmlformats.org/drawingml/2006/main">
               <a:ext uri="{FF2B5EF4-FFF2-40B4-BE49-F238E27FC236}">
-                <a16:creationId xmlns:a16="http://schemas.microsoft.com/office/drawing/2014/main" id="{B45A87AD-2223-4600-9EF3-376A289EBC58}"/>
+                <a16:creationId xmlns:a16="http://schemas.microsoft.com/office/drawing/2014/main" id="{2B04F643-4668-499A-BDEB-F9A22CBBB64B}"/>
               </a:ext>
             </a:extLst>
           </p:cNvPr>
@@ -8765,7 +8633,6 @@
           <a:lstStyle xmlns:a="http://schemas.openxmlformats.org/drawingml/2006/main"/>
           <a:p xmlns:a="http://schemas.openxmlformats.org/drawingml/2006/main">
             <a:pPr algn="l">
-              <a:buNone/>
               <a:defRPr sz="863" b="0">
                 <a:solidFill>
                   <a:srgbClr val="17202A"/>
@@ -8784,7 +8651,7 @@
                 <a:ea typeface="Aptos"/>
                 <a:cs typeface="Aptos"/>
               </a:rPr>
-              <a:t>robots y runtimes</a:t>
+              <a:t>robots and runtimes</a:t>
             </a:r>
           </a:p>
         </p:txBody>
@@ -8794,7 +8661,7 @@
           <p:cNvPr id="21" name="">
             <a:extLst xmlns:a="http://schemas.openxmlformats.org/drawingml/2006/main">
               <a:ext uri="{FF2B5EF4-FFF2-40B4-BE49-F238E27FC236}">
-                <a16:creationId xmlns:a16="http://schemas.microsoft.com/office/drawing/2014/main" id="{476C4899-AE6D-4A3D-AC8F-E97294A99855}"/>
+                <a16:creationId xmlns:a16="http://schemas.microsoft.com/office/drawing/2014/main" id="{0164EE36-5F97-4A3B-810F-7703BA65FC7A}"/>
               </a:ext>
             </a:extLst>
           </p:cNvPr>
@@ -8827,7 +8694,7 @@
           <p:cNvPr id="22" name="">
             <a:extLst xmlns:a="http://schemas.openxmlformats.org/drawingml/2006/main">
               <a:ext uri="{FF2B5EF4-FFF2-40B4-BE49-F238E27FC236}">
-                <a16:creationId xmlns:a16="http://schemas.microsoft.com/office/drawing/2014/main" id="{AC3D4B54-2802-42EB-9285-00A923CDD319}"/>
+                <a16:creationId xmlns:a16="http://schemas.microsoft.com/office/drawing/2014/main" id="{9A9EE1B2-9AE2-4C82-B06E-7D53EE7AB2D8}"/>
               </a:ext>
             </a:extLst>
           </p:cNvPr>
@@ -8863,7 +8730,6 @@
           <a:lstStyle xmlns:a="http://schemas.openxmlformats.org/drawingml/2006/main"/>
           <a:p xmlns:a="http://schemas.openxmlformats.org/drawingml/2006/main">
             <a:pPr algn="l">
-              <a:buNone/>
               <a:defRPr sz="863" b="0">
                 <a:solidFill>
                   <a:srgbClr val="17202A"/>
@@ -8882,7 +8748,7 @@
                 <a:ea typeface="Aptos"/>
                 <a:cs typeface="Aptos"/>
               </a:rPr>
-              <a:t>8 superficies de operacion con estilos y grados de madurez distintos</a:t>
+              <a:t>8 operating surfaces with different styles and maturity levels</a:t>
             </a:r>
           </a:p>
         </p:txBody>
@@ -8892,7 +8758,7 @@
           <p:cNvPr id="23" name="">
             <a:extLst xmlns:a="http://schemas.openxmlformats.org/drawingml/2006/main">
               <a:ext uri="{FF2B5EF4-FFF2-40B4-BE49-F238E27FC236}">
-                <a16:creationId xmlns:a16="http://schemas.microsoft.com/office/drawing/2014/main" id="{558A91D1-1793-4112-8441-6BE44E5EF570}"/>
+                <a16:creationId xmlns:a16="http://schemas.microsoft.com/office/drawing/2014/main" id="{673C2228-FD0B-4AFD-B609-C5A7BA1C61B4}"/>
               </a:ext>
             </a:extLst>
           </p:cNvPr>
@@ -8925,7 +8791,7 @@
           <p:cNvPr id="24" name="">
             <a:extLst xmlns:a="http://schemas.openxmlformats.org/drawingml/2006/main">
               <a:ext uri="{FF2B5EF4-FFF2-40B4-BE49-F238E27FC236}">
-                <a16:creationId xmlns:a16="http://schemas.microsoft.com/office/drawing/2014/main" id="{AE30F5FF-DB06-4853-B5AD-0F44256BDBFF}"/>
+                <a16:creationId xmlns:a16="http://schemas.microsoft.com/office/drawing/2014/main" id="{0AE64077-8F91-4D82-9289-2EDCBE5F5CA6}"/>
               </a:ext>
             </a:extLst>
           </p:cNvPr>
@@ -8961,7 +8827,6 @@
           <a:lstStyle xmlns:a="http://schemas.openxmlformats.org/drawingml/2006/main"/>
           <a:p xmlns:a="http://schemas.openxmlformats.org/drawingml/2006/main">
             <a:pPr algn="l">
-              <a:buNone/>
               <a:defRPr sz="825" b="0">
                 <a:solidFill>
                   <a:srgbClr val="17202A"/>
@@ -8990,7 +8855,7 @@
           <p:cNvPr id="25" name="">
             <a:extLst xmlns:a="http://schemas.openxmlformats.org/drawingml/2006/main">
               <a:ext uri="{FF2B5EF4-FFF2-40B4-BE49-F238E27FC236}">
-                <a16:creationId xmlns:a16="http://schemas.microsoft.com/office/drawing/2014/main" id="{4079C9D9-CD4A-4AE4-9CEE-8867F0BBF3AE}"/>
+                <a16:creationId xmlns:a16="http://schemas.microsoft.com/office/drawing/2014/main" id="{F4B2EA75-0EDB-4F70-9FE2-71582F7B9ECE}"/>
               </a:ext>
             </a:extLst>
           </p:cNvPr>
@@ -9023,7 +8888,7 @@
           <p:cNvPr id="26" name="">
             <a:extLst xmlns:a="http://schemas.openxmlformats.org/drawingml/2006/main">
               <a:ext uri="{FF2B5EF4-FFF2-40B4-BE49-F238E27FC236}">
-                <a16:creationId xmlns:a16="http://schemas.microsoft.com/office/drawing/2014/main" id="{D707E6C4-96FC-4FAA-B2F1-8E482E8BA8C0}"/>
+                <a16:creationId xmlns:a16="http://schemas.microsoft.com/office/drawing/2014/main" id="{F3814411-D226-4141-AD65-FC2AD2F70F54}"/>
               </a:ext>
             </a:extLst>
           </p:cNvPr>
@@ -9059,7 +8924,6 @@
           <a:lstStyle xmlns:a="http://schemas.openxmlformats.org/drawingml/2006/main"/>
           <a:p xmlns:a="http://schemas.openxmlformats.org/drawingml/2006/main">
             <a:pPr algn="l">
-              <a:buNone/>
               <a:defRPr sz="863" b="1">
                 <a:solidFill>
                   <a:srgbClr val="0F8A6A"/>
@@ -9088,7 +8952,7 @@
           <p:cNvPr id="27" name="">
             <a:extLst xmlns:a="http://schemas.openxmlformats.org/drawingml/2006/main">
               <a:ext uri="{FF2B5EF4-FFF2-40B4-BE49-F238E27FC236}">
-                <a16:creationId xmlns:a16="http://schemas.microsoft.com/office/drawing/2014/main" id="{B0A785C2-6DF5-423E-BE54-13194289A1E5}"/>
+                <a16:creationId xmlns:a16="http://schemas.microsoft.com/office/drawing/2014/main" id="{8EB6DF9A-A5CD-436A-96A8-CB7AD24A72E7}"/>
               </a:ext>
             </a:extLst>
           </p:cNvPr>
@@ -9121,7 +8985,7 @@
           <p:cNvPr id="28" name="">
             <a:extLst xmlns:a="http://schemas.openxmlformats.org/drawingml/2006/main">
               <a:ext uri="{FF2B5EF4-FFF2-40B4-BE49-F238E27FC236}">
-                <a16:creationId xmlns:a16="http://schemas.microsoft.com/office/drawing/2014/main" id="{530971CA-3604-499B-82C0-AF005B824479}"/>
+                <a16:creationId xmlns:a16="http://schemas.microsoft.com/office/drawing/2014/main" id="{95AF564E-C747-4F1A-AE36-F93D78C8F8EF}"/>
               </a:ext>
             </a:extLst>
           </p:cNvPr>
@@ -9157,7 +9021,6 @@
           <a:lstStyle xmlns:a="http://schemas.openxmlformats.org/drawingml/2006/main"/>
           <a:p xmlns:a="http://schemas.openxmlformats.org/drawingml/2006/main">
             <a:pPr algn="l">
-              <a:buNone/>
               <a:defRPr sz="863" b="0">
                 <a:solidFill>
                   <a:srgbClr val="17202A"/>
@@ -9186,7 +9049,7 @@
           <p:cNvPr id="29" name="">
             <a:extLst xmlns:a="http://schemas.openxmlformats.org/drawingml/2006/main">
               <a:ext uri="{FF2B5EF4-FFF2-40B4-BE49-F238E27FC236}">
-                <a16:creationId xmlns:a16="http://schemas.microsoft.com/office/drawing/2014/main" id="{0C54B64F-FD39-4F51-A781-209CDB865181}"/>
+                <a16:creationId xmlns:a16="http://schemas.microsoft.com/office/drawing/2014/main" id="{A0282735-7EC2-4A4D-9240-155064425E89}"/>
               </a:ext>
             </a:extLst>
           </p:cNvPr>
@@ -9219,7 +9082,7 @@
           <p:cNvPr id="30" name="">
             <a:extLst xmlns:a="http://schemas.openxmlformats.org/drawingml/2006/main">
               <a:ext uri="{FF2B5EF4-FFF2-40B4-BE49-F238E27FC236}">
-                <a16:creationId xmlns:a16="http://schemas.microsoft.com/office/drawing/2014/main" id="{AECCE73D-9370-498E-9CCC-FDC1B89E2292}"/>
+                <a16:creationId xmlns:a16="http://schemas.microsoft.com/office/drawing/2014/main" id="{2A696EB8-732F-438D-9FA9-F630C830907D}"/>
               </a:ext>
             </a:extLst>
           </p:cNvPr>
@@ -9255,7 +9118,6 @@
           <a:lstStyle xmlns:a="http://schemas.openxmlformats.org/drawingml/2006/main"/>
           <a:p xmlns:a="http://schemas.openxmlformats.org/drawingml/2006/main">
             <a:pPr algn="l">
-              <a:buNone/>
               <a:defRPr sz="863" b="0">
                 <a:solidFill>
                   <a:srgbClr val="17202A"/>
@@ -9274,7 +9136,7 @@
                 <a:ea typeface="Aptos"/>
                 <a:cs typeface="Aptos"/>
               </a:rPr>
-              <a:t>convierte ingest en contrato reusable</a:t>
+              <a:t>turns ingest into a reusable contract</a:t>
             </a:r>
           </a:p>
         </p:txBody>
@@ -9284,7 +9146,7 @@
           <p:cNvPr id="31" name="">
             <a:extLst xmlns:a="http://schemas.openxmlformats.org/drawingml/2006/main">
               <a:ext uri="{FF2B5EF4-FFF2-40B4-BE49-F238E27FC236}">
-                <a16:creationId xmlns:a16="http://schemas.microsoft.com/office/drawing/2014/main" id="{AF4BFD48-D853-40C1-8DA4-2CA9D522016C}"/>
+                <a16:creationId xmlns:a16="http://schemas.microsoft.com/office/drawing/2014/main" id="{67FE89A7-6E8F-4E21-92E3-EB8CDAC1C34E}"/>
               </a:ext>
             </a:extLst>
           </p:cNvPr>
@@ -9317,7 +9179,7 @@
           <p:cNvPr id="32" name="">
             <a:extLst xmlns:a="http://schemas.openxmlformats.org/drawingml/2006/main">
               <a:ext uri="{FF2B5EF4-FFF2-40B4-BE49-F238E27FC236}">
-                <a16:creationId xmlns:a16="http://schemas.microsoft.com/office/drawing/2014/main" id="{6C794E09-6F67-4DE8-8B15-DBE810B10324}"/>
+                <a16:creationId xmlns:a16="http://schemas.microsoft.com/office/drawing/2014/main" id="{337DFFA4-7F17-487F-B4DC-D770F2D7C95B}"/>
               </a:ext>
             </a:extLst>
           </p:cNvPr>
@@ -9353,7 +9215,6 @@
           <a:lstStyle xmlns:a="http://schemas.openxmlformats.org/drawingml/2006/main"/>
           <a:p xmlns:a="http://schemas.openxmlformats.org/drawingml/2006/main">
             <a:pPr algn="l">
-              <a:buNone/>
               <a:defRPr sz="825" b="0">
                 <a:solidFill>
                   <a:srgbClr val="17202A"/>
@@ -9382,7 +9243,7 @@
           <p:cNvPr id="33" name="">
             <a:extLst xmlns:a="http://schemas.openxmlformats.org/drawingml/2006/main">
               <a:ext uri="{FF2B5EF4-FFF2-40B4-BE49-F238E27FC236}">
-                <a16:creationId xmlns:a16="http://schemas.microsoft.com/office/drawing/2014/main" id="{270DBFAA-718C-4FF8-87C8-5AAE9C0FC0F8}"/>
+                <a16:creationId xmlns:a16="http://schemas.microsoft.com/office/drawing/2014/main" id="{F1F98FDC-DE7A-4A0D-8B68-398CED42B71A}"/>
               </a:ext>
             </a:extLst>
           </p:cNvPr>
@@ -9415,7 +9276,7 @@
           <p:cNvPr id="34" name="">
             <a:extLst xmlns:a="http://schemas.openxmlformats.org/drawingml/2006/main">
               <a:ext uri="{FF2B5EF4-FFF2-40B4-BE49-F238E27FC236}">
-                <a16:creationId xmlns:a16="http://schemas.microsoft.com/office/drawing/2014/main" id="{A52847F0-F730-495E-83B6-9AD5FBFBA592}"/>
+                <a16:creationId xmlns:a16="http://schemas.microsoft.com/office/drawing/2014/main" id="{A27D60AE-1B32-46AB-8EB1-2E3E31198745}"/>
               </a:ext>
             </a:extLst>
           </p:cNvPr>
@@ -9451,7 +9312,6 @@
           <a:lstStyle xmlns:a="http://schemas.openxmlformats.org/drawingml/2006/main"/>
           <a:p xmlns:a="http://schemas.openxmlformats.org/drawingml/2006/main">
             <a:pPr algn="l">
-              <a:buNone/>
               <a:defRPr sz="863" b="1">
                 <a:solidFill>
                   <a:srgbClr val="0F8A6A"/>
@@ -9480,7 +9340,7 @@
           <p:cNvPr id="35" name="">
             <a:extLst xmlns:a="http://schemas.openxmlformats.org/drawingml/2006/main">
               <a:ext uri="{FF2B5EF4-FFF2-40B4-BE49-F238E27FC236}">
-                <a16:creationId xmlns:a16="http://schemas.microsoft.com/office/drawing/2014/main" id="{27435DD6-7532-44A9-87C7-F431093FF8DE}"/>
+                <a16:creationId xmlns:a16="http://schemas.microsoft.com/office/drawing/2014/main" id="{D96DC2DE-8599-46E8-9522-19094E49D302}"/>
               </a:ext>
             </a:extLst>
           </p:cNvPr>
@@ -9513,7 +9373,7 @@
           <p:cNvPr id="36" name="">
             <a:extLst xmlns:a="http://schemas.openxmlformats.org/drawingml/2006/main">
               <a:ext uri="{FF2B5EF4-FFF2-40B4-BE49-F238E27FC236}">
-                <a16:creationId xmlns:a16="http://schemas.microsoft.com/office/drawing/2014/main" id="{21A490C6-1BC7-4C72-B894-A442DCB4BBB1}"/>
+                <a16:creationId xmlns:a16="http://schemas.microsoft.com/office/drawing/2014/main" id="{65937D10-6D52-4209-B74D-4244C2B688D7}"/>
               </a:ext>
             </a:extLst>
           </p:cNvPr>
@@ -9549,7 +9409,6 @@
           <a:lstStyle xmlns:a="http://schemas.openxmlformats.org/drawingml/2006/main"/>
           <a:p xmlns:a="http://schemas.openxmlformats.org/drawingml/2006/main">
             <a:pPr algn="l">
-              <a:buNone/>
               <a:defRPr sz="863" b="0">
                 <a:solidFill>
                   <a:srgbClr val="17202A"/>
@@ -9568,7 +9427,7 @@
                 <a:ea typeface="Aptos"/>
                 <a:cs typeface="Aptos"/>
               </a:rPr>
-              <a:t>replay y validacion</a:t>
+              <a:t>replay and validation</a:t>
             </a:r>
           </a:p>
         </p:txBody>
@@ -9578,7 +9437,7 @@
           <p:cNvPr id="37" name="">
             <a:extLst xmlns:a="http://schemas.openxmlformats.org/drawingml/2006/main">
               <a:ext uri="{FF2B5EF4-FFF2-40B4-BE49-F238E27FC236}">
-                <a16:creationId xmlns:a16="http://schemas.microsoft.com/office/drawing/2014/main" id="{1DBBC38C-C46B-4DD9-8270-20EC32140604}"/>
+                <a16:creationId xmlns:a16="http://schemas.microsoft.com/office/drawing/2014/main" id="{9911339A-BEE1-4FCB-AD0C-D0CB482F158E}"/>
               </a:ext>
             </a:extLst>
           </p:cNvPr>
@@ -9611,7 +9470,7 @@
           <p:cNvPr id="38" name="">
             <a:extLst xmlns:a="http://schemas.openxmlformats.org/drawingml/2006/main">
               <a:ext uri="{FF2B5EF4-FFF2-40B4-BE49-F238E27FC236}">
-                <a16:creationId xmlns:a16="http://schemas.microsoft.com/office/drawing/2014/main" id="{DC6E1485-9F22-45A1-9724-1F2461E3CE8F}"/>
+                <a16:creationId xmlns:a16="http://schemas.microsoft.com/office/drawing/2014/main" id="{68B5B3FC-E1FB-476C-8977-E62DFA907409}"/>
               </a:ext>
             </a:extLst>
           </p:cNvPr>
@@ -9647,7 +9506,6 @@
           <a:lstStyle xmlns:a="http://schemas.openxmlformats.org/drawingml/2006/main"/>
           <a:p xmlns:a="http://schemas.openxmlformats.org/drawingml/2006/main">
             <a:pPr algn="l">
-              <a:buNone/>
               <a:defRPr sz="863" b="0">
                 <a:solidFill>
                   <a:srgbClr val="17202A"/>
@@ -9666,7 +9524,7 @@
                 <a:ea typeface="Aptos"/>
                 <a:cs typeface="Aptos"/>
               </a:rPr>
-              <a:t>permiten probar sin tocar live</a:t>
+              <a:t>lets the team test without touching live</a:t>
             </a:r>
           </a:p>
         </p:txBody>
@@ -9676,7 +9534,7 @@
           <p:cNvPr id="39" name="">
             <a:extLst xmlns:a="http://schemas.openxmlformats.org/drawingml/2006/main">
               <a:ext uri="{FF2B5EF4-FFF2-40B4-BE49-F238E27FC236}">
-                <a16:creationId xmlns:a16="http://schemas.microsoft.com/office/drawing/2014/main" id="{3C61CE53-900D-4572-A8DC-520046414663}"/>
+                <a16:creationId xmlns:a16="http://schemas.microsoft.com/office/drawing/2014/main" id="{B5D53035-48CC-47D1-AB54-7331818C35A7}"/>
               </a:ext>
             </a:extLst>
           </p:cNvPr>
@@ -9709,7 +9567,7 @@
           <p:cNvPr id="40" name="">
             <a:extLst xmlns:a="http://schemas.openxmlformats.org/drawingml/2006/main">
               <a:ext uri="{FF2B5EF4-FFF2-40B4-BE49-F238E27FC236}">
-                <a16:creationId xmlns:a16="http://schemas.microsoft.com/office/drawing/2014/main" id="{A954E0A8-3188-4789-9AE0-E8F11BBD5715}"/>
+                <a16:creationId xmlns:a16="http://schemas.microsoft.com/office/drawing/2014/main" id="{6CDAEE8A-9D70-4B47-B089-EE39C1C2691B}"/>
               </a:ext>
             </a:extLst>
           </p:cNvPr>
@@ -9745,7 +9603,6 @@
           <a:lstStyle xmlns:a="http://schemas.openxmlformats.org/drawingml/2006/main"/>
           <a:p xmlns:a="http://schemas.openxmlformats.org/drawingml/2006/main">
             <a:pPr algn="l">
-              <a:buNone/>
               <a:defRPr sz="825" b="0">
                 <a:solidFill>
                   <a:srgbClr val="17202A"/>
@@ -9774,7 +9631,7 @@
           <p:cNvPr id="41" name="">
             <a:extLst xmlns:a="http://schemas.openxmlformats.org/drawingml/2006/main">
               <a:ext uri="{FF2B5EF4-FFF2-40B4-BE49-F238E27FC236}">
-                <a16:creationId xmlns:a16="http://schemas.microsoft.com/office/drawing/2014/main" id="{E4D7BC77-A627-45E5-9F83-853C8D452B94}"/>
+                <a16:creationId xmlns:a16="http://schemas.microsoft.com/office/drawing/2014/main" id="{26CB2625-CEE3-49DD-B66C-60DC68D29D0C}"/>
               </a:ext>
             </a:extLst>
           </p:cNvPr>
@@ -9807,7 +9664,7 @@
           <p:cNvPr id="42" name="">
             <a:extLst xmlns:a="http://schemas.openxmlformats.org/drawingml/2006/main">
               <a:ext uri="{FF2B5EF4-FFF2-40B4-BE49-F238E27FC236}">
-                <a16:creationId xmlns:a16="http://schemas.microsoft.com/office/drawing/2014/main" id="{545776E3-012C-48B4-9627-6F7C4FF395C7}"/>
+                <a16:creationId xmlns:a16="http://schemas.microsoft.com/office/drawing/2014/main" id="{2F451C05-9A39-45C3-9A53-EACE8AEFA2BD}"/>
               </a:ext>
             </a:extLst>
           </p:cNvPr>
@@ -9843,7 +9700,6 @@
           <a:lstStyle xmlns:a="http://schemas.openxmlformats.org/drawingml/2006/main"/>
           <a:p xmlns:a="http://schemas.openxmlformats.org/drawingml/2006/main">
             <a:pPr algn="l">
-              <a:buNone/>
               <a:defRPr sz="863" b="1">
                 <a:solidFill>
                   <a:srgbClr val="0F8A6A"/>
@@ -9872,7 +9728,7 @@
           <p:cNvPr id="43" name="">
             <a:extLst xmlns:a="http://schemas.openxmlformats.org/drawingml/2006/main">
               <a:ext uri="{FF2B5EF4-FFF2-40B4-BE49-F238E27FC236}">
-                <a16:creationId xmlns:a16="http://schemas.microsoft.com/office/drawing/2014/main" id="{33A794AD-BCC4-48AA-8C6B-708E08FF77BE}"/>
+                <a16:creationId xmlns:a16="http://schemas.microsoft.com/office/drawing/2014/main" id="{4B9CE17C-150D-4FA6-89A2-040643DA0051}"/>
               </a:ext>
             </a:extLst>
           </p:cNvPr>
@@ -9905,7 +9761,7 @@
           <p:cNvPr id="44" name="">
             <a:extLst xmlns:a="http://schemas.openxmlformats.org/drawingml/2006/main">
               <a:ext uri="{FF2B5EF4-FFF2-40B4-BE49-F238E27FC236}">
-                <a16:creationId xmlns:a16="http://schemas.microsoft.com/office/drawing/2014/main" id="{BE0BB0A0-C317-47D3-BB33-1FEB41EC748F}"/>
+                <a16:creationId xmlns:a16="http://schemas.microsoft.com/office/drawing/2014/main" id="{838F7074-D681-49C3-BE22-9146EBCA2003}"/>
               </a:ext>
             </a:extLst>
           </p:cNvPr>
@@ -9941,7 +9797,6 @@
           <a:lstStyle xmlns:a="http://schemas.openxmlformats.org/drawingml/2006/main"/>
           <a:p xmlns:a="http://schemas.openxmlformats.org/drawingml/2006/main">
             <a:pPr algn="l">
-              <a:buNone/>
               <a:defRPr sz="863" b="0">
                 <a:solidFill>
                   <a:srgbClr val="17202A"/>
@@ -9960,7 +9815,7 @@
                 <a:ea typeface="Aptos"/>
                 <a:cs typeface="Aptos"/>
               </a:rPr>
-              <a:t>explicar y sintetizar comportamiento</a:t>
+              <a:t>explain and synthesize behavior</a:t>
             </a:r>
           </a:p>
         </p:txBody>
@@ -9970,7 +9825,7 @@
           <p:cNvPr id="45" name="">
             <a:extLst xmlns:a="http://schemas.openxmlformats.org/drawingml/2006/main">
               <a:ext uri="{FF2B5EF4-FFF2-40B4-BE49-F238E27FC236}">
-                <a16:creationId xmlns:a16="http://schemas.microsoft.com/office/drawing/2014/main" id="{B179E921-81D5-472F-94F5-8E3BF42E8153}"/>
+                <a16:creationId xmlns:a16="http://schemas.microsoft.com/office/drawing/2014/main" id="{CBB365E8-7E3D-4DA4-89FE-08B9269BEECB}"/>
               </a:ext>
             </a:extLst>
           </p:cNvPr>
@@ -10003,7 +9858,7 @@
           <p:cNvPr id="46" name="">
             <a:extLst xmlns:a="http://schemas.openxmlformats.org/drawingml/2006/main">
               <a:ext uri="{FF2B5EF4-FFF2-40B4-BE49-F238E27FC236}">
-                <a16:creationId xmlns:a16="http://schemas.microsoft.com/office/drawing/2014/main" id="{B90842B7-33C5-419A-8411-54EBD9C97D61}"/>
+                <a16:creationId xmlns:a16="http://schemas.microsoft.com/office/drawing/2014/main" id="{D33A26B1-1754-40C6-94DA-AD9590688AEB}"/>
               </a:ext>
             </a:extLst>
           </p:cNvPr>
@@ -10039,7 +9894,6 @@
           <a:lstStyle xmlns:a="http://schemas.openxmlformats.org/drawingml/2006/main"/>
           <a:p xmlns:a="http://schemas.openxmlformats.org/drawingml/2006/main">
             <a:pPr algn="l">
-              <a:buNone/>
               <a:defRPr sz="863" b="0">
                 <a:solidFill>
                   <a:srgbClr val="17202A"/>
@@ -10058,7 +9912,7 @@
                 <a:ea typeface="Aptos"/>
                 <a:cs typeface="Aptos"/>
               </a:rPr>
-              <a:t>transforman dolor operativo en evidencia estructurada</a:t>
+              <a:t>turn repeated pain into structured evidence</a:t>
             </a:r>
           </a:p>
         </p:txBody>
@@ -10068,7 +9922,7 @@
           <p:cNvPr id="47" name="">
             <a:extLst xmlns:a="http://schemas.openxmlformats.org/drawingml/2006/main">
               <a:ext uri="{FF2B5EF4-FFF2-40B4-BE49-F238E27FC236}">
-                <a16:creationId xmlns:a16="http://schemas.microsoft.com/office/drawing/2014/main" id="{9A92A68B-EB3C-4B42-8733-22B89F5BF988}"/>
+                <a16:creationId xmlns:a16="http://schemas.microsoft.com/office/drawing/2014/main" id="{F7D41ED9-4936-4D5C-AFB5-D6D1C3C5ECCD}"/>
               </a:ext>
             </a:extLst>
           </p:cNvPr>
@@ -10101,7 +9955,7 @@
           <p:cNvPr id="48" name="">
             <a:extLst xmlns:a="http://schemas.openxmlformats.org/drawingml/2006/main">
               <a:ext uri="{FF2B5EF4-FFF2-40B4-BE49-F238E27FC236}">
-                <a16:creationId xmlns:a16="http://schemas.microsoft.com/office/drawing/2014/main" id="{94869217-D4BD-4272-A4FC-5FA8FCB49E5E}"/>
+                <a16:creationId xmlns:a16="http://schemas.microsoft.com/office/drawing/2014/main" id="{88630B7B-CF1A-40C8-B303-EAD497E64045}"/>
               </a:ext>
             </a:extLst>
           </p:cNvPr>
@@ -10137,7 +9991,6 @@
           <a:lstStyle xmlns:a="http://schemas.openxmlformats.org/drawingml/2006/main"/>
           <a:p xmlns:a="http://schemas.openxmlformats.org/drawingml/2006/main">
             <a:pPr algn="l">
-              <a:buNone/>
               <a:defRPr sz="825" b="0">
                 <a:solidFill>
                   <a:srgbClr val="17202A"/>
@@ -10166,7 +10019,7 @@
           <p:cNvPr id="49" name="">
             <a:extLst xmlns:a="http://schemas.openxmlformats.org/drawingml/2006/main">
               <a:ext uri="{FF2B5EF4-FFF2-40B4-BE49-F238E27FC236}">
-                <a16:creationId xmlns:a16="http://schemas.microsoft.com/office/drawing/2014/main" id="{AE4D4B3A-6A3A-4E9B-9B42-E8394A6C944E}"/>
+                <a16:creationId xmlns:a16="http://schemas.microsoft.com/office/drawing/2014/main" id="{2A1B2DFF-B8CC-4CBD-A2D3-E75BED6178D5}"/>
               </a:ext>
             </a:extLst>
           </p:cNvPr>
@@ -10199,7 +10052,7 @@
           <p:cNvPr id="50" name="">
             <a:extLst xmlns:a="http://schemas.openxmlformats.org/drawingml/2006/main">
               <a:ext uri="{FF2B5EF4-FFF2-40B4-BE49-F238E27FC236}">
-                <a16:creationId xmlns:a16="http://schemas.microsoft.com/office/drawing/2014/main" id="{2C971C01-8874-4D7C-8854-6395DA96E476}"/>
+                <a16:creationId xmlns:a16="http://schemas.microsoft.com/office/drawing/2014/main" id="{1635EAD4-A48F-490F-A43B-00981642B179}"/>
               </a:ext>
             </a:extLst>
           </p:cNvPr>
@@ -10235,7 +10088,6 @@
           <a:lstStyle xmlns:a="http://schemas.openxmlformats.org/drawingml/2006/main"/>
           <a:p xmlns:a="http://schemas.openxmlformats.org/drawingml/2006/main">
             <a:pPr algn="l">
-              <a:buNone/>
               <a:defRPr sz="863" b="1">
                 <a:solidFill>
                   <a:srgbClr val="0F8A6A"/>
@@ -10264,7 +10116,7 @@
           <p:cNvPr id="51" name="">
             <a:extLst xmlns:a="http://schemas.openxmlformats.org/drawingml/2006/main">
               <a:ext uri="{FF2B5EF4-FFF2-40B4-BE49-F238E27FC236}">
-                <a16:creationId xmlns:a16="http://schemas.microsoft.com/office/drawing/2014/main" id="{2702863F-8B2E-410A-A3D6-51214697600A}"/>
+                <a16:creationId xmlns:a16="http://schemas.microsoft.com/office/drawing/2014/main" id="{FE3A7669-CABE-451B-A729-854512B921F0}"/>
               </a:ext>
             </a:extLst>
           </p:cNvPr>
@@ -10297,7 +10149,7 @@
           <p:cNvPr id="52" name="">
             <a:extLst xmlns:a="http://schemas.openxmlformats.org/drawingml/2006/main">
               <a:ext uri="{FF2B5EF4-FFF2-40B4-BE49-F238E27FC236}">
-                <a16:creationId xmlns:a16="http://schemas.microsoft.com/office/drawing/2014/main" id="{2F9E1FC4-56A0-4E7A-B94A-B75901923782}"/>
+                <a16:creationId xmlns:a16="http://schemas.microsoft.com/office/drawing/2014/main" id="{93AD5709-2E6E-48D7-85B6-CAC46ABD5277}"/>
               </a:ext>
             </a:extLst>
           </p:cNvPr>
@@ -10333,7 +10185,6 @@
           <a:lstStyle xmlns:a="http://schemas.openxmlformats.org/drawingml/2006/main"/>
           <a:p xmlns:a="http://schemas.openxmlformats.org/drawingml/2006/main">
             <a:pPr algn="l">
-              <a:buNone/>
               <a:defRPr sz="863" b="0">
                 <a:solidFill>
                   <a:srgbClr val="17202A"/>
@@ -10352,7 +10203,7 @@
                 <a:ea typeface="Aptos"/>
                 <a:cs typeface="Aptos"/>
               </a:rPr>
-              <a:t>buscar edge y madurarlo</a:t>
+              <a:t>search for edge and mature it</a:t>
             </a:r>
           </a:p>
         </p:txBody>
@@ -10362,7 +10213,7 @@
           <p:cNvPr id="53" name="">
             <a:extLst xmlns:a="http://schemas.openxmlformats.org/drawingml/2006/main">
               <a:ext uri="{FF2B5EF4-FFF2-40B4-BE49-F238E27FC236}">
-                <a16:creationId xmlns:a16="http://schemas.microsoft.com/office/drawing/2014/main" id="{726700F5-734E-45CB-9F19-6FEBBB74A279}"/>
+                <a16:creationId xmlns:a16="http://schemas.microsoft.com/office/drawing/2014/main" id="{F90C7D1F-B537-4FA6-BFA9-616590EB53A6}"/>
               </a:ext>
             </a:extLst>
           </p:cNvPr>
@@ -10395,7 +10246,7 @@
           <p:cNvPr id="54" name="">
             <a:extLst xmlns:a="http://schemas.openxmlformats.org/drawingml/2006/main">
               <a:ext uri="{FF2B5EF4-FFF2-40B4-BE49-F238E27FC236}">
-                <a16:creationId xmlns:a16="http://schemas.microsoft.com/office/drawing/2014/main" id="{6386864D-9BBC-49AF-9F1F-157FE95C7236}"/>
+                <a16:creationId xmlns:a16="http://schemas.microsoft.com/office/drawing/2014/main" id="{47B7B81C-F33F-4149-BEC8-E3879E9CEF7B}"/>
               </a:ext>
             </a:extLst>
           </p:cNvPr>
@@ -10431,7 +10282,6 @@
           <a:lstStyle xmlns:a="http://schemas.openxmlformats.org/drawingml/2006/main"/>
           <a:p xmlns:a="http://schemas.openxmlformats.org/drawingml/2006/main">
             <a:pPr algn="l">
-              <a:buNone/>
               <a:defRPr sz="863" b="0">
                 <a:solidFill>
                   <a:srgbClr val="17202A"/>
@@ -10450,7 +10300,7 @@
                 <a:ea typeface="Aptos"/>
                 <a:cs typeface="Aptos"/>
               </a:rPr>
-              <a:t>evitan saltar de backtest a live sin gobierno</a:t>
+              <a:t>avoids jumping from backtest to live</a:t>
             </a:r>
           </a:p>
         </p:txBody>
@@ -10460,7 +10310,7 @@
           <p:cNvPr id="55" name="">
             <a:extLst xmlns:a="http://schemas.openxmlformats.org/drawingml/2006/main">
               <a:ext uri="{FF2B5EF4-FFF2-40B4-BE49-F238E27FC236}">
-                <a16:creationId xmlns:a16="http://schemas.microsoft.com/office/drawing/2014/main" id="{B4438250-9AEE-4DE3-B97A-000638F7581B}"/>
+                <a16:creationId xmlns:a16="http://schemas.microsoft.com/office/drawing/2014/main" id="{E73F7956-1705-49CD-9979-99CFB0F9DD42}"/>
               </a:ext>
             </a:extLst>
           </p:cNvPr>
@@ -10493,7 +10343,7 @@
           <p:cNvPr id="56" name="">
             <a:extLst xmlns:a="http://schemas.openxmlformats.org/drawingml/2006/main">
               <a:ext uri="{FF2B5EF4-FFF2-40B4-BE49-F238E27FC236}">
-                <a16:creationId xmlns:a16="http://schemas.microsoft.com/office/drawing/2014/main" id="{3B9813DC-4B12-4EB6-9799-95CDABEB5AC0}"/>
+                <a16:creationId xmlns:a16="http://schemas.microsoft.com/office/drawing/2014/main" id="{DCB77403-B77D-47D2-8E81-D47CDA5CDED3}"/>
               </a:ext>
             </a:extLst>
           </p:cNvPr>
@@ -10529,7 +10379,6 @@
           <a:lstStyle xmlns:a="http://schemas.openxmlformats.org/drawingml/2006/main"/>
           <a:p xmlns:a="http://schemas.openxmlformats.org/drawingml/2006/main">
             <a:pPr algn="l">
-              <a:buNone/>
               <a:defRPr sz="825" b="0">
                 <a:solidFill>
                   <a:srgbClr val="17202A"/>
@@ -10558,7 +10407,7 @@
           <p:cNvPr id="57" name="">
             <a:extLst xmlns:a="http://schemas.openxmlformats.org/drawingml/2006/main">
               <a:ext uri="{FF2B5EF4-FFF2-40B4-BE49-F238E27FC236}">
-                <a16:creationId xmlns:a16="http://schemas.microsoft.com/office/drawing/2014/main" id="{61464839-D3D8-4AD5-AA00-39142C55A921}"/>
+                <a16:creationId xmlns:a16="http://schemas.microsoft.com/office/drawing/2014/main" id="{2B05C4BB-5E55-464B-94B5-567B783241CE}"/>
               </a:ext>
             </a:extLst>
           </p:cNvPr>
@@ -10591,7 +10440,7 @@
           <p:cNvPr id="58" name="">
             <a:extLst xmlns:a="http://schemas.openxmlformats.org/drawingml/2006/main">
               <a:ext uri="{FF2B5EF4-FFF2-40B4-BE49-F238E27FC236}">
-                <a16:creationId xmlns:a16="http://schemas.microsoft.com/office/drawing/2014/main" id="{125508C0-71B6-4FBC-AF24-3DAA64971721}"/>
+                <a16:creationId xmlns:a16="http://schemas.microsoft.com/office/drawing/2014/main" id="{6DDB1635-63D8-4EB2-9DE9-F7579E344464}"/>
               </a:ext>
             </a:extLst>
           </p:cNvPr>
@@ -10627,7 +10476,6 @@
           <a:lstStyle xmlns:a="http://schemas.openxmlformats.org/drawingml/2006/main"/>
           <a:p xmlns:a="http://schemas.openxmlformats.org/drawingml/2006/main">
             <a:pPr algn="l">
-              <a:buNone/>
               <a:defRPr sz="863" b="1">
                 <a:solidFill>
                   <a:srgbClr val="0F8A6A"/>
@@ -10656,7 +10504,7 @@
           <p:cNvPr id="59" name="">
             <a:extLst xmlns:a="http://schemas.openxmlformats.org/drawingml/2006/main">
               <a:ext uri="{FF2B5EF4-FFF2-40B4-BE49-F238E27FC236}">
-                <a16:creationId xmlns:a16="http://schemas.microsoft.com/office/drawing/2014/main" id="{3E9DC550-BA6F-4EE8-A789-B7468924CB79}"/>
+                <a16:creationId xmlns:a16="http://schemas.microsoft.com/office/drawing/2014/main" id="{E780DAD1-A561-430F-8C40-9B1BD542E923}"/>
               </a:ext>
             </a:extLst>
           </p:cNvPr>
@@ -10689,7 +10537,7 @@
           <p:cNvPr id="60" name="">
             <a:extLst xmlns:a="http://schemas.openxmlformats.org/drawingml/2006/main">
               <a:ext uri="{FF2B5EF4-FFF2-40B4-BE49-F238E27FC236}">
-                <a16:creationId xmlns:a16="http://schemas.microsoft.com/office/drawing/2014/main" id="{E4E34BCE-DB6A-4E1C-94D8-6608A70D1EDB}"/>
+                <a16:creationId xmlns:a16="http://schemas.microsoft.com/office/drawing/2014/main" id="{02BCB4DF-F380-4FEA-812D-D62420856879}"/>
               </a:ext>
             </a:extLst>
           </p:cNvPr>
@@ -10725,7 +10573,6 @@
           <a:lstStyle xmlns:a="http://schemas.openxmlformats.org/drawingml/2006/main"/>
           <a:p xmlns:a="http://schemas.openxmlformats.org/drawingml/2006/main">
             <a:pPr algn="l">
-              <a:buNone/>
               <a:defRPr sz="863" b="0">
                 <a:solidFill>
                   <a:srgbClr val="17202A"/>
@@ -10744,7 +10591,7 @@
                 <a:ea typeface="Aptos"/>
                 <a:cs typeface="Aptos"/>
               </a:rPr>
-              <a:t>decision surfaces y disciplina operativa</a:t>
+              <a:t>decision surfaces and operational discipline</a:t>
             </a:r>
           </a:p>
         </p:txBody>
@@ -10754,7 +10601,7 @@
           <p:cNvPr id="61" name="">
             <a:extLst xmlns:a="http://schemas.openxmlformats.org/drawingml/2006/main">
               <a:ext uri="{FF2B5EF4-FFF2-40B4-BE49-F238E27FC236}">
-                <a16:creationId xmlns:a16="http://schemas.microsoft.com/office/drawing/2014/main" id="{E1FE2B4D-C55B-4013-A662-7679C9178A20}"/>
+                <a16:creationId xmlns:a16="http://schemas.microsoft.com/office/drawing/2014/main" id="{F3AB03AE-8D0F-4771-B0CC-D90A41212759}"/>
               </a:ext>
             </a:extLst>
           </p:cNvPr>
@@ -10787,7 +10634,7 @@
           <p:cNvPr id="62" name="">
             <a:extLst xmlns:a="http://schemas.openxmlformats.org/drawingml/2006/main">
               <a:ext uri="{FF2B5EF4-FFF2-40B4-BE49-F238E27FC236}">
-                <a16:creationId xmlns:a16="http://schemas.microsoft.com/office/drawing/2014/main" id="{4072045A-7301-40A9-B4F3-0480A12FA6AE}"/>
+                <a16:creationId xmlns:a16="http://schemas.microsoft.com/office/drawing/2014/main" id="{07FF7CEE-1D50-481F-ACA9-C6110CDB2C39}"/>
               </a:ext>
             </a:extLst>
           </p:cNvPr>
@@ -10823,7 +10670,6 @@
           <a:lstStyle xmlns:a="http://schemas.openxmlformats.org/drawingml/2006/main"/>
           <a:p xmlns:a="http://schemas.openxmlformats.org/drawingml/2006/main">
             <a:pPr algn="l">
-              <a:buNone/>
               <a:defRPr sz="863" b="0">
                 <a:solidFill>
                   <a:srgbClr val="17202A"/>
@@ -10842,7 +10688,7 @@
                 <a:ea typeface="Aptos"/>
                 <a:cs typeface="Aptos"/>
               </a:rPr>
-              <a:t>permiten decidir que podar, mantener y observar</a:t>
+              <a:t>helps the team decide what to prune, maintain, and observe</a:t>
             </a:r>
           </a:p>
         </p:txBody>
@@ -10852,7 +10698,7 @@
           <p:cNvPr id="63" name="">
             <a:extLst xmlns:a="http://schemas.openxmlformats.org/drawingml/2006/main">
               <a:ext uri="{FF2B5EF4-FFF2-40B4-BE49-F238E27FC236}">
-                <a16:creationId xmlns:a16="http://schemas.microsoft.com/office/drawing/2014/main" id="{C1554398-7DDB-4B69-B957-A84CE9037EBB}"/>
+                <a16:creationId xmlns:a16="http://schemas.microsoft.com/office/drawing/2014/main" id="{2C09D733-6CFA-4E8E-A936-3B24A5E9C2EF}"/>
               </a:ext>
             </a:extLst>
           </p:cNvPr>
@@ -10888,7 +10734,6 @@
           <a:lstStyle xmlns:a="http://schemas.openxmlformats.org/drawingml/2006/main"/>
           <a:p xmlns:a="http://schemas.openxmlformats.org/drawingml/2006/main">
             <a:pPr algn="ctr">
-              <a:buNone/>
               <a:defRPr sz="1050" b="0">
                 <a:solidFill>
                   <a:srgbClr val="5F6B64"/>
@@ -10907,7 +10752,7 @@
                 <a:ea typeface="Aptos"/>
                 <a:cs typeface="Aptos"/>
               </a:rPr>
-              <a:t>Resumen: 8 entornos de ejecucion, 1 plano de datos, 6 modulos de aprendizaje, 3 de discovery y 4 de gobierno.</a:t>
+              <a:t>Summary: 8 execution environments, 1 shared data plane, 6 learning modules, 3 discovery modules, and 4 governance surfaces.</a:t>
             </a:r>
           </a:p>
         </p:txBody>
@@ -10917,7 +10762,7 @@
           <p:cNvPr id="64" name="">
             <a:extLst xmlns:a="http://schemas.openxmlformats.org/drawingml/2006/main">
               <a:ext uri="{FF2B5EF4-FFF2-40B4-BE49-F238E27FC236}">
-                <a16:creationId xmlns:a16="http://schemas.microsoft.com/office/drawing/2014/main" id="{A644FF83-78F3-4093-9B84-DE7E80B62A71}"/>
+                <a16:creationId xmlns:a16="http://schemas.microsoft.com/office/drawing/2014/main" id="{F92BC9A3-3C9B-4FA6-9664-DAF34C5428ED}"/>
               </a:ext>
             </a:extLst>
           </p:cNvPr>
@@ -10953,7 +10798,6 @@
           <a:lstStyle xmlns:a="http://schemas.openxmlformats.org/drawingml/2006/main"/>
           <a:p xmlns:a="http://schemas.openxmlformats.org/drawingml/2006/main">
             <a:pPr algn="r">
-              <a:buNone/>
               <a:defRPr sz="750" b="0">
                 <a:solidFill>
                   <a:srgbClr val="5F6B64"/>
@@ -10980,7 +10824,7 @@
     </p:spTree>
     <p:extLst>
       <p:ext uri="{BB962C8B-B14F-4D97-AF65-F5344CB8AC3E}">
-        <p14:creationId xmlns:p14="http://schemas.microsoft.com/office/powerpoint/2010/main" val="117640084"/>
+        <p14:creationId xmlns:p14="http://schemas.microsoft.com/office/powerpoint/2010/main" val="821803450"/>
       </p:ext>
     </p:extLst>
   </p:cSld>
@@ -11004,7 +10848,7 @@
           <p:cNvPr id="1" name="">
             <a:extLst xmlns:a="http://schemas.openxmlformats.org/drawingml/2006/main">
               <a:ext uri="{FF2B5EF4-FFF2-40B4-BE49-F238E27FC236}">
-                <a16:creationId xmlns:a16="http://schemas.microsoft.com/office/drawing/2014/main" id="{3F11FA9F-0944-4377-96E1-66A22E92C3DE}"/>
+                <a16:creationId xmlns:a16="http://schemas.microsoft.com/office/drawing/2014/main" id="{D73F52A0-4D49-4BE6-9DF8-5646640E20EF}"/>
               </a:ext>
             </a:extLst>
           </p:cNvPr>
@@ -11039,7 +10883,7 @@
           <p:cNvPr id="2" name="">
             <a:extLst xmlns:a="http://schemas.openxmlformats.org/drawingml/2006/main">
               <a:ext uri="{FF2B5EF4-FFF2-40B4-BE49-F238E27FC236}">
-                <a16:creationId xmlns:a16="http://schemas.microsoft.com/office/drawing/2014/main" id="{7FD54DA1-11F1-49B5-A305-589138F17CAD}"/>
+                <a16:creationId xmlns:a16="http://schemas.microsoft.com/office/drawing/2014/main" id="{0E0A9A79-A366-415B-8344-C7CB7FCC42D5}"/>
               </a:ext>
             </a:extLst>
           </p:cNvPr>
@@ -11074,7 +10918,7 @@
           <p:cNvPr id="3" name="">
             <a:extLst xmlns:a="http://schemas.openxmlformats.org/drawingml/2006/main">
               <a:ext uri="{FF2B5EF4-FFF2-40B4-BE49-F238E27FC236}">
-                <a16:creationId xmlns:a16="http://schemas.microsoft.com/office/drawing/2014/main" id="{9B566BB0-AF36-4EBD-9ED6-46D36872B4A1}"/>
+                <a16:creationId xmlns:a16="http://schemas.microsoft.com/office/drawing/2014/main" id="{23EF5D58-12A5-4633-A64B-905CDE19DAE0}"/>
               </a:ext>
             </a:extLst>
           </p:cNvPr>
@@ -11110,7 +10954,6 @@
           <a:lstStyle xmlns:a="http://schemas.openxmlformats.org/drawingml/2006/main"/>
           <a:p xmlns:a="http://schemas.openxmlformats.org/drawingml/2006/main">
             <a:pPr algn="l">
-              <a:buNone/>
               <a:defRPr sz="900" b="1">
                 <a:solidFill>
                   <a:srgbClr val="0F8A6A"/>
@@ -11139,7 +10982,7 @@
           <p:cNvPr id="4" name="">
             <a:extLst xmlns:a="http://schemas.openxmlformats.org/drawingml/2006/main">
               <a:ext uri="{FF2B5EF4-FFF2-40B4-BE49-F238E27FC236}">
-                <a16:creationId xmlns:a16="http://schemas.microsoft.com/office/drawing/2014/main" id="{718EDFAE-E36E-45F4-8D33-B3864E390F2D}"/>
+                <a16:creationId xmlns:a16="http://schemas.microsoft.com/office/drawing/2014/main" id="{241B1A59-4500-489B-93D8-6DE3E5B1C448}"/>
               </a:ext>
             </a:extLst>
           </p:cNvPr>
@@ -11175,7 +11018,6 @@
           <a:lstStyle xmlns:a="http://schemas.openxmlformats.org/drawingml/2006/main"/>
           <a:p xmlns:a="http://schemas.openxmlformats.org/drawingml/2006/main">
             <a:pPr algn="l">
-              <a:buNone/>
               <a:defRPr sz="2325" b="1">
                 <a:solidFill>
                   <a:srgbClr val="17202A"/>
@@ -11194,7 +11036,7 @@
                 <a:ea typeface="Aptos Display"/>
                 <a:cs typeface="Aptos Display"/>
               </a:rPr>
-              <a:t>MarketData Hub convierte datos de mercado en una interfaz comun para varios consumidores.</a:t>
+              <a:t>MarketData Hub turns market data into a common interface for multiple consumers.</a:t>
             </a:r>
           </a:p>
         </p:txBody>
@@ -11204,7 +11046,7 @@
           <p:cNvPr id="5" name="">
             <a:extLst xmlns:a="http://schemas.openxmlformats.org/drawingml/2006/main">
               <a:ext uri="{FF2B5EF4-FFF2-40B4-BE49-F238E27FC236}">
-                <a16:creationId xmlns:a16="http://schemas.microsoft.com/office/drawing/2014/main" id="{75C67AFC-55E3-43A7-B394-F913A4686003}"/>
+                <a16:creationId xmlns:a16="http://schemas.microsoft.com/office/drawing/2014/main" id="{1790D26D-4768-4AC5-A462-1C22691BB3CB}"/>
               </a:ext>
             </a:extLst>
           </p:cNvPr>
@@ -11237,7 +11079,7 @@
           <p:cNvPr id="6" name="">
             <a:extLst xmlns:a="http://schemas.openxmlformats.org/drawingml/2006/main">
               <a:ext uri="{FF2B5EF4-FFF2-40B4-BE49-F238E27FC236}">
-                <a16:creationId xmlns:a16="http://schemas.microsoft.com/office/drawing/2014/main" id="{2DE4AAE3-42C2-4FAE-90F3-7A99C3100024}"/>
+                <a16:creationId xmlns:a16="http://schemas.microsoft.com/office/drawing/2014/main" id="{F8AD37FE-D6E4-4B6D-9377-0210CBFE40DC}"/>
               </a:ext>
             </a:extLst>
           </p:cNvPr>
@@ -11273,7 +11115,6 @@
           <a:lstStyle xmlns:a="http://schemas.openxmlformats.org/drawingml/2006/main"/>
           <a:p xmlns:a="http://schemas.openxmlformats.org/drawingml/2006/main">
             <a:pPr algn="l">
-              <a:buNone/>
               <a:defRPr sz="1200" b="1">
                 <a:solidFill>
                   <a:srgbClr val="0F8A6A"/>
@@ -11302,7 +11143,7 @@
           <p:cNvPr id="7" name="">
             <a:extLst xmlns:a="http://schemas.openxmlformats.org/drawingml/2006/main">
               <a:ext uri="{FF2B5EF4-FFF2-40B4-BE49-F238E27FC236}">
-                <a16:creationId xmlns:a16="http://schemas.microsoft.com/office/drawing/2014/main" id="{ABF64FB9-3398-412A-B5BA-AA4FE67D1E2C}"/>
+                <a16:creationId xmlns:a16="http://schemas.microsoft.com/office/drawing/2014/main" id="{012FE7C0-E82B-4863-87DA-6183E1259694}"/>
               </a:ext>
             </a:extLst>
           </p:cNvPr>
@@ -11338,7 +11179,6 @@
           <a:lstStyle xmlns:a="http://schemas.openxmlformats.org/drawingml/2006/main"/>
           <a:p xmlns:a="http://schemas.openxmlformats.org/drawingml/2006/main">
             <a:pPr algn="l">
-              <a:buNone/>
               <a:defRPr sz="863" b="0">
                 <a:solidFill>
                   <a:srgbClr val="17202A"/>
@@ -11357,7 +11197,7 @@
                 <a:ea typeface="Aptos"/>
                 <a:cs typeface="Aptos"/>
               </a:rPr>
-              <a:t>Fuentes y productos internos de datos, status y cobertura.</a:t>
+              <a:t>Internal sources and products for price, status, and coverage.</a:t>
             </a:r>
           </a:p>
         </p:txBody>
@@ -11367,7 +11207,7 @@
           <p:cNvPr id="8" name="">
             <a:extLst xmlns:a="http://schemas.openxmlformats.org/drawingml/2006/main">
               <a:ext uri="{FF2B5EF4-FFF2-40B4-BE49-F238E27FC236}">
-                <a16:creationId xmlns:a16="http://schemas.microsoft.com/office/drawing/2014/main" id="{BEBD015B-3B14-452E-AE46-141E8976A9FA}"/>
+                <a16:creationId xmlns:a16="http://schemas.microsoft.com/office/drawing/2014/main" id="{EED1A427-4729-4F17-9D22-27967D5B5441}"/>
               </a:ext>
             </a:extLst>
           </p:cNvPr>
@@ -11400,7 +11240,7 @@
           <p:cNvPr id="9" name="">
             <a:extLst xmlns:a="http://schemas.openxmlformats.org/drawingml/2006/main">
               <a:ext uri="{FF2B5EF4-FFF2-40B4-BE49-F238E27FC236}">
-                <a16:creationId xmlns:a16="http://schemas.microsoft.com/office/drawing/2014/main" id="{DB4DDA5B-9314-4D73-BCD2-F58D621A3039}"/>
+                <a16:creationId xmlns:a16="http://schemas.microsoft.com/office/drawing/2014/main" id="{B8622A62-1E26-4231-8335-413D16C532DF}"/>
               </a:ext>
             </a:extLst>
           </p:cNvPr>
@@ -11436,7 +11276,6 @@
           <a:lstStyle xmlns:a="http://schemas.openxmlformats.org/drawingml/2006/main"/>
           <a:p xmlns:a="http://schemas.openxmlformats.org/drawingml/2006/main">
             <a:pPr algn="l">
-              <a:buNone/>
               <a:defRPr sz="1200" b="1">
                 <a:solidFill>
                   <a:srgbClr val="2E5EA7"/>
@@ -11465,7 +11304,7 @@
           <p:cNvPr id="10" name="">
             <a:extLst xmlns:a="http://schemas.openxmlformats.org/drawingml/2006/main">
               <a:ext uri="{FF2B5EF4-FFF2-40B4-BE49-F238E27FC236}">
-                <a16:creationId xmlns:a16="http://schemas.microsoft.com/office/drawing/2014/main" id="{BD982910-A1FC-4FAB-AE65-BDD6D21A2082}"/>
+                <a16:creationId xmlns:a16="http://schemas.microsoft.com/office/drawing/2014/main" id="{466828D1-0157-4500-89C3-BCB9A30EDF1B}"/>
               </a:ext>
             </a:extLst>
           </p:cNvPr>
@@ -11501,7 +11340,6 @@
           <a:lstStyle xmlns:a="http://schemas.openxmlformats.org/drawingml/2006/main"/>
           <a:p xmlns:a="http://schemas.openxmlformats.org/drawingml/2006/main">
             <a:pPr algn="l">
-              <a:buNone/>
               <a:defRPr sz="863" b="0">
                 <a:solidFill>
                   <a:srgbClr val="17202A"/>
@@ -11520,7 +11358,7 @@
                 <a:ea typeface="Aptos"/>
                 <a:cs typeface="Aptos"/>
               </a:rPr>
-              <a:t>Entrega quotes, candles, readiness, mappings, watchlist y universe products bajo un contrato semantico comun.</a:t>
+              <a:t>Delivers quotes, candles, readiness, mappings, watchlist, and universe products under one semantic contract.</a:t>
             </a:r>
           </a:p>
         </p:txBody>
@@ -11530,7 +11368,7 @@
           <p:cNvPr id="11" name="">
             <a:extLst xmlns:a="http://schemas.openxmlformats.org/drawingml/2006/main">
               <a:ext uri="{FF2B5EF4-FFF2-40B4-BE49-F238E27FC236}">
-                <a16:creationId xmlns:a16="http://schemas.microsoft.com/office/drawing/2014/main" id="{815D2473-22D9-45D2-A060-F3356420E1E3}"/>
+                <a16:creationId xmlns:a16="http://schemas.microsoft.com/office/drawing/2014/main" id="{16FC87BF-5EAD-43FD-9A60-B36883DC1E0A}"/>
               </a:ext>
             </a:extLst>
           </p:cNvPr>
@@ -11563,7 +11401,7 @@
           <p:cNvPr id="12" name="">
             <a:extLst xmlns:a="http://schemas.openxmlformats.org/drawingml/2006/main">
               <a:ext uri="{FF2B5EF4-FFF2-40B4-BE49-F238E27FC236}">
-                <a16:creationId xmlns:a16="http://schemas.microsoft.com/office/drawing/2014/main" id="{5685CC8E-25A6-4F7E-8B6B-9B8D13B1D0FB}"/>
+                <a16:creationId xmlns:a16="http://schemas.microsoft.com/office/drawing/2014/main" id="{E796FA76-B882-45F6-9DF2-33160A05A271}"/>
               </a:ext>
             </a:extLst>
           </p:cNvPr>
@@ -11599,7 +11437,6 @@
           <a:lstStyle xmlns:a="http://schemas.openxmlformats.org/drawingml/2006/main"/>
           <a:p xmlns:a="http://schemas.openxmlformats.org/drawingml/2006/main">
             <a:pPr algn="l">
-              <a:buNone/>
               <a:defRPr sz="1200" b="1">
                 <a:solidFill>
                   <a:srgbClr val="6559B7"/>
@@ -11628,7 +11465,7 @@
           <p:cNvPr id="13" name="">
             <a:extLst xmlns:a="http://schemas.openxmlformats.org/drawingml/2006/main">
               <a:ext uri="{FF2B5EF4-FFF2-40B4-BE49-F238E27FC236}">
-                <a16:creationId xmlns:a16="http://schemas.microsoft.com/office/drawing/2014/main" id="{1BCB12B3-640B-48BA-9CB6-B87C66D69314}"/>
+                <a16:creationId xmlns:a16="http://schemas.microsoft.com/office/drawing/2014/main" id="{36983F00-E164-4E5F-BF41-3DF277587066}"/>
               </a:ext>
             </a:extLst>
           </p:cNvPr>
@@ -11664,7 +11501,6 @@
           <a:lstStyle xmlns:a="http://schemas.openxmlformats.org/drawingml/2006/main"/>
           <a:p xmlns:a="http://schemas.openxmlformats.org/drawingml/2006/main">
             <a:pPr algn="l">
-              <a:buNone/>
               <a:defRPr sz="863" b="0">
                 <a:solidFill>
                   <a:srgbClr val="17202A"/>
@@ -11683,7 +11519,7 @@
                 <a:ea typeface="Aptos"/>
                 <a:cs typeface="Aptos"/>
               </a:rPr>
-              <a:t>runtime multi-engine</a:t>
+              <a:t>multi-engine runtime</a:t>
             </a:r>
           </a:p>
         </p:txBody>
@@ -11693,7 +11529,7 @@
           <p:cNvPr id="14" name="">
             <a:extLst xmlns:a="http://schemas.openxmlformats.org/drawingml/2006/main">
               <a:ext uri="{FF2B5EF4-FFF2-40B4-BE49-F238E27FC236}">
-                <a16:creationId xmlns:a16="http://schemas.microsoft.com/office/drawing/2014/main" id="{392B3840-9D2C-4A9E-9FF8-98AC4372B18D}"/>
+                <a16:creationId xmlns:a16="http://schemas.microsoft.com/office/drawing/2014/main" id="{1539CF57-FD9B-4819-9FEE-09503955D65A}"/>
               </a:ext>
             </a:extLst>
           </p:cNvPr>
@@ -11726,7 +11562,7 @@
           <p:cNvPr id="15" name="">
             <a:extLst xmlns:a="http://schemas.openxmlformats.org/drawingml/2006/main">
               <a:ext uri="{FF2B5EF4-FFF2-40B4-BE49-F238E27FC236}">
-                <a16:creationId xmlns:a16="http://schemas.microsoft.com/office/drawing/2014/main" id="{57E15B49-5EF4-49DA-A5B3-19CDC2104E52}"/>
+                <a16:creationId xmlns:a16="http://schemas.microsoft.com/office/drawing/2014/main" id="{AE54AFBF-D80F-44E5-AAE8-C863C0868C9A}"/>
               </a:ext>
             </a:extLst>
           </p:cNvPr>
@@ -11762,7 +11598,6 @@
           <a:lstStyle xmlns:a="http://schemas.openxmlformats.org/drawingml/2006/main"/>
           <a:p xmlns:a="http://schemas.openxmlformats.org/drawingml/2006/main">
             <a:pPr algn="l">
-              <a:buNone/>
               <a:defRPr sz="1200" b="1">
                 <a:solidFill>
                   <a:srgbClr val="C98A21"/>
@@ -11791,7 +11626,7 @@
           <p:cNvPr id="16" name="">
             <a:extLst xmlns:a="http://schemas.openxmlformats.org/drawingml/2006/main">
               <a:ext uri="{FF2B5EF4-FFF2-40B4-BE49-F238E27FC236}">
-                <a16:creationId xmlns:a16="http://schemas.microsoft.com/office/drawing/2014/main" id="{0590B42D-BD7F-4458-8140-C516C8E2A9D5}"/>
+                <a16:creationId xmlns:a16="http://schemas.microsoft.com/office/drawing/2014/main" id="{B84E9FDE-1A88-4C42-93D7-19906992C8C3}"/>
               </a:ext>
             </a:extLst>
           </p:cNvPr>
@@ -11827,7 +11662,6 @@
           <a:lstStyle xmlns:a="http://schemas.openxmlformats.org/drawingml/2006/main"/>
           <a:p xmlns:a="http://schemas.openxmlformats.org/drawingml/2006/main">
             <a:pPr algn="l">
-              <a:buNone/>
               <a:defRPr sz="863" b="0">
                 <a:solidFill>
                   <a:srgbClr val="17202A"/>
@@ -11846,7 +11680,7 @@
                 <a:ea typeface="Aptos"/>
                 <a:cs typeface="Aptos"/>
               </a:rPr>
-              <a:t>consumidores de hub</a:t>
+              <a:t>hub consumers</a:t>
             </a:r>
           </a:p>
         </p:txBody>
@@ -11856,7 +11690,7 @@
           <p:cNvPr id="17" name="">
             <a:extLst xmlns:a="http://schemas.openxmlformats.org/drawingml/2006/main">
               <a:ext uri="{FF2B5EF4-FFF2-40B4-BE49-F238E27FC236}">
-                <a16:creationId xmlns:a16="http://schemas.microsoft.com/office/drawing/2014/main" id="{4B7330A2-F47A-40C9-9C9D-199D148C1B26}"/>
+                <a16:creationId xmlns:a16="http://schemas.microsoft.com/office/drawing/2014/main" id="{CF554EB1-BF54-4CAE-B8BE-82FB2940777C}"/>
               </a:ext>
             </a:extLst>
           </p:cNvPr>
@@ -11889,7 +11723,7 @@
           <p:cNvPr id="18" name="">
             <a:extLst xmlns:a="http://schemas.openxmlformats.org/drawingml/2006/main">
               <a:ext uri="{FF2B5EF4-FFF2-40B4-BE49-F238E27FC236}">
-                <a16:creationId xmlns:a16="http://schemas.microsoft.com/office/drawing/2014/main" id="{8C6C2958-DAE2-4986-BA4E-E6E4861D7EB4}"/>
+                <a16:creationId xmlns:a16="http://schemas.microsoft.com/office/drawing/2014/main" id="{A1D81721-0587-41A5-92EE-DF196ABB7A4A}"/>
               </a:ext>
             </a:extLst>
           </p:cNvPr>
@@ -11925,7 +11759,6 @@
           <a:lstStyle xmlns:a="http://schemas.openxmlformats.org/drawingml/2006/main"/>
           <a:p xmlns:a="http://schemas.openxmlformats.org/drawingml/2006/main">
             <a:pPr algn="l">
-              <a:buNone/>
               <a:defRPr sz="1200" b="1">
                 <a:solidFill>
                   <a:srgbClr val="C85847"/>
@@ -11954,7 +11787,7 @@
           <p:cNvPr id="19" name="">
             <a:extLst xmlns:a="http://schemas.openxmlformats.org/drawingml/2006/main">
               <a:ext uri="{FF2B5EF4-FFF2-40B4-BE49-F238E27FC236}">
-                <a16:creationId xmlns:a16="http://schemas.microsoft.com/office/drawing/2014/main" id="{593F7B7E-FA7B-4A1F-B076-F2E36D158935}"/>
+                <a16:creationId xmlns:a16="http://schemas.microsoft.com/office/drawing/2014/main" id="{140DDF28-D8F3-4D1E-8333-C72A14573F07}"/>
               </a:ext>
             </a:extLst>
           </p:cNvPr>
@@ -11990,7 +11823,6 @@
           <a:lstStyle xmlns:a="http://schemas.openxmlformats.org/drawingml/2006/main"/>
           <a:p xmlns:a="http://schemas.openxmlformats.org/drawingml/2006/main">
             <a:pPr algn="l">
-              <a:buNone/>
               <a:defRPr sz="863" b="0">
                 <a:solidFill>
                   <a:srgbClr val="17202A"/>
@@ -12009,7 +11841,7 @@
                 <a:ea typeface="Aptos"/>
                 <a:cs typeface="Aptos"/>
               </a:rPr>
-              <a:t>backtests e incubacion</a:t>
+              <a:t>backtests and incubation</a:t>
             </a:r>
           </a:p>
         </p:txBody>
@@ -12019,7 +11851,7 @@
           <p:cNvPr id="20" name="">
             <a:extLst xmlns:a="http://schemas.openxmlformats.org/drawingml/2006/main">
               <a:ext uri="{FF2B5EF4-FFF2-40B4-BE49-F238E27FC236}">
-                <a16:creationId xmlns:a16="http://schemas.microsoft.com/office/drawing/2014/main" id="{D476AB6E-0FD6-4F7A-B650-767AFC53E230}"/>
+                <a16:creationId xmlns:a16="http://schemas.microsoft.com/office/drawing/2014/main" id="{B95B0E95-5937-483F-8002-65A063735689}"/>
               </a:ext>
             </a:extLst>
           </p:cNvPr>
@@ -12052,7 +11884,7 @@
           <p:cNvPr id="21" name="">
             <a:extLst xmlns:a="http://schemas.openxmlformats.org/drawingml/2006/main">
               <a:ext uri="{FF2B5EF4-FFF2-40B4-BE49-F238E27FC236}">
-                <a16:creationId xmlns:a16="http://schemas.microsoft.com/office/drawing/2014/main" id="{571D26E8-2C9A-4BD9-9CB7-91A7F0A58DE7}"/>
+                <a16:creationId xmlns:a16="http://schemas.microsoft.com/office/drawing/2014/main" id="{BC95FC34-68C4-49CB-9DDB-F3529023B68E}"/>
               </a:ext>
             </a:extLst>
           </p:cNvPr>
@@ -12088,7 +11920,6 @@
           <a:lstStyle xmlns:a="http://schemas.openxmlformats.org/drawingml/2006/main"/>
           <a:p xmlns:a="http://schemas.openxmlformats.org/drawingml/2006/main">
             <a:pPr algn="l">
-              <a:buNone/>
               <a:defRPr sz="1200" b="1">
                 <a:solidFill>
                   <a:srgbClr val="0F8A6A"/>
@@ -12117,7 +11948,7 @@
           <p:cNvPr id="22" name="">
             <a:extLst xmlns:a="http://schemas.openxmlformats.org/drawingml/2006/main">
               <a:ext uri="{FF2B5EF4-FFF2-40B4-BE49-F238E27FC236}">
-                <a16:creationId xmlns:a16="http://schemas.microsoft.com/office/drawing/2014/main" id="{F09F5D0C-544A-4E0D-90B6-08C790B98BD4}"/>
+                <a16:creationId xmlns:a16="http://schemas.microsoft.com/office/drawing/2014/main" id="{99E9968A-CC8D-4A66-B629-39E4573F1483}"/>
               </a:ext>
             </a:extLst>
           </p:cNvPr>
@@ -12153,7 +11984,6 @@
           <a:lstStyle xmlns:a="http://schemas.openxmlformats.org/drawingml/2006/main"/>
           <a:p xmlns:a="http://schemas.openxmlformats.org/drawingml/2006/main">
             <a:pPr algn="l">
-              <a:buNone/>
               <a:defRPr sz="863" b="0">
                 <a:solidFill>
                   <a:srgbClr val="17202A"/>
@@ -12172,7 +12002,7 @@
                 <a:ea typeface="Aptos"/>
                 <a:cs typeface="Aptos"/>
               </a:rPr>
-              <a:t>rastreador de candidatos NYSE</a:t>
+              <a:t>NYSE candidate tracker</a:t>
             </a:r>
           </a:p>
         </p:txBody>
@@ -12182,7 +12012,7 @@
           <p:cNvPr id="23" name="">
             <a:extLst xmlns:a="http://schemas.openxmlformats.org/drawingml/2006/main">
               <a:ext uri="{FF2B5EF4-FFF2-40B4-BE49-F238E27FC236}">
-                <a16:creationId xmlns:a16="http://schemas.microsoft.com/office/drawing/2014/main" id="{C8FBEB3B-D10B-4029-8FF5-8F8BA3D9A342}"/>
+                <a16:creationId xmlns:a16="http://schemas.microsoft.com/office/drawing/2014/main" id="{FAA02FC9-9AC6-4A1C-96A4-58EAECA544BF}"/>
               </a:ext>
             </a:extLst>
           </p:cNvPr>
@@ -12215,7 +12045,7 @@
           <p:cNvPr id="24" name="">
             <a:extLst xmlns:a="http://schemas.openxmlformats.org/drawingml/2006/main">
               <a:ext uri="{FF2B5EF4-FFF2-40B4-BE49-F238E27FC236}">
-                <a16:creationId xmlns:a16="http://schemas.microsoft.com/office/drawing/2014/main" id="{4D32954A-881B-44A2-9D79-65FEDC961326}"/>
+                <a16:creationId xmlns:a16="http://schemas.microsoft.com/office/drawing/2014/main" id="{9467D732-1B06-4D1B-A648-A46CE7EFA6D3}"/>
               </a:ext>
             </a:extLst>
           </p:cNvPr>
@@ -12248,7 +12078,7 @@
           <p:cNvPr id="25" name="">
             <a:extLst xmlns:a="http://schemas.openxmlformats.org/drawingml/2006/main">
               <a:ext uri="{FF2B5EF4-FFF2-40B4-BE49-F238E27FC236}">
-                <a16:creationId xmlns:a16="http://schemas.microsoft.com/office/drawing/2014/main" id="{5AA5D20D-850B-484A-8862-29BB0B5B504F}"/>
+                <a16:creationId xmlns:a16="http://schemas.microsoft.com/office/drawing/2014/main" id="{1E0ADE6F-B4EE-471E-9950-7C5F93A2B0E6}"/>
               </a:ext>
             </a:extLst>
           </p:cNvPr>
@@ -12281,7 +12111,7 @@
           <p:cNvPr id="26" name="">
             <a:extLst xmlns:a="http://schemas.openxmlformats.org/drawingml/2006/main">
               <a:ext uri="{FF2B5EF4-FFF2-40B4-BE49-F238E27FC236}">
-                <a16:creationId xmlns:a16="http://schemas.microsoft.com/office/drawing/2014/main" id="{5FA403C9-75B2-404D-AEF1-F39336CE08AA}"/>
+                <a16:creationId xmlns:a16="http://schemas.microsoft.com/office/drawing/2014/main" id="{5C8C5CEB-2740-43C4-B37D-0005FF59AC3D}"/>
               </a:ext>
             </a:extLst>
           </p:cNvPr>
@@ -12314,7 +12144,7 @@
           <p:cNvPr id="27" name="">
             <a:extLst xmlns:a="http://schemas.openxmlformats.org/drawingml/2006/main">
               <a:ext uri="{FF2B5EF4-FFF2-40B4-BE49-F238E27FC236}">
-                <a16:creationId xmlns:a16="http://schemas.microsoft.com/office/drawing/2014/main" id="{0E074608-26A6-4A6A-920B-85C4CAF6E471}"/>
+                <a16:creationId xmlns:a16="http://schemas.microsoft.com/office/drawing/2014/main" id="{4C7C6293-AA9E-4C00-A637-35325569CC32}"/>
               </a:ext>
             </a:extLst>
           </p:cNvPr>
@@ -12347,7 +12177,7 @@
           <p:cNvPr id="28" name="">
             <a:extLst xmlns:a="http://schemas.openxmlformats.org/drawingml/2006/main">
               <a:ext uri="{FF2B5EF4-FFF2-40B4-BE49-F238E27FC236}">
-                <a16:creationId xmlns:a16="http://schemas.microsoft.com/office/drawing/2014/main" id="{BCB5E5F1-6D0D-45DB-9EB0-DC3BBEC67CD9}"/>
+                <a16:creationId xmlns:a16="http://schemas.microsoft.com/office/drawing/2014/main" id="{FF3E40A8-0E59-438B-ADA3-3D9C3A11E472}"/>
               </a:ext>
             </a:extLst>
           </p:cNvPr>
@@ -12380,7 +12210,7 @@
           <p:cNvPr id="29" name="">
             <a:extLst xmlns:a="http://schemas.openxmlformats.org/drawingml/2006/main">
               <a:ext uri="{FF2B5EF4-FFF2-40B4-BE49-F238E27FC236}">
-                <a16:creationId xmlns:a16="http://schemas.microsoft.com/office/drawing/2014/main" id="{464C058A-468A-4C23-8A0F-AD2D86AEEECA}"/>
+                <a16:creationId xmlns:a16="http://schemas.microsoft.com/office/drawing/2014/main" id="{C499B343-9F34-4698-97FF-906A375B5FB4}"/>
               </a:ext>
             </a:extLst>
           </p:cNvPr>
@@ -12413,7 +12243,7 @@
           <p:cNvPr id="30" name="">
             <a:extLst xmlns:a="http://schemas.openxmlformats.org/drawingml/2006/main">
               <a:ext uri="{FF2B5EF4-FFF2-40B4-BE49-F238E27FC236}">
-                <a16:creationId xmlns:a16="http://schemas.microsoft.com/office/drawing/2014/main" id="{9A5B71CD-7521-44CA-B7CD-CDEED7DCD40B}"/>
+                <a16:creationId xmlns:a16="http://schemas.microsoft.com/office/drawing/2014/main" id="{42F5C237-AF8A-4DA9-B43A-9F72FA6F92B9}"/>
               </a:ext>
             </a:extLst>
           </p:cNvPr>
@@ -12446,7 +12276,7 @@
           <p:cNvPr id="31" name="">
             <a:extLst xmlns:a="http://schemas.openxmlformats.org/drawingml/2006/main">
               <a:ext uri="{FF2B5EF4-FFF2-40B4-BE49-F238E27FC236}">
-                <a16:creationId xmlns:a16="http://schemas.microsoft.com/office/drawing/2014/main" id="{12BD2C4E-F01B-4FB2-94E3-BEA84C24CC36}"/>
+                <a16:creationId xmlns:a16="http://schemas.microsoft.com/office/drawing/2014/main" id="{3E22855D-6DD5-4010-B97E-7511D7E8B45B}"/>
               </a:ext>
             </a:extLst>
           </p:cNvPr>
@@ -12479,7 +12309,7 @@
           <p:cNvPr id="32" name="">
             <a:extLst xmlns:a="http://schemas.openxmlformats.org/drawingml/2006/main">
               <a:ext uri="{FF2B5EF4-FFF2-40B4-BE49-F238E27FC236}">
-                <a16:creationId xmlns:a16="http://schemas.microsoft.com/office/drawing/2014/main" id="{AB23C8A7-D593-4DC9-B536-EE95093B2224}"/>
+                <a16:creationId xmlns:a16="http://schemas.microsoft.com/office/drawing/2014/main" id="{DB7E3B3A-3EF7-4C1D-8D37-9B100A68D330}"/>
               </a:ext>
             </a:extLst>
           </p:cNvPr>
@@ -12512,7 +12342,7 @@
           <p:cNvPr id="33" name="">
             <a:extLst xmlns:a="http://schemas.openxmlformats.org/drawingml/2006/main">
               <a:ext uri="{FF2B5EF4-FFF2-40B4-BE49-F238E27FC236}">
-                <a16:creationId xmlns:a16="http://schemas.microsoft.com/office/drawing/2014/main" id="{C5FD2619-A971-43FC-882D-324E301BC6D8}"/>
+                <a16:creationId xmlns:a16="http://schemas.microsoft.com/office/drawing/2014/main" id="{39B1A3EA-E9BF-4B2B-9F16-1C41527FC6A2}"/>
               </a:ext>
             </a:extLst>
           </p:cNvPr>
@@ -12545,7 +12375,7 @@
           <p:cNvPr id="34" name="">
             <a:extLst xmlns:a="http://schemas.openxmlformats.org/drawingml/2006/main">
               <a:ext uri="{FF2B5EF4-FFF2-40B4-BE49-F238E27FC236}">
-                <a16:creationId xmlns:a16="http://schemas.microsoft.com/office/drawing/2014/main" id="{5A101F93-DC35-4181-8C95-26B899F57E59}"/>
+                <a16:creationId xmlns:a16="http://schemas.microsoft.com/office/drawing/2014/main" id="{47041435-FA5D-4910-B8BE-10710DDA12AC}"/>
               </a:ext>
             </a:extLst>
           </p:cNvPr>
@@ -12580,7 +12410,7 @@
           <p:cNvPr id="35" name="">
             <a:extLst xmlns:a="http://schemas.openxmlformats.org/drawingml/2006/main">
               <a:ext uri="{FF2B5EF4-FFF2-40B4-BE49-F238E27FC236}">
-                <a16:creationId xmlns:a16="http://schemas.microsoft.com/office/drawing/2014/main" id="{760878CF-026F-400B-B78A-E79C5157B2D6}"/>
+                <a16:creationId xmlns:a16="http://schemas.microsoft.com/office/drawing/2014/main" id="{26836272-B1D4-4AF2-BCD3-0A09FAF001BF}"/>
               </a:ext>
             </a:extLst>
           </p:cNvPr>
@@ -12616,7 +12446,6 @@
           <a:lstStyle xmlns:a="http://schemas.openxmlformats.org/drawingml/2006/main"/>
           <a:p xmlns:a="http://schemas.openxmlformats.org/drawingml/2006/main">
             <a:pPr algn="l">
-              <a:buNone/>
               <a:defRPr sz="2100" b="1">
                 <a:solidFill>
                   <a:srgbClr val="17202A"/>
@@ -12645,7 +12474,7 @@
           <p:cNvPr id="36" name="">
             <a:extLst xmlns:a="http://schemas.openxmlformats.org/drawingml/2006/main">
               <a:ext uri="{FF2B5EF4-FFF2-40B4-BE49-F238E27FC236}">
-                <a16:creationId xmlns:a16="http://schemas.microsoft.com/office/drawing/2014/main" id="{A3DBC5F8-22E2-44AD-A018-5B28725A0218}"/>
+                <a16:creationId xmlns:a16="http://schemas.microsoft.com/office/drawing/2014/main" id="{C047A757-D6AA-4DD5-8899-0306EFD6DEA7}"/>
               </a:ext>
             </a:extLst>
           </p:cNvPr>
@@ -12681,7 +12510,6 @@
           <a:lstStyle xmlns:a="http://schemas.openxmlformats.org/drawingml/2006/main"/>
           <a:p xmlns:a="http://schemas.openxmlformats.org/drawingml/2006/main">
             <a:pPr algn="l">
-              <a:buNone/>
               <a:defRPr sz="900" b="0">
                 <a:solidFill>
                   <a:srgbClr val="5F6B64"/>
@@ -12700,7 +12528,7 @@
                 <a:ea typeface="Aptos"/>
                 <a:cs typeface="Aptos"/>
               </a:rPr>
-              <a:t>contrato de datos</a:t>
+              <a:t>data contract</a:t>
             </a:r>
           </a:p>
         </p:txBody>
@@ -12710,7 +12538,7 @@
           <p:cNvPr id="37" name="">
             <a:extLst xmlns:a="http://schemas.openxmlformats.org/drawingml/2006/main">
               <a:ext uri="{FF2B5EF4-FFF2-40B4-BE49-F238E27FC236}">
-                <a16:creationId xmlns:a16="http://schemas.microsoft.com/office/drawing/2014/main" id="{BC6A875F-CB7E-4F59-B08A-390B0757196E}"/>
+                <a16:creationId xmlns:a16="http://schemas.microsoft.com/office/drawing/2014/main" id="{72DC202E-461D-4FFE-971F-1936125345AF}"/>
               </a:ext>
             </a:extLst>
           </p:cNvPr>
@@ -12743,7 +12571,7 @@
           <p:cNvPr id="38" name="">
             <a:extLst xmlns:a="http://schemas.openxmlformats.org/drawingml/2006/main">
               <a:ext uri="{FF2B5EF4-FFF2-40B4-BE49-F238E27FC236}">
-                <a16:creationId xmlns:a16="http://schemas.microsoft.com/office/drawing/2014/main" id="{18D8B9A0-D758-45D1-AD6E-ED9387BCFBB4}"/>
+                <a16:creationId xmlns:a16="http://schemas.microsoft.com/office/drawing/2014/main" id="{5D6591B0-1EB1-4C38-9050-032A0E228A4C}"/>
               </a:ext>
             </a:extLst>
           </p:cNvPr>
@@ -12778,7 +12606,7 @@
           <p:cNvPr id="39" name="">
             <a:extLst xmlns:a="http://schemas.openxmlformats.org/drawingml/2006/main">
               <a:ext uri="{FF2B5EF4-FFF2-40B4-BE49-F238E27FC236}">
-                <a16:creationId xmlns:a16="http://schemas.microsoft.com/office/drawing/2014/main" id="{DD197064-5A85-4DCC-9A03-3037283D654D}"/>
+                <a16:creationId xmlns:a16="http://schemas.microsoft.com/office/drawing/2014/main" id="{AEFFD151-5810-4733-A8D8-E3985B3AA93F}"/>
               </a:ext>
             </a:extLst>
           </p:cNvPr>
@@ -12814,7 +12642,6 @@
           <a:lstStyle xmlns:a="http://schemas.openxmlformats.org/drawingml/2006/main"/>
           <a:p xmlns:a="http://schemas.openxmlformats.org/drawingml/2006/main">
             <a:pPr algn="l">
-              <a:buNone/>
               <a:defRPr sz="2100" b="1">
                 <a:solidFill>
                   <a:srgbClr val="17202A"/>
@@ -12843,7 +12670,7 @@
           <p:cNvPr id="40" name="">
             <a:extLst xmlns:a="http://schemas.openxmlformats.org/drawingml/2006/main">
               <a:ext uri="{FF2B5EF4-FFF2-40B4-BE49-F238E27FC236}">
-                <a16:creationId xmlns:a16="http://schemas.microsoft.com/office/drawing/2014/main" id="{91E3A066-AC78-413E-8C4E-C3813C203B07}"/>
+                <a16:creationId xmlns:a16="http://schemas.microsoft.com/office/drawing/2014/main" id="{7B035435-4BCC-4A06-9C33-DF09291DBAC7}"/>
               </a:ext>
             </a:extLst>
           </p:cNvPr>
@@ -12879,7 +12706,6 @@
           <a:lstStyle xmlns:a="http://schemas.openxmlformats.org/drawingml/2006/main"/>
           <a:p xmlns:a="http://schemas.openxmlformats.org/drawingml/2006/main">
             <a:pPr algn="l">
-              <a:buNone/>
               <a:defRPr sz="900" b="0">
                 <a:solidFill>
                   <a:srgbClr val="5F6B64"/>
@@ -12898,7 +12724,7 @@
                 <a:ea typeface="Aptos"/>
                 <a:cs typeface="Aptos"/>
               </a:rPr>
-              <a:t>consumidores activos</a:t>
+              <a:t>active consumers</a:t>
             </a:r>
           </a:p>
         </p:txBody>
@@ -12908,7 +12734,7 @@
           <p:cNvPr id="41" name="">
             <a:extLst xmlns:a="http://schemas.openxmlformats.org/drawingml/2006/main">
               <a:ext uri="{FF2B5EF4-FFF2-40B4-BE49-F238E27FC236}">
-                <a16:creationId xmlns:a16="http://schemas.microsoft.com/office/drawing/2014/main" id="{3DB9EBBA-0057-49BF-B003-29FB95729F5F}"/>
+                <a16:creationId xmlns:a16="http://schemas.microsoft.com/office/drawing/2014/main" id="{577D0418-F1B2-4207-8277-30366127B41C}"/>
               </a:ext>
             </a:extLst>
           </p:cNvPr>
@@ -12941,7 +12767,7 @@
           <p:cNvPr id="42" name="">
             <a:extLst xmlns:a="http://schemas.openxmlformats.org/drawingml/2006/main">
               <a:ext uri="{FF2B5EF4-FFF2-40B4-BE49-F238E27FC236}">
-                <a16:creationId xmlns:a16="http://schemas.microsoft.com/office/drawing/2014/main" id="{CF04921C-8184-449E-A848-9C35C719E6CD}"/>
+                <a16:creationId xmlns:a16="http://schemas.microsoft.com/office/drawing/2014/main" id="{8ADB4F8E-0887-4B00-8C26-97019F69F7D8}"/>
               </a:ext>
             </a:extLst>
           </p:cNvPr>
@@ -12976,7 +12802,7 @@
           <p:cNvPr id="43" name="">
             <a:extLst xmlns:a="http://schemas.openxmlformats.org/drawingml/2006/main">
               <a:ext uri="{FF2B5EF4-FFF2-40B4-BE49-F238E27FC236}">
-                <a16:creationId xmlns:a16="http://schemas.microsoft.com/office/drawing/2014/main" id="{1F8C4217-802C-4AB9-9841-E97F3C9AA2A2}"/>
+                <a16:creationId xmlns:a16="http://schemas.microsoft.com/office/drawing/2014/main" id="{9BB15A29-7127-4795-B22C-835DE78359E1}"/>
               </a:ext>
             </a:extLst>
           </p:cNvPr>
@@ -13012,7 +12838,6 @@
           <a:lstStyle xmlns:a="http://schemas.openxmlformats.org/drawingml/2006/main"/>
           <a:p xmlns:a="http://schemas.openxmlformats.org/drawingml/2006/main">
             <a:pPr algn="l">
-              <a:buNone/>
               <a:defRPr sz="2100" b="1">
                 <a:solidFill>
                   <a:srgbClr val="17202A"/>
@@ -13041,7 +12866,7 @@
           <p:cNvPr id="44" name="">
             <a:extLst xmlns:a="http://schemas.openxmlformats.org/drawingml/2006/main">
               <a:ext uri="{FF2B5EF4-FFF2-40B4-BE49-F238E27FC236}">
-                <a16:creationId xmlns:a16="http://schemas.microsoft.com/office/drawing/2014/main" id="{8F27F6C0-17DB-4371-8F5D-4B049AF8A570}"/>
+                <a16:creationId xmlns:a16="http://schemas.microsoft.com/office/drawing/2014/main" id="{609FF8D3-F0D0-47BC-BD7B-41CF7CE068BB}"/>
               </a:ext>
             </a:extLst>
           </p:cNvPr>
@@ -13077,7 +12902,6 @@
           <a:lstStyle xmlns:a="http://schemas.openxmlformats.org/drawingml/2006/main"/>
           <a:p xmlns:a="http://schemas.openxmlformats.org/drawingml/2006/main">
             <a:pPr algn="l">
-              <a:buNone/>
               <a:defRPr sz="900" b="0">
                 <a:solidFill>
                   <a:srgbClr val="5F6B64"/>
@@ -13096,7 +12920,7 @@
                 <a:ea typeface="Aptos"/>
                 <a:cs typeface="Aptos"/>
               </a:rPr>
-              <a:t>credenciales directas en Atlas</a:t>
+              <a:t>direct credentials in Atlas</a:t>
             </a:r>
           </a:p>
         </p:txBody>
@@ -13106,7 +12930,7 @@
           <p:cNvPr id="45" name="">
             <a:extLst xmlns:a="http://schemas.openxmlformats.org/drawingml/2006/main">
               <a:ext uri="{FF2B5EF4-FFF2-40B4-BE49-F238E27FC236}">
-                <a16:creationId xmlns:a16="http://schemas.microsoft.com/office/drawing/2014/main" id="{A80959CB-5858-485C-94FD-55D22C216FDB}"/>
+                <a16:creationId xmlns:a16="http://schemas.microsoft.com/office/drawing/2014/main" id="{D4307FD9-4652-4588-B704-3AC2FF3F885A}"/>
               </a:ext>
             </a:extLst>
           </p:cNvPr>
@@ -13139,7 +12963,7 @@
           <p:cNvPr id="46" name="">
             <a:extLst xmlns:a="http://schemas.openxmlformats.org/drawingml/2006/main">
               <a:ext uri="{FF2B5EF4-FFF2-40B4-BE49-F238E27FC236}">
-                <a16:creationId xmlns:a16="http://schemas.microsoft.com/office/drawing/2014/main" id="{87943A25-3CA0-4584-97C0-D953480A32F4}"/>
+                <a16:creationId xmlns:a16="http://schemas.microsoft.com/office/drawing/2014/main" id="{77681F02-F0E5-45C1-96EF-F3443FA401AA}"/>
               </a:ext>
             </a:extLst>
           </p:cNvPr>
@@ -13174,7 +12998,7 @@
           <p:cNvPr id="47" name="">
             <a:extLst xmlns:a="http://schemas.openxmlformats.org/drawingml/2006/main">
               <a:ext uri="{FF2B5EF4-FFF2-40B4-BE49-F238E27FC236}">
-                <a16:creationId xmlns:a16="http://schemas.microsoft.com/office/drawing/2014/main" id="{9F32231F-9BCB-460E-A91E-7D0AD58A38EF}"/>
+                <a16:creationId xmlns:a16="http://schemas.microsoft.com/office/drawing/2014/main" id="{7CAC9BDB-AB4B-434B-864B-B5DDD6EF5FB7}"/>
               </a:ext>
             </a:extLst>
           </p:cNvPr>
@@ -13210,7 +13034,6 @@
           <a:lstStyle xmlns:a="http://schemas.openxmlformats.org/drawingml/2006/main"/>
           <a:p xmlns:a="http://schemas.openxmlformats.org/drawingml/2006/main">
             <a:pPr algn="l">
-              <a:buNone/>
               <a:defRPr sz="2100" b="1">
                 <a:solidFill>
                   <a:srgbClr val="17202A"/>
@@ -13239,7 +13062,7 @@
           <p:cNvPr id="48" name="">
             <a:extLst xmlns:a="http://schemas.openxmlformats.org/drawingml/2006/main">
               <a:ext uri="{FF2B5EF4-FFF2-40B4-BE49-F238E27FC236}">
-                <a16:creationId xmlns:a16="http://schemas.microsoft.com/office/drawing/2014/main" id="{0D6AE1E0-A0CE-4016-9345-BA981D49748C}"/>
+                <a16:creationId xmlns:a16="http://schemas.microsoft.com/office/drawing/2014/main" id="{70D86CD1-0022-47FF-BE85-3A58A3589DC2}"/>
               </a:ext>
             </a:extLst>
           </p:cNvPr>
@@ -13275,7 +13098,6 @@
           <a:lstStyle xmlns:a="http://schemas.openxmlformats.org/drawingml/2006/main"/>
           <a:p xmlns:a="http://schemas.openxmlformats.org/drawingml/2006/main">
             <a:pPr algn="l">
-              <a:buNone/>
               <a:defRPr sz="900" b="0">
                 <a:solidFill>
                   <a:srgbClr val="5F6B64"/>
@@ -13294,7 +13116,7 @@
                 <a:ea typeface="Aptos"/>
                 <a:cs typeface="Aptos"/>
               </a:rPr>
-              <a:t>robots futuros</a:t>
+              <a:t>future robots</a:t>
             </a:r>
           </a:p>
         </p:txBody>
@@ -13304,7 +13126,7 @@
           <p:cNvPr id="49" name="">
             <a:extLst xmlns:a="http://schemas.openxmlformats.org/drawingml/2006/main">
               <a:ext uri="{FF2B5EF4-FFF2-40B4-BE49-F238E27FC236}">
-                <a16:creationId xmlns:a16="http://schemas.microsoft.com/office/drawing/2014/main" id="{DE6A9F57-5935-45DD-A332-428F52B0A5FE}"/>
+                <a16:creationId xmlns:a16="http://schemas.microsoft.com/office/drawing/2014/main" id="{3815214D-9C74-4491-87F0-3AC7D3EC84F5}"/>
               </a:ext>
             </a:extLst>
           </p:cNvPr>
@@ -13340,7 +13162,6 @@
           <a:lstStyle xmlns:a="http://schemas.openxmlformats.org/drawingml/2006/main"/>
           <a:p xmlns:a="http://schemas.openxmlformats.org/drawingml/2006/main">
             <a:pPr algn="l">
-              <a:buNone/>
               <a:defRPr sz="1050" b="0">
                 <a:solidFill>
                   <a:srgbClr val="17202A"/>
@@ -13359,7 +13180,7 @@
                 <a:ea typeface="Aptos"/>
                 <a:cs typeface="Aptos"/>
               </a:rPr>
-              <a:t>La ventaja no es solo reusar datos. Es compartir semantica, calidad y cobertura.</a:t>
+              <a:t>The advantage is not only reuse. It is shared semantics, quality, and coverage.</a:t>
             </a:r>
           </a:p>
         </p:txBody>
@@ -13369,7 +13190,7 @@
           <p:cNvPr id="50" name="">
             <a:extLst xmlns:a="http://schemas.openxmlformats.org/drawingml/2006/main">
               <a:ext uri="{FF2B5EF4-FFF2-40B4-BE49-F238E27FC236}">
-                <a16:creationId xmlns:a16="http://schemas.microsoft.com/office/drawing/2014/main" id="{9DDE5E2C-9463-49DC-9875-87B9F489FF64}"/>
+                <a16:creationId xmlns:a16="http://schemas.microsoft.com/office/drawing/2014/main" id="{004931BF-23D8-45C3-B1A5-162EA5E65715}"/>
               </a:ext>
             </a:extLst>
           </p:cNvPr>
@@ -13405,7 +13226,6 @@
           <a:lstStyle xmlns:a="http://schemas.openxmlformats.org/drawingml/2006/main"/>
           <a:p xmlns:a="http://schemas.openxmlformats.org/drawingml/2006/main">
             <a:pPr algn="r">
-              <a:buNone/>
               <a:defRPr sz="750" b="0">
                 <a:solidFill>
                   <a:srgbClr val="5F6B64"/>
@@ -13432,7 +13252,7 @@
     </p:spTree>
     <p:extLst>
       <p:ext uri="{BB962C8B-B14F-4D97-AF65-F5344CB8AC3E}">
-        <p14:creationId xmlns:p14="http://schemas.microsoft.com/office/powerpoint/2010/main" val="899471512"/>
+        <p14:creationId xmlns:p14="http://schemas.microsoft.com/office/powerpoint/2010/main" val="279482338"/>
       </p:ext>
     </p:extLst>
   </p:cSld>
@@ -13456,7 +13276,7 @@
           <p:cNvPr id="1" name="">
             <a:extLst xmlns:a="http://schemas.openxmlformats.org/drawingml/2006/main">
               <a:ext uri="{FF2B5EF4-FFF2-40B4-BE49-F238E27FC236}">
-                <a16:creationId xmlns:a16="http://schemas.microsoft.com/office/drawing/2014/main" id="{B90687CB-E062-487A-84A1-6FD9730D0855}"/>
+                <a16:creationId xmlns:a16="http://schemas.microsoft.com/office/drawing/2014/main" id="{5BADD711-C061-4471-8FC1-772B8BA3AF29}"/>
               </a:ext>
             </a:extLst>
           </p:cNvPr>
@@ -13491,7 +13311,7 @@
           <p:cNvPr id="2" name="">
             <a:extLst xmlns:a="http://schemas.openxmlformats.org/drawingml/2006/main">
               <a:ext uri="{FF2B5EF4-FFF2-40B4-BE49-F238E27FC236}">
-                <a16:creationId xmlns:a16="http://schemas.microsoft.com/office/drawing/2014/main" id="{CD90EC9F-6E57-419A-9BFC-95184ED683C8}"/>
+                <a16:creationId xmlns:a16="http://schemas.microsoft.com/office/drawing/2014/main" id="{EADD0A8F-6352-48B4-B63F-D08EDB94418F}"/>
               </a:ext>
             </a:extLst>
           </p:cNvPr>
@@ -13526,7 +13346,7 @@
           <p:cNvPr id="3" name="">
             <a:extLst xmlns:a="http://schemas.openxmlformats.org/drawingml/2006/main">
               <a:ext uri="{FF2B5EF4-FFF2-40B4-BE49-F238E27FC236}">
-                <a16:creationId xmlns:a16="http://schemas.microsoft.com/office/drawing/2014/main" id="{5619752C-8046-4C50-8C8E-B9BE843ED359}"/>
+                <a16:creationId xmlns:a16="http://schemas.microsoft.com/office/drawing/2014/main" id="{EAA9D804-8BF2-4170-8CC8-E86D804A8095}"/>
               </a:ext>
             </a:extLst>
           </p:cNvPr>
@@ -13562,7 +13382,6 @@
           <a:lstStyle xmlns:a="http://schemas.openxmlformats.org/drawingml/2006/main"/>
           <a:p xmlns:a="http://schemas.openxmlformats.org/drawingml/2006/main">
             <a:pPr algn="l">
-              <a:buNone/>
               <a:defRPr sz="900" b="1">
                 <a:solidFill>
                   <a:srgbClr val="0F8A6A"/>
@@ -13591,7 +13410,7 @@
           <p:cNvPr id="4" name="">
             <a:extLst xmlns:a="http://schemas.openxmlformats.org/drawingml/2006/main">
               <a:ext uri="{FF2B5EF4-FFF2-40B4-BE49-F238E27FC236}">
-                <a16:creationId xmlns:a16="http://schemas.microsoft.com/office/drawing/2014/main" id="{37020D2C-0D02-45DB-B9E8-B6B91FBBB0AA}"/>
+                <a16:creationId xmlns:a16="http://schemas.microsoft.com/office/drawing/2014/main" id="{785545E8-931D-4F82-BCAD-E705FAC5D66D}"/>
               </a:ext>
             </a:extLst>
           </p:cNvPr>
@@ -13627,7 +13446,6 @@
           <a:lstStyle xmlns:a="http://schemas.openxmlformats.org/drawingml/2006/main"/>
           <a:p xmlns:a="http://schemas.openxmlformats.org/drawingml/2006/main">
             <a:pPr algn="l">
-              <a:buNone/>
               <a:defRPr sz="2325" b="1">
                 <a:solidFill>
                   <a:srgbClr val="17202A"/>
@@ -13646,7 +13464,7 @@
                 <a:ea typeface="Aptos Display"/>
                 <a:cs typeface="Aptos Display"/>
               </a:rPr>
-              <a:t>Los errores no terminan en PnL: se transforman en replay, explicacion y mejora candidateada.</a:t>
+              <a:t>Losses do not end in PnL. They become replay, explanation, and candidate improvements.</a:t>
             </a:r>
           </a:p>
         </p:txBody>
@@ -13656,7 +13474,7 @@
           <p:cNvPr id="5" name="">
             <a:extLst xmlns:a="http://schemas.openxmlformats.org/drawingml/2006/main">
               <a:ext uri="{FF2B5EF4-FFF2-40B4-BE49-F238E27FC236}">
-                <a16:creationId xmlns:a16="http://schemas.microsoft.com/office/drawing/2014/main" id="{F4926B98-AA7A-4AAE-BFFC-02974E6DA535}"/>
+                <a16:creationId xmlns:a16="http://schemas.microsoft.com/office/drawing/2014/main" id="{1454B36A-1579-420F-8F5F-3172C8C77C77}"/>
               </a:ext>
             </a:extLst>
           </p:cNvPr>
@@ -13689,7 +13507,7 @@
           <p:cNvPr id="6" name="">
             <a:extLst xmlns:a="http://schemas.openxmlformats.org/drawingml/2006/main">
               <a:ext uri="{FF2B5EF4-FFF2-40B4-BE49-F238E27FC236}">
-                <a16:creationId xmlns:a16="http://schemas.microsoft.com/office/drawing/2014/main" id="{AEEDFDD9-CE8D-4A51-B07D-7D7CB3299A41}"/>
+                <a16:creationId xmlns:a16="http://schemas.microsoft.com/office/drawing/2014/main" id="{870D6444-E407-47D1-9F5C-C39CEC908E49}"/>
               </a:ext>
             </a:extLst>
           </p:cNvPr>
@@ -13725,7 +13543,6 @@
           <a:lstStyle xmlns:a="http://schemas.openxmlformats.org/drawingml/2006/main"/>
           <a:p xmlns:a="http://schemas.openxmlformats.org/drawingml/2006/main">
             <a:pPr algn="l">
-              <a:buNone/>
               <a:defRPr sz="1200" b="1">
                 <a:solidFill>
                   <a:srgbClr val="0F8A6A"/>
@@ -13754,7 +13571,7 @@
           <p:cNvPr id="7" name="">
             <a:extLst xmlns:a="http://schemas.openxmlformats.org/drawingml/2006/main">
               <a:ext uri="{FF2B5EF4-FFF2-40B4-BE49-F238E27FC236}">
-                <a16:creationId xmlns:a16="http://schemas.microsoft.com/office/drawing/2014/main" id="{37AD2271-A111-46F9-A717-56FDD4563F0B}"/>
+                <a16:creationId xmlns:a16="http://schemas.microsoft.com/office/drawing/2014/main" id="{A0D60944-002F-4E96-AA23-CD2C53D6F809}"/>
               </a:ext>
             </a:extLst>
           </p:cNvPr>
@@ -13790,7 +13607,6 @@
           <a:lstStyle xmlns:a="http://schemas.openxmlformats.org/drawingml/2006/main"/>
           <a:p xmlns:a="http://schemas.openxmlformats.org/drawingml/2006/main">
             <a:pPr algn="l">
-              <a:buNone/>
               <a:defRPr sz="863" b="0">
                 <a:solidFill>
                   <a:srgbClr val="17202A"/>
@@ -13809,7 +13625,7 @@
                 <a:ea typeface="Aptos"/>
                 <a:cs typeface="Aptos"/>
               </a:rPr>
-              <a:t>Una sesion real deja trades, contexto, tiempos y comportamiento.</a:t>
+              <a:t>A real session leaves trades, timing, context, and behavior.</a:t>
             </a:r>
           </a:p>
         </p:txBody>
@@ -13819,7 +13635,7 @@
           <p:cNvPr id="8" name="">
             <a:extLst xmlns:a="http://schemas.openxmlformats.org/drawingml/2006/main">
               <a:ext uri="{FF2B5EF4-FFF2-40B4-BE49-F238E27FC236}">
-                <a16:creationId xmlns:a16="http://schemas.microsoft.com/office/drawing/2014/main" id="{EA6CCF08-86E1-4B55-9C93-C467DE9754E4}"/>
+                <a16:creationId xmlns:a16="http://schemas.microsoft.com/office/drawing/2014/main" id="{4807AC15-C9AC-43DD-8B41-73D5C52F9646}"/>
               </a:ext>
             </a:extLst>
           </p:cNvPr>
@@ -13852,7 +13668,7 @@
           <p:cNvPr id="9" name="">
             <a:extLst xmlns:a="http://schemas.openxmlformats.org/drawingml/2006/main">
               <a:ext uri="{FF2B5EF4-FFF2-40B4-BE49-F238E27FC236}">
-                <a16:creationId xmlns:a16="http://schemas.microsoft.com/office/drawing/2014/main" id="{7D06D687-13EC-40AF-9890-CFC01B0D7B19}"/>
+                <a16:creationId xmlns:a16="http://schemas.microsoft.com/office/drawing/2014/main" id="{56E29E81-9D82-445C-A751-0BE91DE132A3}"/>
               </a:ext>
             </a:extLst>
           </p:cNvPr>
@@ -13888,7 +13704,6 @@
           <a:lstStyle xmlns:a="http://schemas.openxmlformats.org/drawingml/2006/main"/>
           <a:p xmlns:a="http://schemas.openxmlformats.org/drawingml/2006/main">
             <a:pPr algn="l">
-              <a:buNone/>
               <a:defRPr sz="1200" b="1">
                 <a:solidFill>
                   <a:srgbClr val="2E5EA7"/>
@@ -13917,7 +13732,7 @@
           <p:cNvPr id="10" name="">
             <a:extLst xmlns:a="http://schemas.openxmlformats.org/drawingml/2006/main">
               <a:ext uri="{FF2B5EF4-FFF2-40B4-BE49-F238E27FC236}">
-                <a16:creationId xmlns:a16="http://schemas.microsoft.com/office/drawing/2014/main" id="{A7C88230-14AC-450D-9BE1-97D265991443}"/>
+                <a16:creationId xmlns:a16="http://schemas.microsoft.com/office/drawing/2014/main" id="{2FAA2B73-C574-4C21-9F4B-CDFB049AC647}"/>
               </a:ext>
             </a:extLst>
           </p:cNvPr>
@@ -13953,7 +13768,6 @@
           <a:lstStyle xmlns:a="http://schemas.openxmlformats.org/drawingml/2006/main"/>
           <a:p xmlns:a="http://schemas.openxmlformats.org/drawingml/2006/main">
             <a:pPr algn="l">
-              <a:buNone/>
               <a:defRPr sz="863" b="0">
                 <a:solidFill>
                   <a:srgbClr val="17202A"/>
@@ -13972,7 +13786,7 @@
                 <a:ea typeface="Aptos"/>
                 <a:cs typeface="Aptos"/>
               </a:rPr>
-              <a:t>Reproduce la sesion y separa parity de experimentacion.</a:t>
+              <a:t>Reproduces the session and separates parity from experimentation.</a:t>
             </a:r>
           </a:p>
         </p:txBody>
@@ -13982,7 +13796,7 @@
           <p:cNvPr id="11" name="">
             <a:extLst xmlns:a="http://schemas.openxmlformats.org/drawingml/2006/main">
               <a:ext uri="{FF2B5EF4-FFF2-40B4-BE49-F238E27FC236}">
-                <a16:creationId xmlns:a16="http://schemas.microsoft.com/office/drawing/2014/main" id="{DC68A1B3-082B-4E63-BF9D-87B50120559A}"/>
+                <a16:creationId xmlns:a16="http://schemas.microsoft.com/office/drawing/2014/main" id="{012CBCC9-683A-4D33-AA2E-41574EF769D6}"/>
               </a:ext>
             </a:extLst>
           </p:cNvPr>
@@ -14015,7 +13829,7 @@
           <p:cNvPr id="12" name="">
             <a:extLst xmlns:a="http://schemas.openxmlformats.org/drawingml/2006/main">
               <a:ext uri="{FF2B5EF4-FFF2-40B4-BE49-F238E27FC236}">
-                <a16:creationId xmlns:a16="http://schemas.microsoft.com/office/drawing/2014/main" id="{7EB58E16-FAD2-462A-A2C1-A62EB5313546}"/>
+                <a16:creationId xmlns:a16="http://schemas.microsoft.com/office/drawing/2014/main" id="{ED3F4977-FC16-40F8-90F3-D3EBFA0A8188}"/>
               </a:ext>
             </a:extLst>
           </p:cNvPr>
@@ -14051,7 +13865,6 @@
           <a:lstStyle xmlns:a="http://schemas.openxmlformats.org/drawingml/2006/main"/>
           <a:p xmlns:a="http://schemas.openxmlformats.org/drawingml/2006/main">
             <a:pPr algn="l">
-              <a:buNone/>
               <a:defRPr sz="1200" b="1">
                 <a:solidFill>
                   <a:srgbClr val="C98A21"/>
@@ -14080,7 +13893,7 @@
           <p:cNvPr id="13" name="">
             <a:extLst xmlns:a="http://schemas.openxmlformats.org/drawingml/2006/main">
               <a:ext uri="{FF2B5EF4-FFF2-40B4-BE49-F238E27FC236}">
-                <a16:creationId xmlns:a16="http://schemas.microsoft.com/office/drawing/2014/main" id="{37733B8D-776C-47A8-A4AE-44B462FBE7E5}"/>
+                <a16:creationId xmlns:a16="http://schemas.microsoft.com/office/drawing/2014/main" id="{9D70DB68-ECF3-4C5B-8E94-F450970C69F8}"/>
               </a:ext>
             </a:extLst>
           </p:cNvPr>
@@ -14116,7 +13929,6 @@
           <a:lstStyle xmlns:a="http://schemas.openxmlformats.org/drawingml/2006/main"/>
           <a:p xmlns:a="http://schemas.openxmlformats.org/drawingml/2006/main">
             <a:pPr algn="l">
-              <a:buNone/>
               <a:defRPr sz="863" b="0">
                 <a:solidFill>
                   <a:srgbClr val="17202A"/>
@@ -14135,7 +13947,7 @@
                 <a:ea typeface="Aptos"/>
                 <a:cs typeface="Aptos"/>
               </a:rPr>
-              <a:t>Hace visible precio, decisiones, MFE/MAE y diagnosticos.</a:t>
+              <a:t>Makes price, decisions, MFE/MAE, and diagnostics visible.</a:t>
             </a:r>
           </a:p>
         </p:txBody>
@@ -14145,7 +13957,7 @@
           <p:cNvPr id="14" name="">
             <a:extLst xmlns:a="http://schemas.openxmlformats.org/drawingml/2006/main">
               <a:ext uri="{FF2B5EF4-FFF2-40B4-BE49-F238E27FC236}">
-                <a16:creationId xmlns:a16="http://schemas.microsoft.com/office/drawing/2014/main" id="{2437FA63-C18D-40AC-B9E2-149A24B0B8E9}"/>
+                <a16:creationId xmlns:a16="http://schemas.microsoft.com/office/drawing/2014/main" id="{8618157C-0CAD-43EC-B9F5-0ECFDB210CD0}"/>
               </a:ext>
             </a:extLst>
           </p:cNvPr>
@@ -14178,7 +13990,7 @@
           <p:cNvPr id="15" name="">
             <a:extLst xmlns:a="http://schemas.openxmlformats.org/drawingml/2006/main">
               <a:ext uri="{FF2B5EF4-FFF2-40B4-BE49-F238E27FC236}">
-                <a16:creationId xmlns:a16="http://schemas.microsoft.com/office/drawing/2014/main" id="{9053CA78-99F8-4900-883C-08306E392F53}"/>
+                <a16:creationId xmlns:a16="http://schemas.microsoft.com/office/drawing/2014/main" id="{9EB6A0E0-4046-4122-98D6-CD05499B9E2B}"/>
               </a:ext>
             </a:extLst>
           </p:cNvPr>
@@ -14214,7 +14026,6 @@
           <a:lstStyle xmlns:a="http://schemas.openxmlformats.org/drawingml/2006/main"/>
           <a:p xmlns:a="http://schemas.openxmlformats.org/drawingml/2006/main">
             <a:pPr algn="l">
-              <a:buNone/>
               <a:defRPr sz="1200" b="1">
                 <a:solidFill>
                   <a:srgbClr val="6559B7"/>
@@ -14243,7 +14054,7 @@
           <p:cNvPr id="16" name="">
             <a:extLst xmlns:a="http://schemas.openxmlformats.org/drawingml/2006/main">
               <a:ext uri="{FF2B5EF4-FFF2-40B4-BE49-F238E27FC236}">
-                <a16:creationId xmlns:a16="http://schemas.microsoft.com/office/drawing/2014/main" id="{D2DBD3BA-2E90-4498-8820-BA80D8C402E2}"/>
+                <a16:creationId xmlns:a16="http://schemas.microsoft.com/office/drawing/2014/main" id="{8454250B-DAB4-42EF-93C0-C28B263A6809}"/>
               </a:ext>
             </a:extLst>
           </p:cNvPr>
@@ -14279,7 +14090,6 @@
           <a:lstStyle xmlns:a="http://schemas.openxmlformats.org/drawingml/2006/main"/>
           <a:p xmlns:a="http://schemas.openxmlformats.org/drawingml/2006/main">
             <a:pPr algn="l">
-              <a:buNone/>
               <a:defRPr sz="863" b="0">
                 <a:solidFill>
                   <a:srgbClr val="17202A"/>
@@ -14298,7 +14108,7 @@
                 <a:ea typeface="Aptos"/>
                 <a:cs typeface="Aptos"/>
               </a:rPr>
-              <a:t>Compara lo que el robot hizo contra lo que pudo haber visto.</a:t>
+              <a:t>Compares what the robot did versus what it could have seen.</a:t>
             </a:r>
           </a:p>
         </p:txBody>
@@ -14308,7 +14118,7 @@
           <p:cNvPr id="17" name="">
             <a:extLst xmlns:a="http://schemas.openxmlformats.org/drawingml/2006/main">
               <a:ext uri="{FF2B5EF4-FFF2-40B4-BE49-F238E27FC236}">
-                <a16:creationId xmlns:a16="http://schemas.microsoft.com/office/drawing/2014/main" id="{6BE07839-D7D0-4138-836B-7B3B10A5A1A7}"/>
+                <a16:creationId xmlns:a16="http://schemas.microsoft.com/office/drawing/2014/main" id="{2A955058-F41A-4747-BDD6-E3090C0F4DF7}"/>
               </a:ext>
             </a:extLst>
           </p:cNvPr>
@@ -14341,7 +14151,7 @@
           <p:cNvPr id="18" name="">
             <a:extLst xmlns:a="http://schemas.openxmlformats.org/drawingml/2006/main">
               <a:ext uri="{FF2B5EF4-FFF2-40B4-BE49-F238E27FC236}">
-                <a16:creationId xmlns:a16="http://schemas.microsoft.com/office/drawing/2014/main" id="{E0F78D16-CFB4-4EB6-872C-201AB563C068}"/>
+                <a16:creationId xmlns:a16="http://schemas.microsoft.com/office/drawing/2014/main" id="{9B872006-501C-4249-9E72-B8A9980233B0}"/>
               </a:ext>
             </a:extLst>
           </p:cNvPr>
@@ -14377,7 +14187,6 @@
           <a:lstStyle xmlns:a="http://schemas.openxmlformats.org/drawingml/2006/main"/>
           <a:p xmlns:a="http://schemas.openxmlformats.org/drawingml/2006/main">
             <a:pPr algn="l">
-              <a:buNone/>
               <a:defRPr sz="1200" b="1">
                 <a:solidFill>
                   <a:srgbClr val="C85847"/>
@@ -14406,7 +14215,7 @@
           <p:cNvPr id="19" name="">
             <a:extLst xmlns:a="http://schemas.openxmlformats.org/drawingml/2006/main">
               <a:ext uri="{FF2B5EF4-FFF2-40B4-BE49-F238E27FC236}">
-                <a16:creationId xmlns:a16="http://schemas.microsoft.com/office/drawing/2014/main" id="{81C950F5-1BAC-4903-87BB-A818776A1994}"/>
+                <a16:creationId xmlns:a16="http://schemas.microsoft.com/office/drawing/2014/main" id="{041B6687-BE07-491D-B81D-EE4BFA295C1A}"/>
               </a:ext>
             </a:extLst>
           </p:cNvPr>
@@ -14442,7 +14251,6 @@
           <a:lstStyle xmlns:a="http://schemas.openxmlformats.org/drawingml/2006/main"/>
           <a:p xmlns:a="http://schemas.openxmlformats.org/drawingml/2006/main">
             <a:pPr algn="l">
-              <a:buNone/>
               <a:defRPr sz="863" b="0">
                 <a:solidFill>
                   <a:srgbClr val="17202A"/>
@@ -14461,7 +14269,7 @@
                 <a:ea typeface="Aptos"/>
                 <a:cs typeface="Aptos"/>
               </a:rPr>
-              <a:t>Extrae hallazgos repetidos y los convierte en candidatos.</a:t>
+              <a:t>Extracts repeated findings and turns them into candidates.</a:t>
             </a:r>
           </a:p>
         </p:txBody>
@@ -14471,7 +14279,7 @@
           <p:cNvPr id="20" name="">
             <a:extLst xmlns:a="http://schemas.openxmlformats.org/drawingml/2006/main">
               <a:ext uri="{FF2B5EF4-FFF2-40B4-BE49-F238E27FC236}">
-                <a16:creationId xmlns:a16="http://schemas.microsoft.com/office/drawing/2014/main" id="{1C135F77-6D52-44A5-A42F-7DF07BC03490}"/>
+                <a16:creationId xmlns:a16="http://schemas.microsoft.com/office/drawing/2014/main" id="{B811E0BE-05DC-4E06-87F1-5ACF656A3385}"/>
               </a:ext>
             </a:extLst>
           </p:cNvPr>
@@ -14504,7 +14312,7 @@
           <p:cNvPr id="21" name="">
             <a:extLst xmlns:a="http://schemas.openxmlformats.org/drawingml/2006/main">
               <a:ext uri="{FF2B5EF4-FFF2-40B4-BE49-F238E27FC236}">
-                <a16:creationId xmlns:a16="http://schemas.microsoft.com/office/drawing/2014/main" id="{453E8CFE-32CA-40D3-9197-A9F42A13AA63}"/>
+                <a16:creationId xmlns:a16="http://schemas.microsoft.com/office/drawing/2014/main" id="{FCFD0CA8-78DB-4294-8752-C3B8231C4CB0}"/>
               </a:ext>
             </a:extLst>
           </p:cNvPr>
@@ -14537,7 +14345,7 @@
           <p:cNvPr id="22" name="">
             <a:extLst xmlns:a="http://schemas.openxmlformats.org/drawingml/2006/main">
               <a:ext uri="{FF2B5EF4-FFF2-40B4-BE49-F238E27FC236}">
-                <a16:creationId xmlns:a16="http://schemas.microsoft.com/office/drawing/2014/main" id="{A83AAFD0-9B4E-4FA6-BBEB-944C605E5A04}"/>
+                <a16:creationId xmlns:a16="http://schemas.microsoft.com/office/drawing/2014/main" id="{A2D94CC7-A943-4219-81FD-FCC02BBDDCF1}"/>
               </a:ext>
             </a:extLst>
           </p:cNvPr>
@@ -14570,7 +14378,7 @@
           <p:cNvPr id="23" name="">
             <a:extLst xmlns:a="http://schemas.openxmlformats.org/drawingml/2006/main">
               <a:ext uri="{FF2B5EF4-FFF2-40B4-BE49-F238E27FC236}">
-                <a16:creationId xmlns:a16="http://schemas.microsoft.com/office/drawing/2014/main" id="{947C32B9-50A2-4232-B7B9-3C1D35281D5B}"/>
+                <a16:creationId xmlns:a16="http://schemas.microsoft.com/office/drawing/2014/main" id="{140C6E8F-DE48-4E2A-AEB3-ACCD1261FFD6}"/>
               </a:ext>
             </a:extLst>
           </p:cNvPr>
@@ -14603,7 +14411,7 @@
           <p:cNvPr id="24" name="">
             <a:extLst xmlns:a="http://schemas.openxmlformats.org/drawingml/2006/main">
               <a:ext uri="{FF2B5EF4-FFF2-40B4-BE49-F238E27FC236}">
-                <a16:creationId xmlns:a16="http://schemas.microsoft.com/office/drawing/2014/main" id="{BF01AC94-0E17-48CE-8371-B85ECA429DDC}"/>
+                <a16:creationId xmlns:a16="http://schemas.microsoft.com/office/drawing/2014/main" id="{AC9AA83B-E1AB-44C0-A65C-76DDBB088E3B}"/>
               </a:ext>
             </a:extLst>
           </p:cNvPr>
@@ -14636,7 +14444,7 @@
           <p:cNvPr id="25" name="">
             <a:extLst xmlns:a="http://schemas.openxmlformats.org/drawingml/2006/main">
               <a:ext uri="{FF2B5EF4-FFF2-40B4-BE49-F238E27FC236}">
-                <a16:creationId xmlns:a16="http://schemas.microsoft.com/office/drawing/2014/main" id="{EF890FFD-8962-4124-9AD5-6A2AE91C62E9}"/>
+                <a16:creationId xmlns:a16="http://schemas.microsoft.com/office/drawing/2014/main" id="{1F0BE82D-A5A9-4FFC-A746-01A0B14C76E1}"/>
               </a:ext>
             </a:extLst>
           </p:cNvPr>
@@ -14669,7 +14477,7 @@
           <p:cNvPr id="26" name="">
             <a:extLst xmlns:a="http://schemas.openxmlformats.org/drawingml/2006/main">
               <a:ext uri="{FF2B5EF4-FFF2-40B4-BE49-F238E27FC236}">
-                <a16:creationId xmlns:a16="http://schemas.microsoft.com/office/drawing/2014/main" id="{689F783A-80F3-4C55-BAC7-FDCBA4EB3FA6}"/>
+                <a16:creationId xmlns:a16="http://schemas.microsoft.com/office/drawing/2014/main" id="{45588D82-C8F4-4089-9E58-F91CCDC66FBD}"/>
               </a:ext>
             </a:extLst>
           </p:cNvPr>
@@ -14702,7 +14510,7 @@
           <p:cNvPr id="27" name="">
             <a:extLst xmlns:a="http://schemas.openxmlformats.org/drawingml/2006/main">
               <a:ext uri="{FF2B5EF4-FFF2-40B4-BE49-F238E27FC236}">
-                <a16:creationId xmlns:a16="http://schemas.microsoft.com/office/drawing/2014/main" id="{5C2B4D69-5BF1-493D-8D1F-6DF801BB4813}"/>
+                <a16:creationId xmlns:a16="http://schemas.microsoft.com/office/drawing/2014/main" id="{672B9CC9-D4E1-4755-A6C2-19792CA7BA8B}"/>
               </a:ext>
             </a:extLst>
           </p:cNvPr>
@@ -14735,7 +14543,7 @@
           <p:cNvPr id="28" name="">
             <a:extLst xmlns:a="http://schemas.openxmlformats.org/drawingml/2006/main">
               <a:ext uri="{FF2B5EF4-FFF2-40B4-BE49-F238E27FC236}">
-                <a16:creationId xmlns:a16="http://schemas.microsoft.com/office/drawing/2014/main" id="{34E3090C-5BDB-47B9-9932-13ACC4F31A0C}"/>
+                <a16:creationId xmlns:a16="http://schemas.microsoft.com/office/drawing/2014/main" id="{7C502C27-309B-429F-8063-8806FBA0D583}"/>
               </a:ext>
             </a:extLst>
           </p:cNvPr>
@@ -14768,7 +14576,7 @@
           <p:cNvPr id="29" name="">
             <a:extLst xmlns:a="http://schemas.openxmlformats.org/drawingml/2006/main">
               <a:ext uri="{FF2B5EF4-FFF2-40B4-BE49-F238E27FC236}">
-                <a16:creationId xmlns:a16="http://schemas.microsoft.com/office/drawing/2014/main" id="{1CF086AF-C15A-4BEA-A188-D258A803C486}"/>
+                <a16:creationId xmlns:a16="http://schemas.microsoft.com/office/drawing/2014/main" id="{7D201FE5-28EC-48DA-B0EC-E770849590D4}"/>
               </a:ext>
             </a:extLst>
           </p:cNvPr>
@@ -14804,7 +14612,6 @@
           <a:lstStyle xmlns:a="http://schemas.openxmlformats.org/drawingml/2006/main"/>
           <a:p xmlns:a="http://schemas.openxmlformats.org/drawingml/2006/main">
             <a:pPr algn="ctr">
-              <a:buNone/>
               <a:defRPr sz="1200" b="0">
                 <a:solidFill>
                   <a:srgbClr val="5F6B64"/>
@@ -14823,7 +14630,7 @@
                 <a:ea typeface="Aptos"/>
                 <a:cs typeface="Aptos"/>
               </a:rPr>
-              <a:t>La idea central del laboratorio:</a:t>
+              <a:t>The lab exists for one reason:</a:t>
             </a:r>
           </a:p>
         </p:txBody>
@@ -14833,7 +14640,7 @@
           <p:cNvPr id="30" name="">
             <a:extLst xmlns:a="http://schemas.openxmlformats.org/drawingml/2006/main">
               <a:ext uri="{FF2B5EF4-FFF2-40B4-BE49-F238E27FC236}">
-                <a16:creationId xmlns:a16="http://schemas.microsoft.com/office/drawing/2014/main" id="{16DE0D74-690F-47A2-884C-B7EE329CA6CF}"/>
+                <a16:creationId xmlns:a16="http://schemas.microsoft.com/office/drawing/2014/main" id="{2EA1DD72-0559-40A7-9A8C-3A283E0CFF64}"/>
               </a:ext>
             </a:extLst>
           </p:cNvPr>
@@ -14869,7 +14676,6 @@
           <a:lstStyle xmlns:a="http://schemas.openxmlformats.org/drawingml/2006/main"/>
           <a:p xmlns:a="http://schemas.openxmlformats.org/drawingml/2006/main">
             <a:pPr algn="ctr">
-              <a:buNone/>
               <a:defRPr sz="1650" b="1">
                 <a:solidFill>
                   <a:srgbClr val="17202A"/>
@@ -14888,7 +14694,7 @@
                 <a:ea typeface="Aptos Display"/>
                 <a:cs typeface="Aptos Display"/>
               </a:rPr>
-              <a:t>no cambiar live por intuicion, sino promover mejoras desde evidencia reproducible.</a:t>
+              <a:t>do not touch live by intuition; promote improvements from reproducible evidence.</a:t>
             </a:r>
           </a:p>
         </p:txBody>
@@ -14898,7 +14704,7 @@
           <p:cNvPr id="31" name="">
             <a:extLst xmlns:a="http://schemas.openxmlformats.org/drawingml/2006/main">
               <a:ext uri="{FF2B5EF4-FFF2-40B4-BE49-F238E27FC236}">
-                <a16:creationId xmlns:a16="http://schemas.microsoft.com/office/drawing/2014/main" id="{F73F36E7-A2CA-43EC-AD90-A5AAA10F3D54}"/>
+                <a16:creationId xmlns:a16="http://schemas.microsoft.com/office/drawing/2014/main" id="{3FAE8D57-01CB-4C97-96D0-944F614EA5BC}"/>
               </a:ext>
             </a:extLst>
           </p:cNvPr>
@@ -14934,7 +14740,6 @@
           <a:lstStyle xmlns:a="http://schemas.openxmlformats.org/drawingml/2006/main"/>
           <a:p xmlns:a="http://schemas.openxmlformats.org/drawingml/2006/main">
             <a:pPr algn="r">
-              <a:buNone/>
               <a:defRPr sz="750" b="0">
                 <a:solidFill>
                   <a:srgbClr val="5F6B64"/>
@@ -14961,7 +14766,7 @@
     </p:spTree>
     <p:extLst>
       <p:ext uri="{BB962C8B-B14F-4D97-AF65-F5344CB8AC3E}">
-        <p14:creationId xmlns:p14="http://schemas.microsoft.com/office/powerpoint/2010/main" val="1337146873"/>
+        <p14:creationId xmlns:p14="http://schemas.microsoft.com/office/powerpoint/2010/main" val="517076092"/>
       </p:ext>
     </p:extLst>
   </p:cSld>
@@ -14985,7 +14790,7 @@
           <p:cNvPr id="1" name="">
             <a:extLst xmlns:a="http://schemas.openxmlformats.org/drawingml/2006/main">
               <a:ext uri="{FF2B5EF4-FFF2-40B4-BE49-F238E27FC236}">
-                <a16:creationId xmlns:a16="http://schemas.microsoft.com/office/drawing/2014/main" id="{5D0DB3CE-0D10-4BCD-BB3C-B74C05E1E663}"/>
+                <a16:creationId xmlns:a16="http://schemas.microsoft.com/office/drawing/2014/main" id="{D3A55EBC-269C-4A8B-8B79-C74C4F0A7C54}"/>
               </a:ext>
             </a:extLst>
           </p:cNvPr>
@@ -15020,7 +14825,7 @@
           <p:cNvPr id="2" name="">
             <a:extLst xmlns:a="http://schemas.openxmlformats.org/drawingml/2006/main">
               <a:ext uri="{FF2B5EF4-FFF2-40B4-BE49-F238E27FC236}">
-                <a16:creationId xmlns:a16="http://schemas.microsoft.com/office/drawing/2014/main" id="{1E9E0C8E-A3B6-4CAC-9D51-EA308E72403A}"/>
+                <a16:creationId xmlns:a16="http://schemas.microsoft.com/office/drawing/2014/main" id="{84D6A951-D349-4261-8E38-E26694C16724}"/>
               </a:ext>
             </a:extLst>
           </p:cNvPr>
@@ -15055,7 +14860,7 @@
           <p:cNvPr id="3" name="">
             <a:extLst xmlns:a="http://schemas.openxmlformats.org/drawingml/2006/main">
               <a:ext uri="{FF2B5EF4-FFF2-40B4-BE49-F238E27FC236}">
-                <a16:creationId xmlns:a16="http://schemas.microsoft.com/office/drawing/2014/main" id="{D3752259-5AB1-4ADE-BFA8-BA28BB6AD366}"/>
+                <a16:creationId xmlns:a16="http://schemas.microsoft.com/office/drawing/2014/main" id="{64C01533-8E0B-4B3F-87BD-75F637DDB1E8}"/>
               </a:ext>
             </a:extLst>
           </p:cNvPr>
@@ -15091,7 +14896,6 @@
           <a:lstStyle xmlns:a="http://schemas.openxmlformats.org/drawingml/2006/main"/>
           <a:p xmlns:a="http://schemas.openxmlformats.org/drawingml/2006/main">
             <a:pPr algn="l">
-              <a:buNone/>
               <a:defRPr sz="900" b="1">
                 <a:solidFill>
                   <a:srgbClr val="0F8A6A"/>
@@ -15120,7 +14924,7 @@
           <p:cNvPr id="4" name="">
             <a:extLst xmlns:a="http://schemas.openxmlformats.org/drawingml/2006/main">
               <a:ext uri="{FF2B5EF4-FFF2-40B4-BE49-F238E27FC236}">
-                <a16:creationId xmlns:a16="http://schemas.microsoft.com/office/drawing/2014/main" id="{2B0A67FE-9DAB-4EB4-B89C-83DCF98E31D9}"/>
+                <a16:creationId xmlns:a16="http://schemas.microsoft.com/office/drawing/2014/main" id="{9A5325EF-733F-4FD4-A606-FD6C0486816A}"/>
               </a:ext>
             </a:extLst>
           </p:cNvPr>
@@ -15156,7 +14960,6 @@
           <a:lstStyle xmlns:a="http://schemas.openxmlformats.org/drawingml/2006/main"/>
           <a:p xmlns:a="http://schemas.openxmlformats.org/drawingml/2006/main">
             <a:pPr algn="l">
-              <a:buNone/>
               <a:defRPr sz="2325" b="1">
                 <a:solidFill>
                   <a:srgbClr val="17202A"/>
@@ -15175,7 +14978,7 @@
                 <a:ea typeface="Aptos Display"/>
                 <a:cs typeface="Aptos Display"/>
               </a:rPr>
-              <a:t>Edge Discovery Engine, Incubator y EPIC Atlas forman un pipeline gobernado para edge futuro.</a:t>
+              <a:t>Edge Discovery Engine, the Incubator, and EPIC Atlas form a governed pipeline for future edge.</a:t>
             </a:r>
           </a:p>
         </p:txBody>
@@ -15185,7 +14988,7 @@
           <p:cNvPr id="5" name="">
             <a:extLst xmlns:a="http://schemas.openxmlformats.org/drawingml/2006/main">
               <a:ext uri="{FF2B5EF4-FFF2-40B4-BE49-F238E27FC236}">
-                <a16:creationId xmlns:a16="http://schemas.microsoft.com/office/drawing/2014/main" id="{9BA96A5A-7C5B-425D-8CCC-40A2551E6BC9}"/>
+                <a16:creationId xmlns:a16="http://schemas.microsoft.com/office/drawing/2014/main" id="{D87A166D-81B0-4118-989C-81BAC2ED19CE}"/>
               </a:ext>
             </a:extLst>
           </p:cNvPr>
@@ -15218,7 +15021,7 @@
           <p:cNvPr id="6" name="">
             <a:extLst xmlns:a="http://schemas.openxmlformats.org/drawingml/2006/main">
               <a:ext uri="{FF2B5EF4-FFF2-40B4-BE49-F238E27FC236}">
-                <a16:creationId xmlns:a16="http://schemas.microsoft.com/office/drawing/2014/main" id="{EF5FCCBF-C9FE-4372-89AB-ACFD49958225}"/>
+                <a16:creationId xmlns:a16="http://schemas.microsoft.com/office/drawing/2014/main" id="{FE7ABBB7-F3B7-4B1F-9D9E-71D7F0748767}"/>
               </a:ext>
             </a:extLst>
           </p:cNvPr>
@@ -15253,7 +15056,7 @@
           <p:cNvPr id="7" name="">
             <a:extLst xmlns:a="http://schemas.openxmlformats.org/drawingml/2006/main">
               <a:ext uri="{FF2B5EF4-FFF2-40B4-BE49-F238E27FC236}">
-                <a16:creationId xmlns:a16="http://schemas.microsoft.com/office/drawing/2014/main" id="{42C8434F-ADCB-4610-A9B9-32F959AA4AA5}"/>
+                <a16:creationId xmlns:a16="http://schemas.microsoft.com/office/drawing/2014/main" id="{A3A97AB8-9097-4F55-82B0-733C3FBFB0A6}"/>
               </a:ext>
             </a:extLst>
           </p:cNvPr>
@@ -15289,7 +15092,6 @@
           <a:lstStyle xmlns:a="http://schemas.openxmlformats.org/drawingml/2006/main"/>
           <a:p xmlns:a="http://schemas.openxmlformats.org/drawingml/2006/main">
             <a:pPr algn="l">
-              <a:buNone/>
               <a:defRPr sz="1275" b="1">
                 <a:solidFill>
                   <a:srgbClr val="17202A"/>
@@ -15318,7 +15120,7 @@
           <p:cNvPr id="8" name="">
             <a:extLst xmlns:a="http://schemas.openxmlformats.org/drawingml/2006/main">
               <a:ext uri="{FF2B5EF4-FFF2-40B4-BE49-F238E27FC236}">
-                <a16:creationId xmlns:a16="http://schemas.microsoft.com/office/drawing/2014/main" id="{4283FD9F-1A64-4908-9F23-345793DAA367}"/>
+                <a16:creationId xmlns:a16="http://schemas.microsoft.com/office/drawing/2014/main" id="{619E6316-45CA-4AAA-A5FA-E948C343092C}"/>
               </a:ext>
             </a:extLst>
           </p:cNvPr>
@@ -15354,7 +15156,6 @@
           <a:lstStyle xmlns:a="http://schemas.openxmlformats.org/drawingml/2006/main"/>
           <a:p xmlns:a="http://schemas.openxmlformats.org/drawingml/2006/main">
             <a:pPr algn="l">
-              <a:buNone/>
               <a:defRPr sz="938" b="0">
                 <a:solidFill>
                   <a:srgbClr val="5F6B64"/>
@@ -15373,7 +15174,7 @@
                 <a:ea typeface="Aptos"/>
                 <a:cs typeface="Aptos"/>
               </a:rPr>
-              <a:t>El Edge Discovery Engine explora historia, genera hipotesis y descarta lo fragil antes de tocar un runtime.</a:t>
+              <a:t>The Edge Discovery Engine searches history, generates hypotheses, and rejects fragile ideas before runtime.</a:t>
             </a:r>
           </a:p>
         </p:txBody>
@@ -15383,7 +15184,7 @@
           <p:cNvPr id="9" name="">
             <a:extLst xmlns:a="http://schemas.openxmlformats.org/drawingml/2006/main">
               <a:ext uri="{FF2B5EF4-FFF2-40B4-BE49-F238E27FC236}">
-                <a16:creationId xmlns:a16="http://schemas.microsoft.com/office/drawing/2014/main" id="{F86B844A-07CD-4D43-802C-2E461991EB69}"/>
+                <a16:creationId xmlns:a16="http://schemas.microsoft.com/office/drawing/2014/main" id="{ADF5E937-436C-4524-B728-3BA3938C8CF2}"/>
               </a:ext>
             </a:extLst>
           </p:cNvPr>
@@ -15416,7 +15217,7 @@
           <p:cNvPr id="10" name="">
             <a:extLst xmlns:a="http://schemas.openxmlformats.org/drawingml/2006/main">
               <a:ext uri="{FF2B5EF4-FFF2-40B4-BE49-F238E27FC236}">
-                <a16:creationId xmlns:a16="http://schemas.microsoft.com/office/drawing/2014/main" id="{6E0478DD-B9B9-4421-8830-8B8362F8B208}"/>
+                <a16:creationId xmlns:a16="http://schemas.microsoft.com/office/drawing/2014/main" id="{22ED5A5D-17AD-4DF8-B0D0-3097888A7633}"/>
               </a:ext>
             </a:extLst>
           </p:cNvPr>
@@ -15451,7 +15252,7 @@
           <p:cNvPr id="11" name="">
             <a:extLst xmlns:a="http://schemas.openxmlformats.org/drawingml/2006/main">
               <a:ext uri="{FF2B5EF4-FFF2-40B4-BE49-F238E27FC236}">
-                <a16:creationId xmlns:a16="http://schemas.microsoft.com/office/drawing/2014/main" id="{E34D8242-F0F6-4E89-AA4A-1D7AFE86AF4C}"/>
+                <a16:creationId xmlns:a16="http://schemas.microsoft.com/office/drawing/2014/main" id="{7ADAF666-9D1E-4399-94C6-1A5E69DFEAC3}"/>
               </a:ext>
             </a:extLst>
           </p:cNvPr>
@@ -15487,7 +15288,6 @@
           <a:lstStyle xmlns:a="http://schemas.openxmlformats.org/drawingml/2006/main"/>
           <a:p xmlns:a="http://schemas.openxmlformats.org/drawingml/2006/main">
             <a:pPr algn="l">
-              <a:buNone/>
               <a:defRPr sz="1275" b="1">
                 <a:solidFill>
                   <a:srgbClr val="17202A"/>
@@ -15516,7 +15316,7 @@
           <p:cNvPr id="12" name="">
             <a:extLst xmlns:a="http://schemas.openxmlformats.org/drawingml/2006/main">
               <a:ext uri="{FF2B5EF4-FFF2-40B4-BE49-F238E27FC236}">
-                <a16:creationId xmlns:a16="http://schemas.microsoft.com/office/drawing/2014/main" id="{F4A80D76-A533-40AB-A0EE-3F106CF52DD3}"/>
+                <a16:creationId xmlns:a16="http://schemas.microsoft.com/office/drawing/2014/main" id="{EB992B70-D014-4A05-B06C-11ECC2885D8F}"/>
               </a:ext>
             </a:extLst>
           </p:cNvPr>
@@ -15552,7 +15352,6 @@
           <a:lstStyle xmlns:a="http://schemas.openxmlformats.org/drawingml/2006/main"/>
           <a:p xmlns:a="http://schemas.openxmlformats.org/drawingml/2006/main">
             <a:pPr algn="l">
-              <a:buNone/>
               <a:defRPr sz="938" b="0">
                 <a:solidFill>
                   <a:srgbClr val="5F6B64"/>
@@ -15571,7 +15370,7 @@
                 <a:ea typeface="Aptos"/>
                 <a:cs typeface="Aptos"/>
               </a:rPr>
-              <a:t>La Incubadora mantiene candidatos vivos pero contenidos, con contrato, fecha y kill rule.</a:t>
+              <a:t>The Incubator keeps candidates alive but constrained, with contracts, expiry, and kill rules.</a:t>
             </a:r>
           </a:p>
         </p:txBody>
@@ -15581,7 +15380,7 @@
           <p:cNvPr id="13" name="">
             <a:extLst xmlns:a="http://schemas.openxmlformats.org/drawingml/2006/main">
               <a:ext uri="{FF2B5EF4-FFF2-40B4-BE49-F238E27FC236}">
-                <a16:creationId xmlns:a16="http://schemas.microsoft.com/office/drawing/2014/main" id="{08EEB799-9A72-4F77-958F-9B440F53F3E7}"/>
+                <a16:creationId xmlns:a16="http://schemas.microsoft.com/office/drawing/2014/main" id="{413FE839-70CD-4973-B13A-C37D87C9194A}"/>
               </a:ext>
             </a:extLst>
           </p:cNvPr>
@@ -15614,7 +15413,7 @@
           <p:cNvPr id="14" name="">
             <a:extLst xmlns:a="http://schemas.openxmlformats.org/drawingml/2006/main">
               <a:ext uri="{FF2B5EF4-FFF2-40B4-BE49-F238E27FC236}">
-                <a16:creationId xmlns:a16="http://schemas.microsoft.com/office/drawing/2014/main" id="{DF3D7968-4780-4152-B9BA-165262A775FA}"/>
+                <a16:creationId xmlns:a16="http://schemas.microsoft.com/office/drawing/2014/main" id="{C71AA333-74CD-41FB-828C-0DCBA94474E3}"/>
               </a:ext>
             </a:extLst>
           </p:cNvPr>
@@ -15649,7 +15448,7 @@
           <p:cNvPr id="15" name="">
             <a:extLst xmlns:a="http://schemas.openxmlformats.org/drawingml/2006/main">
               <a:ext uri="{FF2B5EF4-FFF2-40B4-BE49-F238E27FC236}">
-                <a16:creationId xmlns:a16="http://schemas.microsoft.com/office/drawing/2014/main" id="{E5FEA692-A13F-40B1-8ECF-7A4254A64B00}"/>
+                <a16:creationId xmlns:a16="http://schemas.microsoft.com/office/drawing/2014/main" id="{C29385ED-A598-49CC-97E9-1962F65CA1D8}"/>
               </a:ext>
             </a:extLst>
           </p:cNvPr>
@@ -15685,7 +15484,6 @@
           <a:lstStyle xmlns:a="http://schemas.openxmlformats.org/drawingml/2006/main"/>
           <a:p xmlns:a="http://schemas.openxmlformats.org/drawingml/2006/main">
             <a:pPr algn="l">
-              <a:buNone/>
               <a:defRPr sz="1275" b="1">
                 <a:solidFill>
                   <a:srgbClr val="17202A"/>
@@ -15714,7 +15512,7 @@
           <p:cNvPr id="16" name="">
             <a:extLst xmlns:a="http://schemas.openxmlformats.org/drawingml/2006/main">
               <a:ext uri="{FF2B5EF4-FFF2-40B4-BE49-F238E27FC236}">
-                <a16:creationId xmlns:a16="http://schemas.microsoft.com/office/drawing/2014/main" id="{9DD92481-D0D1-46E3-91BB-5FBE5EBBE2F7}"/>
+                <a16:creationId xmlns:a16="http://schemas.microsoft.com/office/drawing/2014/main" id="{9B9CE3E3-F548-49BC-BAD0-73A37393F30D}"/>
               </a:ext>
             </a:extLst>
           </p:cNvPr>
@@ -15750,7 +15548,6 @@
           <a:lstStyle xmlns:a="http://schemas.openxmlformats.org/drawingml/2006/main"/>
           <a:p xmlns:a="http://schemas.openxmlformats.org/drawingml/2006/main">
             <a:pPr algn="l">
-              <a:buNone/>
               <a:defRPr sz="938" b="0">
                 <a:solidFill>
                   <a:srgbClr val="5F6B64"/>
@@ -15769,7 +15566,7 @@
                 <a:ea typeface="Aptos"/>
                 <a:cs typeface="Aptos"/>
               </a:rPr>
-              <a:t>EPIC Atlas rastrea candidatos fuera del watchlist actual y los manda a investigacion.</a:t>
+              <a:t>EPIC Atlas tracks candidates outside the current watchlist and routes them into research.</a:t>
             </a:r>
           </a:p>
         </p:txBody>
@@ -15779,7 +15576,7 @@
           <p:cNvPr id="17" name="">
             <a:extLst xmlns:a="http://schemas.openxmlformats.org/drawingml/2006/main">
               <a:ext uri="{FF2B5EF4-FFF2-40B4-BE49-F238E27FC236}">
-                <a16:creationId xmlns:a16="http://schemas.microsoft.com/office/drawing/2014/main" id="{667456DB-7EB6-4D72-96D2-A16BC0392DA3}"/>
+                <a16:creationId xmlns:a16="http://schemas.microsoft.com/office/drawing/2014/main" id="{931214B5-5986-4275-9E2A-32004F713EC1}"/>
               </a:ext>
             </a:extLst>
           </p:cNvPr>
@@ -15812,7 +15609,7 @@
           <p:cNvPr id="18" name="">
             <a:extLst xmlns:a="http://schemas.openxmlformats.org/drawingml/2006/main">
               <a:ext uri="{FF2B5EF4-FFF2-40B4-BE49-F238E27FC236}">
-                <a16:creationId xmlns:a16="http://schemas.microsoft.com/office/drawing/2014/main" id="{27CDFEE6-B437-4D05-ABDC-C3B622FB5ECE}"/>
+                <a16:creationId xmlns:a16="http://schemas.microsoft.com/office/drawing/2014/main" id="{D51E816E-EAD1-48CA-B37A-9468A7AF3DDB}"/>
               </a:ext>
             </a:extLst>
           </p:cNvPr>
@@ -15847,7 +15644,7 @@
           <p:cNvPr id="19" name="">
             <a:extLst xmlns:a="http://schemas.openxmlformats.org/drawingml/2006/main">
               <a:ext uri="{FF2B5EF4-FFF2-40B4-BE49-F238E27FC236}">
-                <a16:creationId xmlns:a16="http://schemas.microsoft.com/office/drawing/2014/main" id="{356757F8-78F0-45A3-983C-F1A41E19A60B}"/>
+                <a16:creationId xmlns:a16="http://schemas.microsoft.com/office/drawing/2014/main" id="{F926518B-8F51-4775-98FE-12E2C6D7E227}"/>
               </a:ext>
             </a:extLst>
           </p:cNvPr>
@@ -15883,7 +15680,6 @@
           <a:lstStyle xmlns:a="http://schemas.openxmlformats.org/drawingml/2006/main"/>
           <a:p xmlns:a="http://schemas.openxmlformats.org/drawingml/2006/main">
             <a:pPr algn="l">
-              <a:buNone/>
               <a:defRPr sz="1275" b="1">
                 <a:solidFill>
                   <a:srgbClr val="17202A"/>
@@ -15912,7 +15708,7 @@
           <p:cNvPr id="20" name="">
             <a:extLst xmlns:a="http://schemas.openxmlformats.org/drawingml/2006/main">
               <a:ext uri="{FF2B5EF4-FFF2-40B4-BE49-F238E27FC236}">
-                <a16:creationId xmlns:a16="http://schemas.microsoft.com/office/drawing/2014/main" id="{BFBD644C-F566-48C1-AEB0-0852612C4F9B}"/>
+                <a16:creationId xmlns:a16="http://schemas.microsoft.com/office/drawing/2014/main" id="{4D35305E-A6B0-49B8-84EF-4BE85A237738}"/>
               </a:ext>
             </a:extLst>
           </p:cNvPr>
@@ -15948,7 +15744,6 @@
           <a:lstStyle xmlns:a="http://schemas.openxmlformats.org/drawingml/2006/main"/>
           <a:p xmlns:a="http://schemas.openxmlformats.org/drawingml/2006/main">
             <a:pPr algn="l">
-              <a:buNone/>
               <a:defRPr sz="938" b="0">
                 <a:solidFill>
                   <a:srgbClr val="5F6B64"/>
@@ -15967,7 +15762,7 @@
                 <a:ea typeface="Aptos"/>
                 <a:cs typeface="Aptos"/>
               </a:rPr>
-              <a:t>Graphify y las revisiones humanas deciden si podar, mantener, observar o promover.</a:t>
+              <a:t>Graphify and human review decide whether to prune, maintain, observe, or promote.</a:t>
             </a:r>
           </a:p>
         </p:txBody>
@@ -15977,7 +15772,7 @@
           <p:cNvPr id="21" name="">
             <a:extLst xmlns:a="http://schemas.openxmlformats.org/drawingml/2006/main">
               <a:ext uri="{FF2B5EF4-FFF2-40B4-BE49-F238E27FC236}">
-                <a16:creationId xmlns:a16="http://schemas.microsoft.com/office/drawing/2014/main" id="{7D797568-9477-4A0F-844F-758A897E153B}"/>
+                <a16:creationId xmlns:a16="http://schemas.microsoft.com/office/drawing/2014/main" id="{DEA2C7DB-E4E0-4E6E-8D09-FDFB12A3A2A8}"/>
               </a:ext>
             </a:extLst>
           </p:cNvPr>
@@ -16010,7 +15805,7 @@
           <p:cNvPr id="22" name="">
             <a:extLst xmlns:a="http://schemas.openxmlformats.org/drawingml/2006/main">
               <a:ext uri="{FF2B5EF4-FFF2-40B4-BE49-F238E27FC236}">
-                <a16:creationId xmlns:a16="http://schemas.microsoft.com/office/drawing/2014/main" id="{B0CEB226-B00F-4219-B1FE-B7DC72F69267}"/>
+                <a16:creationId xmlns:a16="http://schemas.microsoft.com/office/drawing/2014/main" id="{55C17596-8671-4998-BE58-199778AC8A4C}"/>
               </a:ext>
             </a:extLst>
           </p:cNvPr>
@@ -16045,7 +15840,7 @@
           <p:cNvPr id="23" name="">
             <a:extLst xmlns:a="http://schemas.openxmlformats.org/drawingml/2006/main">
               <a:ext uri="{FF2B5EF4-FFF2-40B4-BE49-F238E27FC236}">
-                <a16:creationId xmlns:a16="http://schemas.microsoft.com/office/drawing/2014/main" id="{3EFDF6B6-0FBE-46A4-970F-E1FA2F20CF19}"/>
+                <a16:creationId xmlns:a16="http://schemas.microsoft.com/office/drawing/2014/main" id="{668A3B47-7C5F-490F-AD33-0EFE917D37F4}"/>
               </a:ext>
             </a:extLst>
           </p:cNvPr>
@@ -16081,7 +15876,6 @@
           <a:lstStyle xmlns:a="http://schemas.openxmlformats.org/drawingml/2006/main"/>
           <a:p xmlns:a="http://schemas.openxmlformats.org/drawingml/2006/main">
             <a:pPr algn="l">
-              <a:buNone/>
               <a:defRPr sz="1275" b="1">
                 <a:solidFill>
                   <a:srgbClr val="17202A"/>
@@ -16110,7 +15904,7 @@
           <p:cNvPr id="24" name="">
             <a:extLst xmlns:a="http://schemas.openxmlformats.org/drawingml/2006/main">
               <a:ext uri="{FF2B5EF4-FFF2-40B4-BE49-F238E27FC236}">
-                <a16:creationId xmlns:a16="http://schemas.microsoft.com/office/drawing/2014/main" id="{EFFB2233-9306-4AD4-896D-CE7B5A02F0E7}"/>
+                <a16:creationId xmlns:a16="http://schemas.microsoft.com/office/drawing/2014/main" id="{5E9F4942-ECAA-48FA-B4D1-893590C609C1}"/>
               </a:ext>
             </a:extLst>
           </p:cNvPr>
@@ -16146,7 +15940,6 @@
           <a:lstStyle xmlns:a="http://schemas.openxmlformats.org/drawingml/2006/main"/>
           <a:p xmlns:a="http://schemas.openxmlformats.org/drawingml/2006/main">
             <a:pPr algn="l">
-              <a:buNone/>
               <a:defRPr sz="938" b="0">
                 <a:solidFill>
                   <a:srgbClr val="5F6B64"/>
@@ -16165,7 +15958,7 @@
                 <a:ea typeface="Aptos"/>
                 <a:cs typeface="Aptos"/>
               </a:rPr>
-              <a:t>Solo llega lo suficientemente evidenciado.</a:t>
+              <a:t>Only sufficiently evidenced ideas should arrive here.</a:t>
             </a:r>
           </a:p>
         </p:txBody>
@@ -16175,7 +15968,7 @@
           <p:cNvPr id="25" name="">
             <a:extLst xmlns:a="http://schemas.openxmlformats.org/drawingml/2006/main">
               <a:ext uri="{FF2B5EF4-FFF2-40B4-BE49-F238E27FC236}">
-                <a16:creationId xmlns:a16="http://schemas.microsoft.com/office/drawing/2014/main" id="{7BBEFF4D-405D-4744-9771-9C2E4EC4EDB6}"/>
+                <a16:creationId xmlns:a16="http://schemas.microsoft.com/office/drawing/2014/main" id="{E9C519CE-9BD5-4C03-8922-F414906E8E02}"/>
               </a:ext>
             </a:extLst>
           </p:cNvPr>
@@ -16208,7 +16001,7 @@
           <p:cNvPr id="26" name="">
             <a:extLst xmlns:a="http://schemas.openxmlformats.org/drawingml/2006/main">
               <a:ext uri="{FF2B5EF4-FFF2-40B4-BE49-F238E27FC236}">
-                <a16:creationId xmlns:a16="http://schemas.microsoft.com/office/drawing/2014/main" id="{497EA76F-CE9E-4921-BB8C-ACB78B5AAB83}"/>
+                <a16:creationId xmlns:a16="http://schemas.microsoft.com/office/drawing/2014/main" id="{0A35DD25-2C89-4C57-91C1-318CC11C6236}"/>
               </a:ext>
             </a:extLst>
           </p:cNvPr>
@@ -16241,7 +16034,7 @@
           <p:cNvPr id="27" name="">
             <a:extLst xmlns:a="http://schemas.openxmlformats.org/drawingml/2006/main">
               <a:ext uri="{FF2B5EF4-FFF2-40B4-BE49-F238E27FC236}">
-                <a16:creationId xmlns:a16="http://schemas.microsoft.com/office/drawing/2014/main" id="{0FC35EAA-C8B7-4D0E-B2F5-5E52B7EF84F5}"/>
+                <a16:creationId xmlns:a16="http://schemas.microsoft.com/office/drawing/2014/main" id="{18144163-05BB-4052-A45D-52335F7715D1}"/>
               </a:ext>
             </a:extLst>
           </p:cNvPr>
@@ -16274,7 +16067,7 @@
           <p:cNvPr id="28" name="">
             <a:extLst xmlns:a="http://schemas.openxmlformats.org/drawingml/2006/main">
               <a:ext uri="{FF2B5EF4-FFF2-40B4-BE49-F238E27FC236}">
-                <a16:creationId xmlns:a16="http://schemas.microsoft.com/office/drawing/2014/main" id="{AB770FFB-35D8-4357-A968-4442F8F4774C}"/>
+                <a16:creationId xmlns:a16="http://schemas.microsoft.com/office/drawing/2014/main" id="{9FD85FDF-EF0F-4511-90CF-18BC2A9AAAAD}"/>
               </a:ext>
             </a:extLst>
           </p:cNvPr>
@@ -16307,7 +16100,7 @@
           <p:cNvPr id="29" name="">
             <a:extLst xmlns:a="http://schemas.openxmlformats.org/drawingml/2006/main">
               <a:ext uri="{FF2B5EF4-FFF2-40B4-BE49-F238E27FC236}">
-                <a16:creationId xmlns:a16="http://schemas.microsoft.com/office/drawing/2014/main" id="{591EFF4E-D45B-47BC-80A5-477E948A5C66}"/>
+                <a16:creationId xmlns:a16="http://schemas.microsoft.com/office/drawing/2014/main" id="{787231A2-9CAD-45D7-A339-8C65E5930291}"/>
               </a:ext>
             </a:extLst>
           </p:cNvPr>
@@ -16340,7 +16133,7 @@
           <p:cNvPr id="30" name="">
             <a:extLst xmlns:a="http://schemas.openxmlformats.org/drawingml/2006/main">
               <a:ext uri="{FF2B5EF4-FFF2-40B4-BE49-F238E27FC236}">
-                <a16:creationId xmlns:a16="http://schemas.microsoft.com/office/drawing/2014/main" id="{8F013E1E-D5E1-4E29-996B-012FD2DD76F3}"/>
+                <a16:creationId xmlns:a16="http://schemas.microsoft.com/office/drawing/2014/main" id="{C28F3BB5-DB89-45D4-8C5D-581C8D6E2C4F}"/>
               </a:ext>
             </a:extLst>
           </p:cNvPr>
@@ -16373,7 +16166,7 @@
           <p:cNvPr id="31" name="">
             <a:extLst xmlns:a="http://schemas.openxmlformats.org/drawingml/2006/main">
               <a:ext uri="{FF2B5EF4-FFF2-40B4-BE49-F238E27FC236}">
-                <a16:creationId xmlns:a16="http://schemas.microsoft.com/office/drawing/2014/main" id="{F2941468-5BB9-4C6E-9367-7C81C10F495F}"/>
+                <a16:creationId xmlns:a16="http://schemas.microsoft.com/office/drawing/2014/main" id="{9F0421E2-717C-4B9D-BEF6-FF8EBE7D522B}"/>
               </a:ext>
             </a:extLst>
           </p:cNvPr>
@@ -16406,7 +16199,7 @@
           <p:cNvPr id="32" name="">
             <a:extLst xmlns:a="http://schemas.openxmlformats.org/drawingml/2006/main">
               <a:ext uri="{FF2B5EF4-FFF2-40B4-BE49-F238E27FC236}">
-                <a16:creationId xmlns:a16="http://schemas.microsoft.com/office/drawing/2014/main" id="{F1D7746E-5E8C-409D-9D35-CD4A027F54A1}"/>
+                <a16:creationId xmlns:a16="http://schemas.microsoft.com/office/drawing/2014/main" id="{FEE2A650-159A-461A-A0A8-40E6AD35DE02}"/>
               </a:ext>
             </a:extLst>
           </p:cNvPr>
@@ -16439,7 +16232,7 @@
           <p:cNvPr id="33" name="">
             <a:extLst xmlns:a="http://schemas.openxmlformats.org/drawingml/2006/main">
               <a:ext uri="{FF2B5EF4-FFF2-40B4-BE49-F238E27FC236}">
-                <a16:creationId xmlns:a16="http://schemas.microsoft.com/office/drawing/2014/main" id="{BD6A5FB1-015D-4A94-8597-0C69057C5B32}"/>
+                <a16:creationId xmlns:a16="http://schemas.microsoft.com/office/drawing/2014/main" id="{D5A9B0CE-9C0C-4ECB-9777-72784033F5B3}"/>
               </a:ext>
             </a:extLst>
           </p:cNvPr>
@@ -16475,7 +16268,6 @@
           <a:lstStyle xmlns:a="http://schemas.openxmlformats.org/drawingml/2006/main"/>
           <a:p xmlns:a="http://schemas.openxmlformats.org/drawingml/2006/main">
             <a:pPr algn="ctr">
-              <a:buNone/>
               <a:defRPr sz="1350" b="1">
                 <a:solidFill>
                   <a:srgbClr val="17202A"/>
@@ -16494,7 +16286,7 @@
                 <a:ea typeface="Aptos Display"/>
                 <a:cs typeface="Aptos Display"/>
               </a:rPr>
-              <a:t>El principio fuerte del sistema es este: descubrir edge no basta; hay que darle una ruta de maduracion.</a:t>
+              <a:t>The strong principle is this: finding edge is not enough; the system needs a maturation path.</a:t>
             </a:r>
           </a:p>
         </p:txBody>
@@ -16504,7 +16296,7 @@
           <p:cNvPr id="34" name="">
             <a:extLst xmlns:a="http://schemas.openxmlformats.org/drawingml/2006/main">
               <a:ext uri="{FF2B5EF4-FFF2-40B4-BE49-F238E27FC236}">
-                <a16:creationId xmlns:a16="http://schemas.microsoft.com/office/drawing/2014/main" id="{B12010B5-72B4-482D-91E4-2ACC5CB35472}"/>
+                <a16:creationId xmlns:a16="http://schemas.microsoft.com/office/drawing/2014/main" id="{84260F5C-EFC9-462C-9613-A4603D6C036A}"/>
               </a:ext>
             </a:extLst>
           </p:cNvPr>
@@ -16540,7 +16332,6 @@
           <a:lstStyle xmlns:a="http://schemas.openxmlformats.org/drawingml/2006/main"/>
           <a:p xmlns:a="http://schemas.openxmlformats.org/drawingml/2006/main">
             <a:pPr algn="ctr">
-              <a:buNone/>
               <a:defRPr sz="1088" b="0">
                 <a:solidFill>
                   <a:srgbClr val="5F6B64"/>
@@ -16559,7 +16350,7 @@
                 <a:ea typeface="Aptos"/>
                 <a:cs typeface="Aptos"/>
               </a:rPr>
-              <a:t>Por eso Atlas no opera, la Incubadora no promociona sola y Prod no deberia heredar ideas sin pasar por evidencia, revision y contexto.</a:t>
+              <a:t>That is why Atlas does not trade, the Incubator does not auto-promote, and Prod should not inherit ideas without evidence, review, and context.</a:t>
             </a:r>
           </a:p>
         </p:txBody>
@@ -16569,7 +16360,7 @@
           <p:cNvPr id="35" name="">
             <a:extLst xmlns:a="http://schemas.openxmlformats.org/drawingml/2006/main">
               <a:ext uri="{FF2B5EF4-FFF2-40B4-BE49-F238E27FC236}">
-                <a16:creationId xmlns:a16="http://schemas.microsoft.com/office/drawing/2014/main" id="{27AE8AC1-1029-43D6-A8AC-8D3CF80EB753}"/>
+                <a16:creationId xmlns:a16="http://schemas.microsoft.com/office/drawing/2014/main" id="{5B05EBDF-87ED-4C95-BB65-EC1D9E4A8C3C}"/>
               </a:ext>
             </a:extLst>
           </p:cNvPr>
@@ -16605,7 +16396,6 @@
           <a:lstStyle xmlns:a="http://schemas.openxmlformats.org/drawingml/2006/main"/>
           <a:p xmlns:a="http://schemas.openxmlformats.org/drawingml/2006/main">
             <a:pPr algn="r">
-              <a:buNone/>
               <a:defRPr sz="750" b="0">
                 <a:solidFill>
                   <a:srgbClr val="5F6B64"/>
@@ -16632,7 +16422,7 @@
     </p:spTree>
     <p:extLst>
       <p:ext uri="{BB962C8B-B14F-4D97-AF65-F5344CB8AC3E}">
-        <p14:creationId xmlns:p14="http://schemas.microsoft.com/office/powerpoint/2010/main" val="1168030078"/>
+        <p14:creationId xmlns:p14="http://schemas.microsoft.com/office/powerpoint/2010/main" val="1113432471"/>
       </p:ext>
     </p:extLst>
   </p:cSld>
@@ -16656,7 +16446,7 @@
           <p:cNvPr id="1" name="">
             <a:extLst xmlns:a="http://schemas.openxmlformats.org/drawingml/2006/main">
               <a:ext uri="{FF2B5EF4-FFF2-40B4-BE49-F238E27FC236}">
-                <a16:creationId xmlns:a16="http://schemas.microsoft.com/office/drawing/2014/main" id="{982E8CD4-D04F-47AA-A784-602B0B68B410}"/>
+                <a16:creationId xmlns:a16="http://schemas.microsoft.com/office/drawing/2014/main" id="{EBDA5EFE-D58A-4188-8584-0324C4D759D6}"/>
               </a:ext>
             </a:extLst>
           </p:cNvPr>
@@ -16691,7 +16481,7 @@
           <p:cNvPr id="2" name="">
             <a:extLst xmlns:a="http://schemas.openxmlformats.org/drawingml/2006/main">
               <a:ext uri="{FF2B5EF4-FFF2-40B4-BE49-F238E27FC236}">
-                <a16:creationId xmlns:a16="http://schemas.microsoft.com/office/drawing/2014/main" id="{6B444F85-7431-45F7-B463-D1797F101A78}"/>
+                <a16:creationId xmlns:a16="http://schemas.microsoft.com/office/drawing/2014/main" id="{CA305764-F663-4078-AD13-57D9AF7BD67C}"/>
               </a:ext>
             </a:extLst>
           </p:cNvPr>
@@ -16726,7 +16516,7 @@
           <p:cNvPr id="3" name="">
             <a:extLst xmlns:a="http://schemas.openxmlformats.org/drawingml/2006/main">
               <a:ext uri="{FF2B5EF4-FFF2-40B4-BE49-F238E27FC236}">
-                <a16:creationId xmlns:a16="http://schemas.microsoft.com/office/drawing/2014/main" id="{6F9F6DF6-2A1F-4D63-9BD2-C609445EE614}"/>
+                <a16:creationId xmlns:a16="http://schemas.microsoft.com/office/drawing/2014/main" id="{5F79E873-A41C-4528-B7D2-2F07B736D02A}"/>
               </a:ext>
             </a:extLst>
           </p:cNvPr>
@@ -16762,7 +16552,6 @@
           <a:lstStyle xmlns:a="http://schemas.openxmlformats.org/drawingml/2006/main"/>
           <a:p xmlns:a="http://schemas.openxmlformats.org/drawingml/2006/main">
             <a:pPr algn="l">
-              <a:buNone/>
               <a:defRPr sz="900" b="1">
                 <a:solidFill>
                   <a:srgbClr val="0F8A6A"/>
@@ -16791,7 +16580,7 @@
           <p:cNvPr id="4" name="">
             <a:extLst xmlns:a="http://schemas.openxmlformats.org/drawingml/2006/main">
               <a:ext uri="{FF2B5EF4-FFF2-40B4-BE49-F238E27FC236}">
-                <a16:creationId xmlns:a16="http://schemas.microsoft.com/office/drawing/2014/main" id="{0B74E342-940C-4268-B768-0889ECE5CA25}"/>
+                <a16:creationId xmlns:a16="http://schemas.microsoft.com/office/drawing/2014/main" id="{EF425A2C-7550-4E99-A044-017E2176FBFF}"/>
               </a:ext>
             </a:extLst>
           </p:cNvPr>
@@ -16827,7 +16616,6 @@
           <a:lstStyle xmlns:a="http://schemas.openxmlformats.org/drawingml/2006/main"/>
           <a:p xmlns:a="http://schemas.openxmlformats.org/drawingml/2006/main">
             <a:pPr algn="l">
-              <a:buNone/>
               <a:defRPr sz="2325" b="1">
                 <a:solidFill>
                   <a:srgbClr val="17202A"/>
@@ -16846,7 +16634,7 @@
                 <a:ea typeface="Aptos Display"/>
                 <a:cs typeface="Aptos Display"/>
               </a:rPr>
-              <a:t>Graphify y las surfaces operativas convierten ruido en decisiones accionables.</a:t>
+              <a:t>Graphify and operational surfaces turn noise into actionable decisions.</a:t>
             </a:r>
           </a:p>
         </p:txBody>
@@ -16856,7 +16644,7 @@
           <p:cNvPr id="5" name="">
             <a:extLst xmlns:a="http://schemas.openxmlformats.org/drawingml/2006/main">
               <a:ext uri="{FF2B5EF4-FFF2-40B4-BE49-F238E27FC236}">
-                <a16:creationId xmlns:a16="http://schemas.microsoft.com/office/drawing/2014/main" id="{FA4A1995-76CA-4853-B358-2A4DF0C79F52}"/>
+                <a16:creationId xmlns:a16="http://schemas.microsoft.com/office/drawing/2014/main" id="{77981070-BF9A-41E0-9D52-4C6BA77A140F}"/>
               </a:ext>
             </a:extLst>
           </p:cNvPr>
@@ -16868,7 +16656,7 @@
         <p:spPr>
           <a:xfrm xmlns:a="http://schemas.openxmlformats.org/drawingml/2006/main">
             <a:off x="819150" y="1466850"/>
-            <a:ext cx="1257300" cy="228600"/>
+            <a:ext cx="1485900" cy="228600"/>
           </a:xfrm>
           <a:prstGeom xmlns:a="http://schemas.openxmlformats.org/drawingml/2006/main" prst="rect">
             <a:avLst/>
@@ -16889,7 +16677,7 @@
           <p:cNvPr id="6" name="">
             <a:extLst xmlns:a="http://schemas.openxmlformats.org/drawingml/2006/main">
               <a:ext uri="{FF2B5EF4-FFF2-40B4-BE49-F238E27FC236}">
-                <a16:creationId xmlns:a16="http://schemas.microsoft.com/office/drawing/2014/main" id="{FBD438AC-01D9-4CB0-9162-4994BD289F87}"/>
+                <a16:creationId xmlns:a16="http://schemas.microsoft.com/office/drawing/2014/main" id="{2D4E0FB5-CA10-4A0F-8BDD-DE534B92E855}"/>
               </a:ext>
             </a:extLst>
           </p:cNvPr>
@@ -16901,7 +16689,7 @@
         <p:spPr>
           <a:xfrm xmlns:a="http://schemas.openxmlformats.org/drawingml/2006/main">
             <a:off x="819150" y="1504950"/>
-            <a:ext cx="1257300" cy="152400"/>
+            <a:ext cx="1485900" cy="152400"/>
           </a:xfrm>
           <a:prstGeom xmlns:a="http://schemas.openxmlformats.org/drawingml/2006/main" prst="rect">
             <a:avLst/>
@@ -16925,7 +16713,6 @@
           <a:lstStyle xmlns:a="http://schemas.openxmlformats.org/drawingml/2006/main"/>
           <a:p xmlns:a="http://schemas.openxmlformats.org/drawingml/2006/main">
             <a:pPr algn="ctr">
-              <a:buNone/>
               <a:defRPr sz="788" b="1">
                 <a:solidFill>
                   <a:srgbClr val="C85847"/>
@@ -16954,7 +16741,7 @@
           <p:cNvPr id="7" name="">
             <a:extLst xmlns:a="http://schemas.openxmlformats.org/drawingml/2006/main">
               <a:ext uri="{FF2B5EF4-FFF2-40B4-BE49-F238E27FC236}">
-                <a16:creationId xmlns:a16="http://schemas.microsoft.com/office/drawing/2014/main" id="{85166879-EB84-4E36-B8BB-0DE88B8996D7}"/>
+                <a16:creationId xmlns:a16="http://schemas.microsoft.com/office/drawing/2014/main" id="{79EC6FF5-E92C-4342-B565-A63C0B4CD1CF}"/>
               </a:ext>
             </a:extLst>
           </p:cNvPr>
@@ -16987,7 +16774,7 @@
           <p:cNvPr id="8" name="">
             <a:extLst xmlns:a="http://schemas.openxmlformats.org/drawingml/2006/main">
               <a:ext uri="{FF2B5EF4-FFF2-40B4-BE49-F238E27FC236}">
-                <a16:creationId xmlns:a16="http://schemas.microsoft.com/office/drawing/2014/main" id="{6FD7A32D-1AC3-4527-AEF5-83768B0CD9EC}"/>
+                <a16:creationId xmlns:a16="http://schemas.microsoft.com/office/drawing/2014/main" id="{95A89CA4-04CE-407A-B21C-44F0284D6A8A}"/>
               </a:ext>
             </a:extLst>
           </p:cNvPr>
@@ -17022,7 +16809,7 @@
           <p:cNvPr id="9" name="">
             <a:extLst xmlns:a="http://schemas.openxmlformats.org/drawingml/2006/main">
               <a:ext uri="{FF2B5EF4-FFF2-40B4-BE49-F238E27FC236}">
-                <a16:creationId xmlns:a16="http://schemas.microsoft.com/office/drawing/2014/main" id="{9DCA0813-045A-4FB5-8AB6-6DFA7EE8CFF7}"/>
+                <a16:creationId xmlns:a16="http://schemas.microsoft.com/office/drawing/2014/main" id="{2768C825-0188-4E65-9A6D-0FD61E7A731B}"/>
               </a:ext>
             </a:extLst>
           </p:cNvPr>
@@ -17058,7 +16845,6 @@
           <a:lstStyle xmlns:a="http://schemas.openxmlformats.org/drawingml/2006/main"/>
           <a:p xmlns:a="http://schemas.openxmlformats.org/drawingml/2006/main">
             <a:pPr algn="l">
-              <a:buNone/>
               <a:defRPr sz="1275" b="1">
                 <a:solidFill>
                   <a:srgbClr val="17202A"/>
@@ -17087,7 +16873,7 @@
           <p:cNvPr id="10" name="">
             <a:extLst xmlns:a="http://schemas.openxmlformats.org/drawingml/2006/main">
               <a:ext uri="{FF2B5EF4-FFF2-40B4-BE49-F238E27FC236}">
-                <a16:creationId xmlns:a16="http://schemas.microsoft.com/office/drawing/2014/main" id="{5EA74307-1B23-48A4-821A-97273D221038}"/>
+                <a16:creationId xmlns:a16="http://schemas.microsoft.com/office/drawing/2014/main" id="{1BD2D26B-05AB-4C38-8489-23A4B05B2839}"/>
               </a:ext>
             </a:extLst>
           </p:cNvPr>
@@ -17123,7 +16909,6 @@
           <a:lstStyle xmlns:a="http://schemas.openxmlformats.org/drawingml/2006/main"/>
           <a:p xmlns:a="http://schemas.openxmlformats.org/drawingml/2006/main">
             <a:pPr algn="l">
-              <a:buNone/>
               <a:defRPr sz="938" b="0">
                 <a:solidFill>
                   <a:srgbClr val="5F6B64"/>
@@ -17142,7 +16927,7 @@
                 <a:ea typeface="Aptos"/>
                 <a:cs typeface="Aptos"/>
               </a:rPr>
-              <a:t>Relaciona robots, edges, factores, blockers y acciones del dia para podar, mantener u observar.</a:t>
+              <a:t>Maps robots, edges, factors, blockers, and actions of the day into a decision surface.</a:t>
             </a:r>
           </a:p>
         </p:txBody>
@@ -17152,7 +16937,7 @@
           <p:cNvPr id="11" name="">
             <a:extLst xmlns:a="http://schemas.openxmlformats.org/drawingml/2006/main">
               <a:ext uri="{FF2B5EF4-FFF2-40B4-BE49-F238E27FC236}">
-                <a16:creationId xmlns:a16="http://schemas.microsoft.com/office/drawing/2014/main" id="{2514476E-DD33-41FB-86B8-8E7039C2D62F}"/>
+                <a16:creationId xmlns:a16="http://schemas.microsoft.com/office/drawing/2014/main" id="{F15C00D9-3098-463A-8DF1-73DE85478052}"/>
               </a:ext>
             </a:extLst>
           </p:cNvPr>
@@ -17185,7 +16970,7 @@
           <p:cNvPr id="12" name="">
             <a:extLst xmlns:a="http://schemas.openxmlformats.org/drawingml/2006/main">
               <a:ext uri="{FF2B5EF4-FFF2-40B4-BE49-F238E27FC236}">
-                <a16:creationId xmlns:a16="http://schemas.microsoft.com/office/drawing/2014/main" id="{B6A7EE59-B9CF-4AD3-A074-FD3FDCBBA86B}"/>
+                <a16:creationId xmlns:a16="http://schemas.microsoft.com/office/drawing/2014/main" id="{D6E27320-94B2-4180-91F8-510C63C936A0}"/>
               </a:ext>
             </a:extLst>
           </p:cNvPr>
@@ -17220,7 +17005,7 @@
           <p:cNvPr id="13" name="">
             <a:extLst xmlns:a="http://schemas.openxmlformats.org/drawingml/2006/main">
               <a:ext uri="{FF2B5EF4-FFF2-40B4-BE49-F238E27FC236}">
-                <a16:creationId xmlns:a16="http://schemas.microsoft.com/office/drawing/2014/main" id="{F2BDC3AE-6BF8-4B62-8F9F-5F3B3B5D3FF6}"/>
+                <a16:creationId xmlns:a16="http://schemas.microsoft.com/office/drawing/2014/main" id="{7EF4DC52-C295-4C32-A12F-84EF638C7F41}"/>
               </a:ext>
             </a:extLst>
           </p:cNvPr>
@@ -17256,7 +17041,6 @@
           <a:lstStyle xmlns:a="http://schemas.openxmlformats.org/drawingml/2006/main"/>
           <a:p xmlns:a="http://schemas.openxmlformats.org/drawingml/2006/main">
             <a:pPr algn="l">
-              <a:buNone/>
               <a:defRPr sz="1275" b="1">
                 <a:solidFill>
                   <a:srgbClr val="17202A"/>
@@ -17285,7 +17069,7 @@
           <p:cNvPr id="14" name="">
             <a:extLst xmlns:a="http://schemas.openxmlformats.org/drawingml/2006/main">
               <a:ext uri="{FF2B5EF4-FFF2-40B4-BE49-F238E27FC236}">
-                <a16:creationId xmlns:a16="http://schemas.microsoft.com/office/drawing/2014/main" id="{77403D50-613D-43CD-938C-818D5476EC8E}"/>
+                <a16:creationId xmlns:a16="http://schemas.microsoft.com/office/drawing/2014/main" id="{2F8A6526-3143-4A62-9A54-CAAFFBDF6EE1}"/>
               </a:ext>
             </a:extLst>
           </p:cNvPr>
@@ -17321,7 +17105,6 @@
           <a:lstStyle xmlns:a="http://schemas.openxmlformats.org/drawingml/2006/main"/>
           <a:p xmlns:a="http://schemas.openxmlformats.org/drawingml/2006/main">
             <a:pPr algn="l">
-              <a:buNone/>
               <a:defRPr sz="938" b="0">
                 <a:solidFill>
                   <a:srgbClr val="5F6B64"/>
@@ -17340,7 +17123,7 @@
                 <a:ea typeface="Aptos"/>
                 <a:cs typeface="Aptos"/>
               </a:rPr>
-              <a:t>Hace checkpoints pre-NYSE, post-NYSE y nocturnos para salud, deuda y alertas.</a:t>
+              <a:t>Runs pre-NYSE, post-NYSE, and night checkpoints for health, debt, and alerts.</a:t>
             </a:r>
           </a:p>
         </p:txBody>
@@ -17350,7 +17133,7 @@
           <p:cNvPr id="15" name="">
             <a:extLst xmlns:a="http://schemas.openxmlformats.org/drawingml/2006/main">
               <a:ext uri="{FF2B5EF4-FFF2-40B4-BE49-F238E27FC236}">
-                <a16:creationId xmlns:a16="http://schemas.microsoft.com/office/drawing/2014/main" id="{2BF9C5B1-3EF7-43C6-BAE5-7EC601B5F1FD}"/>
+                <a16:creationId xmlns:a16="http://schemas.microsoft.com/office/drawing/2014/main" id="{F99CEFBB-77A0-4320-9DB1-023E5D84C4D9}"/>
               </a:ext>
             </a:extLst>
           </p:cNvPr>
@@ -17383,7 +17166,7 @@
           <p:cNvPr id="16" name="">
             <a:extLst xmlns:a="http://schemas.openxmlformats.org/drawingml/2006/main">
               <a:ext uri="{FF2B5EF4-FFF2-40B4-BE49-F238E27FC236}">
-                <a16:creationId xmlns:a16="http://schemas.microsoft.com/office/drawing/2014/main" id="{42B8B7F9-F94B-42F1-9534-95E0310CF925}"/>
+                <a16:creationId xmlns:a16="http://schemas.microsoft.com/office/drawing/2014/main" id="{993AFFD4-522A-4541-8896-ECC14F3AE24D}"/>
               </a:ext>
             </a:extLst>
           </p:cNvPr>
@@ -17418,7 +17201,7 @@
           <p:cNvPr id="17" name="">
             <a:extLst xmlns:a="http://schemas.openxmlformats.org/drawingml/2006/main">
               <a:ext uri="{FF2B5EF4-FFF2-40B4-BE49-F238E27FC236}">
-                <a16:creationId xmlns:a16="http://schemas.microsoft.com/office/drawing/2014/main" id="{573A6A2B-7475-495F-8531-763297DAD474}"/>
+                <a16:creationId xmlns:a16="http://schemas.microsoft.com/office/drawing/2014/main" id="{B828D232-9DD5-43FC-BBCB-79A345B85188}"/>
               </a:ext>
             </a:extLst>
           </p:cNvPr>
@@ -17454,7 +17237,6 @@
           <a:lstStyle xmlns:a="http://schemas.openxmlformats.org/drawingml/2006/main"/>
           <a:p xmlns:a="http://schemas.openxmlformats.org/drawingml/2006/main">
             <a:pPr algn="l">
-              <a:buNone/>
               <a:defRPr sz="1275" b="1">
                 <a:solidFill>
                   <a:srgbClr val="17202A"/>
@@ -17483,7 +17265,7 @@
           <p:cNvPr id="18" name="">
             <a:extLst xmlns:a="http://schemas.openxmlformats.org/drawingml/2006/main">
               <a:ext uri="{FF2B5EF4-FFF2-40B4-BE49-F238E27FC236}">
-                <a16:creationId xmlns:a16="http://schemas.microsoft.com/office/drawing/2014/main" id="{BB1577F8-9207-42DB-828E-C797610EBEBF}"/>
+                <a16:creationId xmlns:a16="http://schemas.microsoft.com/office/drawing/2014/main" id="{13DA5467-DFEA-4EC9-A0A7-410DA161090A}"/>
               </a:ext>
             </a:extLst>
           </p:cNvPr>
@@ -17519,7 +17301,6 @@
           <a:lstStyle xmlns:a="http://schemas.openxmlformats.org/drawingml/2006/main"/>
           <a:p xmlns:a="http://schemas.openxmlformats.org/drawingml/2006/main">
             <a:pPr algn="l">
-              <a:buNone/>
               <a:defRPr sz="938" b="0">
                 <a:solidFill>
                   <a:srgbClr val="5F6B64"/>
@@ -17538,7 +17319,7 @@
                 <a:ea typeface="Aptos"/>
                 <a:cs typeface="Aptos"/>
               </a:rPr>
-              <a:t>Comprimen balances, hallazgos y pendientes en vistas operables por humanos.</a:t>
+              <a:t>Compress balances, findings, and pending work into human-readable views.</a:t>
             </a:r>
           </a:p>
         </p:txBody>
@@ -17548,7 +17329,7 @@
           <p:cNvPr id="19" name="">
             <a:extLst xmlns:a="http://schemas.openxmlformats.org/drawingml/2006/main">
               <a:ext uri="{FF2B5EF4-FFF2-40B4-BE49-F238E27FC236}">
-                <a16:creationId xmlns:a16="http://schemas.microsoft.com/office/drawing/2014/main" id="{4E7A47E6-3EEB-4280-A79A-D3CE89C62523}"/>
+                <a16:creationId xmlns:a16="http://schemas.microsoft.com/office/drawing/2014/main" id="{EAC01FA9-C727-455A-AAB2-00D819DAD56B}"/>
               </a:ext>
             </a:extLst>
           </p:cNvPr>
@@ -17581,7 +17362,7 @@
           <p:cNvPr id="20" name="">
             <a:extLst xmlns:a="http://schemas.openxmlformats.org/drawingml/2006/main">
               <a:ext uri="{FF2B5EF4-FFF2-40B4-BE49-F238E27FC236}">
-                <a16:creationId xmlns:a16="http://schemas.microsoft.com/office/drawing/2014/main" id="{0119A97D-98A2-466A-8A0A-E93E7D661E40}"/>
+                <a16:creationId xmlns:a16="http://schemas.microsoft.com/office/drawing/2014/main" id="{2E27E956-3108-4D40-B133-97D01127BD0D}"/>
               </a:ext>
             </a:extLst>
           </p:cNvPr>
@@ -17616,7 +17397,7 @@
           <p:cNvPr id="21" name="">
             <a:extLst xmlns:a="http://schemas.openxmlformats.org/drawingml/2006/main">
               <a:ext uri="{FF2B5EF4-FFF2-40B4-BE49-F238E27FC236}">
-                <a16:creationId xmlns:a16="http://schemas.microsoft.com/office/drawing/2014/main" id="{E771AF40-8796-4F90-9F51-394AE31D22FC}"/>
+                <a16:creationId xmlns:a16="http://schemas.microsoft.com/office/drawing/2014/main" id="{BFFC4861-680E-4E1F-B9F4-9B9E9339A106}"/>
               </a:ext>
             </a:extLst>
           </p:cNvPr>
@@ -17652,7 +17433,6 @@
           <a:lstStyle xmlns:a="http://schemas.openxmlformats.org/drawingml/2006/main"/>
           <a:p xmlns:a="http://schemas.openxmlformats.org/drawingml/2006/main">
             <a:pPr algn="l">
-              <a:buNone/>
               <a:defRPr sz="1275" b="1">
                 <a:solidFill>
                   <a:srgbClr val="17202A"/>
@@ -17681,7 +17461,7 @@
           <p:cNvPr id="22" name="">
             <a:extLst xmlns:a="http://schemas.openxmlformats.org/drawingml/2006/main">
               <a:ext uri="{FF2B5EF4-FFF2-40B4-BE49-F238E27FC236}">
-                <a16:creationId xmlns:a16="http://schemas.microsoft.com/office/drawing/2014/main" id="{E6ED8116-2244-47F8-934D-6B17092707C3}"/>
+                <a16:creationId xmlns:a16="http://schemas.microsoft.com/office/drawing/2014/main" id="{414CF763-8B40-47B0-8DBA-7C606FF839D1}"/>
               </a:ext>
             </a:extLst>
           </p:cNvPr>
@@ -17717,7 +17497,6 @@
           <a:lstStyle xmlns:a="http://schemas.openxmlformats.org/drawingml/2006/main"/>
           <a:p xmlns:a="http://schemas.openxmlformats.org/drawingml/2006/main">
             <a:pPr algn="l">
-              <a:buNone/>
               <a:defRPr sz="938" b="0">
                 <a:solidFill>
                   <a:srgbClr val="5F6B64"/>
@@ -17736,7 +17515,7 @@
                 <a:ea typeface="Aptos"/>
                 <a:cs typeface="Aptos"/>
               </a:rPr>
-              <a:t>Preservan causalidad y evitan que el equipo dependa solo de memoria o impresiones.</a:t>
+              <a:t>Preserve causality so the team does not rely on memory or vibes.</a:t>
             </a:r>
           </a:p>
         </p:txBody>
@@ -17746,7 +17525,7 @@
           <p:cNvPr id="23" name="">
             <a:extLst xmlns:a="http://schemas.openxmlformats.org/drawingml/2006/main">
               <a:ext uri="{FF2B5EF4-FFF2-40B4-BE49-F238E27FC236}">
-                <a16:creationId xmlns:a16="http://schemas.microsoft.com/office/drawing/2014/main" id="{6B8E68E7-438F-4735-B310-74A06354375C}"/>
+                <a16:creationId xmlns:a16="http://schemas.microsoft.com/office/drawing/2014/main" id="{FFD448E2-3530-42DE-A0DB-4118F7623E05}"/>
               </a:ext>
             </a:extLst>
           </p:cNvPr>
@@ -17779,7 +17558,7 @@
           <p:cNvPr id="24" name="">
             <a:extLst xmlns:a="http://schemas.openxmlformats.org/drawingml/2006/main">
               <a:ext uri="{FF2B5EF4-FFF2-40B4-BE49-F238E27FC236}">
-                <a16:creationId xmlns:a16="http://schemas.microsoft.com/office/drawing/2014/main" id="{D68CB302-312D-498F-B09D-921E64BC0A33}"/>
+                <a16:creationId xmlns:a16="http://schemas.microsoft.com/office/drawing/2014/main" id="{6E32E4E5-84F8-43D4-9EBC-B9785E82E6E0}"/>
               </a:ext>
             </a:extLst>
           </p:cNvPr>
@@ -17815,7 +17594,6 @@
           <a:lstStyle xmlns:a="http://schemas.openxmlformats.org/drawingml/2006/main"/>
           <a:p xmlns:a="http://schemas.openxmlformats.org/drawingml/2006/main">
             <a:pPr algn="ctr">
-              <a:buNone/>
               <a:defRPr sz="1350" b="0">
                 <a:solidFill>
                   <a:srgbClr val="5F6B64"/>
@@ -17834,7 +17612,7 @@
                 <a:ea typeface="Aptos"/>
                 <a:cs typeface="Aptos"/>
               </a:rPr>
-              <a:t>El resultado que importa no es mas observabilidad por si misma.</a:t>
+              <a:t>The outcome that matters is not more observability by itself.</a:t>
             </a:r>
           </a:p>
         </p:txBody>
@@ -17844,7 +17622,7 @@
           <p:cNvPr id="25" name="">
             <a:extLst xmlns:a="http://schemas.openxmlformats.org/drawingml/2006/main">
               <a:ext uri="{FF2B5EF4-FFF2-40B4-BE49-F238E27FC236}">
-                <a16:creationId xmlns:a16="http://schemas.microsoft.com/office/drawing/2014/main" id="{06231030-E95E-4BA4-81C7-C9F96610115E}"/>
+                <a16:creationId xmlns:a16="http://schemas.microsoft.com/office/drawing/2014/main" id="{390D1F82-4B02-4DC6-8A0B-4D32B32E6241}"/>
               </a:ext>
             </a:extLst>
           </p:cNvPr>
@@ -17880,7 +17658,6 @@
           <a:lstStyle xmlns:a="http://schemas.openxmlformats.org/drawingml/2006/main"/>
           <a:p xmlns:a="http://schemas.openxmlformats.org/drawingml/2006/main">
             <a:pPr algn="ctr">
-              <a:buNone/>
               <a:defRPr sz="1725" b="1">
                 <a:solidFill>
                   <a:srgbClr val="17202A"/>
@@ -17899,7 +17676,7 @@
                 <a:ea typeface="Aptos Display"/>
                 <a:cs typeface="Aptos Display"/>
               </a:rPr>
-              <a:t>Es que un equipo pueda decidir mejor que tocar, que no tocar y por que.</a:t>
+              <a:t>It is enabling a team to decide more clearly what to touch, what not to touch, and why.</a:t>
             </a:r>
           </a:p>
         </p:txBody>
@@ -17909,7 +17686,7 @@
           <p:cNvPr id="26" name="">
             <a:extLst xmlns:a="http://schemas.openxmlformats.org/drawingml/2006/main">
               <a:ext uri="{FF2B5EF4-FFF2-40B4-BE49-F238E27FC236}">
-                <a16:creationId xmlns:a16="http://schemas.microsoft.com/office/drawing/2014/main" id="{007815C7-6255-49C8-AF3F-0B456152A32E}"/>
+                <a16:creationId xmlns:a16="http://schemas.microsoft.com/office/drawing/2014/main" id="{5D818FE5-884F-436B-BBC0-D39CD3DB0B9F}"/>
               </a:ext>
             </a:extLst>
           </p:cNvPr>
@@ -17945,7 +17722,6 @@
           <a:lstStyle xmlns:a="http://schemas.openxmlformats.org/drawingml/2006/main"/>
           <a:p xmlns:a="http://schemas.openxmlformats.org/drawingml/2006/main">
             <a:pPr algn="r">
-              <a:buNone/>
               <a:defRPr sz="750" b="0">
                 <a:solidFill>
                   <a:srgbClr val="5F6B64"/>
@@ -17972,7 +17748,7 @@
     </p:spTree>
     <p:extLst>
       <p:ext uri="{BB962C8B-B14F-4D97-AF65-F5344CB8AC3E}">
-        <p14:creationId xmlns:p14="http://schemas.microsoft.com/office/powerpoint/2010/main" val="1505427622"/>
+        <p14:creationId xmlns:p14="http://schemas.microsoft.com/office/powerpoint/2010/main" val="2050976844"/>
       </p:ext>
     </p:extLst>
   </p:cSld>
@@ -17996,7 +17772,7 @@
           <p:cNvPr id="1" name="">
             <a:extLst xmlns:a="http://schemas.openxmlformats.org/drawingml/2006/main">
               <a:ext uri="{FF2B5EF4-FFF2-40B4-BE49-F238E27FC236}">
-                <a16:creationId xmlns:a16="http://schemas.microsoft.com/office/drawing/2014/main" id="{593DC611-0188-4ACB-A54B-4499F41CF1F6}"/>
+                <a16:creationId xmlns:a16="http://schemas.microsoft.com/office/drawing/2014/main" id="{4AD34EA8-A2A5-4756-B5C6-E433043ECDDA}"/>
               </a:ext>
             </a:extLst>
           </p:cNvPr>
@@ -18031,7 +17807,7 @@
           <p:cNvPr id="2" name="">
             <a:extLst xmlns:a="http://schemas.openxmlformats.org/drawingml/2006/main">
               <a:ext uri="{FF2B5EF4-FFF2-40B4-BE49-F238E27FC236}">
-                <a16:creationId xmlns:a16="http://schemas.microsoft.com/office/drawing/2014/main" id="{F4AB6D47-4F8E-4854-BCBC-41352E4626BD}"/>
+                <a16:creationId xmlns:a16="http://schemas.microsoft.com/office/drawing/2014/main" id="{692E607B-6899-4F8F-9C61-AFC59112076C}"/>
               </a:ext>
             </a:extLst>
           </p:cNvPr>
@@ -18066,7 +17842,7 @@
           <p:cNvPr id="3" name="">
             <a:extLst xmlns:a="http://schemas.openxmlformats.org/drawingml/2006/main">
               <a:ext uri="{FF2B5EF4-FFF2-40B4-BE49-F238E27FC236}">
-                <a16:creationId xmlns:a16="http://schemas.microsoft.com/office/drawing/2014/main" id="{EC89FBF7-D6B1-442A-9D23-16CA87CE4023}"/>
+                <a16:creationId xmlns:a16="http://schemas.microsoft.com/office/drawing/2014/main" id="{102B24AB-AFE2-4D14-A666-ABC6C90B0302}"/>
               </a:ext>
             </a:extLst>
           </p:cNvPr>
@@ -18102,7 +17878,6 @@
           <a:lstStyle xmlns:a="http://schemas.openxmlformats.org/drawingml/2006/main"/>
           <a:p xmlns:a="http://schemas.openxmlformats.org/drawingml/2006/main">
             <a:pPr algn="l">
-              <a:buNone/>
               <a:defRPr sz="900" b="1">
                 <a:solidFill>
                   <a:srgbClr val="0F8A6A"/>
@@ -18131,7 +17906,7 @@
           <p:cNvPr id="4" name="">
             <a:extLst xmlns:a="http://schemas.openxmlformats.org/drawingml/2006/main">
               <a:ext uri="{FF2B5EF4-FFF2-40B4-BE49-F238E27FC236}">
-                <a16:creationId xmlns:a16="http://schemas.microsoft.com/office/drawing/2014/main" id="{D33FDB34-9EE2-4F49-8B5E-BA191141D4C0}"/>
+                <a16:creationId xmlns:a16="http://schemas.microsoft.com/office/drawing/2014/main" id="{421E3485-6637-4038-B032-E2C6EA043F56}"/>
               </a:ext>
             </a:extLst>
           </p:cNvPr>
@@ -18167,7 +17942,6 @@
           <a:lstStyle xmlns:a="http://schemas.openxmlformats.org/drawingml/2006/main"/>
           <a:p xmlns:a="http://schemas.openxmlformats.org/drawingml/2006/main">
             <a:pPr algn="l">
-              <a:buNone/>
               <a:defRPr sz="2325" b="1">
                 <a:solidFill>
                   <a:srgbClr val="17202A"/>
@@ -18186,7 +17960,7 @@
                 <a:ea typeface="Aptos Display"/>
                 <a:cs typeface="Aptos Display"/>
               </a:rPr>
-              <a:t>La extension del concurso esta en la plataforma, no en fingir que todo se construyo desde cero.</a:t>
+              <a:t>The competition contribution is in the platform layer, not in pretending everything was built from zero.</a:t>
             </a:r>
           </a:p>
         </p:txBody>
@@ -18196,7 +17970,7 @@
           <p:cNvPr id="5" name="">
             <a:extLst xmlns:a="http://schemas.openxmlformats.org/drawingml/2006/main">
               <a:ext uri="{FF2B5EF4-FFF2-40B4-BE49-F238E27FC236}">
-                <a16:creationId xmlns:a16="http://schemas.microsoft.com/office/drawing/2014/main" id="{40571589-6D23-4EB5-8719-DB3240A85648}"/>
+                <a16:creationId xmlns:a16="http://schemas.microsoft.com/office/drawing/2014/main" id="{2B8517A0-C511-4F2F-BB5F-88EC1FE569B6}"/>
               </a:ext>
             </a:extLst>
           </p:cNvPr>
@@ -18229,7 +18003,7 @@
           <p:cNvPr id="6" name="">
             <a:extLst xmlns:a="http://schemas.openxmlformats.org/drawingml/2006/main">
               <a:ext uri="{FF2B5EF4-FFF2-40B4-BE49-F238E27FC236}">
-                <a16:creationId xmlns:a16="http://schemas.microsoft.com/office/drawing/2014/main" id="{01A1941A-A5B7-4294-AC70-12FFBB3B6A01}"/>
+                <a16:creationId xmlns:a16="http://schemas.microsoft.com/office/drawing/2014/main" id="{A9D63668-0F14-4518-BA3F-371ACB3EA8C7}"/>
               </a:ext>
             </a:extLst>
           </p:cNvPr>
@@ -18264,7 +18038,7 @@
           <p:cNvPr id="7" name="">
             <a:extLst xmlns:a="http://schemas.openxmlformats.org/drawingml/2006/main">
               <a:ext uri="{FF2B5EF4-FFF2-40B4-BE49-F238E27FC236}">
-                <a16:creationId xmlns:a16="http://schemas.microsoft.com/office/drawing/2014/main" id="{5FD95E07-CCC3-423C-ACE5-3E941C691256}"/>
+                <a16:creationId xmlns:a16="http://schemas.microsoft.com/office/drawing/2014/main" id="{4911C803-CF79-4150-B94C-ECFD4E773CD3}"/>
               </a:ext>
             </a:extLst>
           </p:cNvPr>
@@ -18300,7 +18074,6 @@
           <a:lstStyle xmlns:a="http://schemas.openxmlformats.org/drawingml/2006/main"/>
           <a:p xmlns:a="http://schemas.openxmlformats.org/drawingml/2006/main">
             <a:pPr algn="l">
-              <a:buNone/>
               <a:defRPr sz="1275" b="1">
                 <a:solidFill>
                   <a:srgbClr val="17202A"/>
@@ -18319,7 +18092,7 @@
                 <a:ea typeface="Aptos Display"/>
                 <a:cs typeface="Aptos Display"/>
               </a:rPr>
-              <a:t>Lo que ya existia</a:t>
+              <a:t>What already existed</a:t>
             </a:r>
           </a:p>
         </p:txBody>
@@ -18329,7 +18102,7 @@
           <p:cNvPr id="8" name="">
             <a:extLst xmlns:a="http://schemas.openxmlformats.org/drawingml/2006/main">
               <a:ext uri="{FF2B5EF4-FFF2-40B4-BE49-F238E27FC236}">
-                <a16:creationId xmlns:a16="http://schemas.microsoft.com/office/drawing/2014/main" id="{23D14165-1856-4774-87AF-0855DB8F37A9}"/>
+                <a16:creationId xmlns:a16="http://schemas.microsoft.com/office/drawing/2014/main" id="{EC01A3DA-5EB4-410B-AC0A-D4921F59D066}"/>
               </a:ext>
             </a:extLst>
           </p:cNvPr>
@@ -18365,7 +18138,6 @@
           <a:lstStyle xmlns:a="http://schemas.openxmlformats.org/drawingml/2006/main"/>
           <a:p xmlns:a="http://schemas.openxmlformats.org/drawingml/2006/main">
             <a:pPr algn="l">
-              <a:buNone/>
               <a:defRPr sz="938" b="0">
                 <a:solidFill>
                   <a:srgbClr val="5F6B64"/>
@@ -18384,12 +18156,11 @@
                 <a:ea typeface="Aptos"/>
                 <a:cs typeface="Aptos"/>
               </a:rPr>
-              <a:t>- multiples robots y entornos live/lab</a:t>
+              <a:t>- multiple live and lab robot environments</a:t>
             </a:r>
           </a:p>
           <a:p xmlns:a="http://schemas.openxmlformats.org/drawingml/2006/main">
             <a:pPr algn="l">
-              <a:buNone/>
               <a:defRPr sz="938" b="0">
                 <a:solidFill>
                   <a:srgbClr val="5F6B64"/>
@@ -18408,12 +18179,11 @@
                 <a:ea typeface="Aptos"/>
                 <a:cs typeface="Aptos"/>
               </a:rPr>
-              <a:t>- flujos demo de trading</a:t>
+              <a:t>- demo trading execution</a:t>
             </a:r>
           </a:p>
           <a:p xmlns:a="http://schemas.openxmlformats.org/drawingml/2006/main">
             <a:pPr algn="l">
-              <a:buNone/>
               <a:defRPr sz="938" b="0">
                 <a:solidFill>
                   <a:srgbClr val="5F6B64"/>
@@ -18432,12 +18202,11 @@
                 <a:ea typeface="Aptos"/>
                 <a:cs typeface="Aptos"/>
               </a:rPr>
-              <a:t>- monitoreo y control por Telegram</a:t>
+              <a:t>- Telegram control and monitoring</a:t>
             </a:r>
           </a:p>
           <a:p xmlns:a="http://schemas.openxmlformats.org/drawingml/2006/main">
             <a:pPr algn="l">
-              <a:buNone/>
               <a:defRPr sz="938" b="0">
                 <a:solidFill>
                   <a:srgbClr val="5F6B64"/>
@@ -18456,12 +18225,11 @@
                 <a:ea typeface="Aptos"/>
                 <a:cs typeface="Aptos"/>
               </a:rPr>
-              <a:t>- postmortems y practicas de replay</a:t>
+              <a:t>- replay and postmortem practices</a:t>
             </a:r>
           </a:p>
           <a:p xmlns:a="http://schemas.openxmlformats.org/drawingml/2006/main">
             <a:pPr algn="l">
-              <a:buNone/>
               <a:defRPr sz="938" b="0">
                 <a:solidFill>
                   <a:srgbClr val="5F6B64"/>
@@ -18480,7 +18248,7 @@
                 <a:ea typeface="Aptos"/>
                 <a:cs typeface="Aptos"/>
               </a:rPr>
-              <a:t>- infraestructura distribuida entre robo-lab y Hetzner</a:t>
+              <a:t>- infrastructure across robo-lab and Hetzner</a:t>
             </a:r>
           </a:p>
         </p:txBody>
@@ -18490,7 +18258,7 @@
           <p:cNvPr id="9" name="">
             <a:extLst xmlns:a="http://schemas.openxmlformats.org/drawingml/2006/main">
               <a:ext uri="{FF2B5EF4-FFF2-40B4-BE49-F238E27FC236}">
-                <a16:creationId xmlns:a16="http://schemas.microsoft.com/office/drawing/2014/main" id="{26759868-FBCD-43AE-A4BE-6ECA8489B75C}"/>
+                <a16:creationId xmlns:a16="http://schemas.microsoft.com/office/drawing/2014/main" id="{E18CAA26-E724-4ADF-8C17-8431C1412BBF}"/>
               </a:ext>
             </a:extLst>
           </p:cNvPr>
@@ -18523,7 +18291,7 @@
           <p:cNvPr id="10" name="">
             <a:extLst xmlns:a="http://schemas.openxmlformats.org/drawingml/2006/main">
               <a:ext uri="{FF2B5EF4-FFF2-40B4-BE49-F238E27FC236}">
-                <a16:creationId xmlns:a16="http://schemas.microsoft.com/office/drawing/2014/main" id="{26F2C2AD-766F-424B-ADBD-5EB812A07139}"/>
+                <a16:creationId xmlns:a16="http://schemas.microsoft.com/office/drawing/2014/main" id="{43FD611A-AFEC-40B4-B706-BA6FBBE7AF02}"/>
               </a:ext>
             </a:extLst>
           </p:cNvPr>
@@ -18558,7 +18326,7 @@
           <p:cNvPr id="11" name="">
             <a:extLst xmlns:a="http://schemas.openxmlformats.org/drawingml/2006/main">
               <a:ext uri="{FF2B5EF4-FFF2-40B4-BE49-F238E27FC236}">
-                <a16:creationId xmlns:a16="http://schemas.microsoft.com/office/drawing/2014/main" id="{0D011846-BFA2-43B8-B2ED-C35FA294BD68}"/>
+                <a16:creationId xmlns:a16="http://schemas.microsoft.com/office/drawing/2014/main" id="{FFFCE0DD-47D2-41E3-AA94-BA8981F91CA0}"/>
               </a:ext>
             </a:extLst>
           </p:cNvPr>
@@ -18594,7 +18362,6 @@
           <a:lstStyle xmlns:a="http://schemas.openxmlformats.org/drawingml/2006/main"/>
           <a:p xmlns:a="http://schemas.openxmlformats.org/drawingml/2006/main">
             <a:pPr algn="l">
-              <a:buNone/>
               <a:defRPr sz="1275" b="1">
                 <a:solidFill>
                   <a:srgbClr val="17202A"/>
@@ -18613,7 +18380,7 @@
                 <a:ea typeface="Aptos Display"/>
                 <a:cs typeface="Aptos Display"/>
               </a:rPr>
-              <a:t>Lo que se extendio durante Build Week</a:t>
+              <a:t>What was meaningfully extended during Build Week</a:t>
             </a:r>
           </a:p>
         </p:txBody>
@@ -18623,7 +18390,7 @@
           <p:cNvPr id="12" name="">
             <a:extLst xmlns:a="http://schemas.openxmlformats.org/drawingml/2006/main">
               <a:ext uri="{FF2B5EF4-FFF2-40B4-BE49-F238E27FC236}">
-                <a16:creationId xmlns:a16="http://schemas.microsoft.com/office/drawing/2014/main" id="{18575C9E-A9D6-434D-8CCC-E74CCBDF3BEA}"/>
+                <a16:creationId xmlns:a16="http://schemas.microsoft.com/office/drawing/2014/main" id="{335CA2B6-3927-4EB3-BBC3-14FA5AF3F398}"/>
               </a:ext>
             </a:extLst>
           </p:cNvPr>
@@ -18659,7 +18426,6 @@
           <a:lstStyle xmlns:a="http://schemas.openxmlformats.org/drawingml/2006/main"/>
           <a:p xmlns:a="http://schemas.openxmlformats.org/drawingml/2006/main">
             <a:pPr algn="l">
-              <a:buNone/>
               <a:defRPr sz="938" b="0">
                 <a:solidFill>
                   <a:srgbClr val="5F6B64"/>
@@ -18678,12 +18444,11 @@
                 <a:ea typeface="Aptos"/>
                 <a:cs typeface="Aptos"/>
               </a:rPr>
-              <a:t>- uso mas fuerte de MarketData Hub como contrato comun</a:t>
+              <a:t>- stronger use of MarketData Hub as a shared contract surface</a:t>
             </a:r>
           </a:p>
           <a:p xmlns:a="http://schemas.openxmlformats.org/drawingml/2006/main">
             <a:pPr algn="l">
-              <a:buNone/>
               <a:defRPr sz="938" b="0">
                 <a:solidFill>
                   <a:srgbClr val="5F6B64"/>
@@ -18702,12 +18467,11 @@
                 <a:ea typeface="Aptos"/>
                 <a:cs typeface="Aptos"/>
               </a:rPr>
-              <a:t>- integracion de EPIC Atlas contra contratos del Hub</a:t>
+              <a:t>- EPIC Atlas integration against Hub contracts</a:t>
             </a:r>
           </a:p>
           <a:p xmlns:a="http://schemas.openxmlformats.org/drawingml/2006/main">
             <a:pPr algn="l">
-              <a:buNone/>
               <a:defRPr sz="938" b="0">
                 <a:solidFill>
                   <a:srgbClr val="5F6B64"/>
@@ -18726,12 +18490,11 @@
                 <a:ea typeface="Aptos"/>
                 <a:cs typeface="Aptos"/>
               </a:rPr>
-              <a:t>- pipeline discovery/incubator mejor formalizado</a:t>
+              <a:t>- clearer edge discovery and incubation workflow</a:t>
             </a:r>
           </a:p>
           <a:p xmlns:a="http://schemas.openxmlformats.org/drawingml/2006/main">
             <a:pPr algn="l">
-              <a:buNone/>
               <a:defRPr sz="938" b="0">
                 <a:solidFill>
                   <a:srgbClr val="5F6B64"/>
@@ -18750,12 +18513,11 @@
                 <a:ea typeface="Aptos"/>
                 <a:cs typeface="Aptos"/>
               </a:rPr>
-              <a:t>- competition repo publico y narrativa de plataforma</a:t>
+              <a:t>- competition-grade documentation and public repository packaging</a:t>
             </a:r>
           </a:p>
           <a:p xmlns:a="http://schemas.openxmlformats.org/drawingml/2006/main">
             <a:pPr algn="l">
-              <a:buNone/>
               <a:defRPr sz="938" b="0">
                 <a:solidFill>
                   <a:srgbClr val="5F6B64"/>
@@ -18774,7 +18536,7 @@
                 <a:ea typeface="Aptos"/>
                 <a:cs typeface="Aptos"/>
               </a:rPr>
-              <a:t>- evidencia mas clara de como Codex y GPT-5.6 participaron en arquitectura, integracion y debugging</a:t>
+              <a:t>- a cleaner platform narrative for judges</a:t>
             </a:r>
           </a:p>
         </p:txBody>
@@ -18784,7 +18546,7 @@
           <p:cNvPr id="13" name="">
             <a:extLst xmlns:a="http://schemas.openxmlformats.org/drawingml/2006/main">
               <a:ext uri="{FF2B5EF4-FFF2-40B4-BE49-F238E27FC236}">
-                <a16:creationId xmlns:a16="http://schemas.microsoft.com/office/drawing/2014/main" id="{5968D964-14FF-4BB1-8370-A781E77CBEE9}"/>
+                <a16:creationId xmlns:a16="http://schemas.microsoft.com/office/drawing/2014/main" id="{5CF3EF0B-3DC9-4CF8-8DE0-274C2E9A09B9}"/>
               </a:ext>
             </a:extLst>
           </p:cNvPr>
@@ -18817,7 +18579,7 @@
           <p:cNvPr id="14" name="">
             <a:extLst xmlns:a="http://schemas.openxmlformats.org/drawingml/2006/main">
               <a:ext uri="{FF2B5EF4-FFF2-40B4-BE49-F238E27FC236}">
-                <a16:creationId xmlns:a16="http://schemas.microsoft.com/office/drawing/2014/main" id="{7B05BB5C-B2DD-4329-800F-00B651C978D9}"/>
+                <a16:creationId xmlns:a16="http://schemas.microsoft.com/office/drawing/2014/main" id="{F87CF143-78FA-41C3-A97D-4988C2D97440}"/>
               </a:ext>
             </a:extLst>
           </p:cNvPr>
@@ -18853,7 +18615,6 @@
           <a:lstStyle xmlns:a="http://schemas.openxmlformats.org/drawingml/2006/main"/>
           <a:p xmlns:a="http://schemas.openxmlformats.org/drawingml/2006/main">
             <a:pPr algn="ctr">
-              <a:buNone/>
               <a:defRPr sz="1350" b="1">
                 <a:solidFill>
                   <a:srgbClr val="17202A"/>
@@ -18872,7 +18633,7 @@
                 <a:ea typeface="Aptos Display"/>
                 <a:cs typeface="Aptos Display"/>
               </a:rPr>
-              <a:t>Honestidad de la submission: proyecto preexistente, extension nueva y documentada durante Build Week.</a:t>
+              <a:t>Honest framing: pre-existing system, new platform extension, documented during Build Week.</a:t>
             </a:r>
           </a:p>
         </p:txBody>
@@ -18882,7 +18643,7 @@
           <p:cNvPr id="15" name="">
             <a:extLst xmlns:a="http://schemas.openxmlformats.org/drawingml/2006/main">
               <a:ext uri="{FF2B5EF4-FFF2-40B4-BE49-F238E27FC236}">
-                <a16:creationId xmlns:a16="http://schemas.microsoft.com/office/drawing/2014/main" id="{C09321BB-7EAD-46EB-9A81-7AA6A7A19F72}"/>
+                <a16:creationId xmlns:a16="http://schemas.microsoft.com/office/drawing/2014/main" id="{D534C8DD-805F-4615-83FF-99EF28EA1024}"/>
               </a:ext>
             </a:extLst>
           </p:cNvPr>
@@ -18918,7 +18679,6 @@
           <a:lstStyle xmlns:a="http://schemas.openxmlformats.org/drawingml/2006/main"/>
           <a:p xmlns:a="http://schemas.openxmlformats.org/drawingml/2006/main">
             <a:pPr algn="r">
-              <a:buNone/>
               <a:defRPr sz="750" b="0">
                 <a:solidFill>
                   <a:srgbClr val="5F6B64"/>
@@ -18945,7 +18705,7 @@
     </p:spTree>
     <p:extLst>
       <p:ext uri="{BB962C8B-B14F-4D97-AF65-F5344CB8AC3E}">
-        <p14:creationId xmlns:p14="http://schemas.microsoft.com/office/powerpoint/2010/main" val="2034573513"/>
+        <p14:creationId xmlns:p14="http://schemas.microsoft.com/office/powerpoint/2010/main" val="958654466"/>
       </p:ext>
     </p:extLst>
   </p:cSld>
